--- a/Reports/AdvancedGameAI_FinalPresentation_AA.SC.U3BCA2307092.pptx
+++ b/Reports/AdvancedGameAI_FinalPresentation_AA.SC.U3BCA2307092.pptx
@@ -2,28 +2,28 @@
 <file path=ppt/presentation.xml><?xml version="1.0" encoding="utf-8"?>
 <p:presentation xmlns:p="http://schemas.openxmlformats.org/presentationml/2006/main">
   <p:sldMasterIdLst>
-    <p:sldMasterId xmlns:r="http://schemas.openxmlformats.org/officeDocument/2006/relationships" id="2147483648" r:id="R9ab07130aef44bf4"/>
+    <p:sldMasterId xmlns:r="http://schemas.openxmlformats.org/officeDocument/2006/relationships" id="2147483648" r:id="R1fc3d253e8fa4b33"/>
   </p:sldMasterIdLst>
   <p:notesMasterIdLst>
-    <p:notesMasterId xmlns:r="http://schemas.openxmlformats.org/officeDocument/2006/relationships" r:id="Rca21daf82f0041c5"/>
+    <p:notesMasterId xmlns:r="http://schemas.openxmlformats.org/officeDocument/2006/relationships" r:id="R7f15a9c85a124d40"/>
   </p:notesMasterIdLst>
   <p:sldIdLst>
-    <p:sldId xmlns:r="http://schemas.openxmlformats.org/officeDocument/2006/relationships" id="256" r:id="Rbb323f591c2a462e"/>
-    <p:sldId xmlns:r="http://schemas.openxmlformats.org/officeDocument/2006/relationships" id="257" r:id="Rdcb05bdf3d814d40"/>
-    <p:sldId xmlns:r="http://schemas.openxmlformats.org/officeDocument/2006/relationships" id="258" r:id="R9852c131284444fa"/>
-    <p:sldId xmlns:r="http://schemas.openxmlformats.org/officeDocument/2006/relationships" id="259" r:id="Rfe0acb26db964372"/>
-    <p:sldId xmlns:r="http://schemas.openxmlformats.org/officeDocument/2006/relationships" id="260" r:id="R1abb5980173e4b65"/>
-    <p:sldId xmlns:r="http://schemas.openxmlformats.org/officeDocument/2006/relationships" id="261" r:id="Re616a5e9e21d4b26"/>
-    <p:sldId xmlns:r="http://schemas.openxmlformats.org/officeDocument/2006/relationships" id="262" r:id="R285554dfd6ca4ee6"/>
-    <p:sldId xmlns:r="http://schemas.openxmlformats.org/officeDocument/2006/relationships" id="263" r:id="R25aa4110eb3f4ed7"/>
-    <p:sldId xmlns:r="http://schemas.openxmlformats.org/officeDocument/2006/relationships" id="264" r:id="R6c96328473e4452d"/>
-    <p:sldId xmlns:r="http://schemas.openxmlformats.org/officeDocument/2006/relationships" id="265" r:id="R3a76af28fe234fa0"/>
-    <p:sldId xmlns:r="http://schemas.openxmlformats.org/officeDocument/2006/relationships" id="266" r:id="R286a8c2dae0d4cb4"/>
-    <p:sldId xmlns:r="http://schemas.openxmlformats.org/officeDocument/2006/relationships" id="267" r:id="Rebc4c5b376b5464b"/>
-    <p:sldId xmlns:r="http://schemas.openxmlformats.org/officeDocument/2006/relationships" id="268" r:id="R07f7094e6e4d4820"/>
-    <p:sldId xmlns:r="http://schemas.openxmlformats.org/officeDocument/2006/relationships" id="269" r:id="R4eaeb14df0e44db8"/>
-    <p:sldId xmlns:r="http://schemas.openxmlformats.org/officeDocument/2006/relationships" id="270" r:id="Rce79e0cb66ac4937"/>
-    <p:sldId xmlns:r="http://schemas.openxmlformats.org/officeDocument/2006/relationships" id="271" r:id="Ra5cdd4edcaac480f"/>
+    <p:sldId xmlns:r="http://schemas.openxmlformats.org/officeDocument/2006/relationships" id="256" r:id="Rffaf12127e654a66"/>
+    <p:sldId xmlns:r="http://schemas.openxmlformats.org/officeDocument/2006/relationships" id="257" r:id="R831389531b4e49c3"/>
+    <p:sldId xmlns:r="http://schemas.openxmlformats.org/officeDocument/2006/relationships" id="258" r:id="R8d6bf6d4314147c1"/>
+    <p:sldId xmlns:r="http://schemas.openxmlformats.org/officeDocument/2006/relationships" id="259" r:id="R5df479898d264d6e"/>
+    <p:sldId xmlns:r="http://schemas.openxmlformats.org/officeDocument/2006/relationships" id="260" r:id="R8c0458f681fd472a"/>
+    <p:sldId xmlns:r="http://schemas.openxmlformats.org/officeDocument/2006/relationships" id="261" r:id="R5f41ff8d77ac4d28"/>
+    <p:sldId xmlns:r="http://schemas.openxmlformats.org/officeDocument/2006/relationships" id="262" r:id="Ra6fedaaef81445ea"/>
+    <p:sldId xmlns:r="http://schemas.openxmlformats.org/officeDocument/2006/relationships" id="263" r:id="R80f0f9f47aeb4651"/>
+    <p:sldId xmlns:r="http://schemas.openxmlformats.org/officeDocument/2006/relationships" id="264" r:id="R9416e15f2c3348dd"/>
+    <p:sldId xmlns:r="http://schemas.openxmlformats.org/officeDocument/2006/relationships" id="265" r:id="R2d473d8d11e141c0"/>
+    <p:sldId xmlns:r="http://schemas.openxmlformats.org/officeDocument/2006/relationships" id="266" r:id="Rabb5e905d2ea4bbc"/>
+    <p:sldId xmlns:r="http://schemas.openxmlformats.org/officeDocument/2006/relationships" id="267" r:id="Rc5a182098cd44d10"/>
+    <p:sldId xmlns:r="http://schemas.openxmlformats.org/officeDocument/2006/relationships" id="268" r:id="Rd79c66419738497f"/>
+    <p:sldId xmlns:r="http://schemas.openxmlformats.org/officeDocument/2006/relationships" id="269" r:id="R4a617f0b97c049d1"/>
+    <p:sldId xmlns:r="http://schemas.openxmlformats.org/officeDocument/2006/relationships" id="270" r:id="R9cd2cccd77ad4458"/>
+    <p:sldId xmlns:r="http://schemas.openxmlformats.org/officeDocument/2006/relationships" id="271" r:id="R5cdf784cf6c64996"/>
   </p:sldIdLst>
   <p:sldSz cx="12192000" cy="6858000"/>
   <p:notesSz cx="6858000" cy="9144000"/>
@@ -667,7 +667,7 @@
           </a:p>
           <a:p xmlns:a="http://schemas.openxmlformats.org/drawingml/2006/main">
             <a:r>
-              <a:t>- User-provided brawler select screenshot from playtesting.</a:t>
+              <a:t>- Code snippets are concise presentation extracts from the implemented AI pipeline.</a:t>
             </a:r>
           </a:p>
         </p:txBody>
@@ -4436,17 +4436,17 @@
   </p:cSld>
   <p:clrMap bg1="lt1" tx1="dk1" bg2="lt2" tx2="dk2" accent1="accent1" accent2="accent2" accent3="accent3" accent4="accent4" accent5="accent5" accent6="accent6" hlink="hlink" folHlink="folHlink"/>
   <p:sldLayoutIdLst>
-    <p:sldLayoutId xmlns:r="http://schemas.openxmlformats.org/officeDocument/2006/relationships" id="2147483649" r:id="Rd7669b15072244ac"/>
-    <p:sldLayoutId xmlns:r="http://schemas.openxmlformats.org/officeDocument/2006/relationships" id="2147483650" r:id="Rd873565601d74d74"/>
-    <p:sldLayoutId xmlns:r="http://schemas.openxmlformats.org/officeDocument/2006/relationships" id="2147483651" r:id="R0c225ebc8f2341f4"/>
-    <p:sldLayoutId xmlns:r="http://schemas.openxmlformats.org/officeDocument/2006/relationships" id="2147483652" r:id="R5b2b0697cb834ff0"/>
-    <p:sldLayoutId xmlns:r="http://schemas.openxmlformats.org/officeDocument/2006/relationships" id="2147483653" r:id="R1684e4f8656b46f3"/>
-    <p:sldLayoutId xmlns:r="http://schemas.openxmlformats.org/officeDocument/2006/relationships" id="2147483654" r:id="R655e4f7a60514368"/>
-    <p:sldLayoutId xmlns:r="http://schemas.openxmlformats.org/officeDocument/2006/relationships" id="2147483655" r:id="R4575fc22ff3e49c5"/>
-    <p:sldLayoutId xmlns:r="http://schemas.openxmlformats.org/officeDocument/2006/relationships" id="2147483656" r:id="R8a685c3bdad84bb5"/>
-    <p:sldLayoutId xmlns:r="http://schemas.openxmlformats.org/officeDocument/2006/relationships" id="2147483657" r:id="R1d6c950e4fe04bd2"/>
-    <p:sldLayoutId xmlns:r="http://schemas.openxmlformats.org/officeDocument/2006/relationships" id="2147483658" r:id="R9bfaf04d56614247"/>
-    <p:sldLayoutId xmlns:r="http://schemas.openxmlformats.org/officeDocument/2006/relationships" id="2147483659" r:id="R373c5bc08ef74097"/>
+    <p:sldLayoutId xmlns:r="http://schemas.openxmlformats.org/officeDocument/2006/relationships" id="2147483649" r:id="R64629970aa7b4bde"/>
+    <p:sldLayoutId xmlns:r="http://schemas.openxmlformats.org/officeDocument/2006/relationships" id="2147483650" r:id="R2470d3d907b34b84"/>
+    <p:sldLayoutId xmlns:r="http://schemas.openxmlformats.org/officeDocument/2006/relationships" id="2147483651" r:id="R5d397ee771b646bd"/>
+    <p:sldLayoutId xmlns:r="http://schemas.openxmlformats.org/officeDocument/2006/relationships" id="2147483652" r:id="Rf49a1f41406f478a"/>
+    <p:sldLayoutId xmlns:r="http://schemas.openxmlformats.org/officeDocument/2006/relationships" id="2147483653" r:id="R7b09f55f6c5c4a8f"/>
+    <p:sldLayoutId xmlns:r="http://schemas.openxmlformats.org/officeDocument/2006/relationships" id="2147483654" r:id="R1f4f7a1a56d245dd"/>
+    <p:sldLayoutId xmlns:r="http://schemas.openxmlformats.org/officeDocument/2006/relationships" id="2147483655" r:id="R8120acc3a016411d"/>
+    <p:sldLayoutId xmlns:r="http://schemas.openxmlformats.org/officeDocument/2006/relationships" id="2147483656" r:id="R9b0f8cf01fb34ad2"/>
+    <p:sldLayoutId xmlns:r="http://schemas.openxmlformats.org/officeDocument/2006/relationships" id="2147483657" r:id="R50c9a5dc77844bb5"/>
+    <p:sldLayoutId xmlns:r="http://schemas.openxmlformats.org/officeDocument/2006/relationships" id="2147483658" r:id="Re85ed12996654377"/>
+    <p:sldLayoutId xmlns:r="http://schemas.openxmlformats.org/officeDocument/2006/relationships" id="2147483659" r:id="R6588b2b474c94e3c"/>
   </p:sldLayoutIdLst>
   <p:txStyles>
     <p:titleStyle>
@@ -5105,7 +5105,7 @@
           <p:nvPr/>
         </p:nvPicPr>
         <p:blipFill>
-          <a:blip xmlns:r="http://schemas.openxmlformats.org/officeDocument/2006/relationships" xmlns:a="http://schemas.openxmlformats.org/drawingml/2006/main" r:embed="Raaf74926542c4757"/>
+          <a:blip xmlns:r="http://schemas.openxmlformats.org/officeDocument/2006/relationships" xmlns:a="http://schemas.openxmlformats.org/drawingml/2006/main" r:embed="Raa4715ab38664ec5"/>
           <a:stretch xmlns:a="http://schemas.openxmlformats.org/drawingml/2006/main">
             <a:fillRect l="0" t="0" r="0" b="0"/>
           </a:stretch>
@@ -5129,7 +5129,7 @@
           <p:nvPr/>
         </p:nvPicPr>
         <p:blipFill>
-          <a:blip xmlns:r="http://schemas.openxmlformats.org/officeDocument/2006/relationships" xmlns:a="http://schemas.openxmlformats.org/drawingml/2006/main" r:embed="Rd5faa55553464961"/>
+          <a:blip xmlns:r="http://schemas.openxmlformats.org/officeDocument/2006/relationships" xmlns:a="http://schemas.openxmlformats.org/drawingml/2006/main" r:embed="R2a6314cf10504ecb"/>
           <a:srcRect xmlns:a="http://schemas.openxmlformats.org/drawingml/2006/main" l="0" t="0" r="0" b="0"/>
           <a:stretch xmlns:a="http://schemas.openxmlformats.org/drawingml/2006/main"/>
         </p:blipFill>
@@ -5220,7 +5220,7 @@
           <p:cNvPr id="8" name="">
             <a:extLst xmlns:a="http://schemas.openxmlformats.org/drawingml/2006/main">
               <a:ext uri="{FF2B5EF4-FFF2-40B4-BE49-F238E27FC236}">
-                <a16:creationId xmlns:a16="http://schemas.microsoft.com/office/drawing/2014/main" id="{85B92216-0F78-49DB-BC89-90F7F73BA809}"/>
+                <a16:creationId xmlns:a16="http://schemas.microsoft.com/office/drawing/2014/main" id="{DF01C551-1FA5-4010-9D10-E3CBCEBED900}"/>
               </a:ext>
             </a:extLst>
           </p:cNvPr>
@@ -5307,7 +5307,7 @@
           <p:cNvPr id="9" name="">
             <a:extLst xmlns:a="http://schemas.openxmlformats.org/drawingml/2006/main">
               <a:ext uri="{FF2B5EF4-FFF2-40B4-BE49-F238E27FC236}">
-                <a16:creationId xmlns:a16="http://schemas.microsoft.com/office/drawing/2014/main" id="{75B00BF4-737B-4F89-AB90-985EF5F45BFB}"/>
+                <a16:creationId xmlns:a16="http://schemas.microsoft.com/office/drawing/2014/main" id="{F93024EE-B44B-4DC2-8A71-DA32D499582E}"/>
               </a:ext>
             </a:extLst>
           </p:cNvPr>
@@ -5468,120 +5468,1558 @@
       </p:sp>
       <p:sp>
         <p:nvSpPr>
-          <p:cNvPr id="3" name="Content Placeholder 2">
-            <a:extLst xmlns:a="http://schemas.openxmlformats.org/drawingml/2006/main">
-              <a:ext uri="{FF2B5EF4-FFF2-40B4-BE49-F238E27FC236}">
-                <a16:creationId xmlns:a16="http://schemas.microsoft.com/office/drawing/2014/main" id="{69713E3B-DDF1-127A-7FB6-19D6920CF1D9}"/>
-              </a:ext>
-            </a:extLst>
-          </p:cNvPr>
-          <p:cNvSpPr>
-            <a:spLocks xmlns:a="http://schemas.openxmlformats.org/drawingml/2006/main" noGrp="1"/>
-          </p:cNvSpPr>
-          <p:nvPr>
-            <p:ph idx="1"/>
-          </p:nvPr>
-        </p:nvSpPr>
-        <p:spPr/>
-        <p:txBody>
-          <a:bodyPr xmlns:a="http://schemas.openxmlformats.org/drawingml/2006/main"/>
-          <a:lstStyle xmlns:a="http://schemas.openxmlformats.org/drawingml/2006/main"/>
-          <a:p xmlns:a="http://schemas.openxmlformats.org/drawingml/2006/main">
-            <a:pPr marL="0" indent="0">
-              <a:buNone/>
-            </a:pPr>
-            <a:r>
-              <a:t>Development followed an iterative systems methodology:</a:t>
-            </a:r>
-          </a:p>
-          <a:p xmlns:a="http://schemas.openxmlformats.org/drawingml/2006/main">
-            <a:pPr marL="0" indent="0">
+          <p:cNvPr id="3" name="">
+            <a:extLst xmlns:a="http://schemas.openxmlformats.org/drawingml/2006/main">
+              <a:ext uri="{FF2B5EF4-FFF2-40B4-BE49-F238E27FC236}">
+                <a16:creationId xmlns:a16="http://schemas.microsoft.com/office/drawing/2014/main" id="{5928DB76-80F1-4C93-9995-21E44036D32C}"/>
+              </a:ext>
+            </a:extLst>
+          </p:cNvPr>
+          <p:cNvSpPr>
+            <a:spLocks xmlns:a="http://schemas.openxmlformats.org/drawingml/2006/main" noGrp="1"/>
+          </p:cNvSpPr>
+          <p:nvPr/>
+        </p:nvSpPr>
+        <p:spPr>
+          <a:xfrm xmlns:a="http://schemas.openxmlformats.org/drawingml/2006/main">
+            <a:off x="876300" y="1466850"/>
+            <a:ext cx="9906000" cy="342900"/>
+          </a:xfrm>
+          <a:prstGeom xmlns:a="http://schemas.openxmlformats.org/drawingml/2006/main" prst="rect">
+            <a:avLst/>
+          </a:prstGeom>
+          <a:noFill xmlns:a="http://schemas.openxmlformats.org/drawingml/2006/main"/>
+          <a:ln xmlns:a="http://schemas.openxmlformats.org/drawingml/2006/main" w="0">
+            <a:noFill/>
+            <a:prstDash val="solid"/>
+          </a:ln>
+        </p:spPr>
+        <p:txBody>
+          <a:bodyPr xmlns:a="http://schemas.openxmlformats.org/drawingml/2006/main" wrap="square" lIns="38100" tIns="19050" rIns="38100" bIns="19050" anchor="t"/>
+          <a:lstStyle xmlns:a="http://schemas.openxmlformats.org/drawingml/2006/main"/>
+          <a:p xmlns:a="http://schemas.openxmlformats.org/drawingml/2006/main">
+            <a:pPr algn="l">
               <a:lnSpc>
-                <a:spcPct val="100000"/>
+                <a:spcPct val="105000"/>
               </a:lnSpc>
-              <a:spcBef>
-                <a:spcPct val="0"/>
-              </a:spcBef>
-              <a:spcAft>
-                <a:spcPct val="0"/>
-              </a:spcAft>
-              <a:buFontTx/>
-              <a:buChar char="•"/>
-            </a:pPr>
-            <a:r>
-              <a:t>1. Normalize action scores.</a:t>
-            </a:r>
-          </a:p>
-          <a:p xmlns:a="http://schemas.openxmlformats.org/drawingml/2006/main">
-            <a:pPr marL="0" indent="0">
+              <a:buNone/>
+              <a:defRPr sz="1125" b="0" i="0">
+                <a:solidFill>
+                  <a:srgbClr val="444444"/>
+                </a:solidFill>
+                <a:latin typeface="Calibri"/>
+                <a:ea typeface="Calibri"/>
+                <a:cs typeface="Calibri"/>
+              </a:defRPr>
+            </a:pPr>
+            <a:r>
+              <a:rPr sz="1125" b="0" i="0">
+                <a:solidFill>
+                  <a:srgbClr val="444444"/>
+                </a:solidFill>
+                <a:latin typeface="Calibri"/>
+                <a:ea typeface="Calibri"/>
+                <a:cs typeface="Calibri"/>
+              </a:rPr>
+              <a:t>Methodology focused on small, verifiable AI systems: implement one behavior layer, expose debug evidence, playtest it, then tune the scoring data.</a:t>
+            </a:r>
+          </a:p>
+        </p:txBody>
+      </p:sp>
+      <p:sp>
+        <p:nvSpPr>
+          <p:cNvPr id="4" name="">
+            <a:extLst xmlns:a="http://schemas.openxmlformats.org/drawingml/2006/main">
+              <a:ext uri="{FF2B5EF4-FFF2-40B4-BE49-F238E27FC236}">
+                <a16:creationId xmlns:a16="http://schemas.microsoft.com/office/drawing/2014/main" id="{32EA193C-13FA-4934-ABE0-D20F37C8CBED}"/>
+              </a:ext>
+            </a:extLst>
+          </p:cNvPr>
+          <p:cNvSpPr>
+            <a:spLocks xmlns:a="http://schemas.openxmlformats.org/drawingml/2006/main" noGrp="1"/>
+          </p:cNvSpPr>
+          <p:nvPr/>
+        </p:nvSpPr>
+        <p:spPr>
+          <a:xfrm xmlns:a="http://schemas.openxmlformats.org/drawingml/2006/main">
+            <a:off x="647700" y="2038350"/>
+            <a:ext cx="2476500" cy="1009650"/>
+          </a:xfrm>
+          <a:prstGeom xmlns:a="http://schemas.openxmlformats.org/drawingml/2006/main" prst="rect">
+            <a:avLst/>
+          </a:prstGeom>
+          <a:solidFill xmlns:a="http://schemas.openxmlformats.org/drawingml/2006/main">
+            <a:srgbClr val="F8FAFC"/>
+          </a:solidFill>
+          <a:ln xmlns:a="http://schemas.openxmlformats.org/drawingml/2006/main" w="9525">
+            <a:solidFill>
+              <a:srgbClr val="D8DDE7"/>
+            </a:solidFill>
+            <a:prstDash val="solid"/>
+          </a:ln>
+        </p:spPr>
+      </p:sp>
+      <p:sp>
+        <p:nvSpPr>
+          <p:cNvPr id="5" name="">
+            <a:extLst xmlns:a="http://schemas.openxmlformats.org/drawingml/2006/main">
+              <a:ext uri="{FF2B5EF4-FFF2-40B4-BE49-F238E27FC236}">
+                <a16:creationId xmlns:a16="http://schemas.microsoft.com/office/drawing/2014/main" id="{144B7E49-0379-4165-A1A3-A244CAACB04D}"/>
+              </a:ext>
+            </a:extLst>
+          </p:cNvPr>
+          <p:cNvSpPr>
+            <a:spLocks xmlns:a="http://schemas.openxmlformats.org/drawingml/2006/main" noGrp="1"/>
+          </p:cNvSpPr>
+          <p:nvPr/>
+        </p:nvSpPr>
+        <p:spPr>
+          <a:xfrm xmlns:a="http://schemas.openxmlformats.org/drawingml/2006/main">
+            <a:off x="647700" y="2038350"/>
+            <a:ext cx="66675" cy="1009650"/>
+          </a:xfrm>
+          <a:prstGeom xmlns:a="http://schemas.openxmlformats.org/drawingml/2006/main" prst="rect">
+            <a:avLst/>
+          </a:prstGeom>
+          <a:solidFill xmlns:a="http://schemas.openxmlformats.org/drawingml/2006/main">
+            <a:srgbClr val="16824A"/>
+          </a:solidFill>
+          <a:ln xmlns:a="http://schemas.openxmlformats.org/drawingml/2006/main" w="0">
+            <a:noFill/>
+            <a:prstDash val="solid"/>
+          </a:ln>
+        </p:spPr>
+      </p:sp>
+      <p:sp>
+        <p:nvSpPr>
+          <p:cNvPr id="6" name="">
+            <a:extLst xmlns:a="http://schemas.openxmlformats.org/drawingml/2006/main">
+              <a:ext uri="{FF2B5EF4-FFF2-40B4-BE49-F238E27FC236}">
+                <a16:creationId xmlns:a16="http://schemas.microsoft.com/office/drawing/2014/main" id="{595F9C9C-74D5-4DB1-99C1-A6634E0EEE40}"/>
+              </a:ext>
+            </a:extLst>
+          </p:cNvPr>
+          <p:cNvSpPr>
+            <a:spLocks xmlns:a="http://schemas.openxmlformats.org/drawingml/2006/main" noGrp="1"/>
+          </p:cNvSpPr>
+          <p:nvPr/>
+        </p:nvSpPr>
+        <p:spPr>
+          <a:xfrm xmlns:a="http://schemas.openxmlformats.org/drawingml/2006/main">
+            <a:off x="819150" y="2152650"/>
+            <a:ext cx="2171700" cy="209550"/>
+          </a:xfrm>
+          <a:prstGeom xmlns:a="http://schemas.openxmlformats.org/drawingml/2006/main" prst="rect">
+            <a:avLst/>
+          </a:prstGeom>
+          <a:noFill xmlns:a="http://schemas.openxmlformats.org/drawingml/2006/main"/>
+          <a:ln xmlns:a="http://schemas.openxmlformats.org/drawingml/2006/main" w="0">
+            <a:noFill/>
+            <a:prstDash val="solid"/>
+          </a:ln>
+        </p:spPr>
+        <p:txBody>
+          <a:bodyPr xmlns:a="http://schemas.openxmlformats.org/drawingml/2006/main" wrap="square" lIns="38100" tIns="19050" rIns="38100" bIns="19050" anchor="t"/>
+          <a:lstStyle xmlns:a="http://schemas.openxmlformats.org/drawingml/2006/main"/>
+          <a:p xmlns:a="http://schemas.openxmlformats.org/drawingml/2006/main">
+            <a:pPr algn="l">
               <a:lnSpc>
-                <a:spcPct val="100000"/>
+                <a:spcPct val="105000"/>
               </a:lnSpc>
-              <a:spcBef>
-                <a:spcPct val="0"/>
-              </a:spcBef>
-              <a:spcAft>
-                <a:spcPct val="0"/>
-              </a:spcAft>
-              <a:buFontTx/>
-              <a:buChar char="•"/>
-            </a:pPr>
-            <a:r>
-              <a:t>2. Add commitment to prevent flicker.</a:t>
-            </a:r>
-          </a:p>
-          <a:p xmlns:a="http://schemas.openxmlformats.org/drawingml/2006/main">
-            <a:pPr marL="0" indent="0">
+              <a:buNone/>
+              <a:defRPr sz="915" b="1" i="0">
+                <a:solidFill>
+                  <a:srgbClr val="16824A"/>
+                </a:solidFill>
+                <a:latin typeface="Calibri"/>
+                <a:ea typeface="Calibri"/>
+                <a:cs typeface="Calibri"/>
+              </a:defRPr>
+            </a:pPr>
+            <a:r>
+              <a:rPr sz="915" b="1" i="0">
+                <a:solidFill>
+                  <a:srgbClr val="16824A"/>
+                </a:solidFill>
+                <a:latin typeface="Calibri"/>
+                <a:ea typeface="Calibri"/>
+                <a:cs typeface="Calibri"/>
+              </a:rPr>
+              <a:t>Utility scoring</a:t>
+            </a:r>
+          </a:p>
+        </p:txBody>
+      </p:sp>
+      <p:sp>
+        <p:nvSpPr>
+          <p:cNvPr id="7" name="">
+            <a:extLst xmlns:a="http://schemas.openxmlformats.org/drawingml/2006/main">
+              <a:ext uri="{FF2B5EF4-FFF2-40B4-BE49-F238E27FC236}">
+                <a16:creationId xmlns:a16="http://schemas.microsoft.com/office/drawing/2014/main" id="{A382D6B7-CD96-41EB-A1B1-D95B169AE93D}"/>
+              </a:ext>
+            </a:extLst>
+          </p:cNvPr>
+          <p:cNvSpPr>
+            <a:spLocks xmlns:a="http://schemas.openxmlformats.org/drawingml/2006/main" noGrp="1"/>
+          </p:cNvSpPr>
+          <p:nvPr/>
+        </p:nvSpPr>
+        <p:spPr>
+          <a:xfrm xmlns:a="http://schemas.openxmlformats.org/drawingml/2006/main">
+            <a:off x="819150" y="2419350"/>
+            <a:ext cx="2171700" cy="571500"/>
+          </a:xfrm>
+          <a:prstGeom xmlns:a="http://schemas.openxmlformats.org/drawingml/2006/main" prst="rect">
+            <a:avLst/>
+          </a:prstGeom>
+          <a:noFill xmlns:a="http://schemas.openxmlformats.org/drawingml/2006/main"/>
+          <a:ln xmlns:a="http://schemas.openxmlformats.org/drawingml/2006/main" w="0">
+            <a:noFill/>
+            <a:prstDash val="solid"/>
+          </a:ln>
+        </p:spPr>
+        <p:txBody>
+          <a:bodyPr xmlns:a="http://schemas.openxmlformats.org/drawingml/2006/main" wrap="square" lIns="38100" tIns="19050" rIns="38100" bIns="19050" anchor="t"/>
+          <a:lstStyle xmlns:a="http://schemas.openxmlformats.org/drawingml/2006/main"/>
+          <a:p xmlns:a="http://schemas.openxmlformats.org/drawingml/2006/main">
+            <a:pPr algn="l">
               <a:lnSpc>
-                <a:spcPct val="100000"/>
+                <a:spcPct val="102000"/>
               </a:lnSpc>
-              <a:spcBef>
-                <a:spcPct val="0"/>
-              </a:spcBef>
-              <a:spcAft>
-                <a:spcPct val="0"/>
-              </a:spcAft>
-              <a:buFontTx/>
-              <a:buChar char="•"/>
-            </a:pPr>
-            <a:r>
-              <a:t>3. Coordinate teams with a blackboard.</a:t>
-            </a:r>
-          </a:p>
-          <a:p xmlns:a="http://schemas.openxmlformats.org/drawingml/2006/main">
-            <a:r>
-              <a:t>4. Route safely and recover from stalls.</a:t>
-            </a:r>
-          </a:p>
-          <a:p xmlns:a="http://schemas.openxmlformats.org/drawingml/2006/main">
-            <a:r>
-              <a:t>5. Validate decisions in Unity playtests.</a:t>
-            </a:r>
-          </a:p>
-        </p:txBody>
-      </p:sp>
-      <p:sp>
-        <p:nvSpPr>
-          <p:cNvPr id="4" name="">
-            <a:extLst xmlns:a="http://schemas.openxmlformats.org/drawingml/2006/main">
-              <a:ext uri="{FF2B5EF4-FFF2-40B4-BE49-F238E27FC236}">
-                <a16:creationId xmlns:a16="http://schemas.microsoft.com/office/drawing/2014/main" id="{0533B381-2838-4F28-A8B6-2B2629DFE3DF}"/>
-              </a:ext>
-            </a:extLst>
-          </p:cNvPr>
-          <p:cNvSpPr>
-            <a:spLocks xmlns:a="http://schemas.openxmlformats.org/drawingml/2006/main" noGrp="1"/>
-          </p:cNvSpPr>
-          <p:nvPr/>
-        </p:nvSpPr>
-        <p:spPr>
-          <a:xfrm xmlns:a="http://schemas.openxmlformats.org/drawingml/2006/main">
-            <a:off x="5810250" y="5257800"/>
-            <a:ext cx="819150" cy="400050"/>
+              <a:buNone/>
+              <a:defRPr sz="743" b="0" i="0">
+                <a:solidFill>
+                  <a:srgbClr val="444444"/>
+                </a:solidFill>
+                <a:latin typeface="Calibri"/>
+                <a:ea typeface="Calibri"/>
+                <a:cs typeface="Calibri"/>
+              </a:defRPr>
+            </a:pPr>
+            <a:r>
+              <a:rPr sz="743" b="0" i="0">
+                <a:solidFill>
+                  <a:srgbClr val="444444"/>
+                </a:solidFill>
+                <a:latin typeface="Calibri"/>
+                <a:ea typeface="Calibri"/>
+                <a:cs typeface="Calibri"/>
+              </a:rPr>
+              <a:t>Scores actions from objective value, target value, range, safety, team pressure, and risk.</a:t>
+            </a:r>
+          </a:p>
+        </p:txBody>
+      </p:sp>
+      <p:sp>
+        <p:nvSpPr>
+          <p:cNvPr id="8" name="">
+            <a:extLst xmlns:a="http://schemas.openxmlformats.org/drawingml/2006/main">
+              <a:ext uri="{FF2B5EF4-FFF2-40B4-BE49-F238E27FC236}">
+                <a16:creationId xmlns:a16="http://schemas.microsoft.com/office/drawing/2014/main" id="{E6E3A1F3-3DE5-4A08-945B-440A04BE2690}"/>
+              </a:ext>
+            </a:extLst>
+          </p:cNvPr>
+          <p:cNvSpPr>
+            <a:spLocks xmlns:a="http://schemas.openxmlformats.org/drawingml/2006/main" noGrp="1"/>
+          </p:cNvSpPr>
+          <p:nvPr/>
+        </p:nvSpPr>
+        <p:spPr>
+          <a:xfrm xmlns:a="http://schemas.openxmlformats.org/drawingml/2006/main">
+            <a:off x="3457575" y="2038350"/>
+            <a:ext cx="2476500" cy="1009650"/>
+          </a:xfrm>
+          <a:prstGeom xmlns:a="http://schemas.openxmlformats.org/drawingml/2006/main" prst="rect">
+            <a:avLst/>
+          </a:prstGeom>
+          <a:solidFill xmlns:a="http://schemas.openxmlformats.org/drawingml/2006/main">
+            <a:srgbClr val="F8FAFC"/>
+          </a:solidFill>
+          <a:ln xmlns:a="http://schemas.openxmlformats.org/drawingml/2006/main" w="9525">
+            <a:solidFill>
+              <a:srgbClr val="D8DDE7"/>
+            </a:solidFill>
+            <a:prstDash val="solid"/>
+          </a:ln>
+        </p:spPr>
+      </p:sp>
+      <p:sp>
+        <p:nvSpPr>
+          <p:cNvPr id="9" name="">
+            <a:extLst xmlns:a="http://schemas.openxmlformats.org/drawingml/2006/main">
+              <a:ext uri="{FF2B5EF4-FFF2-40B4-BE49-F238E27FC236}">
+                <a16:creationId xmlns:a16="http://schemas.microsoft.com/office/drawing/2014/main" id="{61D35CDF-D9E9-408D-B13D-546AF8BA8EF0}"/>
+              </a:ext>
+            </a:extLst>
+          </p:cNvPr>
+          <p:cNvSpPr>
+            <a:spLocks xmlns:a="http://schemas.openxmlformats.org/drawingml/2006/main" noGrp="1"/>
+          </p:cNvSpPr>
+          <p:nvPr/>
+        </p:nvSpPr>
+        <p:spPr>
+          <a:xfrm xmlns:a="http://schemas.openxmlformats.org/drawingml/2006/main">
+            <a:off x="3457575" y="2038350"/>
+            <a:ext cx="66675" cy="1009650"/>
+          </a:xfrm>
+          <a:prstGeom xmlns:a="http://schemas.openxmlformats.org/drawingml/2006/main" prst="rect">
+            <a:avLst/>
+          </a:prstGeom>
+          <a:solidFill xmlns:a="http://schemas.openxmlformats.org/drawingml/2006/main">
+            <a:srgbClr val="2B5FAA"/>
+          </a:solidFill>
+          <a:ln xmlns:a="http://schemas.openxmlformats.org/drawingml/2006/main" w="0">
+            <a:noFill/>
+            <a:prstDash val="solid"/>
+          </a:ln>
+        </p:spPr>
+      </p:sp>
+      <p:sp>
+        <p:nvSpPr>
+          <p:cNvPr id="10" name="">
+            <a:extLst xmlns:a="http://schemas.openxmlformats.org/drawingml/2006/main">
+              <a:ext uri="{FF2B5EF4-FFF2-40B4-BE49-F238E27FC236}">
+                <a16:creationId xmlns:a16="http://schemas.microsoft.com/office/drawing/2014/main" id="{C222ABF1-8D1E-42AD-917B-BDA2F5E282DF}"/>
+              </a:ext>
+            </a:extLst>
+          </p:cNvPr>
+          <p:cNvSpPr>
+            <a:spLocks xmlns:a="http://schemas.openxmlformats.org/drawingml/2006/main" noGrp="1"/>
+          </p:cNvSpPr>
+          <p:nvPr/>
+        </p:nvSpPr>
+        <p:spPr>
+          <a:xfrm xmlns:a="http://schemas.openxmlformats.org/drawingml/2006/main">
+            <a:off x="3629025" y="2152650"/>
+            <a:ext cx="2171700" cy="209550"/>
+          </a:xfrm>
+          <a:prstGeom xmlns:a="http://schemas.openxmlformats.org/drawingml/2006/main" prst="rect">
+            <a:avLst/>
+          </a:prstGeom>
+          <a:noFill xmlns:a="http://schemas.openxmlformats.org/drawingml/2006/main"/>
+          <a:ln xmlns:a="http://schemas.openxmlformats.org/drawingml/2006/main" w="0">
+            <a:noFill/>
+            <a:prstDash val="solid"/>
+          </a:ln>
+        </p:spPr>
+        <p:txBody>
+          <a:bodyPr xmlns:a="http://schemas.openxmlformats.org/drawingml/2006/main" wrap="square" lIns="38100" tIns="19050" rIns="38100" bIns="19050" anchor="t"/>
+          <a:lstStyle xmlns:a="http://schemas.openxmlformats.org/drawingml/2006/main"/>
+          <a:p xmlns:a="http://schemas.openxmlformats.org/drawingml/2006/main">
+            <a:pPr algn="l">
+              <a:lnSpc>
+                <a:spcPct val="105000"/>
+              </a:lnSpc>
+              <a:buNone/>
+              <a:defRPr sz="915" b="1" i="0">
+                <a:solidFill>
+                  <a:srgbClr val="2B5FAA"/>
+                </a:solidFill>
+                <a:latin typeface="Calibri"/>
+                <a:ea typeface="Calibri"/>
+                <a:cs typeface="Calibri"/>
+              </a:defRPr>
+            </a:pPr>
+            <a:r>
+              <a:rPr sz="915" b="1" i="0">
+                <a:solidFill>
+                  <a:srgbClr val="2B5FAA"/>
+                </a:solidFill>
+                <a:latin typeface="Calibri"/>
+                <a:ea typeface="Calibri"/>
+                <a:cs typeface="Calibri"/>
+              </a:rPr>
+              <a:t>A* grid routing</a:t>
+            </a:r>
+          </a:p>
+        </p:txBody>
+      </p:sp>
+      <p:sp>
+        <p:nvSpPr>
+          <p:cNvPr id="11" name="">
+            <a:extLst xmlns:a="http://schemas.openxmlformats.org/drawingml/2006/main">
+              <a:ext uri="{FF2B5EF4-FFF2-40B4-BE49-F238E27FC236}">
+                <a16:creationId xmlns:a16="http://schemas.microsoft.com/office/drawing/2014/main" id="{35F43A08-7868-48D5-ADB5-8248082F2637}"/>
+              </a:ext>
+            </a:extLst>
+          </p:cNvPr>
+          <p:cNvSpPr>
+            <a:spLocks xmlns:a="http://schemas.openxmlformats.org/drawingml/2006/main" noGrp="1"/>
+          </p:cNvSpPr>
+          <p:nvPr/>
+        </p:nvSpPr>
+        <p:spPr>
+          <a:xfrm xmlns:a="http://schemas.openxmlformats.org/drawingml/2006/main">
+            <a:off x="3629025" y="2419350"/>
+            <a:ext cx="2171700" cy="571500"/>
+          </a:xfrm>
+          <a:prstGeom xmlns:a="http://schemas.openxmlformats.org/drawingml/2006/main" prst="rect">
+            <a:avLst/>
+          </a:prstGeom>
+          <a:noFill xmlns:a="http://schemas.openxmlformats.org/drawingml/2006/main"/>
+          <a:ln xmlns:a="http://schemas.openxmlformats.org/drawingml/2006/main" w="0">
+            <a:noFill/>
+            <a:prstDash val="solid"/>
+          </a:ln>
+        </p:spPr>
+        <p:txBody>
+          <a:bodyPr xmlns:a="http://schemas.openxmlformats.org/drawingml/2006/main" wrap="square" lIns="38100" tIns="19050" rIns="38100" bIns="19050" anchor="t"/>
+          <a:lstStyle xmlns:a="http://schemas.openxmlformats.org/drawingml/2006/main"/>
+          <a:p xmlns:a="http://schemas.openxmlformats.org/drawingml/2006/main">
+            <a:pPr algn="l">
+              <a:lnSpc>
+                <a:spcPct val="102000"/>
+              </a:lnSpc>
+              <a:buNone/>
+              <a:defRPr sz="743" b="0" i="0">
+                <a:solidFill>
+                  <a:srgbClr val="444444"/>
+                </a:solidFill>
+                <a:latin typeface="Calibri"/>
+                <a:ea typeface="Calibri"/>
+                <a:cs typeface="Calibri"/>
+              </a:defRPr>
+            </a:pPr>
+            <a:r>
+              <a:rPr sz="743" b="0" i="0">
+                <a:solidFill>
+                  <a:srgbClr val="444444"/>
+                </a:solidFill>
+                <a:latin typeface="Calibri"/>
+                <a:ea typeface="Calibri"/>
+                <a:cs typeface="Calibri"/>
+              </a:rPr>
+              <a:t>Builds walkable-cell paths around obstacles with fallback goals and route budgets.</a:t>
+            </a:r>
+          </a:p>
+        </p:txBody>
+      </p:sp>
+      <p:sp>
+        <p:nvSpPr>
+          <p:cNvPr id="12" name="">
+            <a:extLst xmlns:a="http://schemas.openxmlformats.org/drawingml/2006/main">
+              <a:ext uri="{FF2B5EF4-FFF2-40B4-BE49-F238E27FC236}">
+                <a16:creationId xmlns:a16="http://schemas.microsoft.com/office/drawing/2014/main" id="{6A44B5D8-C9CF-46B3-BC4F-AED1B6AE5378}"/>
+              </a:ext>
+            </a:extLst>
+          </p:cNvPr>
+          <p:cNvSpPr>
+            <a:spLocks xmlns:a="http://schemas.openxmlformats.org/drawingml/2006/main" noGrp="1"/>
+          </p:cNvSpPr>
+          <p:nvPr/>
+        </p:nvSpPr>
+        <p:spPr>
+          <a:xfrm xmlns:a="http://schemas.openxmlformats.org/drawingml/2006/main">
+            <a:off x="6267450" y="2038350"/>
+            <a:ext cx="2476500" cy="1009650"/>
+          </a:xfrm>
+          <a:prstGeom xmlns:a="http://schemas.openxmlformats.org/drawingml/2006/main" prst="rect">
+            <a:avLst/>
+          </a:prstGeom>
+          <a:solidFill xmlns:a="http://schemas.openxmlformats.org/drawingml/2006/main">
+            <a:srgbClr val="F8FAFC"/>
+          </a:solidFill>
+          <a:ln xmlns:a="http://schemas.openxmlformats.org/drawingml/2006/main" w="9525">
+            <a:solidFill>
+              <a:srgbClr val="D8DDE7"/>
+            </a:solidFill>
+            <a:prstDash val="solid"/>
+          </a:ln>
+        </p:spPr>
+      </p:sp>
+      <p:sp>
+        <p:nvSpPr>
+          <p:cNvPr id="13" name="">
+            <a:extLst xmlns:a="http://schemas.openxmlformats.org/drawingml/2006/main">
+              <a:ext uri="{FF2B5EF4-FFF2-40B4-BE49-F238E27FC236}">
+                <a16:creationId xmlns:a16="http://schemas.microsoft.com/office/drawing/2014/main" id="{7C331A6E-9E12-4EDB-9D67-79FC8B4EF59A}"/>
+              </a:ext>
+            </a:extLst>
+          </p:cNvPr>
+          <p:cNvSpPr>
+            <a:spLocks xmlns:a="http://schemas.openxmlformats.org/drawingml/2006/main" noGrp="1"/>
+          </p:cNvSpPr>
+          <p:nvPr/>
+        </p:nvSpPr>
+        <p:spPr>
+          <a:xfrm xmlns:a="http://schemas.openxmlformats.org/drawingml/2006/main">
+            <a:off x="6267450" y="2038350"/>
+            <a:ext cx="66675" cy="1009650"/>
+          </a:xfrm>
+          <a:prstGeom xmlns:a="http://schemas.openxmlformats.org/drawingml/2006/main" prst="rect">
+            <a:avLst/>
+          </a:prstGeom>
+          <a:solidFill xmlns:a="http://schemas.openxmlformats.org/drawingml/2006/main">
+            <a:srgbClr val="0F8FB3"/>
+          </a:solidFill>
+          <a:ln xmlns:a="http://schemas.openxmlformats.org/drawingml/2006/main" w="0">
+            <a:noFill/>
+            <a:prstDash val="solid"/>
+          </a:ln>
+        </p:spPr>
+      </p:sp>
+      <p:sp>
+        <p:nvSpPr>
+          <p:cNvPr id="14" name="">
+            <a:extLst xmlns:a="http://schemas.openxmlformats.org/drawingml/2006/main">
+              <a:ext uri="{FF2B5EF4-FFF2-40B4-BE49-F238E27FC236}">
+                <a16:creationId xmlns:a16="http://schemas.microsoft.com/office/drawing/2014/main" id="{A7FA8983-6C7D-4EB9-AE7B-608B9290FC91}"/>
+              </a:ext>
+            </a:extLst>
+          </p:cNvPr>
+          <p:cNvSpPr>
+            <a:spLocks xmlns:a="http://schemas.openxmlformats.org/drawingml/2006/main" noGrp="1"/>
+          </p:cNvSpPr>
+          <p:nvPr/>
+        </p:nvSpPr>
+        <p:spPr>
+          <a:xfrm xmlns:a="http://schemas.openxmlformats.org/drawingml/2006/main">
+            <a:off x="6438900" y="2152650"/>
+            <a:ext cx="2171700" cy="209550"/>
+          </a:xfrm>
+          <a:prstGeom xmlns:a="http://schemas.openxmlformats.org/drawingml/2006/main" prst="rect">
+            <a:avLst/>
+          </a:prstGeom>
+          <a:noFill xmlns:a="http://schemas.openxmlformats.org/drawingml/2006/main"/>
+          <a:ln xmlns:a="http://schemas.openxmlformats.org/drawingml/2006/main" w="0">
+            <a:noFill/>
+            <a:prstDash val="solid"/>
+          </a:ln>
+        </p:spPr>
+        <p:txBody>
+          <a:bodyPr xmlns:a="http://schemas.openxmlformats.org/drawingml/2006/main" wrap="square" lIns="38100" tIns="19050" rIns="38100" bIns="19050" anchor="t"/>
+          <a:lstStyle xmlns:a="http://schemas.openxmlformats.org/drawingml/2006/main"/>
+          <a:p xmlns:a="http://schemas.openxmlformats.org/drawingml/2006/main">
+            <a:pPr algn="l">
+              <a:lnSpc>
+                <a:spcPct val="105000"/>
+              </a:lnSpc>
+              <a:buNone/>
+              <a:defRPr sz="915" b="1" i="0">
+                <a:solidFill>
+                  <a:srgbClr val="0F8FB3"/>
+                </a:solidFill>
+                <a:latin typeface="Calibri"/>
+                <a:ea typeface="Calibri"/>
+                <a:cs typeface="Calibri"/>
+              </a:defRPr>
+            </a:pPr>
+            <a:r>
+              <a:rPr sz="915" b="1" i="0">
+                <a:solidFill>
+                  <a:srgbClr val="0F8FB3"/>
+                </a:solidFill>
+                <a:latin typeface="Calibri"/>
+                <a:ea typeface="Calibri"/>
+                <a:cs typeface="Calibri"/>
+              </a:rPr>
+              <a:t>Spatial queries</a:t>
+            </a:r>
+          </a:p>
+        </p:txBody>
+      </p:sp>
+      <p:sp>
+        <p:nvSpPr>
+          <p:cNvPr id="15" name="">
+            <a:extLst xmlns:a="http://schemas.openxmlformats.org/drawingml/2006/main">
+              <a:ext uri="{FF2B5EF4-FFF2-40B4-BE49-F238E27FC236}">
+                <a16:creationId xmlns:a16="http://schemas.microsoft.com/office/drawing/2014/main" id="{73D97356-FB28-4A38-A2C0-319F021DC661}"/>
+              </a:ext>
+            </a:extLst>
+          </p:cNvPr>
+          <p:cNvSpPr>
+            <a:spLocks xmlns:a="http://schemas.openxmlformats.org/drawingml/2006/main" noGrp="1"/>
+          </p:cNvSpPr>
+          <p:nvPr/>
+        </p:nvSpPr>
+        <p:spPr>
+          <a:xfrm xmlns:a="http://schemas.openxmlformats.org/drawingml/2006/main">
+            <a:off x="6438900" y="2419350"/>
+            <a:ext cx="2171700" cy="571500"/>
+          </a:xfrm>
+          <a:prstGeom xmlns:a="http://schemas.openxmlformats.org/drawingml/2006/main" prst="rect">
+            <a:avLst/>
+          </a:prstGeom>
+          <a:noFill xmlns:a="http://schemas.openxmlformats.org/drawingml/2006/main"/>
+          <a:ln xmlns:a="http://schemas.openxmlformats.org/drawingml/2006/main" w="0">
+            <a:noFill/>
+            <a:prstDash val="solid"/>
+          </a:ln>
+        </p:spPr>
+        <p:txBody>
+          <a:bodyPr xmlns:a="http://schemas.openxmlformats.org/drawingml/2006/main" wrap="square" lIns="38100" tIns="19050" rIns="38100" bIns="19050" anchor="t"/>
+          <a:lstStyle xmlns:a="http://schemas.openxmlformats.org/drawingml/2006/main"/>
+          <a:p xmlns:a="http://schemas.openxmlformats.org/drawingml/2006/main">
+            <a:pPr algn="l">
+              <a:lnSpc>
+                <a:spcPct val="102000"/>
+              </a:lnSpc>
+              <a:buNone/>
+              <a:defRPr sz="743" b="0" i="0">
+                <a:solidFill>
+                  <a:srgbClr val="444444"/>
+                </a:solidFill>
+                <a:latin typeface="Calibri"/>
+                <a:ea typeface="Calibri"/>
+                <a:cs typeface="Calibri"/>
+              </a:defRPr>
+            </a:pPr>
+            <a:r>
+              <a:rPr sz="743" b="0" i="0">
+                <a:solidFill>
+                  <a:srgbClr val="444444"/>
+                </a:solidFill>
+                <a:latin typeface="Calibri"/>
+                <a:ea typeface="Calibri"/>
+                <a:cs typeface="Calibri"/>
+              </a:rPr>
+              <a:t>Detects nearby targets, gems, hazards, line-of-fire, bush proximity, and area effects.</a:t>
+            </a:r>
+          </a:p>
+        </p:txBody>
+      </p:sp>
+      <p:sp>
+        <p:nvSpPr>
+          <p:cNvPr id="16" name="">
+            <a:extLst xmlns:a="http://schemas.openxmlformats.org/drawingml/2006/main">
+              <a:ext uri="{FF2B5EF4-FFF2-40B4-BE49-F238E27FC236}">
+                <a16:creationId xmlns:a16="http://schemas.microsoft.com/office/drawing/2014/main" id="{5B6E64AE-A30C-45BB-9162-B3A02B60D11B}"/>
+              </a:ext>
+            </a:extLst>
+          </p:cNvPr>
+          <p:cNvSpPr>
+            <a:spLocks xmlns:a="http://schemas.openxmlformats.org/drawingml/2006/main" noGrp="1"/>
+          </p:cNvSpPr>
+          <p:nvPr/>
+        </p:nvSpPr>
+        <p:spPr>
+          <a:xfrm xmlns:a="http://schemas.openxmlformats.org/drawingml/2006/main">
+            <a:off x="9077325" y="2038350"/>
+            <a:ext cx="2476500" cy="1009650"/>
+          </a:xfrm>
+          <a:prstGeom xmlns:a="http://schemas.openxmlformats.org/drawingml/2006/main" prst="rect">
+            <a:avLst/>
+          </a:prstGeom>
+          <a:solidFill xmlns:a="http://schemas.openxmlformats.org/drawingml/2006/main">
+            <a:srgbClr val="F8FAFC"/>
+          </a:solidFill>
+          <a:ln xmlns:a="http://schemas.openxmlformats.org/drawingml/2006/main" w="9525">
+            <a:solidFill>
+              <a:srgbClr val="D8DDE7"/>
+            </a:solidFill>
+            <a:prstDash val="solid"/>
+          </a:ln>
+        </p:spPr>
+      </p:sp>
+      <p:sp>
+        <p:nvSpPr>
+          <p:cNvPr id="17" name="">
+            <a:extLst xmlns:a="http://schemas.openxmlformats.org/drawingml/2006/main">
+              <a:ext uri="{FF2B5EF4-FFF2-40B4-BE49-F238E27FC236}">
+                <a16:creationId xmlns:a16="http://schemas.microsoft.com/office/drawing/2014/main" id="{D5473807-8567-4143-8821-4F3F81A5061D}"/>
+              </a:ext>
+            </a:extLst>
+          </p:cNvPr>
+          <p:cNvSpPr>
+            <a:spLocks xmlns:a="http://schemas.openxmlformats.org/drawingml/2006/main" noGrp="1"/>
+          </p:cNvSpPr>
+          <p:nvPr/>
+        </p:nvSpPr>
+        <p:spPr>
+          <a:xfrm xmlns:a="http://schemas.openxmlformats.org/drawingml/2006/main">
+            <a:off x="9077325" y="2038350"/>
+            <a:ext cx="66675" cy="1009650"/>
+          </a:xfrm>
+          <a:prstGeom xmlns:a="http://schemas.openxmlformats.org/drawingml/2006/main" prst="rect">
+            <a:avLst/>
+          </a:prstGeom>
+          <a:solidFill xmlns:a="http://schemas.openxmlformats.org/drawingml/2006/main">
+            <a:srgbClr val="20384F"/>
+          </a:solidFill>
+          <a:ln xmlns:a="http://schemas.openxmlformats.org/drawingml/2006/main" w="0">
+            <a:noFill/>
+            <a:prstDash val="solid"/>
+          </a:ln>
+        </p:spPr>
+      </p:sp>
+      <p:sp>
+        <p:nvSpPr>
+          <p:cNvPr id="18" name="">
+            <a:extLst xmlns:a="http://schemas.openxmlformats.org/drawingml/2006/main">
+              <a:ext uri="{FF2B5EF4-FFF2-40B4-BE49-F238E27FC236}">
+                <a16:creationId xmlns:a16="http://schemas.microsoft.com/office/drawing/2014/main" id="{21879147-BF7F-4D61-89BF-DC3473C6C4A9}"/>
+              </a:ext>
+            </a:extLst>
+          </p:cNvPr>
+          <p:cNvSpPr>
+            <a:spLocks xmlns:a="http://schemas.openxmlformats.org/drawingml/2006/main" noGrp="1"/>
+          </p:cNvSpPr>
+          <p:nvPr/>
+        </p:nvSpPr>
+        <p:spPr>
+          <a:xfrm xmlns:a="http://schemas.openxmlformats.org/drawingml/2006/main">
+            <a:off x="9248775" y="2152650"/>
+            <a:ext cx="2171700" cy="209550"/>
+          </a:xfrm>
+          <a:prstGeom xmlns:a="http://schemas.openxmlformats.org/drawingml/2006/main" prst="rect">
+            <a:avLst/>
+          </a:prstGeom>
+          <a:noFill xmlns:a="http://schemas.openxmlformats.org/drawingml/2006/main"/>
+          <a:ln xmlns:a="http://schemas.openxmlformats.org/drawingml/2006/main" w="0">
+            <a:noFill/>
+            <a:prstDash val="solid"/>
+          </a:ln>
+        </p:spPr>
+        <p:txBody>
+          <a:bodyPr xmlns:a="http://schemas.openxmlformats.org/drawingml/2006/main" wrap="square" lIns="38100" tIns="19050" rIns="38100" bIns="19050" anchor="t"/>
+          <a:lstStyle xmlns:a="http://schemas.openxmlformats.org/drawingml/2006/main"/>
+          <a:p xmlns:a="http://schemas.openxmlformats.org/drawingml/2006/main">
+            <a:pPr algn="l">
+              <a:lnSpc>
+                <a:spcPct val="105000"/>
+              </a:lnSpc>
+              <a:buNone/>
+              <a:defRPr sz="915" b="1" i="0">
+                <a:solidFill>
+                  <a:srgbClr val="20384F"/>
+                </a:solidFill>
+                <a:latin typeface="Calibri"/>
+                <a:ea typeface="Calibri"/>
+                <a:cs typeface="Calibri"/>
+              </a:defRPr>
+            </a:pPr>
+            <a:r>
+              <a:rPr sz="915" b="1" i="0">
+                <a:solidFill>
+                  <a:srgbClr val="20384F"/>
+                </a:solidFill>
+                <a:latin typeface="Calibri"/>
+                <a:ea typeface="Calibri"/>
+                <a:cs typeface="Calibri"/>
+              </a:rPr>
+              <a:t>Blackboard</a:t>
+            </a:r>
+          </a:p>
+        </p:txBody>
+      </p:sp>
+      <p:sp>
+        <p:nvSpPr>
+          <p:cNvPr id="19" name="">
+            <a:extLst xmlns:a="http://schemas.openxmlformats.org/drawingml/2006/main">
+              <a:ext uri="{FF2B5EF4-FFF2-40B4-BE49-F238E27FC236}">
+                <a16:creationId xmlns:a16="http://schemas.microsoft.com/office/drawing/2014/main" id="{845536B6-62A2-4A99-B1C8-FCA3A69B0FCD}"/>
+              </a:ext>
+            </a:extLst>
+          </p:cNvPr>
+          <p:cNvSpPr>
+            <a:spLocks xmlns:a="http://schemas.openxmlformats.org/drawingml/2006/main" noGrp="1"/>
+          </p:cNvSpPr>
+          <p:nvPr/>
+        </p:nvSpPr>
+        <p:spPr>
+          <a:xfrm xmlns:a="http://schemas.openxmlformats.org/drawingml/2006/main">
+            <a:off x="9248775" y="2419350"/>
+            <a:ext cx="2171700" cy="571500"/>
+          </a:xfrm>
+          <a:prstGeom xmlns:a="http://schemas.openxmlformats.org/drawingml/2006/main" prst="rect">
+            <a:avLst/>
+          </a:prstGeom>
+          <a:noFill xmlns:a="http://schemas.openxmlformats.org/drawingml/2006/main"/>
+          <a:ln xmlns:a="http://schemas.openxmlformats.org/drawingml/2006/main" w="0">
+            <a:noFill/>
+            <a:prstDash val="solid"/>
+          </a:ln>
+        </p:spPr>
+        <p:txBody>
+          <a:bodyPr xmlns:a="http://schemas.openxmlformats.org/drawingml/2006/main" wrap="square" lIns="38100" tIns="19050" rIns="38100" bIns="19050" anchor="t"/>
+          <a:lstStyle xmlns:a="http://schemas.openxmlformats.org/drawingml/2006/main"/>
+          <a:p xmlns:a="http://schemas.openxmlformats.org/drawingml/2006/main">
+            <a:pPr algn="l">
+              <a:lnSpc>
+                <a:spcPct val="102000"/>
+              </a:lnSpc>
+              <a:buNone/>
+              <a:defRPr sz="743" b="0" i="0">
+                <a:solidFill>
+                  <a:srgbClr val="444444"/>
+                </a:solidFill>
+                <a:latin typeface="Calibri"/>
+                <a:ea typeface="Calibri"/>
+                <a:cs typeface="Calibri"/>
+              </a:defRPr>
+            </a:pPr>
+            <a:r>
+              <a:rPr sz="743" b="0" i="0">
+                <a:solidFill>
+                  <a:srgbClr val="444444"/>
+                </a:solidFill>
+                <a:latin typeface="Calibri"/>
+                <a:ea typeface="Calibri"/>
+                <a:cs typeface="Calibri"/>
+              </a:rPr>
+              <a:t>Stores shared team knowledge such as focus counts, lanes, carriers, and threat centers.</a:t>
+            </a:r>
+          </a:p>
+        </p:txBody>
+      </p:sp>
+      <p:sp>
+        <p:nvSpPr>
+          <p:cNvPr id="20" name="">
+            <a:extLst xmlns:a="http://schemas.openxmlformats.org/drawingml/2006/main">
+              <a:ext uri="{FF2B5EF4-FFF2-40B4-BE49-F238E27FC236}">
+                <a16:creationId xmlns:a16="http://schemas.microsoft.com/office/drawing/2014/main" id="{B0F16786-C07E-481D-A138-B88B71EC6C33}"/>
+              </a:ext>
+            </a:extLst>
+          </p:cNvPr>
+          <p:cNvSpPr>
+            <a:spLocks xmlns:a="http://schemas.openxmlformats.org/drawingml/2006/main" noGrp="1"/>
+          </p:cNvSpPr>
+          <p:nvPr/>
+        </p:nvSpPr>
+        <p:spPr>
+          <a:xfrm xmlns:a="http://schemas.openxmlformats.org/drawingml/2006/main">
+            <a:off x="647700" y="3295650"/>
+            <a:ext cx="2476500" cy="1009650"/>
+          </a:xfrm>
+          <a:prstGeom xmlns:a="http://schemas.openxmlformats.org/drawingml/2006/main" prst="rect">
+            <a:avLst/>
+          </a:prstGeom>
+          <a:solidFill xmlns:a="http://schemas.openxmlformats.org/drawingml/2006/main">
+            <a:srgbClr val="F8FAFC"/>
+          </a:solidFill>
+          <a:ln xmlns:a="http://schemas.openxmlformats.org/drawingml/2006/main" w="9525">
+            <a:solidFill>
+              <a:srgbClr val="D8DDE7"/>
+            </a:solidFill>
+            <a:prstDash val="solid"/>
+          </a:ln>
+        </p:spPr>
+      </p:sp>
+      <p:sp>
+        <p:nvSpPr>
+          <p:cNvPr id="21" name="">
+            <a:extLst xmlns:a="http://schemas.openxmlformats.org/drawingml/2006/main">
+              <a:ext uri="{FF2B5EF4-FFF2-40B4-BE49-F238E27FC236}">
+                <a16:creationId xmlns:a16="http://schemas.microsoft.com/office/drawing/2014/main" id="{125A6AD1-9226-4DAF-97F6-007E3B3CB0B8}"/>
+              </a:ext>
+            </a:extLst>
+          </p:cNvPr>
+          <p:cNvSpPr>
+            <a:spLocks xmlns:a="http://schemas.openxmlformats.org/drawingml/2006/main" noGrp="1"/>
+          </p:cNvSpPr>
+          <p:nvPr/>
+        </p:nvSpPr>
+        <p:spPr>
+          <a:xfrm xmlns:a="http://schemas.openxmlformats.org/drawingml/2006/main">
+            <a:off x="647700" y="3295650"/>
+            <a:ext cx="66675" cy="1009650"/>
+          </a:xfrm>
+          <a:prstGeom xmlns:a="http://schemas.openxmlformats.org/drawingml/2006/main" prst="rect">
+            <a:avLst/>
+          </a:prstGeom>
+          <a:solidFill xmlns:a="http://schemas.openxmlformats.org/drawingml/2006/main">
+            <a:srgbClr val="6A36BF"/>
+          </a:solidFill>
+          <a:ln xmlns:a="http://schemas.openxmlformats.org/drawingml/2006/main" w="0">
+            <a:noFill/>
+            <a:prstDash val="solid"/>
+          </a:ln>
+        </p:spPr>
+      </p:sp>
+      <p:sp>
+        <p:nvSpPr>
+          <p:cNvPr id="22" name="">
+            <a:extLst xmlns:a="http://schemas.openxmlformats.org/drawingml/2006/main">
+              <a:ext uri="{FF2B5EF4-FFF2-40B4-BE49-F238E27FC236}">
+                <a16:creationId xmlns:a16="http://schemas.microsoft.com/office/drawing/2014/main" id="{4D5AD8B9-BC73-4E67-9EB9-E7A8C23EA993}"/>
+              </a:ext>
+            </a:extLst>
+          </p:cNvPr>
+          <p:cNvSpPr>
+            <a:spLocks xmlns:a="http://schemas.openxmlformats.org/drawingml/2006/main" noGrp="1"/>
+          </p:cNvSpPr>
+          <p:nvPr/>
+        </p:nvSpPr>
+        <p:spPr>
+          <a:xfrm xmlns:a="http://schemas.openxmlformats.org/drawingml/2006/main">
+            <a:off x="819150" y="3409950"/>
+            <a:ext cx="2171700" cy="209550"/>
+          </a:xfrm>
+          <a:prstGeom xmlns:a="http://schemas.openxmlformats.org/drawingml/2006/main" prst="rect">
+            <a:avLst/>
+          </a:prstGeom>
+          <a:noFill xmlns:a="http://schemas.openxmlformats.org/drawingml/2006/main"/>
+          <a:ln xmlns:a="http://schemas.openxmlformats.org/drawingml/2006/main" w="0">
+            <a:noFill/>
+            <a:prstDash val="solid"/>
+          </a:ln>
+        </p:spPr>
+        <p:txBody>
+          <a:bodyPr xmlns:a="http://schemas.openxmlformats.org/drawingml/2006/main" wrap="square" lIns="38100" tIns="19050" rIns="38100" bIns="19050" anchor="t"/>
+          <a:lstStyle xmlns:a="http://schemas.openxmlformats.org/drawingml/2006/main"/>
+          <a:p xmlns:a="http://schemas.openxmlformats.org/drawingml/2006/main">
+            <a:pPr algn="l">
+              <a:lnSpc>
+                <a:spcPct val="105000"/>
+              </a:lnSpc>
+              <a:buNone/>
+              <a:defRPr sz="915" b="1" i="0">
+                <a:solidFill>
+                  <a:srgbClr val="6A36BF"/>
+                </a:solidFill>
+                <a:latin typeface="Calibri"/>
+                <a:ea typeface="Calibri"/>
+                <a:cs typeface="Calibri"/>
+              </a:defRPr>
+            </a:pPr>
+            <a:r>
+              <a:rPr sz="915" b="1" i="0">
+                <a:solidFill>
+                  <a:srgbClr val="6A36BF"/>
+                </a:solidFill>
+                <a:latin typeface="Calibri"/>
+                <a:ea typeface="Calibri"/>
+                <a:cs typeface="Calibri"/>
+              </a:rPr>
+              <a:t>Hysteresis</a:t>
+            </a:r>
+          </a:p>
+        </p:txBody>
+      </p:sp>
+      <p:sp>
+        <p:nvSpPr>
+          <p:cNvPr id="23" name="">
+            <a:extLst xmlns:a="http://schemas.openxmlformats.org/drawingml/2006/main">
+              <a:ext uri="{FF2B5EF4-FFF2-40B4-BE49-F238E27FC236}">
+                <a16:creationId xmlns:a16="http://schemas.microsoft.com/office/drawing/2014/main" id="{D4C33591-EC8D-4837-BE04-48E7839AD58B}"/>
+              </a:ext>
+            </a:extLst>
+          </p:cNvPr>
+          <p:cNvSpPr>
+            <a:spLocks xmlns:a="http://schemas.openxmlformats.org/drawingml/2006/main" noGrp="1"/>
+          </p:cNvSpPr>
+          <p:nvPr/>
+        </p:nvSpPr>
+        <p:spPr>
+          <a:xfrm xmlns:a="http://schemas.openxmlformats.org/drawingml/2006/main">
+            <a:off x="819150" y="3676650"/>
+            <a:ext cx="2171700" cy="571500"/>
+          </a:xfrm>
+          <a:prstGeom xmlns:a="http://schemas.openxmlformats.org/drawingml/2006/main" prst="rect">
+            <a:avLst/>
+          </a:prstGeom>
+          <a:noFill xmlns:a="http://schemas.openxmlformats.org/drawingml/2006/main"/>
+          <a:ln xmlns:a="http://schemas.openxmlformats.org/drawingml/2006/main" w="0">
+            <a:noFill/>
+            <a:prstDash val="solid"/>
+          </a:ln>
+        </p:spPr>
+        <p:txBody>
+          <a:bodyPr xmlns:a="http://schemas.openxmlformats.org/drawingml/2006/main" wrap="square" lIns="38100" tIns="19050" rIns="38100" bIns="19050" anchor="t"/>
+          <a:lstStyle xmlns:a="http://schemas.openxmlformats.org/drawingml/2006/main"/>
+          <a:p xmlns:a="http://schemas.openxmlformats.org/drawingml/2006/main">
+            <a:pPr algn="l">
+              <a:lnSpc>
+                <a:spcPct val="102000"/>
+              </a:lnSpc>
+              <a:buNone/>
+              <a:defRPr sz="743" b="0" i="0">
+                <a:solidFill>
+                  <a:srgbClr val="444444"/>
+                </a:solidFill>
+                <a:latin typeface="Calibri"/>
+                <a:ea typeface="Calibri"/>
+                <a:cs typeface="Calibri"/>
+              </a:defRPr>
+            </a:pPr>
+            <a:r>
+              <a:rPr sz="743" b="0" i="0">
+                <a:solidFill>
+                  <a:srgbClr val="444444"/>
+                </a:solidFill>
+                <a:latin typeface="Calibri"/>
+                <a:ea typeface="Calibri"/>
+                <a:cs typeface="Calibri"/>
+              </a:rPr>
+              <a:t>Keeps actions stable long enough to avoid visible flicker and rapid direction changes.</a:t>
+            </a:r>
+          </a:p>
+        </p:txBody>
+      </p:sp>
+      <p:sp>
+        <p:nvSpPr>
+          <p:cNvPr id="24" name="">
+            <a:extLst xmlns:a="http://schemas.openxmlformats.org/drawingml/2006/main">
+              <a:ext uri="{FF2B5EF4-FFF2-40B4-BE49-F238E27FC236}">
+                <a16:creationId xmlns:a16="http://schemas.microsoft.com/office/drawing/2014/main" id="{8AD18B9F-8011-4BE6-861F-1966148515A6}"/>
+              </a:ext>
+            </a:extLst>
+          </p:cNvPr>
+          <p:cNvSpPr>
+            <a:spLocks xmlns:a="http://schemas.openxmlformats.org/drawingml/2006/main" noGrp="1"/>
+          </p:cNvSpPr>
+          <p:nvPr/>
+        </p:nvSpPr>
+        <p:spPr>
+          <a:xfrm xmlns:a="http://schemas.openxmlformats.org/drawingml/2006/main">
+            <a:off x="3457575" y="3295650"/>
+            <a:ext cx="2476500" cy="1009650"/>
+          </a:xfrm>
+          <a:prstGeom xmlns:a="http://schemas.openxmlformats.org/drawingml/2006/main" prst="rect">
+            <a:avLst/>
+          </a:prstGeom>
+          <a:solidFill xmlns:a="http://schemas.openxmlformats.org/drawingml/2006/main">
+            <a:srgbClr val="F8FAFC"/>
+          </a:solidFill>
+          <a:ln xmlns:a="http://schemas.openxmlformats.org/drawingml/2006/main" w="9525">
+            <a:solidFill>
+              <a:srgbClr val="D8DDE7"/>
+            </a:solidFill>
+            <a:prstDash val="solid"/>
+          </a:ln>
+        </p:spPr>
+      </p:sp>
+      <p:sp>
+        <p:nvSpPr>
+          <p:cNvPr id="25" name="">
+            <a:extLst xmlns:a="http://schemas.openxmlformats.org/drawingml/2006/main">
+              <a:ext uri="{FF2B5EF4-FFF2-40B4-BE49-F238E27FC236}">
+                <a16:creationId xmlns:a16="http://schemas.microsoft.com/office/drawing/2014/main" id="{BF1000ED-DCAA-4901-A89E-527AE3B058B9}"/>
+              </a:ext>
+            </a:extLst>
+          </p:cNvPr>
+          <p:cNvSpPr>
+            <a:spLocks xmlns:a="http://schemas.openxmlformats.org/drawingml/2006/main" noGrp="1"/>
+          </p:cNvSpPr>
+          <p:nvPr/>
+        </p:nvSpPr>
+        <p:spPr>
+          <a:xfrm xmlns:a="http://schemas.openxmlformats.org/drawingml/2006/main">
+            <a:off x="3457575" y="3295650"/>
+            <a:ext cx="66675" cy="1009650"/>
+          </a:xfrm>
+          <a:prstGeom xmlns:a="http://schemas.openxmlformats.org/drawingml/2006/main" prst="rect">
+            <a:avLst/>
+          </a:prstGeom>
+          <a:solidFill xmlns:a="http://schemas.openxmlformats.org/drawingml/2006/main">
+            <a:srgbClr val="C01855"/>
+          </a:solidFill>
+          <a:ln xmlns:a="http://schemas.openxmlformats.org/drawingml/2006/main" w="0">
+            <a:noFill/>
+            <a:prstDash val="solid"/>
+          </a:ln>
+        </p:spPr>
+      </p:sp>
+      <p:sp>
+        <p:nvSpPr>
+          <p:cNvPr id="26" name="">
+            <a:extLst xmlns:a="http://schemas.openxmlformats.org/drawingml/2006/main">
+              <a:ext uri="{FF2B5EF4-FFF2-40B4-BE49-F238E27FC236}">
+                <a16:creationId xmlns:a16="http://schemas.microsoft.com/office/drawing/2014/main" id="{9C6EFB20-DCCB-4156-892D-7664F23D964F}"/>
+              </a:ext>
+            </a:extLst>
+          </p:cNvPr>
+          <p:cNvSpPr>
+            <a:spLocks xmlns:a="http://schemas.openxmlformats.org/drawingml/2006/main" noGrp="1"/>
+          </p:cNvSpPr>
+          <p:nvPr/>
+        </p:nvSpPr>
+        <p:spPr>
+          <a:xfrm xmlns:a="http://schemas.openxmlformats.org/drawingml/2006/main">
+            <a:off x="3629025" y="3409950"/>
+            <a:ext cx="2171700" cy="209550"/>
+          </a:xfrm>
+          <a:prstGeom xmlns:a="http://schemas.openxmlformats.org/drawingml/2006/main" prst="rect">
+            <a:avLst/>
+          </a:prstGeom>
+          <a:noFill xmlns:a="http://schemas.openxmlformats.org/drawingml/2006/main"/>
+          <a:ln xmlns:a="http://schemas.openxmlformats.org/drawingml/2006/main" w="0">
+            <a:noFill/>
+            <a:prstDash val="solid"/>
+          </a:ln>
+        </p:spPr>
+        <p:txBody>
+          <a:bodyPr xmlns:a="http://schemas.openxmlformats.org/drawingml/2006/main" wrap="square" lIns="38100" tIns="19050" rIns="38100" bIns="19050" anchor="t"/>
+          <a:lstStyle xmlns:a="http://schemas.openxmlformats.org/drawingml/2006/main"/>
+          <a:p xmlns:a="http://schemas.openxmlformats.org/drawingml/2006/main">
+            <a:pPr algn="l">
+              <a:lnSpc>
+                <a:spcPct val="105000"/>
+              </a:lnSpc>
+              <a:buNone/>
+              <a:defRPr sz="915" b="1" i="0">
+                <a:solidFill>
+                  <a:srgbClr val="C01855"/>
+                </a:solidFill>
+                <a:latin typeface="Calibri"/>
+                <a:ea typeface="Calibri"/>
+                <a:cs typeface="Calibri"/>
+              </a:defRPr>
+            </a:pPr>
+            <a:r>
+              <a:rPr sz="915" b="1" i="0">
+                <a:solidFill>
+                  <a:srgbClr val="C01855"/>
+                </a:solidFill>
+                <a:latin typeface="Calibri"/>
+                <a:ea typeface="Calibri"/>
+                <a:cs typeface="Calibri"/>
+              </a:rPr>
+              <a:t>Mode strategy</a:t>
+            </a:r>
+          </a:p>
+        </p:txBody>
+      </p:sp>
+      <p:sp>
+        <p:nvSpPr>
+          <p:cNvPr id="27" name="">
+            <a:extLst xmlns:a="http://schemas.openxmlformats.org/drawingml/2006/main">
+              <a:ext uri="{FF2B5EF4-FFF2-40B4-BE49-F238E27FC236}">
+                <a16:creationId xmlns:a16="http://schemas.microsoft.com/office/drawing/2014/main" id="{A8F7C491-A0E6-40B1-84D2-9676F56765E0}"/>
+              </a:ext>
+            </a:extLst>
+          </p:cNvPr>
+          <p:cNvSpPr>
+            <a:spLocks xmlns:a="http://schemas.openxmlformats.org/drawingml/2006/main" noGrp="1"/>
+          </p:cNvSpPr>
+          <p:nvPr/>
+        </p:nvSpPr>
+        <p:spPr>
+          <a:xfrm xmlns:a="http://schemas.openxmlformats.org/drawingml/2006/main">
+            <a:off x="3629025" y="3676650"/>
+            <a:ext cx="2171700" cy="571500"/>
+          </a:xfrm>
+          <a:prstGeom xmlns:a="http://schemas.openxmlformats.org/drawingml/2006/main" prst="rect">
+            <a:avLst/>
+          </a:prstGeom>
+          <a:noFill xmlns:a="http://schemas.openxmlformats.org/drawingml/2006/main"/>
+          <a:ln xmlns:a="http://schemas.openxmlformats.org/drawingml/2006/main" w="0">
+            <a:noFill/>
+            <a:prstDash val="solid"/>
+          </a:ln>
+        </p:spPr>
+        <p:txBody>
+          <a:bodyPr xmlns:a="http://schemas.openxmlformats.org/drawingml/2006/main" wrap="square" lIns="38100" tIns="19050" rIns="38100" bIns="19050" anchor="t"/>
+          <a:lstStyle xmlns:a="http://schemas.openxmlformats.org/drawingml/2006/main"/>
+          <a:p xmlns:a="http://schemas.openxmlformats.org/drawingml/2006/main">
+            <a:pPr algn="l">
+              <a:lnSpc>
+                <a:spcPct val="102000"/>
+              </a:lnSpc>
+              <a:buNone/>
+              <a:defRPr sz="743" b="0" i="0">
+                <a:solidFill>
+                  <a:srgbClr val="444444"/>
+                </a:solidFill>
+                <a:latin typeface="Calibri"/>
+                <a:ea typeface="Calibri"/>
+                <a:cs typeface="Calibri"/>
+              </a:defRPr>
+            </a:pPr>
+            <a:r>
+              <a:rPr sz="743" b="0" i="0">
+                <a:solidFill>
+                  <a:srgbClr val="444444"/>
+                </a:solidFill>
+                <a:latin typeface="Calibri"/>
+                <a:ea typeface="Calibri"/>
+                <a:cs typeface="Calibri"/>
+              </a:rPr>
+              <a:t>Adds objective floors for Gem Grab, Knockout, Brawl Ball, and Solo Showdown.</a:t>
+            </a:r>
+          </a:p>
+        </p:txBody>
+      </p:sp>
+      <p:sp>
+        <p:nvSpPr>
+          <p:cNvPr id="28" name="">
+            <a:extLst xmlns:a="http://schemas.openxmlformats.org/drawingml/2006/main">
+              <a:ext uri="{FF2B5EF4-FFF2-40B4-BE49-F238E27FC236}">
+                <a16:creationId xmlns:a16="http://schemas.microsoft.com/office/drawing/2014/main" id="{31BE7F30-A991-48DB-8063-665C483310BB}"/>
+              </a:ext>
+            </a:extLst>
+          </p:cNvPr>
+          <p:cNvSpPr>
+            <a:spLocks xmlns:a="http://schemas.openxmlformats.org/drawingml/2006/main" noGrp="1"/>
+          </p:cNvSpPr>
+          <p:nvPr/>
+        </p:nvSpPr>
+        <p:spPr>
+          <a:xfrm xmlns:a="http://schemas.openxmlformats.org/drawingml/2006/main">
+            <a:off x="6267450" y="3295650"/>
+            <a:ext cx="2476500" cy="1009650"/>
+          </a:xfrm>
+          <a:prstGeom xmlns:a="http://schemas.openxmlformats.org/drawingml/2006/main" prst="rect">
+            <a:avLst/>
+          </a:prstGeom>
+          <a:solidFill xmlns:a="http://schemas.openxmlformats.org/drawingml/2006/main">
+            <a:srgbClr val="F8FAFC"/>
+          </a:solidFill>
+          <a:ln xmlns:a="http://schemas.openxmlformats.org/drawingml/2006/main" w="9525">
+            <a:solidFill>
+              <a:srgbClr val="D8DDE7"/>
+            </a:solidFill>
+            <a:prstDash val="solid"/>
+          </a:ln>
+        </p:spPr>
+      </p:sp>
+      <p:sp>
+        <p:nvSpPr>
+          <p:cNvPr id="29" name="">
+            <a:extLst xmlns:a="http://schemas.openxmlformats.org/drawingml/2006/main">
+              <a:ext uri="{FF2B5EF4-FFF2-40B4-BE49-F238E27FC236}">
+                <a16:creationId xmlns:a16="http://schemas.microsoft.com/office/drawing/2014/main" id="{5208E54A-1759-4CEE-96EE-68227DAC9185}"/>
+              </a:ext>
+            </a:extLst>
+          </p:cNvPr>
+          <p:cNvSpPr>
+            <a:spLocks xmlns:a="http://schemas.openxmlformats.org/drawingml/2006/main" noGrp="1"/>
+          </p:cNvSpPr>
+          <p:nvPr/>
+        </p:nvSpPr>
+        <p:spPr>
+          <a:xfrm xmlns:a="http://schemas.openxmlformats.org/drawingml/2006/main">
+            <a:off x="6267450" y="3295650"/>
+            <a:ext cx="66675" cy="1009650"/>
+          </a:xfrm>
+          <a:prstGeom xmlns:a="http://schemas.openxmlformats.org/drawingml/2006/main" prst="rect">
+            <a:avLst/>
+          </a:prstGeom>
+          <a:solidFill xmlns:a="http://schemas.openxmlformats.org/drawingml/2006/main">
+            <a:srgbClr val="C83232"/>
+          </a:solidFill>
+          <a:ln xmlns:a="http://schemas.openxmlformats.org/drawingml/2006/main" w="0">
+            <a:noFill/>
+            <a:prstDash val="solid"/>
+          </a:ln>
+        </p:spPr>
+      </p:sp>
+      <p:sp>
+        <p:nvSpPr>
+          <p:cNvPr id="30" name="">
+            <a:extLst xmlns:a="http://schemas.openxmlformats.org/drawingml/2006/main">
+              <a:ext uri="{FF2B5EF4-FFF2-40B4-BE49-F238E27FC236}">
+                <a16:creationId xmlns:a16="http://schemas.microsoft.com/office/drawing/2014/main" id="{22ED555F-6AAB-4814-AC2A-35519471E6DA}"/>
+              </a:ext>
+            </a:extLst>
+          </p:cNvPr>
+          <p:cNvSpPr>
+            <a:spLocks xmlns:a="http://schemas.openxmlformats.org/drawingml/2006/main" noGrp="1"/>
+          </p:cNvSpPr>
+          <p:nvPr/>
+        </p:nvSpPr>
+        <p:spPr>
+          <a:xfrm xmlns:a="http://schemas.openxmlformats.org/drawingml/2006/main">
+            <a:off x="6438900" y="3409950"/>
+            <a:ext cx="2171700" cy="209550"/>
+          </a:xfrm>
+          <a:prstGeom xmlns:a="http://schemas.openxmlformats.org/drawingml/2006/main" prst="rect">
+            <a:avLst/>
+          </a:prstGeom>
+          <a:noFill xmlns:a="http://schemas.openxmlformats.org/drawingml/2006/main"/>
+          <a:ln xmlns:a="http://schemas.openxmlformats.org/drawingml/2006/main" w="0">
+            <a:noFill/>
+            <a:prstDash val="solid"/>
+          </a:ln>
+        </p:spPr>
+        <p:txBody>
+          <a:bodyPr xmlns:a="http://schemas.openxmlformats.org/drawingml/2006/main" wrap="square" lIns="38100" tIns="19050" rIns="38100" bIns="19050" anchor="t"/>
+          <a:lstStyle xmlns:a="http://schemas.openxmlformats.org/drawingml/2006/main"/>
+          <a:p xmlns:a="http://schemas.openxmlformats.org/drawingml/2006/main">
+            <a:pPr algn="l">
+              <a:lnSpc>
+                <a:spcPct val="105000"/>
+              </a:lnSpc>
+              <a:buNone/>
+              <a:defRPr sz="915" b="1" i="0">
+                <a:solidFill>
+                  <a:srgbClr val="C83232"/>
+                </a:solidFill>
+                <a:latin typeface="Calibri"/>
+                <a:ea typeface="Calibri"/>
+                <a:cs typeface="Calibri"/>
+              </a:defRPr>
+            </a:pPr>
+            <a:r>
+              <a:rPr sz="915" b="1" i="0">
+                <a:solidFill>
+                  <a:srgbClr val="C83232"/>
+                </a:solidFill>
+                <a:latin typeface="Calibri"/>
+                <a:ea typeface="Calibri"/>
+                <a:cs typeface="Calibri"/>
+              </a:rPr>
+              <a:t>Failure recovery</a:t>
+            </a:r>
+          </a:p>
+        </p:txBody>
+      </p:sp>
+      <p:sp>
+        <p:nvSpPr>
+          <p:cNvPr id="31" name="">
+            <a:extLst xmlns:a="http://schemas.openxmlformats.org/drawingml/2006/main">
+              <a:ext uri="{FF2B5EF4-FFF2-40B4-BE49-F238E27FC236}">
+                <a16:creationId xmlns:a16="http://schemas.microsoft.com/office/drawing/2014/main" id="{B2F3C3B0-DA68-44B2-86C3-953B70A1B6DB}"/>
+              </a:ext>
+            </a:extLst>
+          </p:cNvPr>
+          <p:cNvSpPr>
+            <a:spLocks xmlns:a="http://schemas.openxmlformats.org/drawingml/2006/main" noGrp="1"/>
+          </p:cNvSpPr>
+          <p:nvPr/>
+        </p:nvSpPr>
+        <p:spPr>
+          <a:xfrm xmlns:a="http://schemas.openxmlformats.org/drawingml/2006/main">
+            <a:off x="6438900" y="3676650"/>
+            <a:ext cx="2171700" cy="571500"/>
+          </a:xfrm>
+          <a:prstGeom xmlns:a="http://schemas.openxmlformats.org/drawingml/2006/main" prst="rect">
+            <a:avLst/>
+          </a:prstGeom>
+          <a:noFill xmlns:a="http://schemas.openxmlformats.org/drawingml/2006/main"/>
+          <a:ln xmlns:a="http://schemas.openxmlformats.org/drawingml/2006/main" w="0">
+            <a:noFill/>
+            <a:prstDash val="solid"/>
+          </a:ln>
+        </p:spPr>
+        <p:txBody>
+          <a:bodyPr xmlns:a="http://schemas.openxmlformats.org/drawingml/2006/main" wrap="square" lIns="38100" tIns="19050" rIns="38100" bIns="19050" anchor="t"/>
+          <a:lstStyle xmlns:a="http://schemas.openxmlformats.org/drawingml/2006/main"/>
+          <a:p xmlns:a="http://schemas.openxmlformats.org/drawingml/2006/main">
+            <a:pPr algn="l">
+              <a:lnSpc>
+                <a:spcPct val="102000"/>
+              </a:lnSpc>
+              <a:buNone/>
+              <a:defRPr sz="743" b="0" i="0">
+                <a:solidFill>
+                  <a:srgbClr val="444444"/>
+                </a:solidFill>
+                <a:latin typeface="Calibri"/>
+                <a:ea typeface="Calibri"/>
+                <a:cs typeface="Calibri"/>
+              </a:defRPr>
+            </a:pPr>
+            <a:r>
+              <a:rPr sz="743" b="0" i="0">
+                <a:solidFill>
+                  <a:srgbClr val="444444"/>
+                </a:solidFill>
+                <a:latin typeface="Calibri"/>
+                <a:ea typeface="Calibri"/>
+                <a:cs typeface="Calibri"/>
+              </a:rPr>
+              <a:t>Detects stalls, stale commands, blocked routes, and repeated failed casts.</a:t>
+            </a:r>
+          </a:p>
+        </p:txBody>
+      </p:sp>
+      <p:sp>
+        <p:nvSpPr>
+          <p:cNvPr id="32" name="">
+            <a:extLst xmlns:a="http://schemas.openxmlformats.org/drawingml/2006/main">
+              <a:ext uri="{FF2B5EF4-FFF2-40B4-BE49-F238E27FC236}">
+                <a16:creationId xmlns:a16="http://schemas.microsoft.com/office/drawing/2014/main" id="{99F75E80-8A48-4DE4-B8AF-117FC61392EA}"/>
+              </a:ext>
+            </a:extLst>
+          </p:cNvPr>
+          <p:cNvSpPr>
+            <a:spLocks xmlns:a="http://schemas.openxmlformats.org/drawingml/2006/main" noGrp="1"/>
+          </p:cNvSpPr>
+          <p:nvPr/>
+        </p:nvSpPr>
+        <p:spPr>
+          <a:xfrm xmlns:a="http://schemas.openxmlformats.org/drawingml/2006/main">
+            <a:off x="9077325" y="3295650"/>
+            <a:ext cx="2476500" cy="1009650"/>
+          </a:xfrm>
+          <a:prstGeom xmlns:a="http://schemas.openxmlformats.org/drawingml/2006/main" prst="rect">
+            <a:avLst/>
+          </a:prstGeom>
+          <a:solidFill xmlns:a="http://schemas.openxmlformats.org/drawingml/2006/main">
+            <a:srgbClr val="F8FAFC"/>
+          </a:solidFill>
+          <a:ln xmlns:a="http://schemas.openxmlformats.org/drawingml/2006/main" w="9525">
+            <a:solidFill>
+              <a:srgbClr val="D8DDE7"/>
+            </a:solidFill>
+            <a:prstDash val="solid"/>
+          </a:ln>
+        </p:spPr>
+      </p:sp>
+      <p:sp>
+        <p:nvSpPr>
+          <p:cNvPr id="33" name="">
+            <a:extLst xmlns:a="http://schemas.openxmlformats.org/drawingml/2006/main">
+              <a:ext uri="{FF2B5EF4-FFF2-40B4-BE49-F238E27FC236}">
+                <a16:creationId xmlns:a16="http://schemas.microsoft.com/office/drawing/2014/main" id="{A3CE8DFE-2531-431C-9F73-9A4802151A66}"/>
+              </a:ext>
+            </a:extLst>
+          </p:cNvPr>
+          <p:cNvSpPr>
+            <a:spLocks xmlns:a="http://schemas.openxmlformats.org/drawingml/2006/main" noGrp="1"/>
+          </p:cNvSpPr>
+          <p:nvPr/>
+        </p:nvSpPr>
+        <p:spPr>
+          <a:xfrm xmlns:a="http://schemas.openxmlformats.org/drawingml/2006/main">
+            <a:off x="9077325" y="3295650"/>
+            <a:ext cx="66675" cy="1009650"/>
+          </a:xfrm>
+          <a:prstGeom xmlns:a="http://schemas.openxmlformats.org/drawingml/2006/main" prst="rect">
+            <a:avLst/>
+          </a:prstGeom>
+          <a:solidFill xmlns:a="http://schemas.openxmlformats.org/drawingml/2006/main">
+            <a:srgbClr val="F4A51C"/>
+          </a:solidFill>
+          <a:ln xmlns:a="http://schemas.openxmlformats.org/drawingml/2006/main" w="0">
+            <a:noFill/>
+            <a:prstDash val="solid"/>
+          </a:ln>
+        </p:spPr>
+      </p:sp>
+      <p:sp>
+        <p:nvSpPr>
+          <p:cNvPr id="34" name="">
+            <a:extLst xmlns:a="http://schemas.openxmlformats.org/drawingml/2006/main">
+              <a:ext uri="{FF2B5EF4-FFF2-40B4-BE49-F238E27FC236}">
+                <a16:creationId xmlns:a16="http://schemas.microsoft.com/office/drawing/2014/main" id="{3B027353-CF8B-4024-AA0D-ECE76A83957C}"/>
+              </a:ext>
+            </a:extLst>
+          </p:cNvPr>
+          <p:cNvSpPr>
+            <a:spLocks xmlns:a="http://schemas.openxmlformats.org/drawingml/2006/main" noGrp="1"/>
+          </p:cNvSpPr>
+          <p:nvPr/>
+        </p:nvSpPr>
+        <p:spPr>
+          <a:xfrm xmlns:a="http://schemas.openxmlformats.org/drawingml/2006/main">
+            <a:off x="9248775" y="3409950"/>
+            <a:ext cx="2171700" cy="209550"/>
+          </a:xfrm>
+          <a:prstGeom xmlns:a="http://schemas.openxmlformats.org/drawingml/2006/main" prst="rect">
+            <a:avLst/>
+          </a:prstGeom>
+          <a:noFill xmlns:a="http://schemas.openxmlformats.org/drawingml/2006/main"/>
+          <a:ln xmlns:a="http://schemas.openxmlformats.org/drawingml/2006/main" w="0">
+            <a:noFill/>
+            <a:prstDash val="solid"/>
+          </a:ln>
+        </p:spPr>
+        <p:txBody>
+          <a:bodyPr xmlns:a="http://schemas.openxmlformats.org/drawingml/2006/main" wrap="square" lIns="38100" tIns="19050" rIns="38100" bIns="19050" anchor="t"/>
+          <a:lstStyle xmlns:a="http://schemas.openxmlformats.org/drawingml/2006/main"/>
+          <a:p xmlns:a="http://schemas.openxmlformats.org/drawingml/2006/main">
+            <a:pPr algn="l">
+              <a:lnSpc>
+                <a:spcPct val="105000"/>
+              </a:lnSpc>
+              <a:buNone/>
+              <a:defRPr sz="915" b="1" i="0">
+                <a:solidFill>
+                  <a:srgbClr val="F4A51C"/>
+                </a:solidFill>
+                <a:latin typeface="Calibri"/>
+                <a:ea typeface="Calibri"/>
+                <a:cs typeface="Calibri"/>
+              </a:defRPr>
+            </a:pPr>
+            <a:r>
+              <a:rPr sz="915" b="1" i="0">
+                <a:solidFill>
+                  <a:srgbClr val="F4A51C"/>
+                </a:solidFill>
+                <a:latin typeface="Calibri"/>
+                <a:ea typeface="Calibri"/>
+                <a:cs typeface="Calibri"/>
+              </a:rPr>
+              <a:t>Tuning assets</a:t>
+            </a:r>
+          </a:p>
+        </p:txBody>
+      </p:sp>
+      <p:sp>
+        <p:nvSpPr>
+          <p:cNvPr id="35" name="">
+            <a:extLst xmlns:a="http://schemas.openxmlformats.org/drawingml/2006/main">
+              <a:ext uri="{FF2B5EF4-FFF2-40B4-BE49-F238E27FC236}">
+                <a16:creationId xmlns:a16="http://schemas.microsoft.com/office/drawing/2014/main" id="{D85FD27E-9816-44CF-A5E4-C24F4920B93A}"/>
+              </a:ext>
+            </a:extLst>
+          </p:cNvPr>
+          <p:cNvSpPr>
+            <a:spLocks xmlns:a="http://schemas.openxmlformats.org/drawingml/2006/main" noGrp="1"/>
+          </p:cNvSpPr>
+          <p:nvPr/>
+        </p:nvSpPr>
+        <p:spPr>
+          <a:xfrm xmlns:a="http://schemas.openxmlformats.org/drawingml/2006/main">
+            <a:off x="9248775" y="3676650"/>
+            <a:ext cx="2171700" cy="571500"/>
+          </a:xfrm>
+          <a:prstGeom xmlns:a="http://schemas.openxmlformats.org/drawingml/2006/main" prst="rect">
+            <a:avLst/>
+          </a:prstGeom>
+          <a:noFill xmlns:a="http://schemas.openxmlformats.org/drawingml/2006/main"/>
+          <a:ln xmlns:a="http://schemas.openxmlformats.org/drawingml/2006/main" w="0">
+            <a:noFill/>
+            <a:prstDash val="solid"/>
+          </a:ln>
+        </p:spPr>
+        <p:txBody>
+          <a:bodyPr xmlns:a="http://schemas.openxmlformats.org/drawingml/2006/main" wrap="square" lIns="38100" tIns="19050" rIns="38100" bIns="19050" anchor="t"/>
+          <a:lstStyle xmlns:a="http://schemas.openxmlformats.org/drawingml/2006/main"/>
+          <a:p xmlns:a="http://schemas.openxmlformats.org/drawingml/2006/main">
+            <a:pPr algn="l">
+              <a:lnSpc>
+                <a:spcPct val="102000"/>
+              </a:lnSpc>
+              <a:buNone/>
+              <a:defRPr sz="743" b="0" i="0">
+                <a:solidFill>
+                  <a:srgbClr val="444444"/>
+                </a:solidFill>
+                <a:latin typeface="Calibri"/>
+                <a:ea typeface="Calibri"/>
+                <a:cs typeface="Calibri"/>
+              </a:defRPr>
+            </a:pPr>
+            <a:r>
+              <a:rPr sz="743" b="0" i="0">
+                <a:solidFill>
+                  <a:srgbClr val="444444"/>
+                </a:solidFill>
+                <a:latin typeface="Calibri"/>
+                <a:ea typeface="Calibri"/>
+                <a:cs typeface="Calibri"/>
+              </a:rPr>
+              <a:t>ScriptableObject-style presets adjust difficulty, personality, and role behavior without rewriting code.</a:t>
+            </a:r>
+          </a:p>
+        </p:txBody>
+      </p:sp>
+      <p:sp>
+        <p:nvSpPr>
+          <p:cNvPr id="36" name="">
+            <a:extLst xmlns:a="http://schemas.openxmlformats.org/drawingml/2006/main">
+              <a:ext uri="{FF2B5EF4-FFF2-40B4-BE49-F238E27FC236}">
+                <a16:creationId xmlns:a16="http://schemas.microsoft.com/office/drawing/2014/main" id="{A776C40F-3A6C-47E6-86C2-C4CBA69DDE2C}"/>
+              </a:ext>
+            </a:extLst>
+          </p:cNvPr>
+          <p:cNvSpPr>
+            <a:spLocks xmlns:a="http://schemas.openxmlformats.org/drawingml/2006/main" noGrp="1"/>
+          </p:cNvSpPr>
+          <p:nvPr/>
+        </p:nvSpPr>
+        <p:spPr>
+          <a:xfrm xmlns:a="http://schemas.openxmlformats.org/drawingml/2006/main">
+            <a:off x="2400300" y="5410200"/>
+            <a:ext cx="876300" cy="361950"/>
           </a:xfrm>
           <a:prstGeom xmlns:a="http://schemas.openxmlformats.org/drawingml/2006/main" prst="roundRect">
             <a:avLst>
-              <a:gd name="adj" fmla="val 14286"/>
+              <a:gd name="adj" fmla="val 15789"/>
             </a:avLst>
           </a:prstGeom>
           <a:solidFill xmlns:a="http://schemas.openxmlformats.org/drawingml/2006/main">
@@ -5597,22 +7035,22 @@
       </p:sp>
       <p:sp>
         <p:nvSpPr>
-          <p:cNvPr id="5" name="">
-            <a:extLst xmlns:a="http://schemas.openxmlformats.org/drawingml/2006/main">
-              <a:ext uri="{FF2B5EF4-FFF2-40B4-BE49-F238E27FC236}">
-                <a16:creationId xmlns:a16="http://schemas.microsoft.com/office/drawing/2014/main" id="{4E7F9196-F8AF-4636-9207-D9C5E804D7E6}"/>
-              </a:ext>
-            </a:extLst>
-          </p:cNvPr>
-          <p:cNvSpPr>
-            <a:spLocks xmlns:a="http://schemas.openxmlformats.org/drawingml/2006/main" noGrp="1"/>
-          </p:cNvSpPr>
-          <p:nvPr/>
-        </p:nvSpPr>
-        <p:spPr>
-          <a:xfrm xmlns:a="http://schemas.openxmlformats.org/drawingml/2006/main">
-            <a:off x="5886450" y="5353050"/>
-            <a:ext cx="666750" cy="228600"/>
+          <p:cNvPr id="37" name="">
+            <a:extLst xmlns:a="http://schemas.openxmlformats.org/drawingml/2006/main">
+              <a:ext uri="{FF2B5EF4-FFF2-40B4-BE49-F238E27FC236}">
+                <a16:creationId xmlns:a16="http://schemas.microsoft.com/office/drawing/2014/main" id="{9300FEE3-1072-40F7-8200-C4F62F261F45}"/>
+              </a:ext>
+            </a:extLst>
+          </p:cNvPr>
+          <p:cNvSpPr>
+            <a:spLocks xmlns:a="http://schemas.openxmlformats.org/drawingml/2006/main" noGrp="1"/>
+          </p:cNvSpPr>
+          <p:nvPr/>
+        </p:nvSpPr>
+        <p:spPr>
+          <a:xfrm xmlns:a="http://schemas.openxmlformats.org/drawingml/2006/main">
+            <a:off x="2476500" y="5505450"/>
+            <a:ext cx="723900" cy="190500"/>
           </a:xfrm>
           <a:prstGeom xmlns:a="http://schemas.openxmlformats.org/drawingml/2006/main" prst="rect">
             <a:avLst/>
@@ -5657,22 +7095,22 @@
       </p:sp>
       <p:sp>
         <p:nvSpPr>
-          <p:cNvPr id="6" name="">
-            <a:extLst xmlns:a="http://schemas.openxmlformats.org/drawingml/2006/main">
-              <a:ext uri="{FF2B5EF4-FFF2-40B4-BE49-F238E27FC236}">
-                <a16:creationId xmlns:a16="http://schemas.microsoft.com/office/drawing/2014/main" id="{DD460191-5B8E-4B74-BDB2-33F52F9746DB}"/>
-              </a:ext>
-            </a:extLst>
-          </p:cNvPr>
-          <p:cNvSpPr>
-            <a:spLocks xmlns:a="http://schemas.openxmlformats.org/drawingml/2006/main" noGrp="1"/>
-          </p:cNvSpPr>
-          <p:nvPr/>
-        </p:nvSpPr>
-        <p:spPr>
-          <a:xfrm xmlns:a="http://schemas.openxmlformats.org/drawingml/2006/main">
-            <a:off x="6657975" y="5372100"/>
-            <a:ext cx="190500" cy="171450"/>
+          <p:cNvPr id="38" name="">
+            <a:extLst xmlns:a="http://schemas.openxmlformats.org/drawingml/2006/main">
+              <a:ext uri="{FF2B5EF4-FFF2-40B4-BE49-F238E27FC236}">
+                <a16:creationId xmlns:a16="http://schemas.microsoft.com/office/drawing/2014/main" id="{50EF1B6E-C29E-4575-9A3E-E7BBBC29CE1D}"/>
+              </a:ext>
+            </a:extLst>
+          </p:cNvPr>
+          <p:cNvSpPr>
+            <a:spLocks xmlns:a="http://schemas.openxmlformats.org/drawingml/2006/main" noGrp="1"/>
+          </p:cNvSpPr>
+          <p:nvPr/>
+        </p:nvSpPr>
+        <p:spPr>
+          <a:xfrm xmlns:a="http://schemas.openxmlformats.org/drawingml/2006/main">
+            <a:off x="3295650" y="5505450"/>
+            <a:ext cx="228600" cy="171450"/>
           </a:xfrm>
           <a:prstGeom xmlns:a="http://schemas.openxmlformats.org/drawingml/2006/main" prst="rightArrow">
             <a:avLst/>
@@ -5688,26 +7126,26 @@
       </p:sp>
       <p:sp>
         <p:nvSpPr>
-          <p:cNvPr id="7" name="">
-            <a:extLst xmlns:a="http://schemas.openxmlformats.org/drawingml/2006/main">
-              <a:ext uri="{FF2B5EF4-FFF2-40B4-BE49-F238E27FC236}">
-                <a16:creationId xmlns:a16="http://schemas.microsoft.com/office/drawing/2014/main" id="{48801FA9-BE18-4AD0-A3DE-19C5D6B894DC}"/>
-              </a:ext>
-            </a:extLst>
-          </p:cNvPr>
-          <p:cNvSpPr>
-            <a:spLocks xmlns:a="http://schemas.openxmlformats.org/drawingml/2006/main" noGrp="1"/>
-          </p:cNvSpPr>
-          <p:nvPr/>
-        </p:nvSpPr>
-        <p:spPr>
-          <a:xfrm xmlns:a="http://schemas.openxmlformats.org/drawingml/2006/main">
-            <a:off x="6877050" y="5257800"/>
-            <a:ext cx="819150" cy="400050"/>
+          <p:cNvPr id="39" name="">
+            <a:extLst xmlns:a="http://schemas.openxmlformats.org/drawingml/2006/main">
+              <a:ext uri="{FF2B5EF4-FFF2-40B4-BE49-F238E27FC236}">
+                <a16:creationId xmlns:a16="http://schemas.microsoft.com/office/drawing/2014/main" id="{F5B29D62-E6AD-4ECA-A718-7B1E143475CF}"/>
+              </a:ext>
+            </a:extLst>
+          </p:cNvPr>
+          <p:cNvSpPr>
+            <a:spLocks xmlns:a="http://schemas.openxmlformats.org/drawingml/2006/main" noGrp="1"/>
+          </p:cNvSpPr>
+          <p:nvPr/>
+        </p:nvSpPr>
+        <p:spPr>
+          <a:xfrm xmlns:a="http://schemas.openxmlformats.org/drawingml/2006/main">
+            <a:off x="3638550" y="5410200"/>
+            <a:ext cx="876300" cy="361950"/>
           </a:xfrm>
           <a:prstGeom xmlns:a="http://schemas.openxmlformats.org/drawingml/2006/main" prst="roundRect">
             <a:avLst>
-              <a:gd name="adj" fmla="val 14286"/>
+              <a:gd name="adj" fmla="val 15789"/>
             </a:avLst>
           </a:prstGeom>
           <a:solidFill xmlns:a="http://schemas.openxmlformats.org/drawingml/2006/main">
@@ -5723,22 +7161,22 @@
       </p:sp>
       <p:sp>
         <p:nvSpPr>
-          <p:cNvPr id="8" name="">
-            <a:extLst xmlns:a="http://schemas.openxmlformats.org/drawingml/2006/main">
-              <a:ext uri="{FF2B5EF4-FFF2-40B4-BE49-F238E27FC236}">
-                <a16:creationId xmlns:a16="http://schemas.microsoft.com/office/drawing/2014/main" id="{18ABE867-8EDD-4F06-B22C-E5D5D506DB65}"/>
-              </a:ext>
-            </a:extLst>
-          </p:cNvPr>
-          <p:cNvSpPr>
-            <a:spLocks xmlns:a="http://schemas.openxmlformats.org/drawingml/2006/main" noGrp="1"/>
-          </p:cNvSpPr>
-          <p:nvPr/>
-        </p:nvSpPr>
-        <p:spPr>
-          <a:xfrm xmlns:a="http://schemas.openxmlformats.org/drawingml/2006/main">
-            <a:off x="6953250" y="5353050"/>
-            <a:ext cx="666750" cy="228600"/>
+          <p:cNvPr id="40" name="">
+            <a:extLst xmlns:a="http://schemas.openxmlformats.org/drawingml/2006/main">
+              <a:ext uri="{FF2B5EF4-FFF2-40B4-BE49-F238E27FC236}">
+                <a16:creationId xmlns:a16="http://schemas.microsoft.com/office/drawing/2014/main" id="{438C7BEB-AF26-4A77-BBC8-145A8C1A7F8E}"/>
+              </a:ext>
+            </a:extLst>
+          </p:cNvPr>
+          <p:cNvSpPr>
+            <a:spLocks xmlns:a="http://schemas.openxmlformats.org/drawingml/2006/main" noGrp="1"/>
+          </p:cNvSpPr>
+          <p:nvPr/>
+        </p:nvSpPr>
+        <p:spPr>
+          <a:xfrm xmlns:a="http://schemas.openxmlformats.org/drawingml/2006/main">
+            <a:off x="3714750" y="5505450"/>
+            <a:ext cx="723900" cy="190500"/>
           </a:xfrm>
           <a:prstGeom xmlns:a="http://schemas.openxmlformats.org/drawingml/2006/main" prst="rect">
             <a:avLst/>
@@ -5783,22 +7221,22 @@
       </p:sp>
       <p:sp>
         <p:nvSpPr>
-          <p:cNvPr id="9" name="">
-            <a:extLst xmlns:a="http://schemas.openxmlformats.org/drawingml/2006/main">
-              <a:ext uri="{FF2B5EF4-FFF2-40B4-BE49-F238E27FC236}">
-                <a16:creationId xmlns:a16="http://schemas.microsoft.com/office/drawing/2014/main" id="{30A76F13-12A8-4ADE-842C-D934FF4A7F1D}"/>
-              </a:ext>
-            </a:extLst>
-          </p:cNvPr>
-          <p:cNvSpPr>
-            <a:spLocks xmlns:a="http://schemas.openxmlformats.org/drawingml/2006/main" noGrp="1"/>
-          </p:cNvSpPr>
-          <p:nvPr/>
-        </p:nvSpPr>
-        <p:spPr>
-          <a:xfrm xmlns:a="http://schemas.openxmlformats.org/drawingml/2006/main">
-            <a:off x="7724775" y="5372100"/>
-            <a:ext cx="190500" cy="171450"/>
+          <p:cNvPr id="41" name="">
+            <a:extLst xmlns:a="http://schemas.openxmlformats.org/drawingml/2006/main">
+              <a:ext uri="{FF2B5EF4-FFF2-40B4-BE49-F238E27FC236}">
+                <a16:creationId xmlns:a16="http://schemas.microsoft.com/office/drawing/2014/main" id="{A0CC13B5-12D0-4DE0-91C4-61997D100781}"/>
+              </a:ext>
+            </a:extLst>
+          </p:cNvPr>
+          <p:cNvSpPr>
+            <a:spLocks xmlns:a="http://schemas.openxmlformats.org/drawingml/2006/main" noGrp="1"/>
+          </p:cNvSpPr>
+          <p:nvPr/>
+        </p:nvSpPr>
+        <p:spPr>
+          <a:xfrm xmlns:a="http://schemas.openxmlformats.org/drawingml/2006/main">
+            <a:off x="4533900" y="5505450"/>
+            <a:ext cx="228600" cy="171450"/>
           </a:xfrm>
           <a:prstGeom xmlns:a="http://schemas.openxmlformats.org/drawingml/2006/main" prst="rightArrow">
             <a:avLst/>
@@ -5814,26 +7252,26 @@
       </p:sp>
       <p:sp>
         <p:nvSpPr>
-          <p:cNvPr id="10" name="">
-            <a:extLst xmlns:a="http://schemas.openxmlformats.org/drawingml/2006/main">
-              <a:ext uri="{FF2B5EF4-FFF2-40B4-BE49-F238E27FC236}">
-                <a16:creationId xmlns:a16="http://schemas.microsoft.com/office/drawing/2014/main" id="{CEA14AFF-7B18-490C-81BE-256791F7A477}"/>
-              </a:ext>
-            </a:extLst>
-          </p:cNvPr>
-          <p:cNvSpPr>
-            <a:spLocks xmlns:a="http://schemas.openxmlformats.org/drawingml/2006/main" noGrp="1"/>
-          </p:cNvSpPr>
-          <p:nvPr/>
-        </p:nvSpPr>
-        <p:spPr>
-          <a:xfrm xmlns:a="http://schemas.openxmlformats.org/drawingml/2006/main">
-            <a:off x="7943850" y="5257800"/>
-            <a:ext cx="819150" cy="400050"/>
+          <p:cNvPr id="42" name="">
+            <a:extLst xmlns:a="http://schemas.openxmlformats.org/drawingml/2006/main">
+              <a:ext uri="{FF2B5EF4-FFF2-40B4-BE49-F238E27FC236}">
+                <a16:creationId xmlns:a16="http://schemas.microsoft.com/office/drawing/2014/main" id="{2CAB24A7-A4EF-4BED-8B27-0760A8F52772}"/>
+              </a:ext>
+            </a:extLst>
+          </p:cNvPr>
+          <p:cNvSpPr>
+            <a:spLocks xmlns:a="http://schemas.openxmlformats.org/drawingml/2006/main" noGrp="1"/>
+          </p:cNvSpPr>
+          <p:nvPr/>
+        </p:nvSpPr>
+        <p:spPr>
+          <a:xfrm xmlns:a="http://schemas.openxmlformats.org/drawingml/2006/main">
+            <a:off x="4876800" y="5410200"/>
+            <a:ext cx="876300" cy="361950"/>
           </a:xfrm>
           <a:prstGeom xmlns:a="http://schemas.openxmlformats.org/drawingml/2006/main" prst="roundRect">
             <a:avLst>
-              <a:gd name="adj" fmla="val 14286"/>
+              <a:gd name="adj" fmla="val 15789"/>
             </a:avLst>
           </a:prstGeom>
           <a:solidFill xmlns:a="http://schemas.openxmlformats.org/drawingml/2006/main">
@@ -5849,22 +7287,22 @@
       </p:sp>
       <p:sp>
         <p:nvSpPr>
-          <p:cNvPr id="11" name="">
-            <a:extLst xmlns:a="http://schemas.openxmlformats.org/drawingml/2006/main">
-              <a:ext uri="{FF2B5EF4-FFF2-40B4-BE49-F238E27FC236}">
-                <a16:creationId xmlns:a16="http://schemas.microsoft.com/office/drawing/2014/main" id="{55748F1D-67E1-4712-8234-E6F980AD326B}"/>
-              </a:ext>
-            </a:extLst>
-          </p:cNvPr>
-          <p:cNvSpPr>
-            <a:spLocks xmlns:a="http://schemas.openxmlformats.org/drawingml/2006/main" noGrp="1"/>
-          </p:cNvSpPr>
-          <p:nvPr/>
-        </p:nvSpPr>
-        <p:spPr>
-          <a:xfrm xmlns:a="http://schemas.openxmlformats.org/drawingml/2006/main">
-            <a:off x="8020050" y="5353050"/>
-            <a:ext cx="666750" cy="228600"/>
+          <p:cNvPr id="43" name="">
+            <a:extLst xmlns:a="http://schemas.openxmlformats.org/drawingml/2006/main">
+              <a:ext uri="{FF2B5EF4-FFF2-40B4-BE49-F238E27FC236}">
+                <a16:creationId xmlns:a16="http://schemas.microsoft.com/office/drawing/2014/main" id="{F7DA7D1E-8692-4F44-B1E9-AB0C79B08D8E}"/>
+              </a:ext>
+            </a:extLst>
+          </p:cNvPr>
+          <p:cNvSpPr>
+            <a:spLocks xmlns:a="http://schemas.openxmlformats.org/drawingml/2006/main" noGrp="1"/>
+          </p:cNvSpPr>
+          <p:nvPr/>
+        </p:nvSpPr>
+        <p:spPr>
+          <a:xfrm xmlns:a="http://schemas.openxmlformats.org/drawingml/2006/main">
+            <a:off x="4953000" y="5505450"/>
+            <a:ext cx="723900" cy="190500"/>
           </a:xfrm>
           <a:prstGeom xmlns:a="http://schemas.openxmlformats.org/drawingml/2006/main" prst="rect">
             <a:avLst/>
@@ -5902,29 +7340,29 @@
                 <a:ea typeface="Calibri"/>
                 <a:cs typeface="Calibri"/>
               </a:rPr>
-              <a:t>Commit</a:t>
-            </a:r>
-          </a:p>
-        </p:txBody>
-      </p:sp>
-      <p:sp>
-        <p:nvSpPr>
-          <p:cNvPr id="12" name="">
-            <a:extLst xmlns:a="http://schemas.openxmlformats.org/drawingml/2006/main">
-              <a:ext uri="{FF2B5EF4-FFF2-40B4-BE49-F238E27FC236}">
-                <a16:creationId xmlns:a16="http://schemas.microsoft.com/office/drawing/2014/main" id="{DCD3B9A3-F514-4BD7-B56F-5A37BB7DC57E}"/>
-              </a:ext>
-            </a:extLst>
-          </p:cNvPr>
-          <p:cNvSpPr>
-            <a:spLocks xmlns:a="http://schemas.openxmlformats.org/drawingml/2006/main" noGrp="1"/>
-          </p:cNvSpPr>
-          <p:nvPr/>
-        </p:nvSpPr>
-        <p:spPr>
-          <a:xfrm xmlns:a="http://schemas.openxmlformats.org/drawingml/2006/main">
-            <a:off x="8791575" y="5372100"/>
-            <a:ext cx="190500" cy="171450"/>
+              <a:t>Share</a:t>
+            </a:r>
+          </a:p>
+        </p:txBody>
+      </p:sp>
+      <p:sp>
+        <p:nvSpPr>
+          <p:cNvPr id="44" name="">
+            <a:extLst xmlns:a="http://schemas.openxmlformats.org/drawingml/2006/main">
+              <a:ext uri="{FF2B5EF4-FFF2-40B4-BE49-F238E27FC236}">
+                <a16:creationId xmlns:a16="http://schemas.microsoft.com/office/drawing/2014/main" id="{BF2DD3D3-45FB-402C-B926-1E1DFF19729F}"/>
+              </a:ext>
+            </a:extLst>
+          </p:cNvPr>
+          <p:cNvSpPr>
+            <a:spLocks xmlns:a="http://schemas.openxmlformats.org/drawingml/2006/main" noGrp="1"/>
+          </p:cNvSpPr>
+          <p:nvPr/>
+        </p:nvSpPr>
+        <p:spPr>
+          <a:xfrm xmlns:a="http://schemas.openxmlformats.org/drawingml/2006/main">
+            <a:off x="5772150" y="5505450"/>
+            <a:ext cx="228600" cy="171450"/>
           </a:xfrm>
           <a:prstGeom xmlns:a="http://schemas.openxmlformats.org/drawingml/2006/main" prst="rightArrow">
             <a:avLst/>
@@ -5940,26 +7378,26 @@
       </p:sp>
       <p:sp>
         <p:nvSpPr>
-          <p:cNvPr id="13" name="">
-            <a:extLst xmlns:a="http://schemas.openxmlformats.org/drawingml/2006/main">
-              <a:ext uri="{FF2B5EF4-FFF2-40B4-BE49-F238E27FC236}">
-                <a16:creationId xmlns:a16="http://schemas.microsoft.com/office/drawing/2014/main" id="{29D0085B-07EA-49CA-B715-8DBB7F8C7193}"/>
-              </a:ext>
-            </a:extLst>
-          </p:cNvPr>
-          <p:cNvSpPr>
-            <a:spLocks xmlns:a="http://schemas.openxmlformats.org/drawingml/2006/main" noGrp="1"/>
-          </p:cNvSpPr>
-          <p:nvPr/>
-        </p:nvSpPr>
-        <p:spPr>
-          <a:xfrm xmlns:a="http://schemas.openxmlformats.org/drawingml/2006/main">
-            <a:off x="9010650" y="5257800"/>
-            <a:ext cx="819150" cy="400050"/>
+          <p:cNvPr id="45" name="">
+            <a:extLst xmlns:a="http://schemas.openxmlformats.org/drawingml/2006/main">
+              <a:ext uri="{FF2B5EF4-FFF2-40B4-BE49-F238E27FC236}">
+                <a16:creationId xmlns:a16="http://schemas.microsoft.com/office/drawing/2014/main" id="{FEDFB915-D025-4766-A1B9-A4985F99F99C}"/>
+              </a:ext>
+            </a:extLst>
+          </p:cNvPr>
+          <p:cNvSpPr>
+            <a:spLocks xmlns:a="http://schemas.openxmlformats.org/drawingml/2006/main" noGrp="1"/>
+          </p:cNvSpPr>
+          <p:nvPr/>
+        </p:nvSpPr>
+        <p:spPr>
+          <a:xfrm xmlns:a="http://schemas.openxmlformats.org/drawingml/2006/main">
+            <a:off x="6115050" y="5410200"/>
+            <a:ext cx="876300" cy="361950"/>
           </a:xfrm>
           <a:prstGeom xmlns:a="http://schemas.openxmlformats.org/drawingml/2006/main" prst="roundRect">
             <a:avLst>
-              <a:gd name="adj" fmla="val 14286"/>
+              <a:gd name="adj" fmla="val 15789"/>
             </a:avLst>
           </a:prstGeom>
           <a:solidFill xmlns:a="http://schemas.openxmlformats.org/drawingml/2006/main">
@@ -5975,22 +7413,22 @@
       </p:sp>
       <p:sp>
         <p:nvSpPr>
-          <p:cNvPr id="14" name="">
-            <a:extLst xmlns:a="http://schemas.openxmlformats.org/drawingml/2006/main">
-              <a:ext uri="{FF2B5EF4-FFF2-40B4-BE49-F238E27FC236}">
-                <a16:creationId xmlns:a16="http://schemas.microsoft.com/office/drawing/2014/main" id="{2A0AF6B0-1B5F-429D-AE31-583FA0EF549B}"/>
-              </a:ext>
-            </a:extLst>
-          </p:cNvPr>
-          <p:cNvSpPr>
-            <a:spLocks xmlns:a="http://schemas.openxmlformats.org/drawingml/2006/main" noGrp="1"/>
-          </p:cNvSpPr>
-          <p:nvPr/>
-        </p:nvSpPr>
-        <p:spPr>
-          <a:xfrm xmlns:a="http://schemas.openxmlformats.org/drawingml/2006/main">
-            <a:off x="9086850" y="5353050"/>
-            <a:ext cx="666750" cy="228600"/>
+          <p:cNvPr id="46" name="">
+            <a:extLst xmlns:a="http://schemas.openxmlformats.org/drawingml/2006/main">
+              <a:ext uri="{FF2B5EF4-FFF2-40B4-BE49-F238E27FC236}">
+                <a16:creationId xmlns:a16="http://schemas.microsoft.com/office/drawing/2014/main" id="{A6E1E462-1341-4D86-9C13-83C045FA4B22}"/>
+              </a:ext>
+            </a:extLst>
+          </p:cNvPr>
+          <p:cNvSpPr>
+            <a:spLocks xmlns:a="http://schemas.openxmlformats.org/drawingml/2006/main" noGrp="1"/>
+          </p:cNvSpPr>
+          <p:nvPr/>
+        </p:nvSpPr>
+        <p:spPr>
+          <a:xfrm xmlns:a="http://schemas.openxmlformats.org/drawingml/2006/main">
+            <a:off x="6191250" y="5505450"/>
+            <a:ext cx="723900" cy="190500"/>
           </a:xfrm>
           <a:prstGeom xmlns:a="http://schemas.openxmlformats.org/drawingml/2006/main" prst="rect">
             <a:avLst/>
@@ -6028,29 +7466,29 @@
                 <a:ea typeface="Calibri"/>
                 <a:cs typeface="Calibri"/>
               </a:rPr>
-              <a:t>Move</a:t>
-            </a:r>
-          </a:p>
-        </p:txBody>
-      </p:sp>
-      <p:sp>
-        <p:nvSpPr>
-          <p:cNvPr id="15" name="">
-            <a:extLst xmlns:a="http://schemas.openxmlformats.org/drawingml/2006/main">
-              <a:ext uri="{FF2B5EF4-FFF2-40B4-BE49-F238E27FC236}">
-                <a16:creationId xmlns:a16="http://schemas.microsoft.com/office/drawing/2014/main" id="{ACAFB40D-FAA2-4EAE-8648-EA13FE6437E8}"/>
-              </a:ext>
-            </a:extLst>
-          </p:cNvPr>
-          <p:cNvSpPr>
-            <a:spLocks xmlns:a="http://schemas.openxmlformats.org/drawingml/2006/main" noGrp="1"/>
-          </p:cNvSpPr>
-          <p:nvPr/>
-        </p:nvSpPr>
-        <p:spPr>
-          <a:xfrm xmlns:a="http://schemas.openxmlformats.org/drawingml/2006/main">
-            <a:off x="9858375" y="5372100"/>
-            <a:ext cx="190500" cy="171450"/>
+              <a:t>Commit</a:t>
+            </a:r>
+          </a:p>
+        </p:txBody>
+      </p:sp>
+      <p:sp>
+        <p:nvSpPr>
+          <p:cNvPr id="47" name="">
+            <a:extLst xmlns:a="http://schemas.openxmlformats.org/drawingml/2006/main">
+              <a:ext uri="{FF2B5EF4-FFF2-40B4-BE49-F238E27FC236}">
+                <a16:creationId xmlns:a16="http://schemas.microsoft.com/office/drawing/2014/main" id="{1ECDBA00-BD65-4A23-AFBA-3338B1B82684}"/>
+              </a:ext>
+            </a:extLst>
+          </p:cNvPr>
+          <p:cNvSpPr>
+            <a:spLocks xmlns:a="http://schemas.openxmlformats.org/drawingml/2006/main" noGrp="1"/>
+          </p:cNvSpPr>
+          <p:nvPr/>
+        </p:nvSpPr>
+        <p:spPr>
+          <a:xfrm xmlns:a="http://schemas.openxmlformats.org/drawingml/2006/main">
+            <a:off x="7010400" y="5505450"/>
+            <a:ext cx="228600" cy="171450"/>
           </a:xfrm>
           <a:prstGeom xmlns:a="http://schemas.openxmlformats.org/drawingml/2006/main" prst="rightArrow">
             <a:avLst/>
@@ -6066,26 +7504,26 @@
       </p:sp>
       <p:sp>
         <p:nvSpPr>
-          <p:cNvPr id="16" name="">
-            <a:extLst xmlns:a="http://schemas.openxmlformats.org/drawingml/2006/main">
-              <a:ext uri="{FF2B5EF4-FFF2-40B4-BE49-F238E27FC236}">
-                <a16:creationId xmlns:a16="http://schemas.microsoft.com/office/drawing/2014/main" id="{B1D82A65-A569-496A-BF12-091A5AFC1087}"/>
-              </a:ext>
-            </a:extLst>
-          </p:cNvPr>
-          <p:cNvSpPr>
-            <a:spLocks xmlns:a="http://schemas.openxmlformats.org/drawingml/2006/main" noGrp="1"/>
-          </p:cNvSpPr>
-          <p:nvPr/>
-        </p:nvSpPr>
-        <p:spPr>
-          <a:xfrm xmlns:a="http://schemas.openxmlformats.org/drawingml/2006/main">
-            <a:off x="10077450" y="5257800"/>
-            <a:ext cx="819150" cy="400050"/>
+          <p:cNvPr id="48" name="">
+            <a:extLst xmlns:a="http://schemas.openxmlformats.org/drawingml/2006/main">
+              <a:ext uri="{FF2B5EF4-FFF2-40B4-BE49-F238E27FC236}">
+                <a16:creationId xmlns:a16="http://schemas.microsoft.com/office/drawing/2014/main" id="{8031D98D-F711-4BA5-B6B8-6298D03DCC58}"/>
+              </a:ext>
+            </a:extLst>
+          </p:cNvPr>
+          <p:cNvSpPr>
+            <a:spLocks xmlns:a="http://schemas.openxmlformats.org/drawingml/2006/main" noGrp="1"/>
+          </p:cNvSpPr>
+          <p:nvPr/>
+        </p:nvSpPr>
+        <p:spPr>
+          <a:xfrm xmlns:a="http://schemas.openxmlformats.org/drawingml/2006/main">
+            <a:off x="7353300" y="5410200"/>
+            <a:ext cx="876300" cy="361950"/>
           </a:xfrm>
           <a:prstGeom xmlns:a="http://schemas.openxmlformats.org/drawingml/2006/main" prst="roundRect">
             <a:avLst>
-              <a:gd name="adj" fmla="val 14286"/>
+              <a:gd name="adj" fmla="val 15789"/>
             </a:avLst>
           </a:prstGeom>
           <a:solidFill xmlns:a="http://schemas.openxmlformats.org/drawingml/2006/main">
@@ -6101,22 +7539,148 @@
       </p:sp>
       <p:sp>
         <p:nvSpPr>
-          <p:cNvPr id="17" name="">
-            <a:extLst xmlns:a="http://schemas.openxmlformats.org/drawingml/2006/main">
-              <a:ext uri="{FF2B5EF4-FFF2-40B4-BE49-F238E27FC236}">
-                <a16:creationId xmlns:a16="http://schemas.microsoft.com/office/drawing/2014/main" id="{F8BD82E6-478E-4A26-9E4F-35F38A003D92}"/>
-              </a:ext>
-            </a:extLst>
-          </p:cNvPr>
-          <p:cNvSpPr>
-            <a:spLocks xmlns:a="http://schemas.openxmlformats.org/drawingml/2006/main" noGrp="1"/>
-          </p:cNvSpPr>
-          <p:nvPr/>
-        </p:nvSpPr>
-        <p:spPr>
-          <a:xfrm xmlns:a="http://schemas.openxmlformats.org/drawingml/2006/main">
-            <a:off x="10153650" y="5353050"/>
-            <a:ext cx="666750" cy="228600"/>
+          <p:cNvPr id="49" name="">
+            <a:extLst xmlns:a="http://schemas.openxmlformats.org/drawingml/2006/main">
+              <a:ext uri="{FF2B5EF4-FFF2-40B4-BE49-F238E27FC236}">
+                <a16:creationId xmlns:a16="http://schemas.microsoft.com/office/drawing/2014/main" id="{DC6635AC-5925-4195-9758-35D673EC35BC}"/>
+              </a:ext>
+            </a:extLst>
+          </p:cNvPr>
+          <p:cNvSpPr>
+            <a:spLocks xmlns:a="http://schemas.openxmlformats.org/drawingml/2006/main" noGrp="1"/>
+          </p:cNvSpPr>
+          <p:nvPr/>
+        </p:nvSpPr>
+        <p:spPr>
+          <a:xfrm xmlns:a="http://schemas.openxmlformats.org/drawingml/2006/main">
+            <a:off x="7429500" y="5505450"/>
+            <a:ext cx="723900" cy="190500"/>
+          </a:xfrm>
+          <a:prstGeom xmlns:a="http://schemas.openxmlformats.org/drawingml/2006/main" prst="rect">
+            <a:avLst/>
+          </a:prstGeom>
+          <a:noFill xmlns:a="http://schemas.openxmlformats.org/drawingml/2006/main"/>
+          <a:ln xmlns:a="http://schemas.openxmlformats.org/drawingml/2006/main" w="0">
+            <a:noFill/>
+            <a:prstDash val="solid"/>
+          </a:ln>
+        </p:spPr>
+        <p:txBody>
+          <a:bodyPr xmlns:a="http://schemas.openxmlformats.org/drawingml/2006/main" wrap="square" lIns="38100" tIns="19050" rIns="38100" bIns="19050" anchor="ctr"/>
+          <a:lstStyle xmlns:a="http://schemas.openxmlformats.org/drawingml/2006/main"/>
+          <a:p xmlns:a="http://schemas.openxmlformats.org/drawingml/2006/main">
+            <a:pPr algn="ctr">
+              <a:lnSpc>
+                <a:spcPct val="105000"/>
+              </a:lnSpc>
+              <a:buNone/>
+              <a:defRPr sz="975" b="1" i="0">
+                <a:solidFill>
+                  <a:srgbClr val="FFFFFF"/>
+                </a:solidFill>
+                <a:latin typeface="Calibri"/>
+                <a:ea typeface="Calibri"/>
+                <a:cs typeface="Calibri"/>
+              </a:defRPr>
+            </a:pPr>
+            <a:r>
+              <a:rPr sz="975" b="1" i="0">
+                <a:solidFill>
+                  <a:srgbClr val="FFFFFF"/>
+                </a:solidFill>
+                <a:latin typeface="Calibri"/>
+                <a:ea typeface="Calibri"/>
+                <a:cs typeface="Calibri"/>
+              </a:rPr>
+              <a:t>Act</a:t>
+            </a:r>
+          </a:p>
+        </p:txBody>
+      </p:sp>
+      <p:sp>
+        <p:nvSpPr>
+          <p:cNvPr id="50" name="">
+            <a:extLst xmlns:a="http://schemas.openxmlformats.org/drawingml/2006/main">
+              <a:ext uri="{FF2B5EF4-FFF2-40B4-BE49-F238E27FC236}">
+                <a16:creationId xmlns:a16="http://schemas.microsoft.com/office/drawing/2014/main" id="{0F3FB155-11AD-4DF8-9022-D6C934390DF2}"/>
+              </a:ext>
+            </a:extLst>
+          </p:cNvPr>
+          <p:cNvSpPr>
+            <a:spLocks xmlns:a="http://schemas.openxmlformats.org/drawingml/2006/main" noGrp="1"/>
+          </p:cNvSpPr>
+          <p:nvPr/>
+        </p:nvSpPr>
+        <p:spPr>
+          <a:xfrm xmlns:a="http://schemas.openxmlformats.org/drawingml/2006/main">
+            <a:off x="8248650" y="5505450"/>
+            <a:ext cx="228600" cy="171450"/>
+          </a:xfrm>
+          <a:prstGeom xmlns:a="http://schemas.openxmlformats.org/drawingml/2006/main" prst="rightArrow">
+            <a:avLst/>
+          </a:prstGeom>
+          <a:solidFill xmlns:a="http://schemas.openxmlformats.org/drawingml/2006/main">
+            <a:srgbClr val="F4A51C"/>
+          </a:solidFill>
+          <a:ln xmlns:a="http://schemas.openxmlformats.org/drawingml/2006/main" w="0">
+            <a:noFill/>
+            <a:prstDash val="solid"/>
+          </a:ln>
+        </p:spPr>
+      </p:sp>
+      <p:sp>
+        <p:nvSpPr>
+          <p:cNvPr id="51" name="">
+            <a:extLst xmlns:a="http://schemas.openxmlformats.org/drawingml/2006/main">
+              <a:ext uri="{FF2B5EF4-FFF2-40B4-BE49-F238E27FC236}">
+                <a16:creationId xmlns:a16="http://schemas.microsoft.com/office/drawing/2014/main" id="{1BA098EF-FDA5-47D7-826B-BC5482E93920}"/>
+              </a:ext>
+            </a:extLst>
+          </p:cNvPr>
+          <p:cNvSpPr>
+            <a:spLocks xmlns:a="http://schemas.openxmlformats.org/drawingml/2006/main" noGrp="1"/>
+          </p:cNvSpPr>
+          <p:nvPr/>
+        </p:nvSpPr>
+        <p:spPr>
+          <a:xfrm xmlns:a="http://schemas.openxmlformats.org/drawingml/2006/main">
+            <a:off x="8591550" y="5410200"/>
+            <a:ext cx="876300" cy="361950"/>
+          </a:xfrm>
+          <a:prstGeom xmlns:a="http://schemas.openxmlformats.org/drawingml/2006/main" prst="roundRect">
+            <a:avLst>
+              <a:gd name="adj" fmla="val 15789"/>
+            </a:avLst>
+          </a:prstGeom>
+          <a:solidFill xmlns:a="http://schemas.openxmlformats.org/drawingml/2006/main">
+            <a:srgbClr val="20384F"/>
+          </a:solidFill>
+          <a:ln xmlns:a="http://schemas.openxmlformats.org/drawingml/2006/main" w="9525">
+            <a:solidFill>
+              <a:srgbClr val="20384F"/>
+            </a:solidFill>
+            <a:prstDash val="solid"/>
+          </a:ln>
+        </p:spPr>
+      </p:sp>
+      <p:sp>
+        <p:nvSpPr>
+          <p:cNvPr id="52" name="">
+            <a:extLst xmlns:a="http://schemas.openxmlformats.org/drawingml/2006/main">
+              <a:ext uri="{FF2B5EF4-FFF2-40B4-BE49-F238E27FC236}">
+                <a16:creationId xmlns:a16="http://schemas.microsoft.com/office/drawing/2014/main" id="{EDB92A5F-B72D-4DEF-AB42-2F91700AA720}"/>
+              </a:ext>
+            </a:extLst>
+          </p:cNvPr>
+          <p:cNvSpPr>
+            <a:spLocks xmlns:a="http://schemas.openxmlformats.org/drawingml/2006/main" noGrp="1"/>
+          </p:cNvSpPr>
+          <p:nvPr/>
+        </p:nvSpPr>
+        <p:spPr>
+          <a:xfrm xmlns:a="http://schemas.openxmlformats.org/drawingml/2006/main">
+            <a:off x="8667750" y="5505450"/>
+            <a:ext cx="723900" cy="190500"/>
           </a:xfrm>
           <a:prstGeom xmlns:a="http://schemas.openxmlformats.org/drawingml/2006/main" prst="rect">
             <a:avLst/>
@@ -6214,19 +7778,19 @@
           <p:cNvPr id="3" name="">
             <a:extLst xmlns:a="http://schemas.openxmlformats.org/drawingml/2006/main">
               <a:ext uri="{FF2B5EF4-FFF2-40B4-BE49-F238E27FC236}">
-                <a16:creationId xmlns:a16="http://schemas.microsoft.com/office/drawing/2014/main" id="{CE996BD0-7A95-49D9-ADDF-9BB1BE77C862}"/>
-              </a:ext>
-            </a:extLst>
-          </p:cNvPr>
-          <p:cNvSpPr>
-            <a:spLocks xmlns:a="http://schemas.openxmlformats.org/drawingml/2006/main" noGrp="1"/>
-          </p:cNvSpPr>
-          <p:nvPr/>
-        </p:nvSpPr>
-        <p:spPr>
-          <a:xfrm xmlns:a="http://schemas.openxmlformats.org/drawingml/2006/main">
-            <a:off x="914400" y="1695450"/>
-            <a:ext cx="6858000" cy="742950"/>
+                <a16:creationId xmlns:a16="http://schemas.microsoft.com/office/drawing/2014/main" id="{46C4668A-E75F-44B2-9B95-4AF16EC08E81}"/>
+              </a:ext>
+            </a:extLst>
+          </p:cNvPr>
+          <p:cNvSpPr>
+            <a:spLocks xmlns:a="http://schemas.openxmlformats.org/drawingml/2006/main" noGrp="1"/>
+          </p:cNvSpPr>
+          <p:nvPr/>
+        </p:nvSpPr>
+        <p:spPr>
+          <a:xfrm xmlns:a="http://schemas.openxmlformats.org/drawingml/2006/main">
+            <a:off x="876300" y="1485900"/>
+            <a:ext cx="10001250" cy="381000"/>
           </a:xfrm>
           <a:prstGeom xmlns:a="http://schemas.openxmlformats.org/drawingml/2006/main" prst="rect">
             <a:avLst/>
@@ -6246,7 +7810,7 @@
                 <a:spcPct val="108000"/>
               </a:lnSpc>
               <a:buNone/>
-              <a:defRPr sz="1650" b="0" i="0">
+              <a:defRPr sz="1125" b="0" i="0">
                 <a:solidFill>
                   <a:srgbClr val="111111"/>
                 </a:solidFill>
@@ -6256,7 +7820,7 @@
               </a:defRPr>
             </a:pPr>
             <a:r>
-              <a:rPr sz="1650" b="0" i="0">
+              <a:rPr sz="1125" b="0" i="0">
                 <a:solidFill>
                   <a:srgbClr val="111111"/>
                 </a:solidFill>
@@ -6264,7 +7828,7 @@
                 <a:ea typeface="Calibri"/>
                 <a:cs typeface="Calibri"/>
               </a:rPr>
-              <a:t>Implementation is split into focused modules: perception, scoring, commitment, blackboard, navigation, ability intelligence, mode strategy, debug reporting, and tuning profiles.</a:t>
+              <a:t>Representative code patterns from the implementation show the AI architecture in practical software terms: score, share state, route safely, and enforce mode objectives.</a:t>
             </a:r>
           </a:p>
         </p:txBody>
@@ -6274,19 +7838,19 @@
           <p:cNvPr id="4" name="">
             <a:extLst xmlns:a="http://schemas.openxmlformats.org/drawingml/2006/main">
               <a:ext uri="{FF2B5EF4-FFF2-40B4-BE49-F238E27FC236}">
-                <a16:creationId xmlns:a16="http://schemas.microsoft.com/office/drawing/2014/main" id="{AD2C474F-B8AE-473A-86BB-C9DA7276CC52}"/>
-              </a:ext>
-            </a:extLst>
-          </p:cNvPr>
-          <p:cNvSpPr>
-            <a:spLocks xmlns:a="http://schemas.openxmlformats.org/drawingml/2006/main" noGrp="1"/>
-          </p:cNvSpPr>
-          <p:nvPr/>
-        </p:nvSpPr>
-        <p:spPr>
-          <a:xfrm xmlns:a="http://schemas.openxmlformats.org/drawingml/2006/main">
-            <a:off x="857250" y="3429000"/>
-            <a:ext cx="4095750" cy="1428750"/>
+                <a16:creationId xmlns:a16="http://schemas.microsoft.com/office/drawing/2014/main" id="{B49B70B8-9EC1-45B6-B075-D73485BD9BFA}"/>
+              </a:ext>
+            </a:extLst>
+          </p:cNvPr>
+          <p:cNvSpPr>
+            <a:spLocks xmlns:a="http://schemas.openxmlformats.org/drawingml/2006/main" noGrp="1"/>
+          </p:cNvSpPr>
+          <p:nvPr/>
+        </p:nvSpPr>
+        <p:spPr>
+          <a:xfrm xmlns:a="http://schemas.openxmlformats.org/drawingml/2006/main">
+            <a:off x="723900" y="2133600"/>
+            <a:ext cx="4953000" cy="1200150"/>
           </a:xfrm>
           <a:prstGeom xmlns:a="http://schemas.openxmlformats.org/drawingml/2006/main" prst="rect">
             <a:avLst/>
@@ -6307,19 +7871,19 @@
           <p:cNvPr id="5" name="">
             <a:extLst xmlns:a="http://schemas.openxmlformats.org/drawingml/2006/main">
               <a:ext uri="{FF2B5EF4-FFF2-40B4-BE49-F238E27FC236}">
-                <a16:creationId xmlns:a16="http://schemas.microsoft.com/office/drawing/2014/main" id="{053587CC-3E5D-47B5-9E37-42699635F43E}"/>
-              </a:ext>
-            </a:extLst>
-          </p:cNvPr>
-          <p:cNvSpPr>
-            <a:spLocks xmlns:a="http://schemas.openxmlformats.org/drawingml/2006/main" noGrp="1"/>
-          </p:cNvSpPr>
-          <p:nvPr/>
-        </p:nvSpPr>
-        <p:spPr>
-          <a:xfrm xmlns:a="http://schemas.openxmlformats.org/drawingml/2006/main">
-            <a:off x="857250" y="3429000"/>
-            <a:ext cx="66675" cy="1428750"/>
+                <a16:creationId xmlns:a16="http://schemas.microsoft.com/office/drawing/2014/main" id="{97C91218-9997-47ED-9710-DCF9AB2F0002}"/>
+              </a:ext>
+            </a:extLst>
+          </p:cNvPr>
+          <p:cNvSpPr>
+            <a:spLocks xmlns:a="http://schemas.openxmlformats.org/drawingml/2006/main" noGrp="1"/>
+          </p:cNvSpPr>
+          <p:nvPr/>
+        </p:nvSpPr>
+        <p:spPr>
+          <a:xfrm xmlns:a="http://schemas.openxmlformats.org/drawingml/2006/main">
+            <a:off x="723900" y="2133600"/>
+            <a:ext cx="66675" cy="1200150"/>
           </a:xfrm>
           <a:prstGeom xmlns:a="http://schemas.openxmlformats.org/drawingml/2006/main" prst="rect">
             <a:avLst/>
@@ -6338,19 +7902,19 @@
           <p:cNvPr id="6" name="">
             <a:extLst xmlns:a="http://schemas.openxmlformats.org/drawingml/2006/main">
               <a:ext uri="{FF2B5EF4-FFF2-40B4-BE49-F238E27FC236}">
-                <a16:creationId xmlns:a16="http://schemas.microsoft.com/office/drawing/2014/main" id="{26C962BE-C700-47EB-B0DE-6D383C5196D3}"/>
-              </a:ext>
-            </a:extLst>
-          </p:cNvPr>
-          <p:cNvSpPr>
-            <a:spLocks xmlns:a="http://schemas.openxmlformats.org/drawingml/2006/main" noGrp="1"/>
-          </p:cNvSpPr>
-          <p:nvPr/>
-        </p:nvSpPr>
-        <p:spPr>
-          <a:xfrm xmlns:a="http://schemas.openxmlformats.org/drawingml/2006/main">
-            <a:off x="1028700" y="3543300"/>
-            <a:ext cx="3752850" cy="209550"/>
+                <a16:creationId xmlns:a16="http://schemas.microsoft.com/office/drawing/2014/main" id="{3C161AD9-88D2-4A74-BEF1-1FCF8A5DB81D}"/>
+              </a:ext>
+            </a:extLst>
+          </p:cNvPr>
+          <p:cNvSpPr>
+            <a:spLocks xmlns:a="http://schemas.openxmlformats.org/drawingml/2006/main" noGrp="1"/>
+          </p:cNvSpPr>
+          <p:nvPr/>
+        </p:nvSpPr>
+        <p:spPr>
+          <a:xfrm xmlns:a="http://schemas.openxmlformats.org/drawingml/2006/main">
+            <a:off x="895350" y="2247900"/>
+            <a:ext cx="4610100" cy="209550"/>
           </a:xfrm>
           <a:prstGeom xmlns:a="http://schemas.openxmlformats.org/drawingml/2006/main" prst="rect">
             <a:avLst/>
@@ -6388,7 +7952,7 @@
                 <a:ea typeface="Calibri"/>
                 <a:cs typeface="Calibri"/>
               </a:rPr>
-              <a:t>Objective priority example</a:t>
+              <a:t>Utility score contract</a:t>
             </a:r>
           </a:p>
         </p:txBody>
@@ -6398,19 +7962,19 @@
           <p:cNvPr id="7" name="">
             <a:extLst xmlns:a="http://schemas.openxmlformats.org/drawingml/2006/main">
               <a:ext uri="{FF2B5EF4-FFF2-40B4-BE49-F238E27FC236}">
-                <a16:creationId xmlns:a16="http://schemas.microsoft.com/office/drawing/2014/main" id="{211CF7CA-D689-4CA4-8732-F1F14A5DC0B6}"/>
-              </a:ext>
-            </a:extLst>
-          </p:cNvPr>
-          <p:cNvSpPr>
-            <a:spLocks xmlns:a="http://schemas.openxmlformats.org/drawingml/2006/main" noGrp="1"/>
-          </p:cNvSpPr>
-          <p:nvPr/>
-        </p:nvSpPr>
-        <p:spPr>
-          <a:xfrm xmlns:a="http://schemas.openxmlformats.org/drawingml/2006/main">
-            <a:off x="1028700" y="3829050"/>
-            <a:ext cx="3752850" cy="971550"/>
+                <a16:creationId xmlns:a16="http://schemas.microsoft.com/office/drawing/2014/main" id="{1B6CF09F-27E6-4E8D-9CEE-A5131B75720A}"/>
+              </a:ext>
+            </a:extLst>
+          </p:cNvPr>
+          <p:cNvSpPr>
+            <a:spLocks xmlns:a="http://schemas.openxmlformats.org/drawingml/2006/main" noGrp="1"/>
+          </p:cNvSpPr>
+          <p:nvPr/>
+        </p:nvSpPr>
+        <p:spPr>
+          <a:xfrm xmlns:a="http://schemas.openxmlformats.org/drawingml/2006/main">
+            <a:off x="895350" y="2533650"/>
+            <a:ext cx="4610100" cy="742950"/>
           </a:xfrm>
           <a:prstGeom xmlns:a="http://schemas.openxmlformats.org/drawingml/2006/main" prst="rect">
             <a:avLst/>
@@ -6427,10 +7991,10 @@
           <a:p xmlns:a="http://schemas.openxmlformats.org/drawingml/2006/main">
             <a:pPr algn="l">
               <a:lnSpc>
-                <a:spcPct val="92000"/>
+                <a:spcPct val="98000"/>
               </a:lnSpc>
               <a:buNone/>
-              <a:defRPr sz="713" b="0" i="0">
+              <a:defRPr sz="795" b="0" i="0">
                 <a:solidFill>
                   <a:srgbClr val="FFFFFF"/>
                 </a:solidFill>
@@ -6440,7 +8004,7 @@
               </a:defRPr>
             </a:pPr>
             <a:r>
-              <a:rPr sz="713" b="0" i="0">
+              <a:rPr sz="795" b="0" i="0">
                 <a:solidFill>
                   <a:srgbClr val="FFFFFF"/>
                 </a:solidFill>
@@ -6448,16 +8012,16 @@
                 <a:ea typeface="Calibri"/>
                 <a:cs typeface="Calibri"/>
               </a:rPr>
-              <a:t>if (mode == BrawlBall &amp;&amp; ballIsLoose)</a:t>
+              <a:t>float score = baseScore + objective + safety - risk;</a:t>
             </a:r>
           </a:p>
           <a:p xmlns:a="http://schemas.openxmlformats.org/drawingml/2006/main">
             <a:pPr algn="l">
               <a:lnSpc>
-                <a:spcPct val="92000"/>
+                <a:spcPct val="98000"/>
               </a:lnSpc>
               <a:buNone/>
-              <a:defRPr sz="713" b="0" i="0">
+              <a:defRPr sz="795" b="0" i="0">
                 <a:solidFill>
                   <a:srgbClr val="FFFFFF"/>
                 </a:solidFill>
@@ -6467,7 +8031,7 @@
               </a:defRPr>
             </a:pPr>
             <a:r>
-              <a:rPr sz="713" b="0" i="0">
+              <a:rPr sz="795" b="0" i="0">
                 <a:solidFill>
                   <a:srgbClr val="FFFFFF"/>
                 </a:solidFill>
@@ -6475,16 +8039,16 @@
                 <a:ea typeface="Calibri"/>
                 <a:cs typeface="Calibri"/>
               </a:rPr>
-              <a:t>{</a:t>
+              <a:t>score -= teamFocus * focusPenalty;</a:t>
             </a:r>
           </a:p>
           <a:p xmlns:a="http://schemas.openxmlformats.org/drawingml/2006/main">
             <a:pPr algn="l">
               <a:lnSpc>
-                <a:spcPct val="92000"/>
+                <a:spcPct val="98000"/>
               </a:lnSpc>
               <a:buNone/>
-              <a:defRPr sz="713" b="0" i="0">
+              <a:defRPr sz="795" b="0" i="0">
                 <a:solidFill>
                   <a:srgbClr val="FFFFFF"/>
                 </a:solidFill>
@@ -6494,7 +8058,7 @@
               </a:defRPr>
             </a:pPr>
             <a:r>
-              <a:rPr sz="713" b="0" i="0">
+              <a:rPr sz="795" b="0" i="0">
                 <a:solidFill>
                   <a:srgbClr val="FFFFFF"/>
                 </a:solidFill>
@@ -6502,93 +8066,7 @@
                 <a:ea typeface="Calibri"/>
                 <a:cs typeface="Calibri"/>
               </a:rPr>
-              <a:t>    macro = Push;</a:t>
-            </a:r>
-          </a:p>
-          <a:p xmlns:a="http://schemas.openxmlformats.org/drawingml/2006/main">
-            <a:pPr algn="l">
-              <a:lnSpc>
-                <a:spcPct val="92000"/>
-              </a:lnSpc>
-              <a:buNone/>
-              <a:defRPr sz="713" b="0" i="0">
-                <a:solidFill>
-                  <a:srgbClr val="FFFFFF"/>
-                </a:solidFill>
-                <a:latin typeface="Calibri"/>
-                <a:ea typeface="Calibri"/>
-                <a:cs typeface="Calibri"/>
-              </a:defRPr>
-            </a:pPr>
-            <a:r>
-              <a:rPr sz="713" b="0" i="0">
-                <a:solidFill>
-                  <a:srgbClr val="FFFFFF"/>
-                </a:solidFill>
-                <a:latin typeface="Calibri"/>
-                <a:ea typeface="Calibri"/>
-                <a:cs typeface="Calibri"/>
-              </a:rPr>
-              <a:t>    reason = "loose_ball_claim";</a:t>
-            </a:r>
-          </a:p>
-          <a:p xmlns:a="http://schemas.openxmlformats.org/drawingml/2006/main">
-            <a:pPr algn="l">
-              <a:lnSpc>
-                <a:spcPct val="92000"/>
-              </a:lnSpc>
-              <a:buNone/>
-              <a:defRPr sz="713" b="0" i="0">
-                <a:solidFill>
-                  <a:srgbClr val="FFFFFF"/>
-                </a:solidFill>
-                <a:latin typeface="Calibri"/>
-                <a:ea typeface="Calibri"/>
-                <a:cs typeface="Calibri"/>
-              </a:defRPr>
-            </a:pPr>
-            <a:r>
-              <a:rPr sz="713" b="0" i="0">
-                <a:solidFill>
-                  <a:srgbClr val="FFFFFF"/>
-                </a:solidFill>
-                <a:latin typeface="Calibri"/>
-                <a:ea typeface="Calibri"/>
-                <a:cs typeface="Calibri"/>
-              </a:rPr>
-              <a:t>}</a:t>
-            </a:r>
-          </a:p>
-          <a:p xmlns:a="http://schemas.openxmlformats.org/drawingml/2006/main">
-            <a:r>
-              <a:t/>
-            </a:r>
-          </a:p>
-          <a:p xmlns:a="http://schemas.openxmlformats.org/drawingml/2006/main">
-            <a:pPr algn="l">
-              <a:lnSpc>
-                <a:spcPct val="92000"/>
-              </a:lnSpc>
-              <a:buNone/>
-              <a:defRPr sz="713" b="0" i="0">
-                <a:solidFill>
-                  <a:srgbClr val="FFFFFF"/>
-                </a:solidFill>
-                <a:latin typeface="Calibri"/>
-                <a:ea typeface="Calibri"/>
-                <a:cs typeface="Calibri"/>
-              </a:defRPr>
-            </a:pPr>
-            <a:r>
-              <a:rPr sz="713" b="0" i="0">
-                <a:solidFill>
-                  <a:srgbClr val="FFFFFF"/>
-                </a:solidFill>
-                <a:latin typeface="Calibri"/>
-                <a:ea typeface="Calibri"/>
-                <a:cs typeface="Calibri"/>
-              </a:rPr>
-              <a:t>score = Max(score, objectiveFloor);</a:t>
+              <a:t>return Mathf.Clamp(score, 0f, 100f);</a:t>
             </a:r>
           </a:p>
         </p:txBody>
@@ -6598,19 +8076,19 @@
           <p:cNvPr id="8" name="">
             <a:extLst xmlns:a="http://schemas.openxmlformats.org/drawingml/2006/main">
               <a:ext uri="{FF2B5EF4-FFF2-40B4-BE49-F238E27FC236}">
-                <a16:creationId xmlns:a16="http://schemas.microsoft.com/office/drawing/2014/main" id="{224D18D7-28A4-405B-871F-6657F11218E6}"/>
-              </a:ext>
-            </a:extLst>
-          </p:cNvPr>
-          <p:cNvSpPr>
-            <a:spLocks xmlns:a="http://schemas.openxmlformats.org/drawingml/2006/main" noGrp="1"/>
-          </p:cNvSpPr>
-          <p:nvPr/>
-        </p:nvSpPr>
-        <p:spPr>
-          <a:xfrm xmlns:a="http://schemas.openxmlformats.org/drawingml/2006/main">
-            <a:off x="5619750" y="3429000"/>
-            <a:ext cx="4095750" cy="1428750"/>
+                <a16:creationId xmlns:a16="http://schemas.microsoft.com/office/drawing/2014/main" id="{7E90E228-0A07-472A-967A-9C3E511C3EBD}"/>
+              </a:ext>
+            </a:extLst>
+          </p:cNvPr>
+          <p:cNvSpPr>
+            <a:spLocks xmlns:a="http://schemas.openxmlformats.org/drawingml/2006/main" noGrp="1"/>
+          </p:cNvSpPr>
+          <p:nvPr/>
+        </p:nvSpPr>
+        <p:spPr>
+          <a:xfrm xmlns:a="http://schemas.openxmlformats.org/drawingml/2006/main">
+            <a:off x="6229350" y="2133600"/>
+            <a:ext cx="4953000" cy="1200150"/>
           </a:xfrm>
           <a:prstGeom xmlns:a="http://schemas.openxmlformats.org/drawingml/2006/main" prst="rect">
             <a:avLst/>
@@ -6631,19 +8109,19 @@
           <p:cNvPr id="9" name="">
             <a:extLst xmlns:a="http://schemas.openxmlformats.org/drawingml/2006/main">
               <a:ext uri="{FF2B5EF4-FFF2-40B4-BE49-F238E27FC236}">
-                <a16:creationId xmlns:a16="http://schemas.microsoft.com/office/drawing/2014/main" id="{98F47015-6E07-41D3-98DA-84C986FE0D2A}"/>
-              </a:ext>
-            </a:extLst>
-          </p:cNvPr>
-          <p:cNvSpPr>
-            <a:spLocks xmlns:a="http://schemas.openxmlformats.org/drawingml/2006/main" noGrp="1"/>
-          </p:cNvSpPr>
-          <p:nvPr/>
-        </p:nvSpPr>
-        <p:spPr>
-          <a:xfrm xmlns:a="http://schemas.openxmlformats.org/drawingml/2006/main">
-            <a:off x="5619750" y="3429000"/>
-            <a:ext cx="66675" cy="1428750"/>
+                <a16:creationId xmlns:a16="http://schemas.microsoft.com/office/drawing/2014/main" id="{733AAFDF-F1A2-4263-B67D-F80FB4E4AA40}"/>
+              </a:ext>
+            </a:extLst>
+          </p:cNvPr>
+          <p:cNvSpPr>
+            <a:spLocks xmlns:a="http://schemas.openxmlformats.org/drawingml/2006/main" noGrp="1"/>
+          </p:cNvSpPr>
+          <p:nvPr/>
+        </p:nvSpPr>
+        <p:spPr>
+          <a:xfrm xmlns:a="http://schemas.openxmlformats.org/drawingml/2006/main">
+            <a:off x="6229350" y="2133600"/>
+            <a:ext cx="66675" cy="1200150"/>
           </a:xfrm>
           <a:prstGeom xmlns:a="http://schemas.openxmlformats.org/drawingml/2006/main" prst="rect">
             <a:avLst/>
@@ -6662,19 +8140,19 @@
           <p:cNvPr id="10" name="">
             <a:extLst xmlns:a="http://schemas.openxmlformats.org/drawingml/2006/main">
               <a:ext uri="{FF2B5EF4-FFF2-40B4-BE49-F238E27FC236}">
-                <a16:creationId xmlns:a16="http://schemas.microsoft.com/office/drawing/2014/main" id="{2ECC6734-32EF-44AB-852C-E2B60FA5C8F3}"/>
-              </a:ext>
-            </a:extLst>
-          </p:cNvPr>
-          <p:cNvSpPr>
-            <a:spLocks xmlns:a="http://schemas.openxmlformats.org/drawingml/2006/main" noGrp="1"/>
-          </p:cNvSpPr>
-          <p:nvPr/>
-        </p:nvSpPr>
-        <p:spPr>
-          <a:xfrm xmlns:a="http://schemas.openxmlformats.org/drawingml/2006/main">
-            <a:off x="5791200" y="3543300"/>
-            <a:ext cx="3752850" cy="209550"/>
+                <a16:creationId xmlns:a16="http://schemas.microsoft.com/office/drawing/2014/main" id="{966A4327-9B6E-4CC3-A734-EB1EB3BF802F}"/>
+              </a:ext>
+            </a:extLst>
+          </p:cNvPr>
+          <p:cNvSpPr>
+            <a:spLocks xmlns:a="http://schemas.openxmlformats.org/drawingml/2006/main" noGrp="1"/>
+          </p:cNvSpPr>
+          <p:nvPr/>
+        </p:nvSpPr>
+        <p:spPr>
+          <a:xfrm xmlns:a="http://schemas.openxmlformats.org/drawingml/2006/main">
+            <a:off x="6400800" y="2247900"/>
+            <a:ext cx="4610100" cy="209550"/>
           </a:xfrm>
           <a:prstGeom xmlns:a="http://schemas.openxmlformats.org/drawingml/2006/main" prst="rect">
             <a:avLst/>
@@ -6712,7 +8190,7 @@
                 <a:ea typeface="Calibri"/>
                 <a:cs typeface="Calibri"/>
               </a:rPr>
-              <a:t>Lifecycle recovery example</a:t>
+              <a:t>Team blackboard signal</a:t>
             </a:r>
           </a:p>
         </p:txBody>
@@ -6722,19 +8200,19 @@
           <p:cNvPr id="11" name="">
             <a:extLst xmlns:a="http://schemas.openxmlformats.org/drawingml/2006/main">
               <a:ext uri="{FF2B5EF4-FFF2-40B4-BE49-F238E27FC236}">
-                <a16:creationId xmlns:a16="http://schemas.microsoft.com/office/drawing/2014/main" id="{3BB10FF7-BDBC-4C48-8AAA-D6C76812F73C}"/>
-              </a:ext>
-            </a:extLst>
-          </p:cNvPr>
-          <p:cNvSpPr>
-            <a:spLocks xmlns:a="http://schemas.openxmlformats.org/drawingml/2006/main" noGrp="1"/>
-          </p:cNvSpPr>
-          <p:nvPr/>
-        </p:nvSpPr>
-        <p:spPr>
-          <a:xfrm xmlns:a="http://schemas.openxmlformats.org/drawingml/2006/main">
-            <a:off x="5791200" y="3829050"/>
-            <a:ext cx="3752850" cy="971550"/>
+                <a16:creationId xmlns:a16="http://schemas.microsoft.com/office/drawing/2014/main" id="{FE9B7209-59BD-476D-8661-751493BCB43B}"/>
+              </a:ext>
+            </a:extLst>
+          </p:cNvPr>
+          <p:cNvSpPr>
+            <a:spLocks xmlns:a="http://schemas.openxmlformats.org/drawingml/2006/main" noGrp="1"/>
+          </p:cNvSpPr>
+          <p:nvPr/>
+        </p:nvSpPr>
+        <p:spPr>
+          <a:xfrm xmlns:a="http://schemas.openxmlformats.org/drawingml/2006/main">
+            <a:off x="6400800" y="2533650"/>
+            <a:ext cx="4610100" cy="742950"/>
           </a:xfrm>
           <a:prstGeom xmlns:a="http://schemas.openxmlformats.org/drawingml/2006/main" prst="rect">
             <a:avLst/>
@@ -6751,10 +8229,10 @@
           <a:p xmlns:a="http://schemas.openxmlformats.org/drawingml/2006/main">
             <a:pPr algn="l">
               <a:lnSpc>
-                <a:spcPct val="92000"/>
+                <a:spcPct val="98000"/>
               </a:lnSpc>
               <a:buNone/>
-              <a:defRPr sz="713" b="0" i="0">
+              <a:defRPr sz="795" b="0" i="0">
                 <a:solidFill>
                   <a:srgbClr val="FFFFFF"/>
                 </a:solidFill>
@@ -6764,7 +8242,7 @@
               </a:defRPr>
             </a:pPr>
             <a:r>
-              <a:rPr sz="713" b="0" i="0">
+              <a:rPr sz="795" b="0" i="0">
                 <a:solidFill>
                   <a:srgbClr val="FFFFFF"/>
                 </a:solidFill>
@@ -6772,21 +8250,16 @@
                 <a:ea typeface="Calibri"/>
                 <a:cs typeface="Calibri"/>
               </a:rPr>
-              <a:t>OnBrawlerRespawned += HandleRespawn;</a:t>
-            </a:r>
-          </a:p>
-          <a:p xmlns:a="http://schemas.openxmlformats.org/drawingml/2006/main">
-            <a:r>
-              <a:t/>
+              <a:t>blackboard.ReportIntent(selfId, targetId, objectiveId);</a:t>
             </a:r>
           </a:p>
           <a:p xmlns:a="http://schemas.openxmlformats.org/drawingml/2006/main">
             <a:pPr algn="l">
               <a:lnSpc>
-                <a:spcPct val="92000"/>
+                <a:spcPct val="98000"/>
               </a:lnSpc>
               <a:buNone/>
-              <a:defRPr sz="713" b="0" i="0">
+              <a:defRPr sz="795" b="0" i="0">
                 <a:solidFill>
                   <a:srgbClr val="FFFFFF"/>
                 </a:solidFill>
@@ -6796,7 +8269,7 @@
               </a:defRPr>
             </a:pPr>
             <a:r>
-              <a:rPr sz="713" b="0" i="0">
+              <a:rPr sz="795" b="0" i="0">
                 <a:solidFill>
                   <a:srgbClr val="FFFFFF"/>
                 </a:solidFill>
@@ -6804,16 +8277,16 @@
                 <a:ea typeface="Calibri"/>
                 <a:cs typeface="Calibri"/>
               </a:rPr>
-              <a:t>if (isLocalPlayer)</a:t>
+              <a:t>focusCount = blackboard.GetFocusCount(targetId);</a:t>
             </a:r>
           </a:p>
           <a:p xmlns:a="http://schemas.openxmlformats.org/drawingml/2006/main">
             <a:pPr algn="l">
               <a:lnSpc>
-                <a:spcPct val="92000"/>
+                <a:spcPct val="98000"/>
               </a:lnSpc>
               <a:buNone/>
-              <a:defRPr sz="713" b="0" i="0">
+              <a:defRPr sz="795" b="0" i="0">
                 <a:solidFill>
                   <a:srgbClr val="FFFFFF"/>
                 </a:solidFill>
@@ -6823,7 +8296,7 @@
               </a:defRPr>
             </a:pPr>
             <a:r>
-              <a:rPr sz="713" b="0" i="0">
+              <a:rPr sz="795" b="0" i="0">
                 <a:solidFill>
                   <a:srgbClr val="FFFFFF"/>
                 </a:solidFill>
@@ -6831,18 +8304,115 @@
                 <a:ea typeface="Calibri"/>
                 <a:cs typeface="Calibri"/>
               </a:rPr>
-              <a:t>{</a:t>
-            </a:r>
-          </a:p>
+              <a:t>allyPressure = blackboard.GetObjectivePressure(slotId);</a:t>
+            </a:r>
+          </a:p>
+        </p:txBody>
+      </p:sp>
+      <p:sp>
+        <p:nvSpPr>
+          <p:cNvPr id="12" name="">
+            <a:extLst xmlns:a="http://schemas.openxmlformats.org/drawingml/2006/main">
+              <a:ext uri="{FF2B5EF4-FFF2-40B4-BE49-F238E27FC236}">
+                <a16:creationId xmlns:a16="http://schemas.microsoft.com/office/drawing/2014/main" id="{48C2C146-F96F-4F14-8D33-306A6AD4CEA5}"/>
+              </a:ext>
+            </a:extLst>
+          </p:cNvPr>
+          <p:cNvSpPr>
+            <a:spLocks xmlns:a="http://schemas.openxmlformats.org/drawingml/2006/main" noGrp="1"/>
+          </p:cNvSpPr>
+          <p:nvPr/>
+        </p:nvSpPr>
+        <p:spPr>
+          <a:xfrm xmlns:a="http://schemas.openxmlformats.org/drawingml/2006/main">
+            <a:off x="723900" y="3733800"/>
+            <a:ext cx="4953000" cy="1352550"/>
+          </a:xfrm>
+          <a:prstGeom xmlns:a="http://schemas.openxmlformats.org/drawingml/2006/main" prst="rect">
+            <a:avLst/>
+          </a:prstGeom>
+          <a:solidFill xmlns:a="http://schemas.openxmlformats.org/drawingml/2006/main">
+            <a:srgbClr val="101827"/>
+          </a:solidFill>
+          <a:ln xmlns:a="http://schemas.openxmlformats.org/drawingml/2006/main" w="9525">
+            <a:solidFill>
+              <a:srgbClr val="D8DDE7"/>
+            </a:solidFill>
+            <a:prstDash val="solid"/>
+          </a:ln>
+        </p:spPr>
+      </p:sp>
+      <p:sp>
+        <p:nvSpPr>
+          <p:cNvPr id="13" name="">
+            <a:extLst xmlns:a="http://schemas.openxmlformats.org/drawingml/2006/main">
+              <a:ext uri="{FF2B5EF4-FFF2-40B4-BE49-F238E27FC236}">
+                <a16:creationId xmlns:a16="http://schemas.microsoft.com/office/drawing/2014/main" id="{F2A7F922-9561-48C0-A9A0-CA50B1F9466B}"/>
+              </a:ext>
+            </a:extLst>
+          </p:cNvPr>
+          <p:cNvSpPr>
+            <a:spLocks xmlns:a="http://schemas.openxmlformats.org/drawingml/2006/main" noGrp="1"/>
+          </p:cNvSpPr>
+          <p:nvPr/>
+        </p:nvSpPr>
+        <p:spPr>
+          <a:xfrm xmlns:a="http://schemas.openxmlformats.org/drawingml/2006/main">
+            <a:off x="723900" y="3733800"/>
+            <a:ext cx="66675" cy="1352550"/>
+          </a:xfrm>
+          <a:prstGeom xmlns:a="http://schemas.openxmlformats.org/drawingml/2006/main" prst="rect">
+            <a:avLst/>
+          </a:prstGeom>
+          <a:solidFill xmlns:a="http://schemas.openxmlformats.org/drawingml/2006/main">
+            <a:srgbClr val="16824A"/>
+          </a:solidFill>
+          <a:ln xmlns:a="http://schemas.openxmlformats.org/drawingml/2006/main" w="0">
+            <a:noFill/>
+            <a:prstDash val="solid"/>
+          </a:ln>
+        </p:spPr>
+      </p:sp>
+      <p:sp>
+        <p:nvSpPr>
+          <p:cNvPr id="14" name="">
+            <a:extLst xmlns:a="http://schemas.openxmlformats.org/drawingml/2006/main">
+              <a:ext uri="{FF2B5EF4-FFF2-40B4-BE49-F238E27FC236}">
+                <a16:creationId xmlns:a16="http://schemas.microsoft.com/office/drawing/2014/main" id="{2194700C-EF63-4A53-AE99-9FFD4E9BEE28}"/>
+              </a:ext>
+            </a:extLst>
+          </p:cNvPr>
+          <p:cNvSpPr>
+            <a:spLocks xmlns:a="http://schemas.openxmlformats.org/drawingml/2006/main" noGrp="1"/>
+          </p:cNvSpPr>
+          <p:nvPr/>
+        </p:nvSpPr>
+        <p:spPr>
+          <a:xfrm xmlns:a="http://schemas.openxmlformats.org/drawingml/2006/main">
+            <a:off x="895350" y="3848100"/>
+            <a:ext cx="4610100" cy="209550"/>
+          </a:xfrm>
+          <a:prstGeom xmlns:a="http://schemas.openxmlformats.org/drawingml/2006/main" prst="rect">
+            <a:avLst/>
+          </a:prstGeom>
+          <a:noFill xmlns:a="http://schemas.openxmlformats.org/drawingml/2006/main"/>
+          <a:ln xmlns:a="http://schemas.openxmlformats.org/drawingml/2006/main" w="0">
+            <a:noFill/>
+            <a:prstDash val="solid"/>
+          </a:ln>
+        </p:spPr>
+        <p:txBody>
+          <a:bodyPr xmlns:a="http://schemas.openxmlformats.org/drawingml/2006/main" wrap="square" lIns="38100" tIns="19050" rIns="38100" bIns="19050" anchor="t"/>
+          <a:lstStyle xmlns:a="http://schemas.openxmlformats.org/drawingml/2006/main"/>
           <a:p xmlns:a="http://schemas.openxmlformats.org/drawingml/2006/main">
             <a:pPr algn="l">
               <a:lnSpc>
-                <a:spcPct val="92000"/>
+                <a:spcPct val="105000"/>
               </a:lnSpc>
               <a:buNone/>
-              <a:defRPr sz="713" b="0" i="0">
-                <a:solidFill>
-                  <a:srgbClr val="FFFFFF"/>
+              <a:defRPr sz="900" b="1" i="0">
+                <a:solidFill>
+                  <a:srgbClr val="8CE6B5"/>
                 </a:solidFill>
                 <a:latin typeface="Calibri"/>
                 <a:ea typeface="Calibri"/>
@@ -6850,24 +8420,57 @@
               </a:defRPr>
             </a:pPr>
             <a:r>
-              <a:rPr sz="713" b="0" i="0">
-                <a:solidFill>
-                  <a:srgbClr val="FFFFFF"/>
+              <a:rPr sz="900" b="1" i="0">
+                <a:solidFill>
+                  <a:srgbClr val="8CE6B5"/>
                 </a:solidFill>
                 <a:latin typeface="Calibri"/>
                 <a:ea typeface="Calibri"/>
                 <a:cs typeface="Calibri"/>
               </a:rPr>
-              <a:t>    camera.SetTarget(followTarget);</a:t>
-            </a:r>
-          </a:p>
+              <a:t>Navigation liveness</a:t>
+            </a:r>
+          </a:p>
+        </p:txBody>
+      </p:sp>
+      <p:sp>
+        <p:nvSpPr>
+          <p:cNvPr id="15" name="">
+            <a:extLst xmlns:a="http://schemas.openxmlformats.org/drawingml/2006/main">
+              <a:ext uri="{FF2B5EF4-FFF2-40B4-BE49-F238E27FC236}">
+                <a16:creationId xmlns:a16="http://schemas.microsoft.com/office/drawing/2014/main" id="{586ABCF9-A79F-4412-A1AB-35A6AFEA2ED0}"/>
+              </a:ext>
+            </a:extLst>
+          </p:cNvPr>
+          <p:cNvSpPr>
+            <a:spLocks xmlns:a="http://schemas.openxmlformats.org/drawingml/2006/main" noGrp="1"/>
+          </p:cNvSpPr>
+          <p:nvPr/>
+        </p:nvSpPr>
+        <p:spPr>
+          <a:xfrm xmlns:a="http://schemas.openxmlformats.org/drawingml/2006/main">
+            <a:off x="895350" y="4133850"/>
+            <a:ext cx="4610100" cy="895350"/>
+          </a:xfrm>
+          <a:prstGeom xmlns:a="http://schemas.openxmlformats.org/drawingml/2006/main" prst="rect">
+            <a:avLst/>
+          </a:prstGeom>
+          <a:noFill xmlns:a="http://schemas.openxmlformats.org/drawingml/2006/main"/>
+          <a:ln xmlns:a="http://schemas.openxmlformats.org/drawingml/2006/main" w="0">
+            <a:noFill/>
+            <a:prstDash val="solid"/>
+          </a:ln>
+        </p:spPr>
+        <p:txBody>
+          <a:bodyPr xmlns:a="http://schemas.openxmlformats.org/drawingml/2006/main" wrap="square" lIns="38100" tIns="19050" rIns="38100" bIns="19050" anchor="t"/>
+          <a:lstStyle xmlns:a="http://schemas.openxmlformats.org/drawingml/2006/main"/>
           <a:p xmlns:a="http://schemas.openxmlformats.org/drawingml/2006/main">
             <a:pPr algn="l">
               <a:lnSpc>
-                <a:spcPct val="92000"/>
+                <a:spcPct val="98000"/>
               </a:lnSpc>
               <a:buNone/>
-              <a:defRPr sz="713" b="0" i="0">
+              <a:defRPr sz="795" b="0" i="0">
                 <a:solidFill>
                   <a:srgbClr val="FFFFFF"/>
                 </a:solidFill>
@@ -6877,7 +8480,7 @@
               </a:defRPr>
             </a:pPr>
             <a:r>
-              <a:rPr sz="713" b="0" i="0">
+              <a:rPr sz="795" b="0" i="0">
                 <a:solidFill>
                   <a:srgbClr val="FFFFFF"/>
                 </a:solidFill>
@@ -6885,16 +8488,16 @@
                 <a:ea typeface="Calibri"/>
                 <a:cs typeface="Calibri"/>
               </a:rPr>
-              <a:t>    controls.Rebind(owner);</a:t>
+              <a:t>if (!nav.TryBuildPath(start, goal, out path))</a:t>
             </a:r>
           </a:p>
           <a:p xmlns:a="http://schemas.openxmlformats.org/drawingml/2006/main">
             <a:pPr algn="l">
               <a:lnSpc>
-                <a:spcPct val="92000"/>
+                <a:spcPct val="98000"/>
               </a:lnSpc>
               <a:buNone/>
-              <a:defRPr sz="713" b="0" i="0">
+              <a:defRPr sz="795" b="0" i="0">
                 <a:solidFill>
                   <a:srgbClr val="FFFFFF"/>
                 </a:solidFill>
@@ -6904,7 +8507,7 @@
               </a:defRPr>
             </a:pPr>
             <a:r>
-              <a:rPr sz="713" b="0" i="0">
+              <a:rPr sz="795" b="0" i="0">
                 <a:solidFill>
                   <a:srgbClr val="FFFFFF"/>
                 </a:solidFill>
@@ -6912,66 +8515,572 @@
                 <a:ea typeface="Calibri"/>
                 <a:cs typeface="Calibri"/>
               </a:rPr>
-              <a:t>}</a:t>
-            </a:r>
-          </a:p>
-        </p:txBody>
-      </p:sp>
-      <p:pic>
-        <p:nvPicPr>
-          <p:cNvPr id="24" name=""/>
-          <p:cNvPicPr>
-            <a:picLocks xmlns:a="http://schemas.openxmlformats.org/drawingml/2006/main" noChangeAspect="1"/>
-          </p:cNvPicPr>
-          <p:nvPr/>
-        </p:nvPicPr>
-        <p:blipFill>
-          <a:blip xmlns:r="http://schemas.openxmlformats.org/officeDocument/2006/relationships" xmlns:a="http://schemas.openxmlformats.org/drawingml/2006/main" r:embed="R2a24f63829b64377"/>
-          <a:srcRect xmlns:a="http://schemas.openxmlformats.org/drawingml/2006/main" l="9551" t="0" r="9551" b="0"/>
-          <a:stretch xmlns:a="http://schemas.openxmlformats.org/drawingml/2006/main">
-            <a:fillRect l="0" t="0" r="0" b="0"/>
-          </a:stretch>
-        </p:blipFill>
-        <p:spPr>
-          <a:xfrm xmlns:a="http://schemas.openxmlformats.org/drawingml/2006/main">
-            <a:off x="8286750" y="1571625"/>
-            <a:ext cx="2381250" cy="1428750"/>
-          </a:xfrm>
-          <a:prstGeom xmlns:a="http://schemas.openxmlformats.org/drawingml/2006/main" prst="rect">
-            <a:avLst/>
-          </a:prstGeom>
-        </p:spPr>
-      </p:pic>
-      <p:sp>
-        <p:nvSpPr>
-          <p:cNvPr id="13" name="">
-            <a:extLst xmlns:a="http://schemas.openxmlformats.org/drawingml/2006/main">
-              <a:ext uri="{FF2B5EF4-FFF2-40B4-BE49-F238E27FC236}">
-                <a16:creationId xmlns:a16="http://schemas.microsoft.com/office/drawing/2014/main" id="{C4AE52D3-36FB-4B71-B038-AE11A2263BCE}"/>
-              </a:ext>
-            </a:extLst>
-          </p:cNvPr>
-          <p:cNvSpPr>
-            <a:spLocks xmlns:a="http://schemas.openxmlformats.org/drawingml/2006/main" noGrp="1"/>
-          </p:cNvSpPr>
-          <p:nvPr/>
-        </p:nvSpPr>
-        <p:spPr>
-          <a:xfrm xmlns:a="http://schemas.openxmlformats.org/drawingml/2006/main">
-            <a:off x="8286750" y="1571625"/>
-            <a:ext cx="2381250" cy="1428750"/>
+              <a:t>    goal = nav.FindNearbyWalkable(goal);</a:t>
+            </a:r>
+          </a:p>
+          <a:p xmlns:a="http://schemas.openxmlformats.org/drawingml/2006/main">
+            <a:r>
+              <a:t/>
+            </a:r>
+          </a:p>
+          <a:p xmlns:a="http://schemas.openxmlformats.org/drawingml/2006/main">
+            <a:pPr algn="l">
+              <a:lnSpc>
+                <a:spcPct val="98000"/>
+              </a:lnSpc>
+              <a:buNone/>
+              <a:defRPr sz="795" b="0" i="0">
+                <a:solidFill>
+                  <a:srgbClr val="FFFFFF"/>
+                </a:solidFill>
+                <a:latin typeface="Calibri"/>
+                <a:ea typeface="Calibri"/>
+                <a:cs typeface="Calibri"/>
+              </a:defRPr>
+            </a:pPr>
+            <a:r>
+              <a:rPr sz="795" b="0" i="0">
+                <a:solidFill>
+                  <a:srgbClr val="FFFFFF"/>
+                </a:solidFill>
+                <a:latin typeface="Calibri"/>
+                <a:ea typeface="Calibri"/>
+                <a:cs typeface="Calibri"/>
+              </a:rPr>
+              <a:t>if (watchdog.IsStalled(self))</a:t>
+            </a:r>
+          </a:p>
+          <a:p xmlns:a="http://schemas.openxmlformats.org/drawingml/2006/main">
+            <a:pPr algn="l">
+              <a:lnSpc>
+                <a:spcPct val="98000"/>
+              </a:lnSpc>
+              <a:buNone/>
+              <a:defRPr sz="795" b="0" i="0">
+                <a:solidFill>
+                  <a:srgbClr val="FFFFFF"/>
+                </a:solidFill>
+                <a:latin typeface="Calibri"/>
+                <a:ea typeface="Calibri"/>
+                <a:cs typeface="Calibri"/>
+              </a:defRPr>
+            </a:pPr>
+            <a:r>
+              <a:rPr sz="795" b="0" i="0">
+                <a:solidFill>
+                  <a:srgbClr val="FFFFFF"/>
+                </a:solidFill>
+                <a:latin typeface="Calibri"/>
+                <a:ea typeface="Calibri"/>
+                <a:cs typeface="Calibri"/>
+              </a:rPr>
+              <a:t>    planner.AbandonDestination();</a:t>
+            </a:r>
+          </a:p>
+        </p:txBody>
+      </p:sp>
+      <p:sp>
+        <p:nvSpPr>
+          <p:cNvPr id="16" name="">
+            <a:extLst xmlns:a="http://schemas.openxmlformats.org/drawingml/2006/main">
+              <a:ext uri="{FF2B5EF4-FFF2-40B4-BE49-F238E27FC236}">
+                <a16:creationId xmlns:a16="http://schemas.microsoft.com/office/drawing/2014/main" id="{E59DD5E8-6954-4A5C-B48D-B1E2DC8466CF}"/>
+              </a:ext>
+            </a:extLst>
+          </p:cNvPr>
+          <p:cNvSpPr>
+            <a:spLocks xmlns:a="http://schemas.openxmlformats.org/drawingml/2006/main" noGrp="1"/>
+          </p:cNvSpPr>
+          <p:nvPr/>
+        </p:nvSpPr>
+        <p:spPr>
+          <a:xfrm xmlns:a="http://schemas.openxmlformats.org/drawingml/2006/main">
+            <a:off x="6229350" y="3733800"/>
+            <a:ext cx="4953000" cy="1352550"/>
+          </a:xfrm>
+          <a:prstGeom xmlns:a="http://schemas.openxmlformats.org/drawingml/2006/main" prst="rect">
+            <a:avLst/>
+          </a:prstGeom>
+          <a:solidFill xmlns:a="http://schemas.openxmlformats.org/drawingml/2006/main">
+            <a:srgbClr val="101827"/>
+          </a:solidFill>
+          <a:ln xmlns:a="http://schemas.openxmlformats.org/drawingml/2006/main" w="9525">
+            <a:solidFill>
+              <a:srgbClr val="D8DDE7"/>
+            </a:solidFill>
+            <a:prstDash val="solid"/>
+          </a:ln>
+        </p:spPr>
+      </p:sp>
+      <p:sp>
+        <p:nvSpPr>
+          <p:cNvPr id="17" name="">
+            <a:extLst xmlns:a="http://schemas.openxmlformats.org/drawingml/2006/main">
+              <a:ext uri="{FF2B5EF4-FFF2-40B4-BE49-F238E27FC236}">
+                <a16:creationId xmlns:a16="http://schemas.microsoft.com/office/drawing/2014/main" id="{7878901C-7A55-4D09-A1BC-88747E310783}"/>
+              </a:ext>
+            </a:extLst>
+          </p:cNvPr>
+          <p:cNvSpPr>
+            <a:spLocks xmlns:a="http://schemas.openxmlformats.org/drawingml/2006/main" noGrp="1"/>
+          </p:cNvSpPr>
+          <p:nvPr/>
+        </p:nvSpPr>
+        <p:spPr>
+          <a:xfrm xmlns:a="http://schemas.openxmlformats.org/drawingml/2006/main">
+            <a:off x="6229350" y="3733800"/>
+            <a:ext cx="66675" cy="1352550"/>
+          </a:xfrm>
+          <a:prstGeom xmlns:a="http://schemas.openxmlformats.org/drawingml/2006/main" prst="rect">
+            <a:avLst/>
+          </a:prstGeom>
+          <a:solidFill xmlns:a="http://schemas.openxmlformats.org/drawingml/2006/main">
+            <a:srgbClr val="16824A"/>
+          </a:solidFill>
+          <a:ln xmlns:a="http://schemas.openxmlformats.org/drawingml/2006/main" w="0">
+            <a:noFill/>
+            <a:prstDash val="solid"/>
+          </a:ln>
+        </p:spPr>
+      </p:sp>
+      <p:sp>
+        <p:nvSpPr>
+          <p:cNvPr id="18" name="">
+            <a:extLst xmlns:a="http://schemas.openxmlformats.org/drawingml/2006/main">
+              <a:ext uri="{FF2B5EF4-FFF2-40B4-BE49-F238E27FC236}">
+                <a16:creationId xmlns:a16="http://schemas.microsoft.com/office/drawing/2014/main" id="{BAA80043-3965-4166-8AA3-7B95007DDBE1}"/>
+              </a:ext>
+            </a:extLst>
+          </p:cNvPr>
+          <p:cNvSpPr>
+            <a:spLocks xmlns:a="http://schemas.openxmlformats.org/drawingml/2006/main" noGrp="1"/>
+          </p:cNvSpPr>
+          <p:nvPr/>
+        </p:nvSpPr>
+        <p:spPr>
+          <a:xfrm xmlns:a="http://schemas.openxmlformats.org/drawingml/2006/main">
+            <a:off x="6400800" y="3848100"/>
+            <a:ext cx="4610100" cy="209550"/>
           </a:xfrm>
           <a:prstGeom xmlns:a="http://schemas.openxmlformats.org/drawingml/2006/main" prst="rect">
             <a:avLst/>
           </a:prstGeom>
           <a:noFill xmlns:a="http://schemas.openxmlformats.org/drawingml/2006/main"/>
-          <a:ln xmlns:a="http://schemas.openxmlformats.org/drawingml/2006/main" w="19050">
+          <a:ln xmlns:a="http://schemas.openxmlformats.org/drawingml/2006/main" w="0">
+            <a:noFill/>
+            <a:prstDash val="solid"/>
+          </a:ln>
+        </p:spPr>
+        <p:txBody>
+          <a:bodyPr xmlns:a="http://schemas.openxmlformats.org/drawingml/2006/main" wrap="square" lIns="38100" tIns="19050" rIns="38100" bIns="19050" anchor="t"/>
+          <a:lstStyle xmlns:a="http://schemas.openxmlformats.org/drawingml/2006/main"/>
+          <a:p xmlns:a="http://schemas.openxmlformats.org/drawingml/2006/main">
+            <a:pPr algn="l">
+              <a:lnSpc>
+                <a:spcPct val="105000"/>
+              </a:lnSpc>
+              <a:buNone/>
+              <a:defRPr sz="900" b="1" i="0">
+                <a:solidFill>
+                  <a:srgbClr val="8CE6B5"/>
+                </a:solidFill>
+                <a:latin typeface="Calibri"/>
+                <a:ea typeface="Calibri"/>
+                <a:cs typeface="Calibri"/>
+              </a:defRPr>
+            </a:pPr>
+            <a:r>
+              <a:rPr sz="900" b="1" i="0">
+                <a:solidFill>
+                  <a:srgbClr val="8CE6B5"/>
+                </a:solidFill>
+                <a:latin typeface="Calibri"/>
+                <a:ea typeface="Calibri"/>
+                <a:cs typeface="Calibri"/>
+              </a:rPr>
+              <a:t>Game-mode objective floor</a:t>
+            </a:r>
+          </a:p>
+        </p:txBody>
+      </p:sp>
+      <p:sp>
+        <p:nvSpPr>
+          <p:cNvPr id="19" name="">
+            <a:extLst xmlns:a="http://schemas.openxmlformats.org/drawingml/2006/main">
+              <a:ext uri="{FF2B5EF4-FFF2-40B4-BE49-F238E27FC236}">
+                <a16:creationId xmlns:a16="http://schemas.microsoft.com/office/drawing/2014/main" id="{98FE057D-56F2-4F82-A407-DBBD674FEC93}"/>
+              </a:ext>
+            </a:extLst>
+          </p:cNvPr>
+          <p:cNvSpPr>
+            <a:spLocks xmlns:a="http://schemas.openxmlformats.org/drawingml/2006/main" noGrp="1"/>
+          </p:cNvSpPr>
+          <p:nvPr/>
+        </p:nvSpPr>
+        <p:spPr>
+          <a:xfrm xmlns:a="http://schemas.openxmlformats.org/drawingml/2006/main">
+            <a:off x="6400800" y="4133850"/>
+            <a:ext cx="4610100" cy="895350"/>
+          </a:xfrm>
+          <a:prstGeom xmlns:a="http://schemas.openxmlformats.org/drawingml/2006/main" prst="rect">
+            <a:avLst/>
+          </a:prstGeom>
+          <a:noFill xmlns:a="http://schemas.openxmlformats.org/drawingml/2006/main"/>
+          <a:ln xmlns:a="http://schemas.openxmlformats.org/drawingml/2006/main" w="0">
+            <a:noFill/>
+            <a:prstDash val="solid"/>
+          </a:ln>
+        </p:spPr>
+        <p:txBody>
+          <a:bodyPr xmlns:a="http://schemas.openxmlformats.org/drawingml/2006/main" wrap="square" lIns="38100" tIns="19050" rIns="38100" bIns="19050" anchor="t"/>
+          <a:lstStyle xmlns:a="http://schemas.openxmlformats.org/drawingml/2006/main"/>
+          <a:p xmlns:a="http://schemas.openxmlformats.org/drawingml/2006/main">
+            <a:pPr algn="l">
+              <a:lnSpc>
+                <a:spcPct val="98000"/>
+              </a:lnSpc>
+              <a:buNone/>
+              <a:defRPr sz="795" b="0" i="0">
+                <a:solidFill>
+                  <a:srgbClr val="FFFFFF"/>
+                </a:solidFill>
+                <a:latin typeface="Calibri"/>
+                <a:ea typeface="Calibri"/>
+                <a:cs typeface="Calibri"/>
+              </a:defRPr>
+            </a:pPr>
+            <a:r>
+              <a:rPr sz="795" b="0" i="0">
+                <a:solidFill>
+                  <a:srgbClr val="FFFFFF"/>
+                </a:solidFill>
+                <a:latin typeface="Calibri"/>
+                <a:ea typeface="Calibri"/>
+                <a:cs typeface="Calibri"/>
+              </a:rPr>
+              <a:t>objectiveFloor = mode switch {</a:t>
+            </a:r>
+          </a:p>
+          <a:p xmlns:a="http://schemas.openxmlformats.org/drawingml/2006/main">
+            <a:pPr algn="l">
+              <a:lnSpc>
+                <a:spcPct val="98000"/>
+              </a:lnSpc>
+              <a:buNone/>
+              <a:defRPr sz="795" b="0" i="0">
+                <a:solidFill>
+                  <a:srgbClr val="FFFFFF"/>
+                </a:solidFill>
+                <a:latin typeface="Calibri"/>
+                <a:ea typeface="Calibri"/>
+                <a:cs typeface="Calibri"/>
+              </a:defRPr>
+            </a:pPr>
+            <a:r>
+              <a:rPr sz="795" b="0" i="0">
+                <a:solidFill>
+                  <a:srgbClr val="FFFFFF"/>
+                </a:solidFill>
+                <a:latin typeface="Calibri"/>
+                <a:ea typeface="Calibri"/>
+                <a:cs typeface="Calibri"/>
+              </a:rPr>
+              <a:t>    GemGrab =&gt; ScoreGemIntent(state),</a:t>
+            </a:r>
+          </a:p>
+          <a:p xmlns:a="http://schemas.openxmlformats.org/drawingml/2006/main">
+            <a:pPr algn="l">
+              <a:lnSpc>
+                <a:spcPct val="98000"/>
+              </a:lnSpc>
+              <a:buNone/>
+              <a:defRPr sz="795" b="0" i="0">
+                <a:solidFill>
+                  <a:srgbClr val="FFFFFF"/>
+                </a:solidFill>
+                <a:latin typeface="Calibri"/>
+                <a:ea typeface="Calibri"/>
+                <a:cs typeface="Calibri"/>
+              </a:defRPr>
+            </a:pPr>
+            <a:r>
+              <a:rPr sz="795" b="0" i="0">
+                <a:solidFill>
+                  <a:srgbClr val="FFFFFF"/>
+                </a:solidFill>
+                <a:latin typeface="Calibri"/>
+                <a:ea typeface="Calibri"/>
+                <a:cs typeface="Calibri"/>
+              </a:rPr>
+              <a:t>    BrawlBall =&gt; ScoreBallIntent(state),</a:t>
+            </a:r>
+          </a:p>
+          <a:p xmlns:a="http://schemas.openxmlformats.org/drawingml/2006/main">
+            <a:pPr algn="l">
+              <a:lnSpc>
+                <a:spcPct val="98000"/>
+              </a:lnSpc>
+              <a:buNone/>
+              <a:defRPr sz="795" b="0" i="0">
+                <a:solidFill>
+                  <a:srgbClr val="FFFFFF"/>
+                </a:solidFill>
+                <a:latin typeface="Calibri"/>
+                <a:ea typeface="Calibri"/>
+                <a:cs typeface="Calibri"/>
+              </a:defRPr>
+            </a:pPr>
+            <a:r>
+              <a:rPr sz="795" b="0" i="0">
+                <a:solidFill>
+                  <a:srgbClr val="FFFFFF"/>
+                </a:solidFill>
+                <a:latin typeface="Calibri"/>
+                <a:ea typeface="Calibri"/>
+                <a:cs typeface="Calibri"/>
+              </a:rPr>
+              <a:t>    Knockout =&gt; ScoreSurvivalPressure(state),</a:t>
+            </a:r>
+          </a:p>
+          <a:p xmlns:a="http://schemas.openxmlformats.org/drawingml/2006/main">
+            <a:pPr algn="l">
+              <a:lnSpc>
+                <a:spcPct val="98000"/>
+              </a:lnSpc>
+              <a:buNone/>
+              <a:defRPr sz="795" b="0" i="0">
+                <a:solidFill>
+                  <a:srgbClr val="FFFFFF"/>
+                </a:solidFill>
+                <a:latin typeface="Calibri"/>
+                <a:ea typeface="Calibri"/>
+                <a:cs typeface="Calibri"/>
+              </a:defRPr>
+            </a:pPr>
+            <a:r>
+              <a:rPr sz="795" b="0" i="0">
+                <a:solidFill>
+                  <a:srgbClr val="FFFFFF"/>
+                </a:solidFill>
+                <a:latin typeface="Calibri"/>
+                <a:ea typeface="Calibri"/>
+                <a:cs typeface="Calibri"/>
+              </a:rPr>
+              <a:t>};</a:t>
+            </a:r>
+          </a:p>
+          <a:p xmlns:a="http://schemas.openxmlformats.org/drawingml/2006/main">
+            <a:pPr algn="l">
+              <a:lnSpc>
+                <a:spcPct val="98000"/>
+              </a:lnSpc>
+              <a:buNone/>
+              <a:defRPr sz="795" b="0" i="0">
+                <a:solidFill>
+                  <a:srgbClr val="FFFFFF"/>
+                </a:solidFill>
+                <a:latin typeface="Calibri"/>
+                <a:ea typeface="Calibri"/>
+                <a:cs typeface="Calibri"/>
+              </a:defRPr>
+            </a:pPr>
+            <a:r>
+              <a:rPr sz="795" b="0" i="0">
+                <a:solidFill>
+                  <a:srgbClr val="FFFFFF"/>
+                </a:solidFill>
+                <a:latin typeface="Calibri"/>
+                <a:ea typeface="Calibri"/>
+                <a:cs typeface="Calibri"/>
+              </a:rPr>
+              <a:t>score = Mathf.Max(score, objectiveFloor);</a:t>
+            </a:r>
+          </a:p>
+        </p:txBody>
+      </p:sp>
+      <p:sp>
+        <p:nvSpPr>
+          <p:cNvPr id="20" name="">
+            <a:extLst xmlns:a="http://schemas.openxmlformats.org/drawingml/2006/main">
+              <a:ext uri="{FF2B5EF4-FFF2-40B4-BE49-F238E27FC236}">
+                <a16:creationId xmlns:a16="http://schemas.microsoft.com/office/drawing/2014/main" id="{ADA08F4B-3008-45D3-BC83-087C8DD24163}"/>
+              </a:ext>
+            </a:extLst>
+          </p:cNvPr>
+          <p:cNvSpPr>
+            <a:spLocks xmlns:a="http://schemas.openxmlformats.org/drawingml/2006/main" noGrp="1"/>
+          </p:cNvSpPr>
+          <p:nvPr/>
+        </p:nvSpPr>
+        <p:spPr>
+          <a:xfrm xmlns:a="http://schemas.openxmlformats.org/drawingml/2006/main">
+            <a:off x="1866900" y="5410200"/>
+            <a:ext cx="8096250" cy="685800"/>
+          </a:xfrm>
+          <a:prstGeom xmlns:a="http://schemas.openxmlformats.org/drawingml/2006/main" prst="rect">
+            <a:avLst/>
+          </a:prstGeom>
+          <a:solidFill xmlns:a="http://schemas.openxmlformats.org/drawingml/2006/main">
+            <a:srgbClr val="F8FAFC"/>
+          </a:solidFill>
+          <a:ln xmlns:a="http://schemas.openxmlformats.org/drawingml/2006/main" w="9525">
             <a:solidFill>
-              <a:srgbClr val="20384F"/>
+              <a:srgbClr val="D8DDE7"/>
             </a:solidFill>
             <a:prstDash val="solid"/>
           </a:ln>
         </p:spPr>
+      </p:sp>
+      <p:sp>
+        <p:nvSpPr>
+          <p:cNvPr id="21" name="">
+            <a:extLst xmlns:a="http://schemas.openxmlformats.org/drawingml/2006/main">
+              <a:ext uri="{FF2B5EF4-FFF2-40B4-BE49-F238E27FC236}">
+                <a16:creationId xmlns:a16="http://schemas.microsoft.com/office/drawing/2014/main" id="{4764B109-921A-488B-B24B-7F3224E5A46B}"/>
+              </a:ext>
+            </a:extLst>
+          </p:cNvPr>
+          <p:cNvSpPr>
+            <a:spLocks xmlns:a="http://schemas.openxmlformats.org/drawingml/2006/main" noGrp="1"/>
+          </p:cNvSpPr>
+          <p:nvPr/>
+        </p:nvSpPr>
+        <p:spPr>
+          <a:xfrm xmlns:a="http://schemas.openxmlformats.org/drawingml/2006/main">
+            <a:off x="1866900" y="5410200"/>
+            <a:ext cx="66675" cy="685800"/>
+          </a:xfrm>
+          <a:prstGeom xmlns:a="http://schemas.openxmlformats.org/drawingml/2006/main" prst="rect">
+            <a:avLst/>
+          </a:prstGeom>
+          <a:solidFill xmlns:a="http://schemas.openxmlformats.org/drawingml/2006/main">
+            <a:srgbClr val="F4A51C"/>
+          </a:solidFill>
+          <a:ln xmlns:a="http://schemas.openxmlformats.org/drawingml/2006/main" w="0">
+            <a:noFill/>
+            <a:prstDash val="solid"/>
+          </a:ln>
+        </p:spPr>
+      </p:sp>
+      <p:sp>
+        <p:nvSpPr>
+          <p:cNvPr id="22" name="">
+            <a:extLst xmlns:a="http://schemas.openxmlformats.org/drawingml/2006/main">
+              <a:ext uri="{FF2B5EF4-FFF2-40B4-BE49-F238E27FC236}">
+                <a16:creationId xmlns:a16="http://schemas.microsoft.com/office/drawing/2014/main" id="{854FC88E-AD78-4545-B167-9CE6D2CDE3DD}"/>
+              </a:ext>
+            </a:extLst>
+          </p:cNvPr>
+          <p:cNvSpPr>
+            <a:spLocks xmlns:a="http://schemas.openxmlformats.org/drawingml/2006/main" noGrp="1"/>
+          </p:cNvSpPr>
+          <p:nvPr/>
+        </p:nvSpPr>
+        <p:spPr>
+          <a:xfrm xmlns:a="http://schemas.openxmlformats.org/drawingml/2006/main">
+            <a:off x="2038350" y="5524500"/>
+            <a:ext cx="7791450" cy="209550"/>
+          </a:xfrm>
+          <a:prstGeom xmlns:a="http://schemas.openxmlformats.org/drawingml/2006/main" prst="rect">
+            <a:avLst/>
+          </a:prstGeom>
+          <a:noFill xmlns:a="http://schemas.openxmlformats.org/drawingml/2006/main"/>
+          <a:ln xmlns:a="http://schemas.openxmlformats.org/drawingml/2006/main" w="0">
+            <a:noFill/>
+            <a:prstDash val="solid"/>
+          </a:ln>
+        </p:spPr>
+        <p:txBody>
+          <a:bodyPr xmlns:a="http://schemas.openxmlformats.org/drawingml/2006/main" wrap="square" lIns="38100" tIns="19050" rIns="38100" bIns="19050" anchor="t"/>
+          <a:lstStyle xmlns:a="http://schemas.openxmlformats.org/drawingml/2006/main"/>
+          <a:p xmlns:a="http://schemas.openxmlformats.org/drawingml/2006/main">
+            <a:pPr algn="l">
+              <a:lnSpc>
+                <a:spcPct val="105000"/>
+              </a:lnSpc>
+              <a:buNone/>
+              <a:defRPr sz="938" b="1" i="0">
+                <a:solidFill>
+                  <a:srgbClr val="F4A51C"/>
+                </a:solidFill>
+                <a:latin typeface="Calibri"/>
+                <a:ea typeface="Calibri"/>
+                <a:cs typeface="Calibri"/>
+              </a:defRPr>
+            </a:pPr>
+            <a:r>
+              <a:rPr sz="938" b="1" i="0">
+                <a:solidFill>
+                  <a:srgbClr val="F4A51C"/>
+                </a:solidFill>
+                <a:latin typeface="Calibri"/>
+                <a:ea typeface="Calibri"/>
+                <a:cs typeface="Calibri"/>
+              </a:rPr>
+              <a:t>Software architecture takeaway</a:t>
+            </a:r>
+          </a:p>
+        </p:txBody>
+      </p:sp>
+      <p:sp>
+        <p:nvSpPr>
+          <p:cNvPr id="23" name="">
+            <a:extLst xmlns:a="http://schemas.openxmlformats.org/drawingml/2006/main">
+              <a:ext uri="{FF2B5EF4-FFF2-40B4-BE49-F238E27FC236}">
+                <a16:creationId xmlns:a16="http://schemas.microsoft.com/office/drawing/2014/main" id="{D9764292-BC1B-4F55-A931-A20A1B919A35}"/>
+              </a:ext>
+            </a:extLst>
+          </p:cNvPr>
+          <p:cNvSpPr>
+            <a:spLocks xmlns:a="http://schemas.openxmlformats.org/drawingml/2006/main" noGrp="1"/>
+          </p:cNvSpPr>
+          <p:nvPr/>
+        </p:nvSpPr>
+        <p:spPr>
+          <a:xfrm xmlns:a="http://schemas.openxmlformats.org/drawingml/2006/main">
+            <a:off x="2038350" y="5791200"/>
+            <a:ext cx="7791450" cy="247650"/>
+          </a:xfrm>
+          <a:prstGeom xmlns:a="http://schemas.openxmlformats.org/drawingml/2006/main" prst="rect">
+            <a:avLst/>
+          </a:prstGeom>
+          <a:noFill xmlns:a="http://schemas.openxmlformats.org/drawingml/2006/main"/>
+          <a:ln xmlns:a="http://schemas.openxmlformats.org/drawingml/2006/main" w="0">
+            <a:noFill/>
+            <a:prstDash val="solid"/>
+          </a:ln>
+        </p:spPr>
+        <p:txBody>
+          <a:bodyPr xmlns:a="http://schemas.openxmlformats.org/drawingml/2006/main" wrap="square" lIns="38100" tIns="19050" rIns="38100" bIns="19050" anchor="t"/>
+          <a:lstStyle xmlns:a="http://schemas.openxmlformats.org/drawingml/2006/main"/>
+          <a:p xmlns:a="http://schemas.openxmlformats.org/drawingml/2006/main">
+            <a:pPr algn="l">
+              <a:lnSpc>
+                <a:spcPct val="102000"/>
+              </a:lnSpc>
+              <a:buNone/>
+              <a:defRPr sz="773" b="0" i="0">
+                <a:solidFill>
+                  <a:srgbClr val="444444"/>
+                </a:solidFill>
+                <a:latin typeface="Calibri"/>
+                <a:ea typeface="Calibri"/>
+                <a:cs typeface="Calibri"/>
+              </a:defRPr>
+            </a:pPr>
+            <a:r>
+              <a:rPr sz="773" b="0" i="0">
+                <a:solidFill>
+                  <a:srgbClr val="444444"/>
+                </a:solidFill>
+                <a:latin typeface="Calibri"/>
+                <a:ea typeface="Calibri"/>
+                <a:cs typeface="Calibri"/>
+              </a:rPr>
+              <a:t>The code avoids one large bot script. Each module has a narrow responsibility, which makes the system testable, explainable, and easier to extend for new modes.</a:t>
+            </a:r>
+          </a:p>
+        </p:txBody>
       </p:sp>
     </p:spTree>
     <p:extLst>
@@ -7062,7 +9171,7 @@
           <p:nvPr/>
         </p:nvPicPr>
         <p:blipFill>
-          <a:blip xmlns:r="http://schemas.openxmlformats.org/officeDocument/2006/relationships" xmlns:a="http://schemas.openxmlformats.org/drawingml/2006/main" r:embed="R33b48821ca284cb8"/>
+          <a:blip xmlns:r="http://schemas.openxmlformats.org/officeDocument/2006/relationships" xmlns:a="http://schemas.openxmlformats.org/drawingml/2006/main" r:embed="Re404ca8b82ab4d3f"/>
           <a:srcRect xmlns:a="http://schemas.openxmlformats.org/drawingml/2006/main" l="0" t="2654" r="0" b="2654"/>
           <a:stretch xmlns:a="http://schemas.openxmlformats.org/drawingml/2006/main">
             <a:fillRect l="0" t="0" r="0" b="0"/>
@@ -7083,7 +9192,7 @@
           <p:cNvPr id="5" name="">
             <a:extLst xmlns:a="http://schemas.openxmlformats.org/drawingml/2006/main">
               <a:ext uri="{FF2B5EF4-FFF2-40B4-BE49-F238E27FC236}">
-                <a16:creationId xmlns:a16="http://schemas.microsoft.com/office/drawing/2014/main" id="{3B2A2B9A-9AA6-45D8-9249-AB9AB597B5C0}"/>
+                <a16:creationId xmlns:a16="http://schemas.microsoft.com/office/drawing/2014/main" id="{9DF7E2E1-B0E8-4E45-BD8D-13FB23D70937}"/>
               </a:ext>
             </a:extLst>
           </p:cNvPr>
@@ -7118,7 +9227,7 @@
           <p:nvPr/>
         </p:nvPicPr>
         <p:blipFill>
-          <a:blip xmlns:r="http://schemas.openxmlformats.org/officeDocument/2006/relationships" xmlns:a="http://schemas.openxmlformats.org/drawingml/2006/main" r:embed="R6b41750545dc4d8b"/>
+          <a:blip xmlns:r="http://schemas.openxmlformats.org/officeDocument/2006/relationships" xmlns:a="http://schemas.openxmlformats.org/drawingml/2006/main" r:embed="R2837a0a46a7248e4"/>
           <a:srcRect xmlns:a="http://schemas.openxmlformats.org/drawingml/2006/main" l="6422" t="0" r="6422" b="0"/>
           <a:stretch xmlns:a="http://schemas.openxmlformats.org/drawingml/2006/main">
             <a:fillRect l="0" t="0" r="0" b="0"/>
@@ -7139,7 +9248,7 @@
           <p:cNvPr id="7" name="">
             <a:extLst xmlns:a="http://schemas.openxmlformats.org/drawingml/2006/main">
               <a:ext uri="{FF2B5EF4-FFF2-40B4-BE49-F238E27FC236}">
-                <a16:creationId xmlns:a16="http://schemas.microsoft.com/office/drawing/2014/main" id="{DB46BD23-F320-4E48-B69C-2165EB3D2599}"/>
+                <a16:creationId xmlns:a16="http://schemas.microsoft.com/office/drawing/2014/main" id="{004CD4D8-0E5D-407D-8663-7D2AB0C6A68E}"/>
               </a:ext>
             </a:extLst>
           </p:cNvPr>
@@ -7170,7 +9279,7 @@
           <p:cNvPr id="8" name="">
             <a:extLst xmlns:a="http://schemas.openxmlformats.org/drawingml/2006/main">
               <a:ext uri="{FF2B5EF4-FFF2-40B4-BE49-F238E27FC236}">
-                <a16:creationId xmlns:a16="http://schemas.microsoft.com/office/drawing/2014/main" id="{13EE0916-8FB4-4641-8929-A39C4B54F116}"/>
+                <a16:creationId xmlns:a16="http://schemas.microsoft.com/office/drawing/2014/main" id="{63787AAA-43F1-498B-8491-67C678A8DD88}"/>
               </a:ext>
             </a:extLst>
           </p:cNvPr>
@@ -7203,7 +9312,7 @@
           <p:cNvPr id="9" name="">
             <a:extLst xmlns:a="http://schemas.openxmlformats.org/drawingml/2006/main">
               <a:ext uri="{FF2B5EF4-FFF2-40B4-BE49-F238E27FC236}">
-                <a16:creationId xmlns:a16="http://schemas.microsoft.com/office/drawing/2014/main" id="{37B78F0C-E7CE-4A4C-8E37-A8D9FA0BA87D}"/>
+                <a16:creationId xmlns:a16="http://schemas.microsoft.com/office/drawing/2014/main" id="{5137A347-E926-4CE9-BAB0-80B011062864}"/>
               </a:ext>
             </a:extLst>
           </p:cNvPr>
@@ -7234,7 +9343,7 @@
           <p:cNvPr id="10" name="">
             <a:extLst xmlns:a="http://schemas.openxmlformats.org/drawingml/2006/main">
               <a:ext uri="{FF2B5EF4-FFF2-40B4-BE49-F238E27FC236}">
-                <a16:creationId xmlns:a16="http://schemas.microsoft.com/office/drawing/2014/main" id="{983ABD6A-E4A2-4417-A4AE-EF2F588863FB}"/>
+                <a16:creationId xmlns:a16="http://schemas.microsoft.com/office/drawing/2014/main" id="{8A3A260E-9873-4D32-8374-D6DCB24FC809}"/>
               </a:ext>
             </a:extLst>
           </p:cNvPr>
@@ -7294,7 +9403,7 @@
           <p:cNvPr id="11" name="">
             <a:extLst xmlns:a="http://schemas.openxmlformats.org/drawingml/2006/main">
               <a:ext uri="{FF2B5EF4-FFF2-40B4-BE49-F238E27FC236}">
-                <a16:creationId xmlns:a16="http://schemas.microsoft.com/office/drawing/2014/main" id="{96D5ABD0-1175-4947-88A5-E0871CF4A1B4}"/>
+                <a16:creationId xmlns:a16="http://schemas.microsoft.com/office/drawing/2014/main" id="{D3C8BC1B-E606-4E8F-9FAC-4E3860CF33EC}"/>
               </a:ext>
             </a:extLst>
           </p:cNvPr>
@@ -7327,7 +9436,7 @@
           <p:cNvPr id="12" name="">
             <a:extLst xmlns:a="http://schemas.openxmlformats.org/drawingml/2006/main">
               <a:ext uri="{FF2B5EF4-FFF2-40B4-BE49-F238E27FC236}">
-                <a16:creationId xmlns:a16="http://schemas.microsoft.com/office/drawing/2014/main" id="{3A5D013D-0027-4E28-8B46-E10DCA169C26}"/>
+                <a16:creationId xmlns:a16="http://schemas.microsoft.com/office/drawing/2014/main" id="{DC0F8943-24A2-47A9-823F-781373FA4369}"/>
               </a:ext>
             </a:extLst>
           </p:cNvPr>
@@ -7358,7 +9467,7 @@
           <p:cNvPr id="13" name="">
             <a:extLst xmlns:a="http://schemas.openxmlformats.org/drawingml/2006/main">
               <a:ext uri="{FF2B5EF4-FFF2-40B4-BE49-F238E27FC236}">
-                <a16:creationId xmlns:a16="http://schemas.microsoft.com/office/drawing/2014/main" id="{A7B88CD8-AE7D-463F-BADF-FF057F74654E}"/>
+                <a16:creationId xmlns:a16="http://schemas.microsoft.com/office/drawing/2014/main" id="{DC98B565-0647-4134-8897-4D1F87FAEDD4}"/>
               </a:ext>
             </a:extLst>
           </p:cNvPr>
@@ -7468,7 +9577,7 @@
           <p:cNvPr id="3" name="">
             <a:extLst xmlns:a="http://schemas.openxmlformats.org/drawingml/2006/main">
               <a:ext uri="{FF2B5EF4-FFF2-40B4-BE49-F238E27FC236}">
-                <a16:creationId xmlns:a16="http://schemas.microsoft.com/office/drawing/2014/main" id="{366BA9D0-2BB4-4506-83E1-5DA29F89A773}"/>
+                <a16:creationId xmlns:a16="http://schemas.microsoft.com/office/drawing/2014/main" id="{120EC7F1-5CF5-49C3-8CBB-3DA7D2A4A391}"/>
               </a:ext>
             </a:extLst>
           </p:cNvPr>
@@ -7532,7 +9641,7 @@
           <p:nvPr/>
         </p:nvPicPr>
         <p:blipFill>
-          <a:blip xmlns:r="http://schemas.openxmlformats.org/officeDocument/2006/relationships" xmlns:a="http://schemas.openxmlformats.org/drawingml/2006/main" r:embed="R24b8218925134223"/>
+          <a:blip xmlns:r="http://schemas.openxmlformats.org/officeDocument/2006/relationships" xmlns:a="http://schemas.openxmlformats.org/drawingml/2006/main" r:embed="R199865f23d0d4e8d"/>
           <a:srcRect xmlns:a="http://schemas.openxmlformats.org/drawingml/2006/main" l="6825" t="0" r="6825" b="0"/>
           <a:stretch xmlns:a="http://schemas.openxmlformats.org/drawingml/2006/main">
             <a:fillRect l="0" t="0" r="0" b="0"/>
@@ -7553,7 +9662,7 @@
           <p:cNvPr id="5" name="">
             <a:extLst xmlns:a="http://schemas.openxmlformats.org/drawingml/2006/main">
               <a:ext uri="{FF2B5EF4-FFF2-40B4-BE49-F238E27FC236}">
-                <a16:creationId xmlns:a16="http://schemas.microsoft.com/office/drawing/2014/main" id="{F1FF7EC5-3FBF-471B-9859-A27486574837}"/>
+                <a16:creationId xmlns:a16="http://schemas.microsoft.com/office/drawing/2014/main" id="{E15C582C-587C-4798-8B3D-D7A193BE95B9}"/>
               </a:ext>
             </a:extLst>
           </p:cNvPr>
@@ -7588,7 +9697,7 @@
           <p:nvPr/>
         </p:nvPicPr>
         <p:blipFill>
-          <a:blip xmlns:r="http://schemas.openxmlformats.org/officeDocument/2006/relationships" xmlns:a="http://schemas.openxmlformats.org/drawingml/2006/main" r:embed="Re7c146a5fd5547c9"/>
+          <a:blip xmlns:r="http://schemas.openxmlformats.org/officeDocument/2006/relationships" xmlns:a="http://schemas.openxmlformats.org/drawingml/2006/main" r:embed="Rb794c7c4411b462a"/>
           <a:srcRect xmlns:a="http://schemas.openxmlformats.org/drawingml/2006/main" l="1204" t="0" r="1204" b="0"/>
           <a:stretch xmlns:a="http://schemas.openxmlformats.org/drawingml/2006/main">
             <a:fillRect l="0" t="0" r="0" b="0"/>
@@ -7609,7 +9718,7 @@
           <p:cNvPr id="7" name="">
             <a:extLst xmlns:a="http://schemas.openxmlformats.org/drawingml/2006/main">
               <a:ext uri="{FF2B5EF4-FFF2-40B4-BE49-F238E27FC236}">
-                <a16:creationId xmlns:a16="http://schemas.microsoft.com/office/drawing/2014/main" id="{040AA62E-3D61-429C-AC76-4DA2DBDF5EDF}"/>
+                <a16:creationId xmlns:a16="http://schemas.microsoft.com/office/drawing/2014/main" id="{661E467A-797A-4E5D-9DE4-B38F615F5743}"/>
               </a:ext>
             </a:extLst>
           </p:cNvPr>
@@ -7640,7 +9749,7 @@
           <p:cNvPr id="8" name="">
             <a:extLst xmlns:a="http://schemas.openxmlformats.org/drawingml/2006/main">
               <a:ext uri="{FF2B5EF4-FFF2-40B4-BE49-F238E27FC236}">
-                <a16:creationId xmlns:a16="http://schemas.microsoft.com/office/drawing/2014/main" id="{889AB593-2DE5-40F1-8944-FDC92B0E02CB}"/>
+                <a16:creationId xmlns:a16="http://schemas.microsoft.com/office/drawing/2014/main" id="{633EE1A3-1BFC-4F81-BCF3-7FE6147BEDB2}"/>
               </a:ext>
             </a:extLst>
           </p:cNvPr>
@@ -7673,7 +9782,7 @@
           <p:cNvPr id="9" name="">
             <a:extLst xmlns:a="http://schemas.openxmlformats.org/drawingml/2006/main">
               <a:ext uri="{FF2B5EF4-FFF2-40B4-BE49-F238E27FC236}">
-                <a16:creationId xmlns:a16="http://schemas.microsoft.com/office/drawing/2014/main" id="{B228BD86-BCDE-462F-9301-E039379E7787}"/>
+                <a16:creationId xmlns:a16="http://schemas.microsoft.com/office/drawing/2014/main" id="{E2A9798A-C25F-4161-AFF7-2EB11FA5B196}"/>
               </a:ext>
             </a:extLst>
           </p:cNvPr>
@@ -7704,7 +9813,7 @@
           <p:cNvPr id="10" name="">
             <a:extLst xmlns:a="http://schemas.openxmlformats.org/drawingml/2006/main">
               <a:ext uri="{FF2B5EF4-FFF2-40B4-BE49-F238E27FC236}">
-                <a16:creationId xmlns:a16="http://schemas.microsoft.com/office/drawing/2014/main" id="{2BC308F9-8F37-4C0D-8689-E24DC36D4786}"/>
+                <a16:creationId xmlns:a16="http://schemas.microsoft.com/office/drawing/2014/main" id="{77EF0BDE-E9DB-4763-B96B-60FFE454DB55}"/>
               </a:ext>
             </a:extLst>
           </p:cNvPr>
@@ -7814,7 +9923,7 @@
           <p:cNvPr id="3" name="">
             <a:extLst xmlns:a="http://schemas.openxmlformats.org/drawingml/2006/main">
               <a:ext uri="{FF2B5EF4-FFF2-40B4-BE49-F238E27FC236}">
-                <a16:creationId xmlns:a16="http://schemas.microsoft.com/office/drawing/2014/main" id="{FA07C9AE-45FE-47DC-AC16-C4E8FF675E73}"/>
+                <a16:creationId xmlns:a16="http://schemas.microsoft.com/office/drawing/2014/main" id="{CAA4CA5F-3825-43B1-8249-1C56849F39BA}"/>
               </a:ext>
             </a:extLst>
           </p:cNvPr>
@@ -7847,7 +9956,7 @@
           <p:cNvPr id="4" name="">
             <a:extLst xmlns:a="http://schemas.openxmlformats.org/drawingml/2006/main">
               <a:ext uri="{FF2B5EF4-FFF2-40B4-BE49-F238E27FC236}">
-                <a16:creationId xmlns:a16="http://schemas.microsoft.com/office/drawing/2014/main" id="{049B2291-2C97-4C2F-BF06-C8CAB86C1D5C}"/>
+                <a16:creationId xmlns:a16="http://schemas.microsoft.com/office/drawing/2014/main" id="{7DC6EFA5-6235-4D2A-8722-79680C5AE9FE}"/>
               </a:ext>
             </a:extLst>
           </p:cNvPr>
@@ -7878,7 +9987,7 @@
           <p:cNvPr id="5" name="">
             <a:extLst xmlns:a="http://schemas.openxmlformats.org/drawingml/2006/main">
               <a:ext uri="{FF2B5EF4-FFF2-40B4-BE49-F238E27FC236}">
-                <a16:creationId xmlns:a16="http://schemas.microsoft.com/office/drawing/2014/main" id="{07C22601-DFBA-4252-BEEF-AEB970FA0B45}"/>
+                <a16:creationId xmlns:a16="http://schemas.microsoft.com/office/drawing/2014/main" id="{5291E60D-5B09-4776-ACCC-E1060E9F2FB4}"/>
               </a:ext>
             </a:extLst>
           </p:cNvPr>
@@ -7938,7 +10047,7 @@
           <p:cNvPr id="6" name="">
             <a:extLst xmlns:a="http://schemas.openxmlformats.org/drawingml/2006/main">
               <a:ext uri="{FF2B5EF4-FFF2-40B4-BE49-F238E27FC236}">
-                <a16:creationId xmlns:a16="http://schemas.microsoft.com/office/drawing/2014/main" id="{EB8E8DC5-5782-44A0-8BC2-D70C327137FF}"/>
+                <a16:creationId xmlns:a16="http://schemas.microsoft.com/office/drawing/2014/main" id="{C0B73EC0-E68F-41B0-971F-C99D1B728E8D}"/>
               </a:ext>
             </a:extLst>
           </p:cNvPr>
@@ -7970,7 +10079,7 @@
                 <a:spcPct val="105000"/>
               </a:lnSpc>
               <a:buNone/>
-              <a:defRPr sz="1350" b="0" i="0">
+              <a:defRPr sz="1163" b="0" i="0">
                 <a:solidFill>
                   <a:srgbClr val="111111"/>
                 </a:solidFill>
@@ -7980,7 +10089,7 @@
               </a:defRPr>
             </a:pPr>
             <a:r>
-              <a:rPr sz="1350" b="0" i="0">
+              <a:rPr sz="1163" b="0" i="0">
                 <a:solidFill>
                   <a:srgbClr val="111111"/>
                 </a:solidFill>
@@ -7988,7 +10097,7 @@
                 <a:ea typeface="Calibri"/>
                 <a:cs typeface="Calibri"/>
               </a:rPr>
-              <a:t>Layered, objective-aware AI for a Unity brawler prototype.</a:t>
+              <a:t>Layered, objective-aware AI for a Unity real-time game prototype.</a:t>
             </a:r>
           </a:p>
         </p:txBody>
@@ -7998,7 +10107,7 @@
           <p:cNvPr id="7" name="">
             <a:extLst xmlns:a="http://schemas.openxmlformats.org/drawingml/2006/main">
               <a:ext uri="{FF2B5EF4-FFF2-40B4-BE49-F238E27FC236}">
-                <a16:creationId xmlns:a16="http://schemas.microsoft.com/office/drawing/2014/main" id="{A7A3ADE5-D9DE-41FC-A57A-C5ADFA07D138}"/>
+                <a16:creationId xmlns:a16="http://schemas.microsoft.com/office/drawing/2014/main" id="{5DDD3351-A72D-43CA-B3C3-B45DBCCC5038}"/>
               </a:ext>
             </a:extLst>
           </p:cNvPr>
@@ -8031,7 +10140,7 @@
           <p:cNvPr id="8" name="">
             <a:extLst xmlns:a="http://schemas.openxmlformats.org/drawingml/2006/main">
               <a:ext uri="{FF2B5EF4-FFF2-40B4-BE49-F238E27FC236}">
-                <a16:creationId xmlns:a16="http://schemas.microsoft.com/office/drawing/2014/main" id="{63F57047-4518-42DC-ABCC-D543B0AD54B9}"/>
+                <a16:creationId xmlns:a16="http://schemas.microsoft.com/office/drawing/2014/main" id="{2FEF7F9B-10F1-4646-9EE6-3D026179F494}"/>
               </a:ext>
             </a:extLst>
           </p:cNvPr>
@@ -8062,7 +10171,7 @@
           <p:cNvPr id="9" name="">
             <a:extLst xmlns:a="http://schemas.openxmlformats.org/drawingml/2006/main">
               <a:ext uri="{FF2B5EF4-FFF2-40B4-BE49-F238E27FC236}">
-                <a16:creationId xmlns:a16="http://schemas.microsoft.com/office/drawing/2014/main" id="{A5DD8E97-B7B5-4DDA-B06D-9051C5B4B82A}"/>
+                <a16:creationId xmlns:a16="http://schemas.microsoft.com/office/drawing/2014/main" id="{66C68133-A19A-425F-9422-740D7B8A43DE}"/>
               </a:ext>
             </a:extLst>
           </p:cNvPr>
@@ -8122,7 +10231,7 @@
           <p:cNvPr id="10" name="">
             <a:extLst xmlns:a="http://schemas.openxmlformats.org/drawingml/2006/main">
               <a:ext uri="{FF2B5EF4-FFF2-40B4-BE49-F238E27FC236}">
-                <a16:creationId xmlns:a16="http://schemas.microsoft.com/office/drawing/2014/main" id="{238BB3AC-9EC3-4741-B444-308E26DF4EC2}"/>
+                <a16:creationId xmlns:a16="http://schemas.microsoft.com/office/drawing/2014/main" id="{0B5A1B41-2D79-4424-B859-27F01931B687}"/>
               </a:ext>
             </a:extLst>
           </p:cNvPr>
@@ -8154,7 +10263,7 @@
                 <a:spcPct val="105000"/>
               </a:lnSpc>
               <a:buNone/>
-              <a:defRPr sz="1350" b="0" i="0">
+              <a:defRPr sz="1163" b="0" i="0">
                 <a:solidFill>
                   <a:srgbClr val="111111"/>
                 </a:solidFill>
@@ -8164,7 +10273,7 @@
               </a:defRPr>
             </a:pPr>
             <a:r>
-              <a:rPr sz="1350" b="0" i="0">
+              <a:rPr sz="1163" b="0" i="0">
                 <a:solidFill>
                   <a:srgbClr val="111111"/>
                 </a:solidFill>
@@ -8172,7 +10281,7 @@
                 <a:ea typeface="Calibri"/>
                 <a:cs typeface="Calibri"/>
               </a:rPr>
-              <a:t>Utility scoring, team blackboard, brawler roles, navigation recovery, and debug telemetry.</a:t>
+              <a:t>Utility scoring, team blackboard, role policies, navigation recovery, and debug telemetry.</a:t>
             </a:r>
           </a:p>
         </p:txBody>
@@ -8182,7 +10291,7 @@
           <p:cNvPr id="11" name="">
             <a:extLst xmlns:a="http://schemas.openxmlformats.org/drawingml/2006/main">
               <a:ext uri="{FF2B5EF4-FFF2-40B4-BE49-F238E27FC236}">
-                <a16:creationId xmlns:a16="http://schemas.microsoft.com/office/drawing/2014/main" id="{FC4E03F0-5E2C-44ED-8344-5ADB4DF20511}"/>
+                <a16:creationId xmlns:a16="http://schemas.microsoft.com/office/drawing/2014/main" id="{9898019A-472A-433D-B87E-308F960A0FA2}"/>
               </a:ext>
             </a:extLst>
           </p:cNvPr>
@@ -8215,7 +10324,7 @@
           <p:cNvPr id="12" name="">
             <a:extLst xmlns:a="http://schemas.openxmlformats.org/drawingml/2006/main">
               <a:ext uri="{FF2B5EF4-FFF2-40B4-BE49-F238E27FC236}">
-                <a16:creationId xmlns:a16="http://schemas.microsoft.com/office/drawing/2014/main" id="{BB312143-B0EC-4A4D-9D03-9458ED991175}"/>
+                <a16:creationId xmlns:a16="http://schemas.microsoft.com/office/drawing/2014/main" id="{0B91F21B-DDD8-4AD9-A53A-B79C52BFE210}"/>
               </a:ext>
             </a:extLst>
           </p:cNvPr>
@@ -8246,7 +10355,7 @@
           <p:cNvPr id="13" name="">
             <a:extLst xmlns:a="http://schemas.openxmlformats.org/drawingml/2006/main">
               <a:ext uri="{FF2B5EF4-FFF2-40B4-BE49-F238E27FC236}">
-                <a16:creationId xmlns:a16="http://schemas.microsoft.com/office/drawing/2014/main" id="{06D7EA3D-79B3-4813-814F-633648E4F256}"/>
+                <a16:creationId xmlns:a16="http://schemas.microsoft.com/office/drawing/2014/main" id="{B14ACDD0-A1B4-4F84-BE75-4DF1A485D34F}"/>
               </a:ext>
             </a:extLst>
           </p:cNvPr>
@@ -8306,7 +10415,7 @@
           <p:cNvPr id="14" name="">
             <a:extLst xmlns:a="http://schemas.openxmlformats.org/drawingml/2006/main">
               <a:ext uri="{FF2B5EF4-FFF2-40B4-BE49-F238E27FC236}">
-                <a16:creationId xmlns:a16="http://schemas.microsoft.com/office/drawing/2014/main" id="{6ED187DF-1C3F-49FF-A9AA-5FEF4DF29F69}"/>
+                <a16:creationId xmlns:a16="http://schemas.microsoft.com/office/drawing/2014/main" id="{9A407025-2856-4402-9E60-CB7B30B89468}"/>
               </a:ext>
             </a:extLst>
           </p:cNvPr>
@@ -8338,7 +10447,7 @@
                 <a:spcPct val="105000"/>
               </a:lnSpc>
               <a:buNone/>
-              <a:defRPr sz="1350" b="0" i="0">
+              <a:defRPr sz="1163" b="0" i="0">
                 <a:solidFill>
                   <a:srgbClr val="111111"/>
                 </a:solidFill>
@@ -8348,7 +10457,7 @@
               </a:defRPr>
             </a:pPr>
             <a:r>
-              <a:rPr sz="1350" b="0" i="0">
+              <a:rPr sz="1163" b="0" i="0">
                 <a:solidFill>
                   <a:srgbClr val="111111"/>
                 </a:solidFill>
@@ -8356,7 +10465,7 @@
                 <a:ea typeface="Calibri"/>
                 <a:cs typeface="Calibri"/>
               </a:rPr>
-              <a:t>Automated gauntlets, richer semantic maps, more brawler packs, and optional ML experiments.</a:t>
+              <a:t>Automated gauntlets, richer semantic maps, broader role packs, and optional ML experiments.</a:t>
             </a:r>
           </a:p>
         </p:txBody>
@@ -8416,7 +10525,7 @@
           <p:cNvPr id="3" name="">
             <a:extLst xmlns:a="http://schemas.openxmlformats.org/drawingml/2006/main">
               <a:ext uri="{FF2B5EF4-FFF2-40B4-BE49-F238E27FC236}">
-                <a16:creationId xmlns:a16="http://schemas.microsoft.com/office/drawing/2014/main" id="{5D76FB75-AE57-4683-A73C-DED44175CD10}"/>
+                <a16:creationId xmlns:a16="http://schemas.microsoft.com/office/drawing/2014/main" id="{28216F91-3D13-4DD0-942D-A15EBCFCD389}"/>
               </a:ext>
             </a:extLst>
           </p:cNvPr>
@@ -8601,7 +10710,7 @@
                 <a:ea typeface="Calibri"/>
                 <a:cs typeface="Calibri"/>
               </a:rPr>
-              <a:t>6. Project source code: AI scoring, blackboard, navigation, mode strategy, brawler intelligence, and debug telemetry.</a:t>
+              <a:t>6. Project source code: AI scoring, blackboard, navigation, mode strategy, role intelligence, and debug telemetry.</a:t>
             </a:r>
           </a:p>
         </p:txBody>
@@ -8894,7 +11003,7 @@
           <p:nvPr/>
         </p:nvPicPr>
         <p:blipFill>
-          <a:blip xmlns:r="http://schemas.openxmlformats.org/officeDocument/2006/relationships" xmlns:a="http://schemas.openxmlformats.org/drawingml/2006/main" r:embed="R65469f7f01f44f27"/>
+          <a:blip xmlns:r="http://schemas.openxmlformats.org/officeDocument/2006/relationships" xmlns:a="http://schemas.openxmlformats.org/drawingml/2006/main" r:embed="R8c8a05ae674045fe"/>
           <a:srcRect xmlns:a="http://schemas.openxmlformats.org/drawingml/2006/main" l="0" t="0" r="0" b="0"/>
           <a:stretch xmlns:a="http://schemas.openxmlformats.org/drawingml/2006/main"/>
         </p:blipFill>
@@ -8989,12 +11098,12 @@
               <a:buNone/>
             </a:pPr>
             <a:r>
-              <a:t>Unity MOBA / brawler prototype focused on AI architecture.</a:t>
-            </a:r>
-          </a:p>
-          <a:p xmlns:a="http://schemas.openxmlformats.org/drawingml/2006/main">
-            <a:r>
-              <a:t>Bots value objectives, team state, map safety, and brawler roles.</a:t>
+              <a:t>Unity MOBA prototype focused on AI architecture.</a:t>
+            </a:r>
+          </a:p>
+          <a:p xmlns:a="http://schemas.openxmlformats.org/drawingml/2006/main">
+            <a:r>
+              <a:t>Bots evaluate objectives, team state, map safety, and role policies.</a:t>
             </a:r>
           </a:p>
           <a:p xmlns:a="http://schemas.openxmlformats.org/drawingml/2006/main">
@@ -9159,7 +11268,7 @@
           <p:cNvPr id="5" name="">
             <a:extLst xmlns:a="http://schemas.openxmlformats.org/drawingml/2006/main">
               <a:ext uri="{FF2B5EF4-FFF2-40B4-BE49-F238E27FC236}">
-                <a16:creationId xmlns:a16="http://schemas.microsoft.com/office/drawing/2014/main" id="{0AC9AFB6-D0AA-4C6B-B9BB-71EC8D0B5DD4}"/>
+                <a16:creationId xmlns:a16="http://schemas.microsoft.com/office/drawing/2014/main" id="{3FFC079D-FCFE-4D79-821D-23EA567BFB0E}"/>
               </a:ext>
             </a:extLst>
           </p:cNvPr>
@@ -9219,7 +11328,7 @@
           <p:cNvPr id="6" name="">
             <a:extLst xmlns:a="http://schemas.openxmlformats.org/drawingml/2006/main">
               <a:ext uri="{FF2B5EF4-FFF2-40B4-BE49-F238E27FC236}">
-                <a16:creationId xmlns:a16="http://schemas.microsoft.com/office/drawing/2014/main" id="{F6E443E6-DA2A-4C2B-8B7E-1071EAB68153}"/>
+                <a16:creationId xmlns:a16="http://schemas.microsoft.com/office/drawing/2014/main" id="{3FE86561-B92A-4C37-9CD7-A67332F49CD9}"/>
               </a:ext>
             </a:extLst>
           </p:cNvPr>
@@ -9279,7 +11388,7 @@
           <p:cNvPr id="7" name="">
             <a:extLst xmlns:a="http://schemas.openxmlformats.org/drawingml/2006/main">
               <a:ext uri="{FF2B5EF4-FFF2-40B4-BE49-F238E27FC236}">
-                <a16:creationId xmlns:a16="http://schemas.microsoft.com/office/drawing/2014/main" id="{5F7F559E-1EBA-4D03-A852-B696629FA5D6}"/>
+                <a16:creationId xmlns:a16="http://schemas.microsoft.com/office/drawing/2014/main" id="{64DCAA36-F459-4179-B260-848AFD60D8F5}"/>
               </a:ext>
             </a:extLst>
           </p:cNvPr>
@@ -9314,7 +11423,7 @@
           <p:cNvPr id="8" name="">
             <a:extLst xmlns:a="http://schemas.openxmlformats.org/drawingml/2006/main">
               <a:ext uri="{FF2B5EF4-FFF2-40B4-BE49-F238E27FC236}">
-                <a16:creationId xmlns:a16="http://schemas.microsoft.com/office/drawing/2014/main" id="{31D5FDCF-E7DA-4E20-9A1C-B3D5D666E7C6}"/>
+                <a16:creationId xmlns:a16="http://schemas.microsoft.com/office/drawing/2014/main" id="{BF494569-0AFB-41E8-8868-D36EDB081B7D}"/>
               </a:ext>
             </a:extLst>
           </p:cNvPr>
@@ -9374,7 +11483,7 @@
           <p:cNvPr id="9" name="">
             <a:extLst xmlns:a="http://schemas.openxmlformats.org/drawingml/2006/main">
               <a:ext uri="{FF2B5EF4-FFF2-40B4-BE49-F238E27FC236}">
-                <a16:creationId xmlns:a16="http://schemas.microsoft.com/office/drawing/2014/main" id="{0B65ADCD-6D23-4534-BBE7-8DEE61953475}"/>
+                <a16:creationId xmlns:a16="http://schemas.microsoft.com/office/drawing/2014/main" id="{332086A4-D718-4610-B3E0-929D859EF743}"/>
               </a:ext>
             </a:extLst>
           </p:cNvPr>
@@ -9405,7 +11514,7 @@
           <p:cNvPr id="10" name="">
             <a:extLst xmlns:a="http://schemas.openxmlformats.org/drawingml/2006/main">
               <a:ext uri="{FF2B5EF4-FFF2-40B4-BE49-F238E27FC236}">
-                <a16:creationId xmlns:a16="http://schemas.microsoft.com/office/drawing/2014/main" id="{EFCD27C6-6D48-49CC-AC27-A353FD7E088A}"/>
+                <a16:creationId xmlns:a16="http://schemas.microsoft.com/office/drawing/2014/main" id="{FF256836-1C2E-40F4-8F92-8DEA0E29C7F8}"/>
               </a:ext>
             </a:extLst>
           </p:cNvPr>
@@ -9440,7 +11549,7 @@
           <p:cNvPr id="11" name="">
             <a:extLst xmlns:a="http://schemas.openxmlformats.org/drawingml/2006/main">
               <a:ext uri="{FF2B5EF4-FFF2-40B4-BE49-F238E27FC236}">
-                <a16:creationId xmlns:a16="http://schemas.microsoft.com/office/drawing/2014/main" id="{B49C1247-D590-4A0A-AFDE-369B0CB51911}"/>
+                <a16:creationId xmlns:a16="http://schemas.microsoft.com/office/drawing/2014/main" id="{B3B6D48C-1A37-4296-92A6-D9E013FDDCC2}"/>
               </a:ext>
             </a:extLst>
           </p:cNvPr>
@@ -9500,7 +11609,7 @@
           <p:cNvPr id="12" name="">
             <a:extLst xmlns:a="http://schemas.openxmlformats.org/drawingml/2006/main">
               <a:ext uri="{FF2B5EF4-FFF2-40B4-BE49-F238E27FC236}">
-                <a16:creationId xmlns:a16="http://schemas.microsoft.com/office/drawing/2014/main" id="{BB51AFEE-CA81-431D-BFD2-3A999F6CCD21}"/>
+                <a16:creationId xmlns:a16="http://schemas.microsoft.com/office/drawing/2014/main" id="{E7668C90-FCD3-44C3-B7E4-44C72113FA4C}"/>
               </a:ext>
             </a:extLst>
           </p:cNvPr>
@@ -9531,7 +11640,7 @@
           <p:cNvPr id="13" name="">
             <a:extLst xmlns:a="http://schemas.openxmlformats.org/drawingml/2006/main">
               <a:ext uri="{FF2B5EF4-FFF2-40B4-BE49-F238E27FC236}">
-                <a16:creationId xmlns:a16="http://schemas.microsoft.com/office/drawing/2014/main" id="{CB1D1997-3B6B-4C29-BBFB-345DDA97EB10}"/>
+                <a16:creationId xmlns:a16="http://schemas.microsoft.com/office/drawing/2014/main" id="{72AF8E13-C23E-42B1-9AD4-9A6CE771F1D8}"/>
               </a:ext>
             </a:extLst>
           </p:cNvPr>
@@ -9566,7 +11675,7 @@
           <p:cNvPr id="14" name="">
             <a:extLst xmlns:a="http://schemas.openxmlformats.org/drawingml/2006/main">
               <a:ext uri="{FF2B5EF4-FFF2-40B4-BE49-F238E27FC236}">
-                <a16:creationId xmlns:a16="http://schemas.microsoft.com/office/drawing/2014/main" id="{428C0B7A-6DC9-4669-9A34-71132F959B4D}"/>
+                <a16:creationId xmlns:a16="http://schemas.microsoft.com/office/drawing/2014/main" id="{74B5E205-0B06-49A3-9E6C-8FFDBFF266F0}"/>
               </a:ext>
             </a:extLst>
           </p:cNvPr>
@@ -9626,7 +11735,7 @@
           <p:cNvPr id="15" name="">
             <a:extLst xmlns:a="http://schemas.openxmlformats.org/drawingml/2006/main">
               <a:ext uri="{FF2B5EF4-FFF2-40B4-BE49-F238E27FC236}">
-                <a16:creationId xmlns:a16="http://schemas.microsoft.com/office/drawing/2014/main" id="{C6190798-9EF4-41EF-A307-DCB782724607}"/>
+                <a16:creationId xmlns:a16="http://schemas.microsoft.com/office/drawing/2014/main" id="{E80869B7-F85F-48D7-9C19-17D1D5F5B661}"/>
               </a:ext>
             </a:extLst>
           </p:cNvPr>
@@ -9657,7 +11766,7 @@
           <p:cNvPr id="16" name="">
             <a:extLst xmlns:a="http://schemas.openxmlformats.org/drawingml/2006/main">
               <a:ext uri="{FF2B5EF4-FFF2-40B4-BE49-F238E27FC236}">
-                <a16:creationId xmlns:a16="http://schemas.microsoft.com/office/drawing/2014/main" id="{347270E3-256B-421A-905E-C1D1A1F178EE}"/>
+                <a16:creationId xmlns:a16="http://schemas.microsoft.com/office/drawing/2014/main" id="{3D06A8F4-1F1F-4CA1-979F-FA4575D3523E}"/>
               </a:ext>
             </a:extLst>
           </p:cNvPr>
@@ -9692,7 +11801,7 @@
           <p:cNvPr id="17" name="">
             <a:extLst xmlns:a="http://schemas.openxmlformats.org/drawingml/2006/main">
               <a:ext uri="{FF2B5EF4-FFF2-40B4-BE49-F238E27FC236}">
-                <a16:creationId xmlns:a16="http://schemas.microsoft.com/office/drawing/2014/main" id="{882FE2F7-0404-4CCA-A1EC-2FBF39810B2A}"/>
+                <a16:creationId xmlns:a16="http://schemas.microsoft.com/office/drawing/2014/main" id="{FF86B9E9-8ABA-426D-A831-53BF28749388}"/>
               </a:ext>
             </a:extLst>
           </p:cNvPr>
@@ -9752,7 +11861,7 @@
           <p:cNvPr id="18" name="">
             <a:extLst xmlns:a="http://schemas.openxmlformats.org/drawingml/2006/main">
               <a:ext uri="{FF2B5EF4-FFF2-40B4-BE49-F238E27FC236}">
-                <a16:creationId xmlns:a16="http://schemas.microsoft.com/office/drawing/2014/main" id="{A451DCD9-230A-473C-832C-B9641638C308}"/>
+                <a16:creationId xmlns:a16="http://schemas.microsoft.com/office/drawing/2014/main" id="{70B5ACA1-8A3B-4089-8303-7604FF492CFD}"/>
               </a:ext>
             </a:extLst>
           </p:cNvPr>
@@ -9787,7 +11896,7 @@
           <p:cNvPr id="19" name="">
             <a:extLst xmlns:a="http://schemas.openxmlformats.org/drawingml/2006/main">
               <a:ext uri="{FF2B5EF4-FFF2-40B4-BE49-F238E27FC236}">
-                <a16:creationId xmlns:a16="http://schemas.microsoft.com/office/drawing/2014/main" id="{3C4846FF-FA4E-4F4C-9A8C-084A30CD5957}"/>
+                <a16:creationId xmlns:a16="http://schemas.microsoft.com/office/drawing/2014/main" id="{FB99A588-469A-40AC-A73E-BB5D358DBDAA}"/>
               </a:ext>
             </a:extLst>
           </p:cNvPr>
@@ -9847,7 +11956,7 @@
           <p:cNvPr id="20" name="">
             <a:extLst xmlns:a="http://schemas.openxmlformats.org/drawingml/2006/main">
               <a:ext uri="{FF2B5EF4-FFF2-40B4-BE49-F238E27FC236}">
-                <a16:creationId xmlns:a16="http://schemas.microsoft.com/office/drawing/2014/main" id="{CE02AF51-7A21-4A23-861E-EC179CAB9257}"/>
+                <a16:creationId xmlns:a16="http://schemas.microsoft.com/office/drawing/2014/main" id="{44EDD63C-C64D-42F3-8E0F-5A5CFF5AA38D}"/>
               </a:ext>
             </a:extLst>
           </p:cNvPr>
@@ -9878,7 +11987,7 @@
           <p:cNvPr id="21" name="">
             <a:extLst xmlns:a="http://schemas.openxmlformats.org/drawingml/2006/main">
               <a:ext uri="{FF2B5EF4-FFF2-40B4-BE49-F238E27FC236}">
-                <a16:creationId xmlns:a16="http://schemas.microsoft.com/office/drawing/2014/main" id="{C3CB7D7F-E9B1-4C0F-B0D5-E28448CEC951}"/>
+                <a16:creationId xmlns:a16="http://schemas.microsoft.com/office/drawing/2014/main" id="{E2B5D05F-41D8-496A-A55C-D8862A7E93F4}"/>
               </a:ext>
             </a:extLst>
           </p:cNvPr>
@@ -9913,7 +12022,7 @@
           <p:cNvPr id="22" name="">
             <a:extLst xmlns:a="http://schemas.openxmlformats.org/drawingml/2006/main">
               <a:ext uri="{FF2B5EF4-FFF2-40B4-BE49-F238E27FC236}">
-                <a16:creationId xmlns:a16="http://schemas.microsoft.com/office/drawing/2014/main" id="{2121F757-D4F8-4B4F-AD25-7240F9B9BA1A}"/>
+                <a16:creationId xmlns:a16="http://schemas.microsoft.com/office/drawing/2014/main" id="{8CD8D30D-D022-4A6D-8AAC-43314B502BBD}"/>
               </a:ext>
             </a:extLst>
           </p:cNvPr>
@@ -9973,7 +12082,7 @@
           <p:cNvPr id="23" name="">
             <a:extLst xmlns:a="http://schemas.openxmlformats.org/drawingml/2006/main">
               <a:ext uri="{FF2B5EF4-FFF2-40B4-BE49-F238E27FC236}">
-                <a16:creationId xmlns:a16="http://schemas.microsoft.com/office/drawing/2014/main" id="{E75E56A0-A51B-4BB4-9ABA-3F9DD88750A0}"/>
+                <a16:creationId xmlns:a16="http://schemas.microsoft.com/office/drawing/2014/main" id="{20A3F0A8-C412-4AC6-AAE1-A1CB42A9DCE2}"/>
               </a:ext>
             </a:extLst>
           </p:cNvPr>
@@ -10004,7 +12113,7 @@
           <p:cNvPr id="24" name="">
             <a:extLst xmlns:a="http://schemas.openxmlformats.org/drawingml/2006/main">
               <a:ext uri="{FF2B5EF4-FFF2-40B4-BE49-F238E27FC236}">
-                <a16:creationId xmlns:a16="http://schemas.microsoft.com/office/drawing/2014/main" id="{F94EF87A-B13F-48C1-88DF-58E3EF579603}"/>
+                <a16:creationId xmlns:a16="http://schemas.microsoft.com/office/drawing/2014/main" id="{BA29672E-D111-4BDF-A6BA-B9F8FC27A54B}"/>
               </a:ext>
             </a:extLst>
           </p:cNvPr>
@@ -10039,7 +12148,7 @@
           <p:cNvPr id="25" name="">
             <a:extLst xmlns:a="http://schemas.openxmlformats.org/drawingml/2006/main">
               <a:ext uri="{FF2B5EF4-FFF2-40B4-BE49-F238E27FC236}">
-                <a16:creationId xmlns:a16="http://schemas.microsoft.com/office/drawing/2014/main" id="{73DB2C79-3702-47C0-BC00-2C0FBA9ADCB4}"/>
+                <a16:creationId xmlns:a16="http://schemas.microsoft.com/office/drawing/2014/main" id="{05CB9F74-0B91-4DEE-84FD-43428D941D9D}"/>
               </a:ext>
             </a:extLst>
           </p:cNvPr>
@@ -10099,7 +12208,7 @@
           <p:cNvPr id="26" name="">
             <a:extLst xmlns:a="http://schemas.openxmlformats.org/drawingml/2006/main">
               <a:ext uri="{FF2B5EF4-FFF2-40B4-BE49-F238E27FC236}">
-                <a16:creationId xmlns:a16="http://schemas.microsoft.com/office/drawing/2014/main" id="{11A42EBB-D8EB-49F7-8364-D0EF60667AE2}"/>
+                <a16:creationId xmlns:a16="http://schemas.microsoft.com/office/drawing/2014/main" id="{D0727A7E-5C10-4BFC-84B7-EDD51E511F23}"/>
               </a:ext>
             </a:extLst>
           </p:cNvPr>
@@ -10130,7 +12239,7 @@
           <p:cNvPr id="27" name="">
             <a:extLst xmlns:a="http://schemas.openxmlformats.org/drawingml/2006/main">
               <a:ext uri="{FF2B5EF4-FFF2-40B4-BE49-F238E27FC236}">
-                <a16:creationId xmlns:a16="http://schemas.microsoft.com/office/drawing/2014/main" id="{88E41848-676B-45F1-931E-1988C820CD0D}"/>
+                <a16:creationId xmlns:a16="http://schemas.microsoft.com/office/drawing/2014/main" id="{D42B9227-F12D-4F25-98B6-D33B0E4ABB56}"/>
               </a:ext>
             </a:extLst>
           </p:cNvPr>
@@ -10165,7 +12274,7 @@
           <p:cNvPr id="28" name="">
             <a:extLst xmlns:a="http://schemas.openxmlformats.org/drawingml/2006/main">
               <a:ext uri="{FF2B5EF4-FFF2-40B4-BE49-F238E27FC236}">
-                <a16:creationId xmlns:a16="http://schemas.microsoft.com/office/drawing/2014/main" id="{42073E59-7835-4912-A6EB-A26A3F84C0E4}"/>
+                <a16:creationId xmlns:a16="http://schemas.microsoft.com/office/drawing/2014/main" id="{8E645403-4032-4D5A-92BF-41A6720D5E16}"/>
               </a:ext>
             </a:extLst>
           </p:cNvPr>
@@ -10369,7 +12478,7 @@
               <a:buNone/>
             </a:pPr>
             <a:r>
-              <a:t>5. Add brawler-specific tactical roles.</a:t>
+              <a:t>5. Add role-specific tactical behavior.</a:t>
             </a:r>
           </a:p>
           <a:p xmlns:a="http://schemas.openxmlformats.org/drawingml/2006/main">
@@ -10521,7 +12630,7 @@
               <a:buNone/>
             </a:pPr>
             <a:r>
-              <a:t>- Brawler role intelligence and debug visibility.</a:t>
+              <a:t>- Role intelligence and debug visibility.</a:t>
             </a:r>
           </a:p>
           <a:p xmlns:a="http://schemas.openxmlformats.org/drawingml/2006/main">
@@ -10570,7 +12679,7 @@
           <p:cNvPr id="5" name="">
             <a:extLst xmlns:a="http://schemas.openxmlformats.org/drawingml/2006/main">
               <a:ext uri="{FF2B5EF4-FFF2-40B4-BE49-F238E27FC236}">
-                <a16:creationId xmlns:a16="http://schemas.microsoft.com/office/drawing/2014/main" id="{8A2B7362-C4D7-4FF1-A680-B3376A80AFD6}"/>
+                <a16:creationId xmlns:a16="http://schemas.microsoft.com/office/drawing/2014/main" id="{B8D7D0C0-DA92-447A-8354-5F823CFBBA4E}"/>
               </a:ext>
             </a:extLst>
           </p:cNvPr>
@@ -10603,7 +12712,7 @@
           <p:cNvPr id="6" name="">
             <a:extLst xmlns:a="http://schemas.openxmlformats.org/drawingml/2006/main">
               <a:ext uri="{FF2B5EF4-FFF2-40B4-BE49-F238E27FC236}">
-                <a16:creationId xmlns:a16="http://schemas.microsoft.com/office/drawing/2014/main" id="{76635884-2C2E-4817-979F-013DA38F6F37}"/>
+                <a16:creationId xmlns:a16="http://schemas.microsoft.com/office/drawing/2014/main" id="{8CD2A2D0-165D-4C4B-825B-8254DFB3F47D}"/>
               </a:ext>
             </a:extLst>
           </p:cNvPr>
@@ -10663,7 +12772,7 @@
           <p:cNvPr id="7" name="">
             <a:extLst xmlns:a="http://schemas.openxmlformats.org/drawingml/2006/main">
               <a:ext uri="{FF2B5EF4-FFF2-40B4-BE49-F238E27FC236}">
-                <a16:creationId xmlns:a16="http://schemas.microsoft.com/office/drawing/2014/main" id="{D0820108-29A7-4552-9109-FC5F59BA3BFB}"/>
+                <a16:creationId xmlns:a16="http://schemas.microsoft.com/office/drawing/2014/main" id="{6A938868-16AD-434C-977C-52C780A41324}"/>
               </a:ext>
             </a:extLst>
           </p:cNvPr>
@@ -10696,7 +12805,7 @@
           <p:cNvPr id="8" name="">
             <a:extLst xmlns:a="http://schemas.openxmlformats.org/drawingml/2006/main">
               <a:ext uri="{FF2B5EF4-FFF2-40B4-BE49-F238E27FC236}">
-                <a16:creationId xmlns:a16="http://schemas.microsoft.com/office/drawing/2014/main" id="{241CAE31-FA5A-4D8C-8DBC-01092E125B4B}"/>
+                <a16:creationId xmlns:a16="http://schemas.microsoft.com/office/drawing/2014/main" id="{329CFDE4-1A65-42C9-AF81-BAEBCE91A922}"/>
               </a:ext>
             </a:extLst>
           </p:cNvPr>
@@ -10756,7 +12865,7 @@
           <p:cNvPr id="9" name="">
             <a:extLst xmlns:a="http://schemas.openxmlformats.org/drawingml/2006/main">
               <a:ext uri="{FF2B5EF4-FFF2-40B4-BE49-F238E27FC236}">
-                <a16:creationId xmlns:a16="http://schemas.microsoft.com/office/drawing/2014/main" id="{B435F359-B512-4E4F-8B80-4FF1A81F185D}"/>
+                <a16:creationId xmlns:a16="http://schemas.microsoft.com/office/drawing/2014/main" id="{26A98A08-03F0-4036-8504-39F0813BDC33}"/>
               </a:ext>
             </a:extLst>
           </p:cNvPr>
@@ -10789,7 +12898,7 @@
           <p:cNvPr id="10" name="">
             <a:extLst xmlns:a="http://schemas.openxmlformats.org/drawingml/2006/main">
               <a:ext uri="{FF2B5EF4-FFF2-40B4-BE49-F238E27FC236}">
-                <a16:creationId xmlns:a16="http://schemas.microsoft.com/office/drawing/2014/main" id="{96862C34-3832-4905-B419-E8B067BBE872}"/>
+                <a16:creationId xmlns:a16="http://schemas.microsoft.com/office/drawing/2014/main" id="{CF08F1BF-7134-4581-B340-FF4ADDF24C76}"/>
               </a:ext>
             </a:extLst>
           </p:cNvPr>
@@ -10849,7 +12958,7 @@
           <p:cNvPr id="11" name="">
             <a:extLst xmlns:a="http://schemas.openxmlformats.org/drawingml/2006/main">
               <a:ext uri="{FF2B5EF4-FFF2-40B4-BE49-F238E27FC236}">
-                <a16:creationId xmlns:a16="http://schemas.microsoft.com/office/drawing/2014/main" id="{A47EC3E2-91CF-4147-B4EB-A7576AA81B85}"/>
+                <a16:creationId xmlns:a16="http://schemas.microsoft.com/office/drawing/2014/main" id="{78CD8EEB-E403-434B-BFD2-1147E0EFA098}"/>
               </a:ext>
             </a:extLst>
           </p:cNvPr>
@@ -10882,7 +12991,7 @@
           <p:cNvPr id="12" name="">
             <a:extLst xmlns:a="http://schemas.openxmlformats.org/drawingml/2006/main">
               <a:ext uri="{FF2B5EF4-FFF2-40B4-BE49-F238E27FC236}">
-                <a16:creationId xmlns:a16="http://schemas.microsoft.com/office/drawing/2014/main" id="{21C011FC-8967-4130-9DB0-0350E888BB8D}"/>
+                <a16:creationId xmlns:a16="http://schemas.microsoft.com/office/drawing/2014/main" id="{B3E1F7F7-D010-4200-A594-A1B5E640FCBF}"/>
               </a:ext>
             </a:extLst>
           </p:cNvPr>
@@ -10942,7 +13051,7 @@
           <p:cNvPr id="13" name="">
             <a:extLst xmlns:a="http://schemas.openxmlformats.org/drawingml/2006/main">
               <a:ext uri="{FF2B5EF4-FFF2-40B4-BE49-F238E27FC236}">
-                <a16:creationId xmlns:a16="http://schemas.microsoft.com/office/drawing/2014/main" id="{3BAE6716-F85B-40E9-8D0B-704BA956D75C}"/>
+                <a16:creationId xmlns:a16="http://schemas.microsoft.com/office/drawing/2014/main" id="{18D3E0E2-D1CD-4F98-A9E7-C2C041BBC00C}"/>
               </a:ext>
             </a:extLst>
           </p:cNvPr>
@@ -10975,7 +13084,7 @@
           <p:cNvPr id="14" name="">
             <a:extLst xmlns:a="http://schemas.openxmlformats.org/drawingml/2006/main">
               <a:ext uri="{FF2B5EF4-FFF2-40B4-BE49-F238E27FC236}">
-                <a16:creationId xmlns:a16="http://schemas.microsoft.com/office/drawing/2014/main" id="{4778D8C5-FEED-48D5-82BA-B40D5BFEB856}"/>
+                <a16:creationId xmlns:a16="http://schemas.microsoft.com/office/drawing/2014/main" id="{11E86F76-D2EB-41A0-8272-64AAB8A97C3B}"/>
               </a:ext>
             </a:extLst>
           </p:cNvPr>
@@ -11025,7 +13134,7 @@
                 <a:ea typeface="Calibri"/>
                 <a:cs typeface="Calibri"/>
               </a:rPr>
-              <a:t>Brawler roles</a:t>
+              <a:t>Role AI</a:t>
             </a:r>
           </a:p>
         </p:txBody>
@@ -11035,7 +13144,7 @@
           <p:cNvPr id="15" name="">
             <a:extLst xmlns:a="http://schemas.openxmlformats.org/drawingml/2006/main">
               <a:ext uri="{FF2B5EF4-FFF2-40B4-BE49-F238E27FC236}">
-                <a16:creationId xmlns:a16="http://schemas.microsoft.com/office/drawing/2014/main" id="{2E281C08-C073-41EA-92A1-7177021B23A3}"/>
+                <a16:creationId xmlns:a16="http://schemas.microsoft.com/office/drawing/2014/main" id="{37A8C759-759E-483D-8749-CD0ECC9F9C2B}"/>
               </a:ext>
             </a:extLst>
           </p:cNvPr>
@@ -11068,7 +13177,7 @@
           <p:cNvPr id="16" name="">
             <a:extLst xmlns:a="http://schemas.openxmlformats.org/drawingml/2006/main">
               <a:ext uri="{FF2B5EF4-FFF2-40B4-BE49-F238E27FC236}">
-                <a16:creationId xmlns:a16="http://schemas.microsoft.com/office/drawing/2014/main" id="{C04DCB1A-3FE4-46B1-B00F-8A0B494B1316}"/>
+                <a16:creationId xmlns:a16="http://schemas.microsoft.com/office/drawing/2014/main" id="{08D87926-00C4-4E4B-8696-5961CBE79F95}"/>
               </a:ext>
             </a:extLst>
           </p:cNvPr>
@@ -11174,124 +13283,82 @@
       </p:sp>
       <p:sp>
         <p:nvSpPr>
-          <p:cNvPr id="4" name="Rectangle 1">
-            <a:extLst xmlns:a="http://schemas.openxmlformats.org/drawingml/2006/main">
-              <a:ext uri="{FF2B5EF4-FFF2-40B4-BE49-F238E27FC236}">
-                <a16:creationId xmlns:a16="http://schemas.microsoft.com/office/drawing/2014/main" id="{112865FB-3B6E-8F6F-7C4B-FE83EA29652A}"/>
-              </a:ext>
-            </a:extLst>
-          </p:cNvPr>
-          <p:cNvSpPr>
-            <a:spLocks xmlns:a="http://schemas.openxmlformats.org/drawingml/2006/main" noGrp="1"/>
-          </p:cNvSpPr>
-          <p:nvPr>
-            <p:ph idx="1"/>
-          </p:nvPr>
-        </p:nvSpPr>
-        <p:spPr>
-          <a:xfrm xmlns:a="http://schemas.openxmlformats.org/drawingml/2006/main">
-            <a:off x="1319981" y="1663326"/>
-            <a:ext cx="5914376" cy="3030728"/>
+          <p:cNvPr id="3" name="">
+            <a:extLst xmlns:a="http://schemas.openxmlformats.org/drawingml/2006/main">
+              <a:ext uri="{FF2B5EF4-FFF2-40B4-BE49-F238E27FC236}">
+                <a16:creationId xmlns:a16="http://schemas.microsoft.com/office/drawing/2014/main" id="{A5CE8A93-DC8E-419B-89DF-3947EC78AF78}"/>
+              </a:ext>
+            </a:extLst>
+          </p:cNvPr>
+          <p:cNvSpPr>
+            <a:spLocks xmlns:a="http://schemas.openxmlformats.org/drawingml/2006/main" noGrp="1"/>
+          </p:cNvSpPr>
+          <p:nvPr/>
+        </p:nvSpPr>
+        <p:spPr>
+          <a:xfrm xmlns:a="http://schemas.openxmlformats.org/drawingml/2006/main">
+            <a:off x="914400" y="1485900"/>
+            <a:ext cx="9525000" cy="323850"/>
           </a:xfrm>
           <a:prstGeom xmlns:a="http://schemas.openxmlformats.org/drawingml/2006/main" prst="rect">
             <a:avLst/>
           </a:prstGeom>
           <a:noFill xmlns:a="http://schemas.openxmlformats.org/drawingml/2006/main"/>
-          <a:ln xmlns:a="http://schemas.openxmlformats.org/drawingml/2006/main">
+          <a:ln xmlns:a="http://schemas.openxmlformats.org/drawingml/2006/main" w="0">
             <a:noFill/>
-          </a:ln>
-        </p:spPr>
-        <p:txBody>
-          <a:bodyPr xmlns:a="http://schemas.openxmlformats.org/drawingml/2006/main" vert="horz" wrap="none" lIns="91440" tIns="45720" rIns="91440" bIns="45720" anchor="ctr">
-            <a:spAutoFit/>
-          </a:bodyPr>
-          <a:lstStyle xmlns:a="http://schemas.openxmlformats.org/drawingml/2006/main"/>
-          <a:p xmlns:a="http://schemas.openxmlformats.org/drawingml/2006/main">
-            <a:pPr>
-              <a:spcAft>
-                <a:spcPct val="0"/>
-              </a:spcAft>
-              <a:buNone/>
-            </a:pPr>
-            <a:r>
-              <a:t>Related ideas: FSMs, behavior trees,</a:t>
-            </a:r>
-          </a:p>
-          <a:p xmlns:a="http://schemas.openxmlformats.org/drawingml/2006/main">
-            <a:pPr>
-              <a:spcAft>
-                <a:spcPct val="0"/>
-              </a:spcAft>
-              <a:buNone/>
-            </a:pPr>
-            <a:r>
-              <a:t>utility AI, blackboards, and A* pathfinding.</a:t>
-            </a:r>
-          </a:p>
-          <a:p xmlns:a="http://schemas.openxmlformats.org/drawingml/2006/main">
-            <a:pPr>
-              <a:spcAft>
-                <a:spcPct val="0"/>
-              </a:spcAft>
-              <a:buNone/>
-            </a:pPr>
-            <a:r>
-              <a:t>Selected approach: utility AI + blackboard</a:t>
-            </a:r>
-          </a:p>
-          <a:p xmlns:a="http://schemas.openxmlformats.org/drawingml/2006/main">
-            <a:pPr>
-              <a:spcAft>
-                <a:spcPct val="0"/>
-              </a:spcAft>
-              <a:buNone/>
-            </a:pPr>
-            <a:r>
-              <a:t>for flexible, inspectable decisions.</a:t>
-            </a:r>
-          </a:p>
-          <a:p xmlns:a="http://schemas.openxmlformats.org/drawingml/2006/main">
-            <a:pPr>
-              <a:spcAft>
-                <a:spcPct val="0"/>
-              </a:spcAft>
-              <a:buNone/>
-            </a:pPr>
-            <a:r>
-              <a:t>Gap: scripted bots fail when objectives,</a:t>
-            </a:r>
-          </a:p>
-          <a:p xmlns:a="http://schemas.openxmlformats.org/drawingml/2006/main">
-            <a:pPr>
-              <a:spcAft>
-                <a:spcPct val="0"/>
-              </a:spcAft>
-              <a:buNone/>
-            </a:pPr>
-            <a:r>
-              <a:t>roles, hazards, and team strategy interact.</a:t>
-            </a:r>
-          </a:p>
-        </p:txBody>
-      </p:sp>
-      <p:sp>
-        <p:nvSpPr>
-          <p:cNvPr id="5" name="">
-            <a:extLst xmlns:a="http://schemas.openxmlformats.org/drawingml/2006/main">
-              <a:ext uri="{FF2B5EF4-FFF2-40B4-BE49-F238E27FC236}">
-                <a16:creationId xmlns:a16="http://schemas.microsoft.com/office/drawing/2014/main" id="{4F4FBB39-10FD-410D-92C7-B2564D8EE428}"/>
-              </a:ext>
-            </a:extLst>
-          </p:cNvPr>
-          <p:cNvSpPr>
-            <a:spLocks xmlns:a="http://schemas.openxmlformats.org/drawingml/2006/main" noGrp="1"/>
-          </p:cNvSpPr>
-          <p:nvPr/>
-        </p:nvSpPr>
-        <p:spPr>
-          <a:xfrm xmlns:a="http://schemas.openxmlformats.org/drawingml/2006/main">
-            <a:off x="7239000" y="4333875"/>
-            <a:ext cx="2667000" cy="1000125"/>
+            <a:prstDash val="solid"/>
+          </a:ln>
+        </p:spPr>
+        <p:txBody>
+          <a:bodyPr xmlns:a="http://schemas.openxmlformats.org/drawingml/2006/main" wrap="square" lIns="38100" tIns="19050" rIns="38100" bIns="19050" anchor="t"/>
+          <a:lstStyle xmlns:a="http://schemas.openxmlformats.org/drawingml/2006/main"/>
+          <a:p xmlns:a="http://schemas.openxmlformats.org/drawingml/2006/main">
+            <a:pPr algn="l">
+              <a:lnSpc>
+                <a:spcPct val="105000"/>
+              </a:lnSpc>
+              <a:buNone/>
+              <a:defRPr sz="1125" b="0" i="0">
+                <a:solidFill>
+                  <a:srgbClr val="444444"/>
+                </a:solidFill>
+                <a:latin typeface="Calibri"/>
+                <a:ea typeface="Calibri"/>
+                <a:cs typeface="Calibri"/>
+              </a:defRPr>
+            </a:pPr>
+            <a:r>
+              <a:rPr sz="1125" b="0" i="0">
+                <a:solidFill>
+                  <a:srgbClr val="444444"/>
+                </a:solidFill>
+                <a:latin typeface="Calibri"/>
+                <a:ea typeface="Calibri"/>
+                <a:cs typeface="Calibri"/>
+              </a:rPr>
+              <a:t>The project compares common bot-authoring patterns and chooses an explainable hybrid architecture suitable for real-time games.</a:t>
+            </a:r>
+          </a:p>
+        </p:txBody>
+      </p:sp>
+      <p:sp>
+        <p:nvSpPr>
+          <p:cNvPr id="4" name="">
+            <a:extLst xmlns:a="http://schemas.openxmlformats.org/drawingml/2006/main">
+              <a:ext uri="{FF2B5EF4-FFF2-40B4-BE49-F238E27FC236}">
+                <a16:creationId xmlns:a16="http://schemas.microsoft.com/office/drawing/2014/main" id="{3E62EF09-25D2-4558-AC2A-588042C18D3D}"/>
+              </a:ext>
+            </a:extLst>
+          </p:cNvPr>
+          <p:cNvSpPr>
+            <a:spLocks xmlns:a="http://schemas.openxmlformats.org/drawingml/2006/main" noGrp="1"/>
+          </p:cNvSpPr>
+          <p:nvPr/>
+        </p:nvSpPr>
+        <p:spPr>
+          <a:xfrm xmlns:a="http://schemas.openxmlformats.org/drawingml/2006/main">
+            <a:off x="819150" y="2076450"/>
+            <a:ext cx="2952750" cy="1200150"/>
           </a:xfrm>
           <a:prstGeom xmlns:a="http://schemas.openxmlformats.org/drawingml/2006/main" prst="rect">
             <a:avLst/>
@@ -11309,22 +13376,574 @@
       </p:sp>
       <p:sp>
         <p:nvSpPr>
+          <p:cNvPr id="5" name="">
+            <a:extLst xmlns:a="http://schemas.openxmlformats.org/drawingml/2006/main">
+              <a:ext uri="{FF2B5EF4-FFF2-40B4-BE49-F238E27FC236}">
+                <a16:creationId xmlns:a16="http://schemas.microsoft.com/office/drawing/2014/main" id="{F0AE04C3-29EC-4FEF-8FDF-1DEA6644C4AE}"/>
+              </a:ext>
+            </a:extLst>
+          </p:cNvPr>
+          <p:cNvSpPr>
+            <a:spLocks xmlns:a="http://schemas.openxmlformats.org/drawingml/2006/main" noGrp="1"/>
+          </p:cNvSpPr>
+          <p:nvPr/>
+        </p:nvSpPr>
+        <p:spPr>
+          <a:xfrm xmlns:a="http://schemas.openxmlformats.org/drawingml/2006/main">
+            <a:off x="819150" y="2076450"/>
+            <a:ext cx="66675" cy="1200150"/>
+          </a:xfrm>
+          <a:prstGeom xmlns:a="http://schemas.openxmlformats.org/drawingml/2006/main" prst="rect">
+            <a:avLst/>
+          </a:prstGeom>
+          <a:solidFill xmlns:a="http://schemas.openxmlformats.org/drawingml/2006/main">
+            <a:srgbClr val="20384F"/>
+          </a:solidFill>
+          <a:ln xmlns:a="http://schemas.openxmlformats.org/drawingml/2006/main" w="0">
+            <a:noFill/>
+            <a:prstDash val="solid"/>
+          </a:ln>
+        </p:spPr>
+      </p:sp>
+      <p:sp>
+        <p:nvSpPr>
           <p:cNvPr id="6" name="">
             <a:extLst xmlns:a="http://schemas.openxmlformats.org/drawingml/2006/main">
               <a:ext uri="{FF2B5EF4-FFF2-40B4-BE49-F238E27FC236}">
-                <a16:creationId xmlns:a16="http://schemas.microsoft.com/office/drawing/2014/main" id="{E3AB752F-7C49-4071-8F62-43BA62E3859A}"/>
-              </a:ext>
-            </a:extLst>
-          </p:cNvPr>
-          <p:cNvSpPr>
-            <a:spLocks xmlns:a="http://schemas.openxmlformats.org/drawingml/2006/main" noGrp="1"/>
-          </p:cNvSpPr>
-          <p:nvPr/>
-        </p:nvSpPr>
-        <p:spPr>
-          <a:xfrm xmlns:a="http://schemas.openxmlformats.org/drawingml/2006/main">
-            <a:off x="7239000" y="4333875"/>
-            <a:ext cx="66675" cy="1000125"/>
+                <a16:creationId xmlns:a16="http://schemas.microsoft.com/office/drawing/2014/main" id="{054EB44D-D5FF-4685-9F31-71978E51E822}"/>
+              </a:ext>
+            </a:extLst>
+          </p:cNvPr>
+          <p:cNvSpPr>
+            <a:spLocks xmlns:a="http://schemas.openxmlformats.org/drawingml/2006/main" noGrp="1"/>
+          </p:cNvSpPr>
+          <p:nvPr/>
+        </p:nvSpPr>
+        <p:spPr>
+          <a:xfrm xmlns:a="http://schemas.openxmlformats.org/drawingml/2006/main">
+            <a:off x="990600" y="2190750"/>
+            <a:ext cx="2647950" cy="209550"/>
+          </a:xfrm>
+          <a:prstGeom xmlns:a="http://schemas.openxmlformats.org/drawingml/2006/main" prst="rect">
+            <a:avLst/>
+          </a:prstGeom>
+          <a:noFill xmlns:a="http://schemas.openxmlformats.org/drawingml/2006/main"/>
+          <a:ln xmlns:a="http://schemas.openxmlformats.org/drawingml/2006/main" w="0">
+            <a:noFill/>
+            <a:prstDash val="solid"/>
+          </a:ln>
+        </p:spPr>
+        <p:txBody>
+          <a:bodyPr xmlns:a="http://schemas.openxmlformats.org/drawingml/2006/main" wrap="square" lIns="38100" tIns="19050" rIns="38100" bIns="19050" anchor="t"/>
+          <a:lstStyle xmlns:a="http://schemas.openxmlformats.org/drawingml/2006/main"/>
+          <a:p xmlns:a="http://schemas.openxmlformats.org/drawingml/2006/main">
+            <a:pPr algn="l">
+              <a:lnSpc>
+                <a:spcPct val="105000"/>
+              </a:lnSpc>
+              <a:buNone/>
+              <a:defRPr sz="975" b="1" i="0">
+                <a:solidFill>
+                  <a:srgbClr val="20384F"/>
+                </a:solidFill>
+                <a:latin typeface="Calibri"/>
+                <a:ea typeface="Calibri"/>
+                <a:cs typeface="Calibri"/>
+              </a:defRPr>
+            </a:pPr>
+            <a:r>
+              <a:rPr sz="975" b="1" i="0">
+                <a:solidFill>
+                  <a:srgbClr val="20384F"/>
+                </a:solidFill>
+                <a:latin typeface="Calibri"/>
+                <a:ea typeface="Calibri"/>
+                <a:cs typeface="Calibri"/>
+              </a:rPr>
+              <a:t>Finite State Machines</a:t>
+            </a:r>
+          </a:p>
+        </p:txBody>
+      </p:sp>
+      <p:sp>
+        <p:nvSpPr>
+          <p:cNvPr id="7" name="">
+            <a:extLst xmlns:a="http://schemas.openxmlformats.org/drawingml/2006/main">
+              <a:ext uri="{FF2B5EF4-FFF2-40B4-BE49-F238E27FC236}">
+                <a16:creationId xmlns:a16="http://schemas.microsoft.com/office/drawing/2014/main" id="{CB485A4B-8A4B-44AB-AF7E-1E28C98BCD43}"/>
+              </a:ext>
+            </a:extLst>
+          </p:cNvPr>
+          <p:cNvSpPr>
+            <a:spLocks xmlns:a="http://schemas.openxmlformats.org/drawingml/2006/main" noGrp="1"/>
+          </p:cNvSpPr>
+          <p:nvPr/>
+        </p:nvSpPr>
+        <p:spPr>
+          <a:xfrm xmlns:a="http://schemas.openxmlformats.org/drawingml/2006/main">
+            <a:off x="990600" y="2457450"/>
+            <a:ext cx="2647950" cy="762000"/>
+          </a:xfrm>
+          <a:prstGeom xmlns:a="http://schemas.openxmlformats.org/drawingml/2006/main" prst="rect">
+            <a:avLst/>
+          </a:prstGeom>
+          <a:noFill xmlns:a="http://schemas.openxmlformats.org/drawingml/2006/main"/>
+          <a:ln xmlns:a="http://schemas.openxmlformats.org/drawingml/2006/main" w="0">
+            <a:noFill/>
+            <a:prstDash val="solid"/>
+          </a:ln>
+        </p:spPr>
+        <p:txBody>
+          <a:bodyPr xmlns:a="http://schemas.openxmlformats.org/drawingml/2006/main" wrap="square" lIns="38100" tIns="19050" rIns="38100" bIns="19050" anchor="t"/>
+          <a:lstStyle xmlns:a="http://schemas.openxmlformats.org/drawingml/2006/main"/>
+          <a:p xmlns:a="http://schemas.openxmlformats.org/drawingml/2006/main">
+            <a:pPr algn="l">
+              <a:lnSpc>
+                <a:spcPct val="102000"/>
+              </a:lnSpc>
+              <a:buNone/>
+              <a:defRPr sz="810" b="0" i="0">
+                <a:solidFill>
+                  <a:srgbClr val="444444"/>
+                </a:solidFill>
+                <a:latin typeface="Calibri"/>
+                <a:ea typeface="Calibri"/>
+                <a:cs typeface="Calibri"/>
+              </a:defRPr>
+            </a:pPr>
+            <a:r>
+              <a:rPr sz="810" b="0" i="0">
+                <a:solidFill>
+                  <a:srgbClr val="444444"/>
+                </a:solidFill>
+                <a:latin typeface="Calibri"/>
+                <a:ea typeface="Calibri"/>
+                <a:cs typeface="Calibri"/>
+              </a:rPr>
+              <a:t>Clear and easy to debug, but transitions become hard to scale when objectives, hazards, roles, and teamplay interact.</a:t>
+            </a:r>
+          </a:p>
+        </p:txBody>
+      </p:sp>
+      <p:sp>
+        <p:nvSpPr>
+          <p:cNvPr id="8" name="">
+            <a:extLst xmlns:a="http://schemas.openxmlformats.org/drawingml/2006/main">
+              <a:ext uri="{FF2B5EF4-FFF2-40B4-BE49-F238E27FC236}">
+                <a16:creationId xmlns:a16="http://schemas.microsoft.com/office/drawing/2014/main" id="{B6DA0434-DFCC-4AB7-B4EA-5C39FD45A443}"/>
+              </a:ext>
+            </a:extLst>
+          </p:cNvPr>
+          <p:cNvSpPr>
+            <a:spLocks xmlns:a="http://schemas.openxmlformats.org/drawingml/2006/main" noGrp="1"/>
+          </p:cNvSpPr>
+          <p:nvPr/>
+        </p:nvSpPr>
+        <p:spPr>
+          <a:xfrm xmlns:a="http://schemas.openxmlformats.org/drawingml/2006/main">
+            <a:off x="4248150" y="2076450"/>
+            <a:ext cx="2952750" cy="1200150"/>
+          </a:xfrm>
+          <a:prstGeom xmlns:a="http://schemas.openxmlformats.org/drawingml/2006/main" prst="rect">
+            <a:avLst/>
+          </a:prstGeom>
+          <a:solidFill xmlns:a="http://schemas.openxmlformats.org/drawingml/2006/main">
+            <a:srgbClr val="F8FAFC"/>
+          </a:solidFill>
+          <a:ln xmlns:a="http://schemas.openxmlformats.org/drawingml/2006/main" w="9525">
+            <a:solidFill>
+              <a:srgbClr val="D8DDE7"/>
+            </a:solidFill>
+            <a:prstDash val="solid"/>
+          </a:ln>
+        </p:spPr>
+      </p:sp>
+      <p:sp>
+        <p:nvSpPr>
+          <p:cNvPr id="9" name="">
+            <a:extLst xmlns:a="http://schemas.openxmlformats.org/drawingml/2006/main">
+              <a:ext uri="{FF2B5EF4-FFF2-40B4-BE49-F238E27FC236}">
+                <a16:creationId xmlns:a16="http://schemas.microsoft.com/office/drawing/2014/main" id="{54C98136-346C-4993-8FA7-33CB2AE180FE}"/>
+              </a:ext>
+            </a:extLst>
+          </p:cNvPr>
+          <p:cNvSpPr>
+            <a:spLocks xmlns:a="http://schemas.openxmlformats.org/drawingml/2006/main" noGrp="1"/>
+          </p:cNvSpPr>
+          <p:nvPr/>
+        </p:nvSpPr>
+        <p:spPr>
+          <a:xfrm xmlns:a="http://schemas.openxmlformats.org/drawingml/2006/main">
+            <a:off x="4248150" y="2076450"/>
+            <a:ext cx="66675" cy="1200150"/>
+          </a:xfrm>
+          <a:prstGeom xmlns:a="http://schemas.openxmlformats.org/drawingml/2006/main" prst="rect">
+            <a:avLst/>
+          </a:prstGeom>
+          <a:solidFill xmlns:a="http://schemas.openxmlformats.org/drawingml/2006/main">
+            <a:srgbClr val="F4A51C"/>
+          </a:solidFill>
+          <a:ln xmlns:a="http://schemas.openxmlformats.org/drawingml/2006/main" w="0">
+            <a:noFill/>
+            <a:prstDash val="solid"/>
+          </a:ln>
+        </p:spPr>
+      </p:sp>
+      <p:sp>
+        <p:nvSpPr>
+          <p:cNvPr id="10" name="">
+            <a:extLst xmlns:a="http://schemas.openxmlformats.org/drawingml/2006/main">
+              <a:ext uri="{FF2B5EF4-FFF2-40B4-BE49-F238E27FC236}">
+                <a16:creationId xmlns:a16="http://schemas.microsoft.com/office/drawing/2014/main" id="{30CFD57E-7E04-4CA7-BA28-E024E7F0FA9B}"/>
+              </a:ext>
+            </a:extLst>
+          </p:cNvPr>
+          <p:cNvSpPr>
+            <a:spLocks xmlns:a="http://schemas.openxmlformats.org/drawingml/2006/main" noGrp="1"/>
+          </p:cNvSpPr>
+          <p:nvPr/>
+        </p:nvSpPr>
+        <p:spPr>
+          <a:xfrm xmlns:a="http://schemas.openxmlformats.org/drawingml/2006/main">
+            <a:off x="4419600" y="2190750"/>
+            <a:ext cx="2647950" cy="209550"/>
+          </a:xfrm>
+          <a:prstGeom xmlns:a="http://schemas.openxmlformats.org/drawingml/2006/main" prst="rect">
+            <a:avLst/>
+          </a:prstGeom>
+          <a:noFill xmlns:a="http://schemas.openxmlformats.org/drawingml/2006/main"/>
+          <a:ln xmlns:a="http://schemas.openxmlformats.org/drawingml/2006/main" w="0">
+            <a:noFill/>
+            <a:prstDash val="solid"/>
+          </a:ln>
+        </p:spPr>
+        <p:txBody>
+          <a:bodyPr xmlns:a="http://schemas.openxmlformats.org/drawingml/2006/main" wrap="square" lIns="38100" tIns="19050" rIns="38100" bIns="19050" anchor="t"/>
+          <a:lstStyle xmlns:a="http://schemas.openxmlformats.org/drawingml/2006/main"/>
+          <a:p xmlns:a="http://schemas.openxmlformats.org/drawingml/2006/main">
+            <a:pPr algn="l">
+              <a:lnSpc>
+                <a:spcPct val="105000"/>
+              </a:lnSpc>
+              <a:buNone/>
+              <a:defRPr sz="975" b="1" i="0">
+                <a:solidFill>
+                  <a:srgbClr val="F4A51C"/>
+                </a:solidFill>
+                <a:latin typeface="Calibri"/>
+                <a:ea typeface="Calibri"/>
+                <a:cs typeface="Calibri"/>
+              </a:defRPr>
+            </a:pPr>
+            <a:r>
+              <a:rPr sz="975" b="1" i="0">
+                <a:solidFill>
+                  <a:srgbClr val="F4A51C"/>
+                </a:solidFill>
+                <a:latin typeface="Calibri"/>
+                <a:ea typeface="Calibri"/>
+                <a:cs typeface="Calibri"/>
+              </a:rPr>
+              <a:t>Behavior Trees</a:t>
+            </a:r>
+          </a:p>
+        </p:txBody>
+      </p:sp>
+      <p:sp>
+        <p:nvSpPr>
+          <p:cNvPr id="11" name="">
+            <a:extLst xmlns:a="http://schemas.openxmlformats.org/drawingml/2006/main">
+              <a:ext uri="{FF2B5EF4-FFF2-40B4-BE49-F238E27FC236}">
+                <a16:creationId xmlns:a16="http://schemas.microsoft.com/office/drawing/2014/main" id="{291C3407-1FD7-45EC-9EF5-7E7F0F45FB39}"/>
+              </a:ext>
+            </a:extLst>
+          </p:cNvPr>
+          <p:cNvSpPr>
+            <a:spLocks xmlns:a="http://schemas.openxmlformats.org/drawingml/2006/main" noGrp="1"/>
+          </p:cNvSpPr>
+          <p:nvPr/>
+        </p:nvSpPr>
+        <p:spPr>
+          <a:xfrm xmlns:a="http://schemas.openxmlformats.org/drawingml/2006/main">
+            <a:off x="4419600" y="2457450"/>
+            <a:ext cx="2647950" cy="762000"/>
+          </a:xfrm>
+          <a:prstGeom xmlns:a="http://schemas.openxmlformats.org/drawingml/2006/main" prst="rect">
+            <a:avLst/>
+          </a:prstGeom>
+          <a:noFill xmlns:a="http://schemas.openxmlformats.org/drawingml/2006/main"/>
+          <a:ln xmlns:a="http://schemas.openxmlformats.org/drawingml/2006/main" w="0">
+            <a:noFill/>
+            <a:prstDash val="solid"/>
+          </a:ln>
+        </p:spPr>
+        <p:txBody>
+          <a:bodyPr xmlns:a="http://schemas.openxmlformats.org/drawingml/2006/main" wrap="square" lIns="38100" tIns="19050" rIns="38100" bIns="19050" anchor="t"/>
+          <a:lstStyle xmlns:a="http://schemas.openxmlformats.org/drawingml/2006/main"/>
+          <a:p xmlns:a="http://schemas.openxmlformats.org/drawingml/2006/main">
+            <a:pPr algn="l">
+              <a:lnSpc>
+                <a:spcPct val="102000"/>
+              </a:lnSpc>
+              <a:buNone/>
+              <a:defRPr sz="810" b="0" i="0">
+                <a:solidFill>
+                  <a:srgbClr val="444444"/>
+                </a:solidFill>
+                <a:latin typeface="Calibri"/>
+                <a:ea typeface="Calibri"/>
+                <a:cs typeface="Calibri"/>
+              </a:defRPr>
+            </a:pPr>
+            <a:r>
+              <a:rPr sz="810" b="0" i="0">
+                <a:solidFill>
+                  <a:srgbClr val="444444"/>
+                </a:solidFill>
+                <a:latin typeface="Calibri"/>
+                <a:ea typeface="Calibri"/>
+                <a:cs typeface="Calibri"/>
+              </a:rPr>
+              <a:t>Useful for structured behavior, but large trees often repeat checks and can hide why one action won over another.</a:t>
+            </a:r>
+          </a:p>
+        </p:txBody>
+      </p:sp>
+      <p:sp>
+        <p:nvSpPr>
+          <p:cNvPr id="12" name="">
+            <a:extLst xmlns:a="http://schemas.openxmlformats.org/drawingml/2006/main">
+              <a:ext uri="{FF2B5EF4-FFF2-40B4-BE49-F238E27FC236}">
+                <a16:creationId xmlns:a16="http://schemas.microsoft.com/office/drawing/2014/main" id="{3557AF6C-17C9-4F12-873C-57B3A5FC1BF6}"/>
+              </a:ext>
+            </a:extLst>
+          </p:cNvPr>
+          <p:cNvSpPr>
+            <a:spLocks xmlns:a="http://schemas.openxmlformats.org/drawingml/2006/main" noGrp="1"/>
+          </p:cNvSpPr>
+          <p:nvPr/>
+        </p:nvSpPr>
+        <p:spPr>
+          <a:xfrm xmlns:a="http://schemas.openxmlformats.org/drawingml/2006/main">
+            <a:off x="7677150" y="2076450"/>
+            <a:ext cx="2952750" cy="1200150"/>
+          </a:xfrm>
+          <a:prstGeom xmlns:a="http://schemas.openxmlformats.org/drawingml/2006/main" prst="rect">
+            <a:avLst/>
+          </a:prstGeom>
+          <a:solidFill xmlns:a="http://schemas.openxmlformats.org/drawingml/2006/main">
+            <a:srgbClr val="F8FAFC"/>
+          </a:solidFill>
+          <a:ln xmlns:a="http://schemas.openxmlformats.org/drawingml/2006/main" w="9525">
+            <a:solidFill>
+              <a:srgbClr val="D8DDE7"/>
+            </a:solidFill>
+            <a:prstDash val="solid"/>
+          </a:ln>
+        </p:spPr>
+      </p:sp>
+      <p:sp>
+        <p:nvSpPr>
+          <p:cNvPr id="13" name="">
+            <a:extLst xmlns:a="http://schemas.openxmlformats.org/drawingml/2006/main">
+              <a:ext uri="{FF2B5EF4-FFF2-40B4-BE49-F238E27FC236}">
+                <a16:creationId xmlns:a16="http://schemas.microsoft.com/office/drawing/2014/main" id="{1DFF7450-DA04-47E9-84A0-CF9766976107}"/>
+              </a:ext>
+            </a:extLst>
+          </p:cNvPr>
+          <p:cNvSpPr>
+            <a:spLocks xmlns:a="http://schemas.openxmlformats.org/drawingml/2006/main" noGrp="1"/>
+          </p:cNvSpPr>
+          <p:nvPr/>
+        </p:nvSpPr>
+        <p:spPr>
+          <a:xfrm xmlns:a="http://schemas.openxmlformats.org/drawingml/2006/main">
+            <a:off x="7677150" y="2076450"/>
+            <a:ext cx="66675" cy="1200150"/>
+          </a:xfrm>
+          <a:prstGeom xmlns:a="http://schemas.openxmlformats.org/drawingml/2006/main" prst="rect">
+            <a:avLst/>
+          </a:prstGeom>
+          <a:solidFill xmlns:a="http://schemas.openxmlformats.org/drawingml/2006/main">
+            <a:srgbClr val="16824A"/>
+          </a:solidFill>
+          <a:ln xmlns:a="http://schemas.openxmlformats.org/drawingml/2006/main" w="0">
+            <a:noFill/>
+            <a:prstDash val="solid"/>
+          </a:ln>
+        </p:spPr>
+      </p:sp>
+      <p:sp>
+        <p:nvSpPr>
+          <p:cNvPr id="14" name="">
+            <a:extLst xmlns:a="http://schemas.openxmlformats.org/drawingml/2006/main">
+              <a:ext uri="{FF2B5EF4-FFF2-40B4-BE49-F238E27FC236}">
+                <a16:creationId xmlns:a16="http://schemas.microsoft.com/office/drawing/2014/main" id="{88CB91CF-1F7E-412B-A52B-0A7D1BCF48FB}"/>
+              </a:ext>
+            </a:extLst>
+          </p:cNvPr>
+          <p:cNvSpPr>
+            <a:spLocks xmlns:a="http://schemas.openxmlformats.org/drawingml/2006/main" noGrp="1"/>
+          </p:cNvSpPr>
+          <p:nvPr/>
+        </p:nvSpPr>
+        <p:spPr>
+          <a:xfrm xmlns:a="http://schemas.openxmlformats.org/drawingml/2006/main">
+            <a:off x="7848600" y="2190750"/>
+            <a:ext cx="2647950" cy="209550"/>
+          </a:xfrm>
+          <a:prstGeom xmlns:a="http://schemas.openxmlformats.org/drawingml/2006/main" prst="rect">
+            <a:avLst/>
+          </a:prstGeom>
+          <a:noFill xmlns:a="http://schemas.openxmlformats.org/drawingml/2006/main"/>
+          <a:ln xmlns:a="http://schemas.openxmlformats.org/drawingml/2006/main" w="0">
+            <a:noFill/>
+            <a:prstDash val="solid"/>
+          </a:ln>
+        </p:spPr>
+        <p:txBody>
+          <a:bodyPr xmlns:a="http://schemas.openxmlformats.org/drawingml/2006/main" wrap="square" lIns="38100" tIns="19050" rIns="38100" bIns="19050" anchor="t"/>
+          <a:lstStyle xmlns:a="http://schemas.openxmlformats.org/drawingml/2006/main"/>
+          <a:p xmlns:a="http://schemas.openxmlformats.org/drawingml/2006/main">
+            <a:pPr algn="l">
+              <a:lnSpc>
+                <a:spcPct val="105000"/>
+              </a:lnSpc>
+              <a:buNone/>
+              <a:defRPr sz="975" b="1" i="0">
+                <a:solidFill>
+                  <a:srgbClr val="16824A"/>
+                </a:solidFill>
+                <a:latin typeface="Calibri"/>
+                <a:ea typeface="Calibri"/>
+                <a:cs typeface="Calibri"/>
+              </a:defRPr>
+            </a:pPr>
+            <a:r>
+              <a:rPr sz="975" b="1" i="0">
+                <a:solidFill>
+                  <a:srgbClr val="16824A"/>
+                </a:solidFill>
+                <a:latin typeface="Calibri"/>
+                <a:ea typeface="Calibri"/>
+                <a:cs typeface="Calibri"/>
+              </a:rPr>
+              <a:t>Utility AI</a:t>
+            </a:r>
+          </a:p>
+        </p:txBody>
+      </p:sp>
+      <p:sp>
+        <p:nvSpPr>
+          <p:cNvPr id="15" name="">
+            <a:extLst xmlns:a="http://schemas.openxmlformats.org/drawingml/2006/main">
+              <a:ext uri="{FF2B5EF4-FFF2-40B4-BE49-F238E27FC236}">
+                <a16:creationId xmlns:a16="http://schemas.microsoft.com/office/drawing/2014/main" id="{A69E693F-1868-41D3-9F39-97659E7E9BE3}"/>
+              </a:ext>
+            </a:extLst>
+          </p:cNvPr>
+          <p:cNvSpPr>
+            <a:spLocks xmlns:a="http://schemas.openxmlformats.org/drawingml/2006/main" noGrp="1"/>
+          </p:cNvSpPr>
+          <p:nvPr/>
+        </p:nvSpPr>
+        <p:spPr>
+          <a:xfrm xmlns:a="http://schemas.openxmlformats.org/drawingml/2006/main">
+            <a:off x="7848600" y="2457450"/>
+            <a:ext cx="2647950" cy="762000"/>
+          </a:xfrm>
+          <a:prstGeom xmlns:a="http://schemas.openxmlformats.org/drawingml/2006/main" prst="rect">
+            <a:avLst/>
+          </a:prstGeom>
+          <a:noFill xmlns:a="http://schemas.openxmlformats.org/drawingml/2006/main"/>
+          <a:ln xmlns:a="http://schemas.openxmlformats.org/drawingml/2006/main" w="0">
+            <a:noFill/>
+            <a:prstDash val="solid"/>
+          </a:ln>
+        </p:spPr>
+        <p:txBody>
+          <a:bodyPr xmlns:a="http://schemas.openxmlformats.org/drawingml/2006/main" wrap="square" lIns="38100" tIns="19050" rIns="38100" bIns="19050" anchor="t"/>
+          <a:lstStyle xmlns:a="http://schemas.openxmlformats.org/drawingml/2006/main"/>
+          <a:p xmlns:a="http://schemas.openxmlformats.org/drawingml/2006/main">
+            <a:pPr algn="l">
+              <a:lnSpc>
+                <a:spcPct val="102000"/>
+              </a:lnSpc>
+              <a:buNone/>
+              <a:defRPr sz="810" b="0" i="0">
+                <a:solidFill>
+                  <a:srgbClr val="444444"/>
+                </a:solidFill>
+                <a:latin typeface="Calibri"/>
+                <a:ea typeface="Calibri"/>
+                <a:cs typeface="Calibri"/>
+              </a:defRPr>
+            </a:pPr>
+            <a:r>
+              <a:rPr sz="810" b="0" i="0">
+                <a:solidFill>
+                  <a:srgbClr val="444444"/>
+                </a:solidFill>
+                <a:latin typeface="Calibri"/>
+                <a:ea typeface="Calibri"/>
+                <a:cs typeface="Calibri"/>
+              </a:rPr>
+              <a:t>Actions are scored from context. This fits dynamic combat because targeting, safety, and objectives can compete numerically.</a:t>
+            </a:r>
+          </a:p>
+        </p:txBody>
+      </p:sp>
+      <p:sp>
+        <p:nvSpPr>
+          <p:cNvPr id="16" name="">
+            <a:extLst xmlns:a="http://schemas.openxmlformats.org/drawingml/2006/main">
+              <a:ext uri="{FF2B5EF4-FFF2-40B4-BE49-F238E27FC236}">
+                <a16:creationId xmlns:a16="http://schemas.microsoft.com/office/drawing/2014/main" id="{38C8BFB6-52D1-4776-8AB1-DF2DD131122C}"/>
+              </a:ext>
+            </a:extLst>
+          </p:cNvPr>
+          <p:cNvSpPr>
+            <a:spLocks xmlns:a="http://schemas.openxmlformats.org/drawingml/2006/main" noGrp="1"/>
+          </p:cNvSpPr>
+          <p:nvPr/>
+        </p:nvSpPr>
+        <p:spPr>
+          <a:xfrm xmlns:a="http://schemas.openxmlformats.org/drawingml/2006/main">
+            <a:off x="1809750" y="3752850"/>
+            <a:ext cx="7810500" cy="1123950"/>
+          </a:xfrm>
+          <a:prstGeom xmlns:a="http://schemas.openxmlformats.org/drawingml/2006/main" prst="rect">
+            <a:avLst/>
+          </a:prstGeom>
+          <a:solidFill xmlns:a="http://schemas.openxmlformats.org/drawingml/2006/main">
+            <a:srgbClr val="F8FAFC"/>
+          </a:solidFill>
+          <a:ln xmlns:a="http://schemas.openxmlformats.org/drawingml/2006/main" w="9525">
+            <a:solidFill>
+              <a:srgbClr val="D8DDE7"/>
+            </a:solidFill>
+            <a:prstDash val="solid"/>
+          </a:ln>
+        </p:spPr>
+      </p:sp>
+      <p:sp>
+        <p:nvSpPr>
+          <p:cNvPr id="17" name="">
+            <a:extLst xmlns:a="http://schemas.openxmlformats.org/drawingml/2006/main">
+              <a:ext uri="{FF2B5EF4-FFF2-40B4-BE49-F238E27FC236}">
+                <a16:creationId xmlns:a16="http://schemas.microsoft.com/office/drawing/2014/main" id="{67B249F6-FF51-402B-9475-8569798344D5}"/>
+              </a:ext>
+            </a:extLst>
+          </p:cNvPr>
+          <p:cNvSpPr>
+            <a:spLocks xmlns:a="http://schemas.openxmlformats.org/drawingml/2006/main" noGrp="1"/>
+          </p:cNvSpPr>
+          <p:nvPr/>
+        </p:nvSpPr>
+        <p:spPr>
+          <a:xfrm xmlns:a="http://schemas.openxmlformats.org/drawingml/2006/main">
+            <a:off x="1809750" y="3752850"/>
+            <a:ext cx="66675" cy="1123950"/>
           </a:xfrm>
           <a:prstGeom xmlns:a="http://schemas.openxmlformats.org/drawingml/2006/main" prst="rect">
             <a:avLst/>
@@ -11340,22 +13959,22 @@
       </p:sp>
       <p:sp>
         <p:nvSpPr>
-          <p:cNvPr id="7" name="">
-            <a:extLst xmlns:a="http://schemas.openxmlformats.org/drawingml/2006/main">
-              <a:ext uri="{FF2B5EF4-FFF2-40B4-BE49-F238E27FC236}">
-                <a16:creationId xmlns:a16="http://schemas.microsoft.com/office/drawing/2014/main" id="{624A6373-9229-4D8D-A91A-106BB44FB4B7}"/>
-              </a:ext>
-            </a:extLst>
-          </p:cNvPr>
-          <p:cNvSpPr>
-            <a:spLocks xmlns:a="http://schemas.openxmlformats.org/drawingml/2006/main" noGrp="1"/>
-          </p:cNvSpPr>
-          <p:nvPr/>
-        </p:nvSpPr>
-        <p:spPr>
-          <a:xfrm xmlns:a="http://schemas.openxmlformats.org/drawingml/2006/main">
-            <a:off x="7486650" y="4533900"/>
-            <a:ext cx="2095500" cy="228600"/>
+          <p:cNvPr id="18" name="">
+            <a:extLst xmlns:a="http://schemas.openxmlformats.org/drawingml/2006/main">
+              <a:ext uri="{FF2B5EF4-FFF2-40B4-BE49-F238E27FC236}">
+                <a16:creationId xmlns:a16="http://schemas.microsoft.com/office/drawing/2014/main" id="{0DEE4953-0205-494E-AE20-90284DC04E30}"/>
+              </a:ext>
+            </a:extLst>
+          </p:cNvPr>
+          <p:cNvSpPr>
+            <a:spLocks xmlns:a="http://schemas.openxmlformats.org/drawingml/2006/main" noGrp="1"/>
+          </p:cNvSpPr>
+          <p:nvPr/>
+        </p:nvSpPr>
+        <p:spPr>
+          <a:xfrm xmlns:a="http://schemas.openxmlformats.org/drawingml/2006/main">
+            <a:off x="1981200" y="3867150"/>
+            <a:ext cx="7505700" cy="209550"/>
           </a:xfrm>
           <a:prstGeom xmlns:a="http://schemas.openxmlformats.org/drawingml/2006/main" prst="rect">
             <a:avLst/>
@@ -11375,7 +13994,7 @@
                 <a:spcPct val="105000"/>
               </a:lnSpc>
               <a:buNone/>
-              <a:defRPr sz="1275" b="1" i="0">
+              <a:defRPr sz="1050" b="1" i="0">
                 <a:solidFill>
                   <a:srgbClr val="C01855"/>
                 </a:solidFill>
@@ -11385,7 +14004,7 @@
               </a:defRPr>
             </a:pPr>
             <a:r>
-              <a:rPr sz="1275" b="1" i="0">
+              <a:rPr sz="1050" b="1" i="0">
                 <a:solidFill>
                   <a:srgbClr val="C01855"/>
                 </a:solidFill>
@@ -11400,22 +14019,22 @@
       </p:sp>
       <p:sp>
         <p:nvSpPr>
-          <p:cNvPr id="8" name="">
-            <a:extLst xmlns:a="http://schemas.openxmlformats.org/drawingml/2006/main">
-              <a:ext uri="{FF2B5EF4-FFF2-40B4-BE49-F238E27FC236}">
-                <a16:creationId xmlns:a16="http://schemas.microsoft.com/office/drawing/2014/main" id="{9969858C-5F77-45AD-8BAE-EC51E927470E}"/>
-              </a:ext>
-            </a:extLst>
-          </p:cNvPr>
-          <p:cNvSpPr>
-            <a:spLocks xmlns:a="http://schemas.openxmlformats.org/drawingml/2006/main" noGrp="1"/>
-          </p:cNvSpPr>
-          <p:nvPr/>
-        </p:nvSpPr>
-        <p:spPr>
-          <a:xfrm xmlns:a="http://schemas.openxmlformats.org/drawingml/2006/main">
-            <a:off x="7486650" y="4895850"/>
-            <a:ext cx="2095500" cy="342900"/>
+          <p:cNvPr id="19" name="">
+            <a:extLst xmlns:a="http://schemas.openxmlformats.org/drawingml/2006/main">
+              <a:ext uri="{FF2B5EF4-FFF2-40B4-BE49-F238E27FC236}">
+                <a16:creationId xmlns:a16="http://schemas.microsoft.com/office/drawing/2014/main" id="{A6AED3E7-83EC-4CFF-9E44-9E550CFF31E4}"/>
+              </a:ext>
+            </a:extLst>
+          </p:cNvPr>
+          <p:cNvSpPr>
+            <a:spLocks xmlns:a="http://schemas.openxmlformats.org/drawingml/2006/main" noGrp="1"/>
+          </p:cNvSpPr>
+          <p:nvPr/>
+        </p:nvSpPr>
+        <p:spPr>
+          <a:xfrm xmlns:a="http://schemas.openxmlformats.org/drawingml/2006/main">
+            <a:off x="1981200" y="4133850"/>
+            <a:ext cx="7505700" cy="685800"/>
           </a:xfrm>
           <a:prstGeom xmlns:a="http://schemas.openxmlformats.org/drawingml/2006/main" prst="rect">
             <a:avLst/>
@@ -11432,10 +14051,10 @@
           <a:p xmlns:a="http://schemas.openxmlformats.org/drawingml/2006/main">
             <a:pPr algn="l">
               <a:lnSpc>
-                <a:spcPct val="105000"/>
+                <a:spcPct val="102000"/>
               </a:lnSpc>
               <a:buNone/>
-              <a:defRPr sz="938" b="0" i="0">
+              <a:defRPr sz="840" b="0" i="0">
                 <a:solidFill>
                   <a:srgbClr val="444444"/>
                 </a:solidFill>
@@ -11445,7 +14064,7 @@
               </a:defRPr>
             </a:pPr>
             <a:r>
-              <a:rPr sz="938" b="0" i="0">
+              <a:rPr sz="840" b="0" i="0">
                 <a:solidFill>
                   <a:srgbClr val="444444"/>
                 </a:solidFill>
@@ -11453,7 +14072,7 @@
                 <a:ea typeface="Calibri"/>
                 <a:cs typeface="Calibri"/>
               </a:rPr>
-              <a:t>Authored, inspectable game AI now; optional ML experiments later.</a:t>
+              <a:t>Utility scoring + team blackboard + A* navigation + validation telemetry. The system remains authored, inspectable, and tunable; ML can be explored later without replacing the core.</a:t>
             </a:r>
           </a:p>
         </p:txBody>
@@ -11509,119 +14128,425 @@
       </p:sp>
       <p:sp>
         <p:nvSpPr>
-          <p:cNvPr id="4" name="Rectangle 1">
-            <a:extLst xmlns:a="http://schemas.openxmlformats.org/drawingml/2006/main">
-              <a:ext uri="{FF2B5EF4-FFF2-40B4-BE49-F238E27FC236}">
-                <a16:creationId xmlns:a16="http://schemas.microsoft.com/office/drawing/2014/main" id="{8324EED9-8B6B-7CAC-9011-17B1859177C7}"/>
-              </a:ext>
-            </a:extLst>
-          </p:cNvPr>
-          <p:cNvSpPr>
-            <a:spLocks xmlns:a="http://schemas.openxmlformats.org/drawingml/2006/main" noGrp="1"/>
-          </p:cNvSpPr>
-          <p:nvPr>
-            <p:ph idx="1"/>
-          </p:nvPr>
-        </p:nvSpPr>
-        <p:spPr>
-          <a:xfrm xmlns:a="http://schemas.openxmlformats.org/drawingml/2006/main">
-            <a:off x="956187" y="1764266"/>
-            <a:ext cx="8561703" cy="1371600"/>
+          <p:cNvPr id="3" name="">
+            <a:extLst xmlns:a="http://schemas.openxmlformats.org/drawingml/2006/main">
+              <a:ext uri="{FF2B5EF4-FFF2-40B4-BE49-F238E27FC236}">
+                <a16:creationId xmlns:a16="http://schemas.microsoft.com/office/drawing/2014/main" id="{BACF1F66-BC38-467D-82C9-4D8E4ED33371}"/>
+              </a:ext>
+            </a:extLst>
+          </p:cNvPr>
+          <p:cNvSpPr>
+            <a:spLocks xmlns:a="http://schemas.openxmlformats.org/drawingml/2006/main" noGrp="1"/>
+          </p:cNvSpPr>
+          <p:nvPr/>
+        </p:nvSpPr>
+        <p:spPr>
+          <a:xfrm xmlns:a="http://schemas.openxmlformats.org/drawingml/2006/main">
+            <a:off x="914400" y="1581150"/>
+            <a:ext cx="9620250" cy="400050"/>
           </a:xfrm>
           <a:prstGeom xmlns:a="http://schemas.openxmlformats.org/drawingml/2006/main" prst="rect">
             <a:avLst/>
           </a:prstGeom>
           <a:noFill xmlns:a="http://schemas.openxmlformats.org/drawingml/2006/main"/>
-          <a:ln xmlns:a="http://schemas.openxmlformats.org/drawingml/2006/main">
+          <a:ln xmlns:a="http://schemas.openxmlformats.org/drawingml/2006/main" w="0">
             <a:noFill/>
-          </a:ln>
-        </p:spPr>
-        <p:txBody>
-          <a:bodyPr xmlns:a="http://schemas.openxmlformats.org/drawingml/2006/main" vert="horz" wrap="none" lIns="91440" tIns="45720" rIns="91440" bIns="45720" anchor="ctr">
-            <a:spAutoFit/>
-          </a:bodyPr>
-          <a:lstStyle xmlns:a="http://schemas.openxmlformats.org/drawingml/2006/main"/>
-          <a:p xmlns:a="http://schemas.openxmlformats.org/drawingml/2006/main">
-            <a:pPr>
+            <a:prstDash val="solid"/>
+          </a:ln>
+        </p:spPr>
+        <p:txBody>
+          <a:bodyPr xmlns:a="http://schemas.openxmlformats.org/drawingml/2006/main" wrap="square" lIns="38100" tIns="19050" rIns="38100" bIns="19050" anchor="t"/>
+          <a:lstStyle xmlns:a="http://schemas.openxmlformats.org/drawingml/2006/main"/>
+          <a:p xmlns:a="http://schemas.openxmlformats.org/drawingml/2006/main">
+            <a:pPr algn="l">
               <a:lnSpc>
-                <a:spcPct val="100000"/>
+                <a:spcPct val="105000"/>
               </a:lnSpc>
-              <a:spcBef>
-                <a:spcPct val="0"/>
-              </a:spcBef>
-              <a:spcAft>
-                <a:spcPct val="0"/>
-              </a:spcAft>
-              <a:buNone/>
-            </a:pPr>
-            <a:r>
-              <a:t>Layered AI stack with one clear responsibility per layer.</a:t>
-            </a:r>
-          </a:p>
-          <a:p xmlns:a="http://schemas.openxmlformats.org/drawingml/2006/main">
-            <a:pPr marL="0" marR="0" lvl="0" indent="0" algn="l" defTabSz="914400">
-              <a:lnSpc>
-                <a:spcPct val="100000"/>
-              </a:lnSpc>
-              <a:spcBef>
-                <a:spcPct val="0"/>
-              </a:spcBef>
-              <a:spcAft>
-                <a:spcPct val="0"/>
-              </a:spcAft>
-              <a:buClrTx/>
-              <a:buSzTx/>
-              <a:buFontTx/>
-              <a:buChar char="•"/>
-            </a:pPr>
-            <a:r>
-              <a:t>New brawlers, maps, modes, and difficulty profiles</a:t>
-            </a:r>
-          </a:p>
-          <a:p xmlns:a="http://schemas.openxmlformats.org/drawingml/2006/main">
-            <a:pPr marL="0" marR="0" lvl="0" indent="0" algn="l" defTabSz="914400">
-              <a:lnSpc>
-                <a:spcPct val="100000"/>
-              </a:lnSpc>
-              <a:spcBef>
-                <a:spcPct val="0"/>
-              </a:spcBef>
-              <a:spcAft>
-                <a:spcPct val="0"/>
-              </a:spcAft>
-              <a:buClrTx/>
-              <a:buSzTx/>
-              <a:buFontTx/>
-              <a:buChar char="•"/>
-            </a:pPr>
-            <a:r>
-              <a:t>plug into the same decision pipeline.</a:t>
-            </a:r>
-          </a:p>
-        </p:txBody>
-      </p:sp>
-      <p:sp>
-        <p:nvSpPr>
-          <p:cNvPr id="5" name="">
-            <a:extLst xmlns:a="http://schemas.openxmlformats.org/drawingml/2006/main">
-              <a:ext uri="{FF2B5EF4-FFF2-40B4-BE49-F238E27FC236}">
-                <a16:creationId xmlns:a16="http://schemas.microsoft.com/office/drawing/2014/main" id="{A0530D11-0E5D-4414-8714-5E76478D87D2}"/>
-              </a:ext>
-            </a:extLst>
-          </p:cNvPr>
-          <p:cNvSpPr>
-            <a:spLocks xmlns:a="http://schemas.openxmlformats.org/drawingml/2006/main" noGrp="1"/>
-          </p:cNvSpPr>
-          <p:nvPr/>
-        </p:nvSpPr>
-        <p:spPr>
-          <a:xfrm xmlns:a="http://schemas.openxmlformats.org/drawingml/2006/main">
-            <a:off x="1066800" y="4000500"/>
-            <a:ext cx="1428750" cy="523875"/>
+              <a:buNone/>
+              <a:defRPr sz="1163" b="0" i="0">
+                <a:solidFill>
+                  <a:srgbClr val="444444"/>
+                </a:solidFill>
+                <a:latin typeface="Calibri"/>
+                <a:ea typeface="Calibri"/>
+                <a:cs typeface="Calibri"/>
+              </a:defRPr>
+            </a:pPr>
+            <a:r>
+              <a:rPr sz="1163" b="0" i="0">
+                <a:solidFill>
+                  <a:srgbClr val="444444"/>
+                </a:solidFill>
+                <a:latin typeface="Calibri"/>
+                <a:ea typeface="Calibri"/>
+                <a:cs typeface="Calibri"/>
+              </a:rPr>
+              <a:t>The proposed system treats every bot as a modular decision agent. Game rules, map data, tuning assets, and team state feed the same runtime pipeline.</a:t>
+            </a:r>
+          </a:p>
+        </p:txBody>
+      </p:sp>
+      <p:sp>
+        <p:nvSpPr>
+          <p:cNvPr id="4" name="">
+            <a:extLst xmlns:a="http://schemas.openxmlformats.org/drawingml/2006/main">
+              <a:ext uri="{FF2B5EF4-FFF2-40B4-BE49-F238E27FC236}">
+                <a16:creationId xmlns:a16="http://schemas.microsoft.com/office/drawing/2014/main" id="{ED8CB889-497D-4E50-8A46-1FFC001C1E37}"/>
+              </a:ext>
+            </a:extLst>
+          </p:cNvPr>
+          <p:cNvSpPr>
+            <a:spLocks xmlns:a="http://schemas.openxmlformats.org/drawingml/2006/main" noGrp="1"/>
+          </p:cNvSpPr>
+          <p:nvPr/>
+        </p:nvSpPr>
+        <p:spPr>
+          <a:xfrm xmlns:a="http://schemas.openxmlformats.org/drawingml/2006/main">
+            <a:off x="838200" y="2857500"/>
+            <a:ext cx="1466850" cy="552450"/>
           </a:xfrm>
           <a:prstGeom xmlns:a="http://schemas.openxmlformats.org/drawingml/2006/main" prst="roundRect">
             <a:avLst>
-              <a:gd name="adj" fmla="val 10909"/>
+              <a:gd name="adj" fmla="val 10345"/>
+            </a:avLst>
+          </a:prstGeom>
+          <a:solidFill xmlns:a="http://schemas.openxmlformats.org/drawingml/2006/main">
+            <a:srgbClr val="0F8FB3"/>
+          </a:solidFill>
+          <a:ln xmlns:a="http://schemas.openxmlformats.org/drawingml/2006/main" w="9525">
+            <a:solidFill>
+              <a:srgbClr val="0F8FB3"/>
+            </a:solidFill>
+            <a:prstDash val="solid"/>
+          </a:ln>
+        </p:spPr>
+      </p:sp>
+      <p:sp>
+        <p:nvSpPr>
+          <p:cNvPr id="5" name="">
+            <a:extLst xmlns:a="http://schemas.openxmlformats.org/drawingml/2006/main">
+              <a:ext uri="{FF2B5EF4-FFF2-40B4-BE49-F238E27FC236}">
+                <a16:creationId xmlns:a16="http://schemas.microsoft.com/office/drawing/2014/main" id="{E10FC473-D270-48C0-BB34-345E35E6CFC5}"/>
+              </a:ext>
+            </a:extLst>
+          </p:cNvPr>
+          <p:cNvSpPr>
+            <a:spLocks xmlns:a="http://schemas.openxmlformats.org/drawingml/2006/main" noGrp="1"/>
+          </p:cNvSpPr>
+          <p:nvPr/>
+        </p:nvSpPr>
+        <p:spPr>
+          <a:xfrm xmlns:a="http://schemas.openxmlformats.org/drawingml/2006/main">
+            <a:off x="914400" y="2952750"/>
+            <a:ext cx="1314450" cy="381000"/>
+          </a:xfrm>
+          <a:prstGeom xmlns:a="http://schemas.openxmlformats.org/drawingml/2006/main" prst="rect">
+            <a:avLst/>
+          </a:prstGeom>
+          <a:noFill xmlns:a="http://schemas.openxmlformats.org/drawingml/2006/main"/>
+          <a:ln xmlns:a="http://schemas.openxmlformats.org/drawingml/2006/main" w="0">
+            <a:noFill/>
+            <a:prstDash val="solid"/>
+          </a:ln>
+        </p:spPr>
+        <p:txBody>
+          <a:bodyPr xmlns:a="http://schemas.openxmlformats.org/drawingml/2006/main" wrap="square" lIns="38100" tIns="19050" rIns="38100" bIns="19050" anchor="ctr"/>
+          <a:lstStyle xmlns:a="http://schemas.openxmlformats.org/drawingml/2006/main"/>
+          <a:p xmlns:a="http://schemas.openxmlformats.org/drawingml/2006/main">
+            <a:pPr algn="ctr">
+              <a:lnSpc>
+                <a:spcPct val="105000"/>
+              </a:lnSpc>
+              <a:buNone/>
+              <a:defRPr sz="975" b="1" i="0">
+                <a:solidFill>
+                  <a:srgbClr val="FFFFFF"/>
+                </a:solidFill>
+                <a:latin typeface="Calibri"/>
+                <a:ea typeface="Calibri"/>
+                <a:cs typeface="Calibri"/>
+              </a:defRPr>
+            </a:pPr>
+            <a:r>
+              <a:rPr sz="975" b="1" i="0">
+                <a:solidFill>
+                  <a:srgbClr val="FFFFFF"/>
+                </a:solidFill>
+                <a:latin typeface="Calibri"/>
+                <a:ea typeface="Calibri"/>
+                <a:cs typeface="Calibri"/>
+              </a:rPr>
+              <a:t>Perception</a:t>
+            </a:r>
+          </a:p>
+        </p:txBody>
+      </p:sp>
+      <p:sp>
+        <p:nvSpPr>
+          <p:cNvPr id="6" name="">
+            <a:extLst xmlns:a="http://schemas.openxmlformats.org/drawingml/2006/main">
+              <a:ext uri="{FF2B5EF4-FFF2-40B4-BE49-F238E27FC236}">
+                <a16:creationId xmlns:a16="http://schemas.microsoft.com/office/drawing/2014/main" id="{BBB06AA7-17A7-4804-8179-01D51D9B2292}"/>
+              </a:ext>
+            </a:extLst>
+          </p:cNvPr>
+          <p:cNvSpPr>
+            <a:spLocks xmlns:a="http://schemas.openxmlformats.org/drawingml/2006/main" noGrp="1"/>
+          </p:cNvSpPr>
+          <p:nvPr/>
+        </p:nvSpPr>
+        <p:spPr>
+          <a:xfrm xmlns:a="http://schemas.openxmlformats.org/drawingml/2006/main">
+            <a:off x="2743200" y="2857500"/>
+            <a:ext cx="1466850" cy="552450"/>
+          </a:xfrm>
+          <a:prstGeom xmlns:a="http://schemas.openxmlformats.org/drawingml/2006/main" prst="roundRect">
+            <a:avLst>
+              <a:gd name="adj" fmla="val 10345"/>
+            </a:avLst>
+          </a:prstGeom>
+          <a:solidFill xmlns:a="http://schemas.openxmlformats.org/drawingml/2006/main">
+            <a:srgbClr val="16824A"/>
+          </a:solidFill>
+          <a:ln xmlns:a="http://schemas.openxmlformats.org/drawingml/2006/main" w="9525">
+            <a:solidFill>
+              <a:srgbClr val="16824A"/>
+            </a:solidFill>
+            <a:prstDash val="solid"/>
+          </a:ln>
+        </p:spPr>
+      </p:sp>
+      <p:sp>
+        <p:nvSpPr>
+          <p:cNvPr id="7" name="">
+            <a:extLst xmlns:a="http://schemas.openxmlformats.org/drawingml/2006/main">
+              <a:ext uri="{FF2B5EF4-FFF2-40B4-BE49-F238E27FC236}">
+                <a16:creationId xmlns:a16="http://schemas.microsoft.com/office/drawing/2014/main" id="{76EEFB82-2326-4278-AE60-E12A3C16C9E3}"/>
+              </a:ext>
+            </a:extLst>
+          </p:cNvPr>
+          <p:cNvSpPr>
+            <a:spLocks xmlns:a="http://schemas.openxmlformats.org/drawingml/2006/main" noGrp="1"/>
+          </p:cNvSpPr>
+          <p:nvPr/>
+        </p:nvSpPr>
+        <p:spPr>
+          <a:xfrm xmlns:a="http://schemas.openxmlformats.org/drawingml/2006/main">
+            <a:off x="2819400" y="2952750"/>
+            <a:ext cx="1314450" cy="381000"/>
+          </a:xfrm>
+          <a:prstGeom xmlns:a="http://schemas.openxmlformats.org/drawingml/2006/main" prst="rect">
+            <a:avLst/>
+          </a:prstGeom>
+          <a:noFill xmlns:a="http://schemas.openxmlformats.org/drawingml/2006/main"/>
+          <a:ln xmlns:a="http://schemas.openxmlformats.org/drawingml/2006/main" w="0">
+            <a:noFill/>
+            <a:prstDash val="solid"/>
+          </a:ln>
+        </p:spPr>
+        <p:txBody>
+          <a:bodyPr xmlns:a="http://schemas.openxmlformats.org/drawingml/2006/main" wrap="square" lIns="38100" tIns="19050" rIns="38100" bIns="19050" anchor="ctr"/>
+          <a:lstStyle xmlns:a="http://schemas.openxmlformats.org/drawingml/2006/main"/>
+          <a:p xmlns:a="http://schemas.openxmlformats.org/drawingml/2006/main">
+            <a:pPr algn="ctr">
+              <a:lnSpc>
+                <a:spcPct val="105000"/>
+              </a:lnSpc>
+              <a:buNone/>
+              <a:defRPr sz="975" b="1" i="0">
+                <a:solidFill>
+                  <a:srgbClr val="FFFFFF"/>
+                </a:solidFill>
+                <a:latin typeface="Calibri"/>
+                <a:ea typeface="Calibri"/>
+                <a:cs typeface="Calibri"/>
+              </a:defRPr>
+            </a:pPr>
+            <a:r>
+              <a:rPr sz="975" b="1" i="0">
+                <a:solidFill>
+                  <a:srgbClr val="FFFFFF"/>
+                </a:solidFill>
+                <a:latin typeface="Calibri"/>
+                <a:ea typeface="Calibri"/>
+                <a:cs typeface="Calibri"/>
+              </a:rPr>
+              <a:t>Utility</a:t>
+            </a:r>
+          </a:p>
+          <a:p xmlns:a="http://schemas.openxmlformats.org/drawingml/2006/main">
+            <a:pPr algn="ctr">
+              <a:lnSpc>
+                <a:spcPct val="105000"/>
+              </a:lnSpc>
+              <a:buNone/>
+              <a:defRPr sz="975" b="1" i="0">
+                <a:solidFill>
+                  <a:srgbClr val="FFFFFF"/>
+                </a:solidFill>
+                <a:latin typeface="Calibri"/>
+                <a:ea typeface="Calibri"/>
+                <a:cs typeface="Calibri"/>
+              </a:defRPr>
+            </a:pPr>
+            <a:r>
+              <a:rPr sz="975" b="1" i="0">
+                <a:solidFill>
+                  <a:srgbClr val="FFFFFF"/>
+                </a:solidFill>
+                <a:latin typeface="Calibri"/>
+                <a:ea typeface="Calibri"/>
+                <a:cs typeface="Calibri"/>
+              </a:rPr>
+              <a:t>Scoring</a:t>
+            </a:r>
+          </a:p>
+        </p:txBody>
+      </p:sp>
+      <p:sp>
+        <p:nvSpPr>
+          <p:cNvPr id="8" name="">
+            <a:extLst xmlns:a="http://schemas.openxmlformats.org/drawingml/2006/main">
+              <a:ext uri="{FF2B5EF4-FFF2-40B4-BE49-F238E27FC236}">
+                <a16:creationId xmlns:a16="http://schemas.microsoft.com/office/drawing/2014/main" id="{799A5441-5A74-4E17-800B-719ED32D0681}"/>
+              </a:ext>
+            </a:extLst>
+          </p:cNvPr>
+          <p:cNvSpPr>
+            <a:spLocks xmlns:a="http://schemas.openxmlformats.org/drawingml/2006/main" noGrp="1"/>
+          </p:cNvSpPr>
+          <p:nvPr/>
+        </p:nvSpPr>
+        <p:spPr>
+          <a:xfrm xmlns:a="http://schemas.openxmlformats.org/drawingml/2006/main">
+            <a:off x="4648200" y="2857500"/>
+            <a:ext cx="1466850" cy="552450"/>
+          </a:xfrm>
+          <a:prstGeom xmlns:a="http://schemas.openxmlformats.org/drawingml/2006/main" prst="roundRect">
+            <a:avLst>
+              <a:gd name="adj" fmla="val 10345"/>
+            </a:avLst>
+          </a:prstGeom>
+          <a:solidFill xmlns:a="http://schemas.openxmlformats.org/drawingml/2006/main">
+            <a:srgbClr val="20384F"/>
+          </a:solidFill>
+          <a:ln xmlns:a="http://schemas.openxmlformats.org/drawingml/2006/main" w="9525">
+            <a:solidFill>
+              <a:srgbClr val="20384F"/>
+            </a:solidFill>
+            <a:prstDash val="solid"/>
+          </a:ln>
+        </p:spPr>
+      </p:sp>
+      <p:sp>
+        <p:nvSpPr>
+          <p:cNvPr id="9" name="">
+            <a:extLst xmlns:a="http://schemas.openxmlformats.org/drawingml/2006/main">
+              <a:ext uri="{FF2B5EF4-FFF2-40B4-BE49-F238E27FC236}">
+                <a16:creationId xmlns:a16="http://schemas.microsoft.com/office/drawing/2014/main" id="{EB9742E5-6D42-4E75-960A-8E96EEAA72EE}"/>
+              </a:ext>
+            </a:extLst>
+          </p:cNvPr>
+          <p:cNvSpPr>
+            <a:spLocks xmlns:a="http://schemas.openxmlformats.org/drawingml/2006/main" noGrp="1"/>
+          </p:cNvSpPr>
+          <p:nvPr/>
+        </p:nvSpPr>
+        <p:spPr>
+          <a:xfrm xmlns:a="http://schemas.openxmlformats.org/drawingml/2006/main">
+            <a:off x="4724400" y="2952750"/>
+            <a:ext cx="1314450" cy="381000"/>
+          </a:xfrm>
+          <a:prstGeom xmlns:a="http://schemas.openxmlformats.org/drawingml/2006/main" prst="rect">
+            <a:avLst/>
+          </a:prstGeom>
+          <a:noFill xmlns:a="http://schemas.openxmlformats.org/drawingml/2006/main"/>
+          <a:ln xmlns:a="http://schemas.openxmlformats.org/drawingml/2006/main" w="0">
+            <a:noFill/>
+            <a:prstDash val="solid"/>
+          </a:ln>
+        </p:spPr>
+        <p:txBody>
+          <a:bodyPr xmlns:a="http://schemas.openxmlformats.org/drawingml/2006/main" wrap="square" lIns="38100" tIns="19050" rIns="38100" bIns="19050" anchor="ctr"/>
+          <a:lstStyle xmlns:a="http://schemas.openxmlformats.org/drawingml/2006/main"/>
+          <a:p xmlns:a="http://schemas.openxmlformats.org/drawingml/2006/main">
+            <a:pPr algn="ctr">
+              <a:lnSpc>
+                <a:spcPct val="105000"/>
+              </a:lnSpc>
+              <a:buNone/>
+              <a:defRPr sz="975" b="1" i="0">
+                <a:solidFill>
+                  <a:srgbClr val="FFFFFF"/>
+                </a:solidFill>
+                <a:latin typeface="Calibri"/>
+                <a:ea typeface="Calibri"/>
+                <a:cs typeface="Calibri"/>
+              </a:defRPr>
+            </a:pPr>
+            <a:r>
+              <a:rPr sz="975" b="1" i="0">
+                <a:solidFill>
+                  <a:srgbClr val="FFFFFF"/>
+                </a:solidFill>
+                <a:latin typeface="Calibri"/>
+                <a:ea typeface="Calibri"/>
+                <a:cs typeface="Calibri"/>
+              </a:rPr>
+              <a:t>Team</a:t>
+            </a:r>
+          </a:p>
+          <a:p xmlns:a="http://schemas.openxmlformats.org/drawingml/2006/main">
+            <a:pPr algn="ctr">
+              <a:lnSpc>
+                <a:spcPct val="105000"/>
+              </a:lnSpc>
+              <a:buNone/>
+              <a:defRPr sz="975" b="1" i="0">
+                <a:solidFill>
+                  <a:srgbClr val="FFFFFF"/>
+                </a:solidFill>
+                <a:latin typeface="Calibri"/>
+                <a:ea typeface="Calibri"/>
+                <a:cs typeface="Calibri"/>
+              </a:defRPr>
+            </a:pPr>
+            <a:r>
+              <a:rPr sz="975" b="1" i="0">
+                <a:solidFill>
+                  <a:srgbClr val="FFFFFF"/>
+                </a:solidFill>
+                <a:latin typeface="Calibri"/>
+                <a:ea typeface="Calibri"/>
+                <a:cs typeface="Calibri"/>
+              </a:rPr>
+              <a:t>Blackboard</a:t>
+            </a:r>
+          </a:p>
+        </p:txBody>
+      </p:sp>
+      <p:sp>
+        <p:nvSpPr>
+          <p:cNvPr id="10" name="">
+            <a:extLst xmlns:a="http://schemas.openxmlformats.org/drawingml/2006/main">
+              <a:ext uri="{FF2B5EF4-FFF2-40B4-BE49-F238E27FC236}">
+                <a16:creationId xmlns:a16="http://schemas.microsoft.com/office/drawing/2014/main" id="{243638C7-9483-4980-AD9D-8F05258547DD}"/>
+              </a:ext>
+            </a:extLst>
+          </p:cNvPr>
+          <p:cNvSpPr>
+            <a:spLocks xmlns:a="http://schemas.openxmlformats.org/drawingml/2006/main" noGrp="1"/>
+          </p:cNvSpPr>
+          <p:nvPr/>
+        </p:nvSpPr>
+        <p:spPr>
+          <a:xfrm xmlns:a="http://schemas.openxmlformats.org/drawingml/2006/main">
+            <a:off x="6553200" y="2857500"/>
+            <a:ext cx="1466850" cy="552450"/>
+          </a:xfrm>
+          <a:prstGeom xmlns:a="http://schemas.openxmlformats.org/drawingml/2006/main" prst="roundRect">
+            <a:avLst>
+              <a:gd name="adj" fmla="val 10345"/>
             </a:avLst>
           </a:prstGeom>
           <a:solidFill xmlns:a="http://schemas.openxmlformats.org/drawingml/2006/main">
@@ -11637,22 +14562,22 @@
       </p:sp>
       <p:sp>
         <p:nvSpPr>
-          <p:cNvPr id="6" name="">
-            <a:extLst xmlns:a="http://schemas.openxmlformats.org/drawingml/2006/main">
-              <a:ext uri="{FF2B5EF4-FFF2-40B4-BE49-F238E27FC236}">
-                <a16:creationId xmlns:a16="http://schemas.microsoft.com/office/drawing/2014/main" id="{EEC0D949-9300-44CD-809D-A6824C67C803}"/>
-              </a:ext>
-            </a:extLst>
-          </p:cNvPr>
-          <p:cNvSpPr>
-            <a:spLocks xmlns:a="http://schemas.openxmlformats.org/drawingml/2006/main" noGrp="1"/>
-          </p:cNvSpPr>
-          <p:nvPr/>
-        </p:nvSpPr>
-        <p:spPr>
-          <a:xfrm xmlns:a="http://schemas.openxmlformats.org/drawingml/2006/main">
-            <a:off x="1143000" y="4095750"/>
-            <a:ext cx="1276350" cy="352425"/>
+          <p:cNvPr id="11" name="">
+            <a:extLst xmlns:a="http://schemas.openxmlformats.org/drawingml/2006/main">
+              <a:ext uri="{FF2B5EF4-FFF2-40B4-BE49-F238E27FC236}">
+                <a16:creationId xmlns:a16="http://schemas.microsoft.com/office/drawing/2014/main" id="{57FBB525-C18C-45F7-9366-5A603D5A57C1}"/>
+              </a:ext>
+            </a:extLst>
+          </p:cNvPr>
+          <p:cNvSpPr>
+            <a:spLocks xmlns:a="http://schemas.openxmlformats.org/drawingml/2006/main" noGrp="1"/>
+          </p:cNvSpPr>
+          <p:nvPr/>
+        </p:nvSpPr>
+        <p:spPr>
+          <a:xfrm xmlns:a="http://schemas.openxmlformats.org/drawingml/2006/main">
+            <a:off x="6629400" y="2952750"/>
+            <a:ext cx="1314450" cy="381000"/>
           </a:xfrm>
           <a:prstGeom xmlns:a="http://schemas.openxmlformats.org/drawingml/2006/main" prst="rect">
             <a:avLst/>
@@ -11690,77 +14615,9 @@
                 <a:ea typeface="Calibri"/>
                 <a:cs typeface="Calibri"/>
               </a:rPr>
-              <a:t>Scoring</a:t>
-            </a:r>
-          </a:p>
-        </p:txBody>
-      </p:sp>
-      <p:sp>
-        <p:nvSpPr>
-          <p:cNvPr id="7" name="">
-            <a:extLst xmlns:a="http://schemas.openxmlformats.org/drawingml/2006/main">
-              <a:ext uri="{FF2B5EF4-FFF2-40B4-BE49-F238E27FC236}">
-                <a16:creationId xmlns:a16="http://schemas.microsoft.com/office/drawing/2014/main" id="{8749510D-432E-4D44-AFF1-FCE4D222CD2A}"/>
-              </a:ext>
-            </a:extLst>
-          </p:cNvPr>
-          <p:cNvSpPr>
-            <a:spLocks xmlns:a="http://schemas.openxmlformats.org/drawingml/2006/main" noGrp="1"/>
-          </p:cNvSpPr>
-          <p:nvPr/>
-        </p:nvSpPr>
-        <p:spPr>
-          <a:xfrm xmlns:a="http://schemas.openxmlformats.org/drawingml/2006/main">
-            <a:off x="2971800" y="4000500"/>
-            <a:ext cx="1428750" cy="523875"/>
-          </a:xfrm>
-          <a:prstGeom xmlns:a="http://schemas.openxmlformats.org/drawingml/2006/main" prst="roundRect">
-            <a:avLst>
-              <a:gd name="adj" fmla="val 10909"/>
-            </a:avLst>
-          </a:prstGeom>
-          <a:solidFill xmlns:a="http://schemas.openxmlformats.org/drawingml/2006/main">
-            <a:srgbClr val="6A36BF"/>
-          </a:solidFill>
-          <a:ln xmlns:a="http://schemas.openxmlformats.org/drawingml/2006/main" w="9525">
-            <a:solidFill>
-              <a:srgbClr val="6A36BF"/>
-            </a:solidFill>
-            <a:prstDash val="solid"/>
-          </a:ln>
-        </p:spPr>
-      </p:sp>
-      <p:sp>
-        <p:nvSpPr>
-          <p:cNvPr id="8" name="">
-            <a:extLst xmlns:a="http://schemas.openxmlformats.org/drawingml/2006/main">
-              <a:ext uri="{FF2B5EF4-FFF2-40B4-BE49-F238E27FC236}">
-                <a16:creationId xmlns:a16="http://schemas.microsoft.com/office/drawing/2014/main" id="{D8778C72-A8AE-4A29-9AC3-562DA9457BDF}"/>
-              </a:ext>
-            </a:extLst>
-          </p:cNvPr>
-          <p:cNvSpPr>
-            <a:spLocks xmlns:a="http://schemas.openxmlformats.org/drawingml/2006/main" noGrp="1"/>
-          </p:cNvSpPr>
-          <p:nvPr/>
-        </p:nvSpPr>
-        <p:spPr>
-          <a:xfrm xmlns:a="http://schemas.openxmlformats.org/drawingml/2006/main">
-            <a:off x="3048000" y="4095750"/>
-            <a:ext cx="1276350" cy="352425"/>
-          </a:xfrm>
-          <a:prstGeom xmlns:a="http://schemas.openxmlformats.org/drawingml/2006/main" prst="rect">
-            <a:avLst/>
-          </a:prstGeom>
-          <a:noFill xmlns:a="http://schemas.openxmlformats.org/drawingml/2006/main"/>
-          <a:ln xmlns:a="http://schemas.openxmlformats.org/drawingml/2006/main" w="0">
-            <a:noFill/>
-            <a:prstDash val="solid"/>
-          </a:ln>
-        </p:spPr>
-        <p:txBody>
-          <a:bodyPr xmlns:a="http://schemas.openxmlformats.org/drawingml/2006/main" wrap="square" lIns="38100" tIns="19050" rIns="38100" bIns="19050" anchor="ctr"/>
-          <a:lstStyle xmlns:a="http://schemas.openxmlformats.org/drawingml/2006/main"/>
+              <a:t>Mode</a:t>
+            </a:r>
+          </a:p>
           <a:p xmlns:a="http://schemas.openxmlformats.org/drawingml/2006/main">
             <a:pPr algn="ctr">
               <a:lnSpc>
@@ -11785,223 +14642,33 @@
                 <a:ea typeface="Calibri"/>
                 <a:cs typeface="Calibri"/>
               </a:rPr>
-              <a:t>Commitment</a:t>
-            </a:r>
-          </a:p>
-        </p:txBody>
-      </p:sp>
-      <p:sp>
-        <p:nvSpPr>
-          <p:cNvPr id="9" name="">
-            <a:extLst xmlns:a="http://schemas.openxmlformats.org/drawingml/2006/main">
-              <a:ext uri="{FF2B5EF4-FFF2-40B4-BE49-F238E27FC236}">
-                <a16:creationId xmlns:a16="http://schemas.microsoft.com/office/drawing/2014/main" id="{66BCB7F3-E7CA-4364-A61A-7A64A5BC191A}"/>
-              </a:ext>
-            </a:extLst>
-          </p:cNvPr>
-          <p:cNvSpPr>
-            <a:spLocks xmlns:a="http://schemas.openxmlformats.org/drawingml/2006/main" noGrp="1"/>
-          </p:cNvSpPr>
-          <p:nvPr/>
-        </p:nvSpPr>
-        <p:spPr>
-          <a:xfrm xmlns:a="http://schemas.openxmlformats.org/drawingml/2006/main">
-            <a:off x="4876800" y="4000500"/>
-            <a:ext cx="1428750" cy="523875"/>
+              <a:t>Strategy</a:t>
+            </a:r>
+          </a:p>
+        </p:txBody>
+      </p:sp>
+      <p:sp>
+        <p:nvSpPr>
+          <p:cNvPr id="12" name="">
+            <a:extLst xmlns:a="http://schemas.openxmlformats.org/drawingml/2006/main">
+              <a:ext uri="{FF2B5EF4-FFF2-40B4-BE49-F238E27FC236}">
+                <a16:creationId xmlns:a16="http://schemas.microsoft.com/office/drawing/2014/main" id="{E01CE074-F154-4B54-9EF0-C2B5F873EDC5}"/>
+              </a:ext>
+            </a:extLst>
+          </p:cNvPr>
+          <p:cNvSpPr>
+            <a:spLocks xmlns:a="http://schemas.openxmlformats.org/drawingml/2006/main" noGrp="1"/>
+          </p:cNvSpPr>
+          <p:nvPr/>
+        </p:nvSpPr>
+        <p:spPr>
+          <a:xfrm xmlns:a="http://schemas.openxmlformats.org/drawingml/2006/main">
+            <a:off x="8458200" y="2857500"/>
+            <a:ext cx="1466850" cy="552450"/>
           </a:xfrm>
           <a:prstGeom xmlns:a="http://schemas.openxmlformats.org/drawingml/2006/main" prst="roundRect">
             <a:avLst>
-              <a:gd name="adj" fmla="val 10909"/>
-            </a:avLst>
-          </a:prstGeom>
-          <a:solidFill xmlns:a="http://schemas.openxmlformats.org/drawingml/2006/main">
-            <a:srgbClr val="20384F"/>
-          </a:solidFill>
-          <a:ln xmlns:a="http://schemas.openxmlformats.org/drawingml/2006/main" w="9525">
-            <a:solidFill>
-              <a:srgbClr val="20384F"/>
-            </a:solidFill>
-            <a:prstDash val="solid"/>
-          </a:ln>
-        </p:spPr>
-      </p:sp>
-      <p:sp>
-        <p:nvSpPr>
-          <p:cNvPr id="10" name="">
-            <a:extLst xmlns:a="http://schemas.openxmlformats.org/drawingml/2006/main">
-              <a:ext uri="{FF2B5EF4-FFF2-40B4-BE49-F238E27FC236}">
-                <a16:creationId xmlns:a16="http://schemas.microsoft.com/office/drawing/2014/main" id="{6FDE4016-96C7-41C4-8701-36A095FAA03A}"/>
-              </a:ext>
-            </a:extLst>
-          </p:cNvPr>
-          <p:cNvSpPr>
-            <a:spLocks xmlns:a="http://schemas.openxmlformats.org/drawingml/2006/main" noGrp="1"/>
-          </p:cNvSpPr>
-          <p:nvPr/>
-        </p:nvSpPr>
-        <p:spPr>
-          <a:xfrm xmlns:a="http://schemas.openxmlformats.org/drawingml/2006/main">
-            <a:off x="4953000" y="4095750"/>
-            <a:ext cx="1276350" cy="352425"/>
-          </a:xfrm>
-          <a:prstGeom xmlns:a="http://schemas.openxmlformats.org/drawingml/2006/main" prst="rect">
-            <a:avLst/>
-          </a:prstGeom>
-          <a:noFill xmlns:a="http://schemas.openxmlformats.org/drawingml/2006/main"/>
-          <a:ln xmlns:a="http://schemas.openxmlformats.org/drawingml/2006/main" w="0">
-            <a:noFill/>
-            <a:prstDash val="solid"/>
-          </a:ln>
-        </p:spPr>
-        <p:txBody>
-          <a:bodyPr xmlns:a="http://schemas.openxmlformats.org/drawingml/2006/main" wrap="square" lIns="38100" tIns="19050" rIns="38100" bIns="19050" anchor="ctr"/>
-          <a:lstStyle xmlns:a="http://schemas.openxmlformats.org/drawingml/2006/main"/>
-          <a:p xmlns:a="http://schemas.openxmlformats.org/drawingml/2006/main">
-            <a:pPr algn="ctr">
-              <a:lnSpc>
-                <a:spcPct val="105000"/>
-              </a:lnSpc>
-              <a:buNone/>
-              <a:defRPr sz="975" b="1" i="0">
-                <a:solidFill>
-                  <a:srgbClr val="FFFFFF"/>
-                </a:solidFill>
-                <a:latin typeface="Calibri"/>
-                <a:ea typeface="Calibri"/>
-                <a:cs typeface="Calibri"/>
-              </a:defRPr>
-            </a:pPr>
-            <a:r>
-              <a:rPr sz="975" b="1" i="0">
-                <a:solidFill>
-                  <a:srgbClr val="FFFFFF"/>
-                </a:solidFill>
-                <a:latin typeface="Calibri"/>
-                <a:ea typeface="Calibri"/>
-                <a:cs typeface="Calibri"/>
-              </a:rPr>
-              <a:t>Blackboard</a:t>
-            </a:r>
-          </a:p>
-        </p:txBody>
-      </p:sp>
-      <p:sp>
-        <p:nvSpPr>
-          <p:cNvPr id="11" name="">
-            <a:extLst xmlns:a="http://schemas.openxmlformats.org/drawingml/2006/main">
-              <a:ext uri="{FF2B5EF4-FFF2-40B4-BE49-F238E27FC236}">
-                <a16:creationId xmlns:a16="http://schemas.microsoft.com/office/drawing/2014/main" id="{21A3ED71-17BF-4543-94BD-8058E111F35F}"/>
-              </a:ext>
-            </a:extLst>
-          </p:cNvPr>
-          <p:cNvSpPr>
-            <a:spLocks xmlns:a="http://schemas.openxmlformats.org/drawingml/2006/main" noGrp="1"/>
-          </p:cNvSpPr>
-          <p:nvPr/>
-        </p:nvSpPr>
-        <p:spPr>
-          <a:xfrm xmlns:a="http://schemas.openxmlformats.org/drawingml/2006/main">
-            <a:off x="6781800" y="4000500"/>
-            <a:ext cx="1428750" cy="523875"/>
-          </a:xfrm>
-          <a:prstGeom xmlns:a="http://schemas.openxmlformats.org/drawingml/2006/main" prst="roundRect">
-            <a:avLst>
-              <a:gd name="adj" fmla="val 10909"/>
-            </a:avLst>
-          </a:prstGeom>
-          <a:solidFill xmlns:a="http://schemas.openxmlformats.org/drawingml/2006/main">
-            <a:srgbClr val="16824A"/>
-          </a:solidFill>
-          <a:ln xmlns:a="http://schemas.openxmlformats.org/drawingml/2006/main" w="9525">
-            <a:solidFill>
-              <a:srgbClr val="16824A"/>
-            </a:solidFill>
-            <a:prstDash val="solid"/>
-          </a:ln>
-        </p:spPr>
-      </p:sp>
-      <p:sp>
-        <p:nvSpPr>
-          <p:cNvPr id="12" name="">
-            <a:extLst xmlns:a="http://schemas.openxmlformats.org/drawingml/2006/main">
-              <a:ext uri="{FF2B5EF4-FFF2-40B4-BE49-F238E27FC236}">
-                <a16:creationId xmlns:a16="http://schemas.microsoft.com/office/drawing/2014/main" id="{0286CF14-1493-4F1C-A5B3-96CF6454FFC1}"/>
-              </a:ext>
-            </a:extLst>
-          </p:cNvPr>
-          <p:cNvSpPr>
-            <a:spLocks xmlns:a="http://schemas.openxmlformats.org/drawingml/2006/main" noGrp="1"/>
-          </p:cNvSpPr>
-          <p:nvPr/>
-        </p:nvSpPr>
-        <p:spPr>
-          <a:xfrm xmlns:a="http://schemas.openxmlformats.org/drawingml/2006/main">
-            <a:off x="6858000" y="4095750"/>
-            <a:ext cx="1276350" cy="352425"/>
-          </a:xfrm>
-          <a:prstGeom xmlns:a="http://schemas.openxmlformats.org/drawingml/2006/main" prst="rect">
-            <a:avLst/>
-          </a:prstGeom>
-          <a:noFill xmlns:a="http://schemas.openxmlformats.org/drawingml/2006/main"/>
-          <a:ln xmlns:a="http://schemas.openxmlformats.org/drawingml/2006/main" w="0">
-            <a:noFill/>
-            <a:prstDash val="solid"/>
-          </a:ln>
-        </p:spPr>
-        <p:txBody>
-          <a:bodyPr xmlns:a="http://schemas.openxmlformats.org/drawingml/2006/main" wrap="square" lIns="38100" tIns="19050" rIns="38100" bIns="19050" anchor="ctr"/>
-          <a:lstStyle xmlns:a="http://schemas.openxmlformats.org/drawingml/2006/main"/>
-          <a:p xmlns:a="http://schemas.openxmlformats.org/drawingml/2006/main">
-            <a:pPr algn="ctr">
-              <a:lnSpc>
-                <a:spcPct val="105000"/>
-              </a:lnSpc>
-              <a:buNone/>
-              <a:defRPr sz="975" b="1" i="0">
-                <a:solidFill>
-                  <a:srgbClr val="FFFFFF"/>
-                </a:solidFill>
-                <a:latin typeface="Calibri"/>
-                <a:ea typeface="Calibri"/>
-                <a:cs typeface="Calibri"/>
-              </a:defRPr>
-            </a:pPr>
-            <a:r>
-              <a:rPr sz="975" b="1" i="0">
-                <a:solidFill>
-                  <a:srgbClr val="FFFFFF"/>
-                </a:solidFill>
-                <a:latin typeface="Calibri"/>
-                <a:ea typeface="Calibri"/>
-                <a:cs typeface="Calibri"/>
-              </a:rPr>
-              <a:t>Navigation</a:t>
-            </a:r>
-          </a:p>
-        </p:txBody>
-      </p:sp>
-      <p:sp>
-        <p:nvSpPr>
-          <p:cNvPr id="13" name="">
-            <a:extLst xmlns:a="http://schemas.openxmlformats.org/drawingml/2006/main">
-              <a:ext uri="{FF2B5EF4-FFF2-40B4-BE49-F238E27FC236}">
-                <a16:creationId xmlns:a16="http://schemas.microsoft.com/office/drawing/2014/main" id="{452A9073-20B5-4BCE-8B22-8E30A8CE99C8}"/>
-              </a:ext>
-            </a:extLst>
-          </p:cNvPr>
-          <p:cNvSpPr>
-            <a:spLocks xmlns:a="http://schemas.openxmlformats.org/drawingml/2006/main" noGrp="1"/>
-          </p:cNvSpPr>
-          <p:nvPr/>
-        </p:nvSpPr>
-        <p:spPr>
-          <a:xfrm xmlns:a="http://schemas.openxmlformats.org/drawingml/2006/main">
-            <a:off x="8686800" y="4000500"/>
-            <a:ext cx="1428750" cy="523875"/>
-          </a:xfrm>
-          <a:prstGeom xmlns:a="http://schemas.openxmlformats.org/drawingml/2006/main" prst="roundRect">
-            <a:avLst>
-              <a:gd name="adj" fmla="val 10909"/>
+              <a:gd name="adj" fmla="val 10345"/>
             </a:avLst>
           </a:prstGeom>
           <a:solidFill xmlns:a="http://schemas.openxmlformats.org/drawingml/2006/main">
@@ -12017,22 +14684,22 @@
       </p:sp>
       <p:sp>
         <p:nvSpPr>
-          <p:cNvPr id="14" name="">
-            <a:extLst xmlns:a="http://schemas.openxmlformats.org/drawingml/2006/main">
-              <a:ext uri="{FF2B5EF4-FFF2-40B4-BE49-F238E27FC236}">
-                <a16:creationId xmlns:a16="http://schemas.microsoft.com/office/drawing/2014/main" id="{602D4A1E-CC0B-455E-9652-A0D4C5ACEF27}"/>
-              </a:ext>
-            </a:extLst>
-          </p:cNvPr>
-          <p:cNvSpPr>
-            <a:spLocks xmlns:a="http://schemas.openxmlformats.org/drawingml/2006/main" noGrp="1"/>
-          </p:cNvSpPr>
-          <p:nvPr/>
-        </p:nvSpPr>
-        <p:spPr>
-          <a:xfrm xmlns:a="http://schemas.openxmlformats.org/drawingml/2006/main">
-            <a:off x="8763000" y="4095750"/>
-            <a:ext cx="1276350" cy="352425"/>
+          <p:cNvPr id="13" name="">
+            <a:extLst xmlns:a="http://schemas.openxmlformats.org/drawingml/2006/main">
+              <a:ext uri="{FF2B5EF4-FFF2-40B4-BE49-F238E27FC236}">
+                <a16:creationId xmlns:a16="http://schemas.microsoft.com/office/drawing/2014/main" id="{320EBB3B-2AE7-4B74-B6F0-0D9132BAB44F}"/>
+              </a:ext>
+            </a:extLst>
+          </p:cNvPr>
+          <p:cNvSpPr>
+            <a:spLocks xmlns:a="http://schemas.openxmlformats.org/drawingml/2006/main" noGrp="1"/>
+          </p:cNvSpPr>
+          <p:nvPr/>
+        </p:nvSpPr>
+        <p:spPr>
+          <a:xfrm xmlns:a="http://schemas.openxmlformats.org/drawingml/2006/main">
+            <a:off x="8534400" y="2952750"/>
+            <a:ext cx="1314450" cy="381000"/>
           </a:xfrm>
           <a:prstGeom xmlns:a="http://schemas.openxmlformats.org/drawingml/2006/main" prst="rect">
             <a:avLst/>
@@ -12070,28 +14737,55 @@
                 <a:ea typeface="Calibri"/>
                 <a:cs typeface="Calibri"/>
               </a:rPr>
-              <a:t>Validation</a:t>
-            </a:r>
-          </a:p>
-        </p:txBody>
-      </p:sp>
-      <p:sp>
-        <p:nvSpPr>
-          <p:cNvPr id="15" name="">
-            <a:extLst xmlns:a="http://schemas.openxmlformats.org/drawingml/2006/main">
-              <a:ext uri="{FF2B5EF4-FFF2-40B4-BE49-F238E27FC236}">
-                <a16:creationId xmlns:a16="http://schemas.microsoft.com/office/drawing/2014/main" id="{3E8052E6-5787-4E08-8CF8-084C8D08FD42}"/>
-              </a:ext>
-            </a:extLst>
-          </p:cNvPr>
-          <p:cNvSpPr>
-            <a:spLocks xmlns:a="http://schemas.openxmlformats.org/drawingml/2006/main" noGrp="1"/>
-          </p:cNvSpPr>
-          <p:nvPr/>
-        </p:nvSpPr>
-        <p:spPr>
-          <a:xfrm xmlns:a="http://schemas.openxmlformats.org/drawingml/2006/main">
-            <a:off x="2533650" y="4171950"/>
+              <a:t>Planner +</a:t>
+            </a:r>
+          </a:p>
+          <a:p xmlns:a="http://schemas.openxmlformats.org/drawingml/2006/main">
+            <a:pPr algn="ctr">
+              <a:lnSpc>
+                <a:spcPct val="105000"/>
+              </a:lnSpc>
+              <a:buNone/>
+              <a:defRPr sz="975" b="1" i="0">
+                <a:solidFill>
+                  <a:srgbClr val="FFFFFF"/>
+                </a:solidFill>
+                <a:latin typeface="Calibri"/>
+                <a:ea typeface="Calibri"/>
+                <a:cs typeface="Calibri"/>
+              </a:defRPr>
+            </a:pPr>
+            <a:r>
+              <a:rPr sz="975" b="1" i="0">
+                <a:solidFill>
+                  <a:srgbClr val="FFFFFF"/>
+                </a:solidFill>
+                <a:latin typeface="Calibri"/>
+                <a:ea typeface="Calibri"/>
+                <a:cs typeface="Calibri"/>
+              </a:rPr>
+              <a:t>Executor</a:t>
+            </a:r>
+          </a:p>
+        </p:txBody>
+      </p:sp>
+      <p:sp>
+        <p:nvSpPr>
+          <p:cNvPr id="14" name="">
+            <a:extLst xmlns:a="http://schemas.openxmlformats.org/drawingml/2006/main">
+              <a:ext uri="{FF2B5EF4-FFF2-40B4-BE49-F238E27FC236}">
+                <a16:creationId xmlns:a16="http://schemas.microsoft.com/office/drawing/2014/main" id="{CD9C5DC1-45E5-4C09-9A3D-D1913108E2DB}"/>
+              </a:ext>
+            </a:extLst>
+          </p:cNvPr>
+          <p:cNvSpPr>
+            <a:spLocks xmlns:a="http://schemas.openxmlformats.org/drawingml/2006/main" noGrp="1"/>
+          </p:cNvSpPr>
+          <p:nvPr/>
+        </p:nvSpPr>
+        <p:spPr>
+          <a:xfrm xmlns:a="http://schemas.openxmlformats.org/drawingml/2006/main">
+            <a:off x="2362200" y="3048000"/>
             <a:ext cx="323850" cy="171450"/>
           </a:xfrm>
           <a:prstGeom xmlns:a="http://schemas.openxmlformats.org/drawingml/2006/main" prst="rightArrow">
@@ -12108,21 +14802,21 @@
       </p:sp>
       <p:sp>
         <p:nvSpPr>
-          <p:cNvPr id="16" name="">
-            <a:extLst xmlns:a="http://schemas.openxmlformats.org/drawingml/2006/main">
-              <a:ext uri="{FF2B5EF4-FFF2-40B4-BE49-F238E27FC236}">
-                <a16:creationId xmlns:a16="http://schemas.microsoft.com/office/drawing/2014/main" id="{CAA94595-1FB2-43B7-B4E7-1C160DD80C75}"/>
-              </a:ext>
-            </a:extLst>
-          </p:cNvPr>
-          <p:cNvSpPr>
-            <a:spLocks xmlns:a="http://schemas.openxmlformats.org/drawingml/2006/main" noGrp="1"/>
-          </p:cNvSpPr>
-          <p:nvPr/>
-        </p:nvSpPr>
-        <p:spPr>
-          <a:xfrm xmlns:a="http://schemas.openxmlformats.org/drawingml/2006/main">
-            <a:off x="4438650" y="4171950"/>
+          <p:cNvPr id="15" name="">
+            <a:extLst xmlns:a="http://schemas.openxmlformats.org/drawingml/2006/main">
+              <a:ext uri="{FF2B5EF4-FFF2-40B4-BE49-F238E27FC236}">
+                <a16:creationId xmlns:a16="http://schemas.microsoft.com/office/drawing/2014/main" id="{8035888E-76D6-41D5-98FF-4403799BDE7F}"/>
+              </a:ext>
+            </a:extLst>
+          </p:cNvPr>
+          <p:cNvSpPr>
+            <a:spLocks xmlns:a="http://schemas.openxmlformats.org/drawingml/2006/main" noGrp="1"/>
+          </p:cNvSpPr>
+          <p:nvPr/>
+        </p:nvSpPr>
+        <p:spPr>
+          <a:xfrm xmlns:a="http://schemas.openxmlformats.org/drawingml/2006/main">
+            <a:off x="4267200" y="3048000"/>
             <a:ext cx="323850" cy="171450"/>
           </a:xfrm>
           <a:prstGeom xmlns:a="http://schemas.openxmlformats.org/drawingml/2006/main" prst="rightArrow">
@@ -12139,21 +14833,21 @@
       </p:sp>
       <p:sp>
         <p:nvSpPr>
-          <p:cNvPr id="17" name="">
-            <a:extLst xmlns:a="http://schemas.openxmlformats.org/drawingml/2006/main">
-              <a:ext uri="{FF2B5EF4-FFF2-40B4-BE49-F238E27FC236}">
-                <a16:creationId xmlns:a16="http://schemas.microsoft.com/office/drawing/2014/main" id="{ED0C97EC-9063-44EC-B1ED-B54A4D2BFA44}"/>
-              </a:ext>
-            </a:extLst>
-          </p:cNvPr>
-          <p:cNvSpPr>
-            <a:spLocks xmlns:a="http://schemas.openxmlformats.org/drawingml/2006/main" noGrp="1"/>
-          </p:cNvSpPr>
-          <p:nvPr/>
-        </p:nvSpPr>
-        <p:spPr>
-          <a:xfrm xmlns:a="http://schemas.openxmlformats.org/drawingml/2006/main">
-            <a:off x="6343650" y="4171950"/>
+          <p:cNvPr id="16" name="">
+            <a:extLst xmlns:a="http://schemas.openxmlformats.org/drawingml/2006/main">
+              <a:ext uri="{FF2B5EF4-FFF2-40B4-BE49-F238E27FC236}">
+                <a16:creationId xmlns:a16="http://schemas.microsoft.com/office/drawing/2014/main" id="{5481C076-913E-4EF1-A98E-F79F869D5D85}"/>
+              </a:ext>
+            </a:extLst>
+          </p:cNvPr>
+          <p:cNvSpPr>
+            <a:spLocks xmlns:a="http://schemas.openxmlformats.org/drawingml/2006/main" noGrp="1"/>
+          </p:cNvSpPr>
+          <p:nvPr/>
+        </p:nvSpPr>
+        <p:spPr>
+          <a:xfrm xmlns:a="http://schemas.openxmlformats.org/drawingml/2006/main">
+            <a:off x="6172200" y="3048000"/>
             <a:ext cx="323850" cy="171450"/>
           </a:xfrm>
           <a:prstGeom xmlns:a="http://schemas.openxmlformats.org/drawingml/2006/main" prst="rightArrow">
@@ -12170,21 +14864,21 @@
       </p:sp>
       <p:sp>
         <p:nvSpPr>
-          <p:cNvPr id="18" name="">
-            <a:extLst xmlns:a="http://schemas.openxmlformats.org/drawingml/2006/main">
-              <a:ext uri="{FF2B5EF4-FFF2-40B4-BE49-F238E27FC236}">
-                <a16:creationId xmlns:a16="http://schemas.microsoft.com/office/drawing/2014/main" id="{8C23086F-10C4-45D5-AA00-8C0FA6FAA9E4}"/>
-              </a:ext>
-            </a:extLst>
-          </p:cNvPr>
-          <p:cNvSpPr>
-            <a:spLocks xmlns:a="http://schemas.openxmlformats.org/drawingml/2006/main" noGrp="1"/>
-          </p:cNvSpPr>
-          <p:nvPr/>
-        </p:nvSpPr>
-        <p:spPr>
-          <a:xfrm xmlns:a="http://schemas.openxmlformats.org/drawingml/2006/main">
-            <a:off x="8248650" y="4171950"/>
+          <p:cNvPr id="17" name="">
+            <a:extLst xmlns:a="http://schemas.openxmlformats.org/drawingml/2006/main">
+              <a:ext uri="{FF2B5EF4-FFF2-40B4-BE49-F238E27FC236}">
+                <a16:creationId xmlns:a16="http://schemas.microsoft.com/office/drawing/2014/main" id="{55E52704-F5AF-48F7-8328-01276F0C49E3}"/>
+              </a:ext>
+            </a:extLst>
+          </p:cNvPr>
+          <p:cNvSpPr>
+            <a:spLocks xmlns:a="http://schemas.openxmlformats.org/drawingml/2006/main" noGrp="1"/>
+          </p:cNvSpPr>
+          <p:nvPr/>
+        </p:nvSpPr>
+        <p:spPr>
+          <a:xfrm xmlns:a="http://schemas.openxmlformats.org/drawingml/2006/main">
+            <a:off x="8077200" y="3048000"/>
             <a:ext cx="323850" cy="171450"/>
           </a:xfrm>
           <a:prstGeom xmlns:a="http://schemas.openxmlformats.org/drawingml/2006/main" prst="rightArrow">
@@ -12198,6 +14892,558 @@
             <a:prstDash val="solid"/>
           </a:ln>
         </p:spPr>
+      </p:sp>
+      <p:sp>
+        <p:nvSpPr>
+          <p:cNvPr id="18" name="">
+            <a:extLst xmlns:a="http://schemas.openxmlformats.org/drawingml/2006/main">
+              <a:ext uri="{FF2B5EF4-FFF2-40B4-BE49-F238E27FC236}">
+                <a16:creationId xmlns:a16="http://schemas.microsoft.com/office/drawing/2014/main" id="{DD1F5D8E-D496-4EED-8C5B-7245794010BA}"/>
+              </a:ext>
+            </a:extLst>
+          </p:cNvPr>
+          <p:cNvSpPr>
+            <a:spLocks xmlns:a="http://schemas.openxmlformats.org/drawingml/2006/main" noGrp="1"/>
+          </p:cNvSpPr>
+          <p:nvPr/>
+        </p:nvSpPr>
+        <p:spPr>
+          <a:xfrm xmlns:a="http://schemas.openxmlformats.org/drawingml/2006/main">
+            <a:off x="876300" y="4000500"/>
+            <a:ext cx="2905125" cy="1066800"/>
+          </a:xfrm>
+          <a:prstGeom xmlns:a="http://schemas.openxmlformats.org/drawingml/2006/main" prst="rect">
+            <a:avLst/>
+          </a:prstGeom>
+          <a:solidFill xmlns:a="http://schemas.openxmlformats.org/drawingml/2006/main">
+            <a:srgbClr val="F8FAFC"/>
+          </a:solidFill>
+          <a:ln xmlns:a="http://schemas.openxmlformats.org/drawingml/2006/main" w="9525">
+            <a:solidFill>
+              <a:srgbClr val="D8DDE7"/>
+            </a:solidFill>
+            <a:prstDash val="solid"/>
+          </a:ln>
+        </p:spPr>
+      </p:sp>
+      <p:sp>
+        <p:nvSpPr>
+          <p:cNvPr id="19" name="">
+            <a:extLst xmlns:a="http://schemas.openxmlformats.org/drawingml/2006/main">
+              <a:ext uri="{FF2B5EF4-FFF2-40B4-BE49-F238E27FC236}">
+                <a16:creationId xmlns:a16="http://schemas.microsoft.com/office/drawing/2014/main" id="{EBA7AD23-AAE0-4260-91B7-1575BF0C814D}"/>
+              </a:ext>
+            </a:extLst>
+          </p:cNvPr>
+          <p:cNvSpPr>
+            <a:spLocks xmlns:a="http://schemas.openxmlformats.org/drawingml/2006/main" noGrp="1"/>
+          </p:cNvSpPr>
+          <p:nvPr/>
+        </p:nvSpPr>
+        <p:spPr>
+          <a:xfrm xmlns:a="http://schemas.openxmlformats.org/drawingml/2006/main">
+            <a:off x="876300" y="4000500"/>
+            <a:ext cx="66675" cy="1066800"/>
+          </a:xfrm>
+          <a:prstGeom xmlns:a="http://schemas.openxmlformats.org/drawingml/2006/main" prst="rect">
+            <a:avLst/>
+          </a:prstGeom>
+          <a:solidFill xmlns:a="http://schemas.openxmlformats.org/drawingml/2006/main">
+            <a:srgbClr val="6A36BF"/>
+          </a:solidFill>
+          <a:ln xmlns:a="http://schemas.openxmlformats.org/drawingml/2006/main" w="0">
+            <a:noFill/>
+            <a:prstDash val="solid"/>
+          </a:ln>
+        </p:spPr>
+      </p:sp>
+      <p:sp>
+        <p:nvSpPr>
+          <p:cNvPr id="20" name="">
+            <a:extLst xmlns:a="http://schemas.openxmlformats.org/drawingml/2006/main">
+              <a:ext uri="{FF2B5EF4-FFF2-40B4-BE49-F238E27FC236}">
+                <a16:creationId xmlns:a16="http://schemas.microsoft.com/office/drawing/2014/main" id="{5AF9831C-CFF0-4A48-A4BC-7BB2B2B845E6}"/>
+              </a:ext>
+            </a:extLst>
+          </p:cNvPr>
+          <p:cNvSpPr>
+            <a:spLocks xmlns:a="http://schemas.openxmlformats.org/drawingml/2006/main" noGrp="1"/>
+          </p:cNvSpPr>
+          <p:nvPr/>
+        </p:nvSpPr>
+        <p:spPr>
+          <a:xfrm xmlns:a="http://schemas.openxmlformats.org/drawingml/2006/main">
+            <a:off x="1047750" y="4114800"/>
+            <a:ext cx="2600325" cy="209550"/>
+          </a:xfrm>
+          <a:prstGeom xmlns:a="http://schemas.openxmlformats.org/drawingml/2006/main" prst="rect">
+            <a:avLst/>
+          </a:prstGeom>
+          <a:noFill xmlns:a="http://schemas.openxmlformats.org/drawingml/2006/main"/>
+          <a:ln xmlns:a="http://schemas.openxmlformats.org/drawingml/2006/main" w="0">
+            <a:noFill/>
+            <a:prstDash val="solid"/>
+          </a:ln>
+        </p:spPr>
+        <p:txBody>
+          <a:bodyPr xmlns:a="http://schemas.openxmlformats.org/drawingml/2006/main" wrap="square" lIns="38100" tIns="19050" rIns="38100" bIns="19050" anchor="t"/>
+          <a:lstStyle xmlns:a="http://schemas.openxmlformats.org/drawingml/2006/main"/>
+          <a:p xmlns:a="http://schemas.openxmlformats.org/drawingml/2006/main">
+            <a:pPr algn="l">
+              <a:lnSpc>
+                <a:spcPct val="105000"/>
+              </a:lnSpc>
+              <a:buNone/>
+              <a:defRPr sz="975" b="1" i="0">
+                <a:solidFill>
+                  <a:srgbClr val="6A36BF"/>
+                </a:solidFill>
+                <a:latin typeface="Calibri"/>
+                <a:ea typeface="Calibri"/>
+                <a:cs typeface="Calibri"/>
+              </a:defRPr>
+            </a:pPr>
+            <a:r>
+              <a:rPr sz="975" b="1" i="0">
+                <a:solidFill>
+                  <a:srgbClr val="6A36BF"/>
+                </a:solidFill>
+                <a:latin typeface="Calibri"/>
+                <a:ea typeface="Calibri"/>
+                <a:cs typeface="Calibri"/>
+              </a:rPr>
+              <a:t>Scalable by data</a:t>
+            </a:r>
+          </a:p>
+        </p:txBody>
+      </p:sp>
+      <p:sp>
+        <p:nvSpPr>
+          <p:cNvPr id="21" name="">
+            <a:extLst xmlns:a="http://schemas.openxmlformats.org/drawingml/2006/main">
+              <a:ext uri="{FF2B5EF4-FFF2-40B4-BE49-F238E27FC236}">
+                <a16:creationId xmlns:a16="http://schemas.microsoft.com/office/drawing/2014/main" id="{C70922F4-1387-41BB-9227-593D877EB3EC}"/>
+              </a:ext>
+            </a:extLst>
+          </p:cNvPr>
+          <p:cNvSpPr>
+            <a:spLocks xmlns:a="http://schemas.openxmlformats.org/drawingml/2006/main" noGrp="1"/>
+          </p:cNvSpPr>
+          <p:nvPr/>
+        </p:nvSpPr>
+        <p:spPr>
+          <a:xfrm xmlns:a="http://schemas.openxmlformats.org/drawingml/2006/main">
+            <a:off x="1047750" y="4381500"/>
+            <a:ext cx="2600325" cy="628650"/>
+          </a:xfrm>
+          <a:prstGeom xmlns:a="http://schemas.openxmlformats.org/drawingml/2006/main" prst="rect">
+            <a:avLst/>
+          </a:prstGeom>
+          <a:noFill xmlns:a="http://schemas.openxmlformats.org/drawingml/2006/main"/>
+          <a:ln xmlns:a="http://schemas.openxmlformats.org/drawingml/2006/main" w="0">
+            <a:noFill/>
+            <a:prstDash val="solid"/>
+          </a:ln>
+        </p:spPr>
+        <p:txBody>
+          <a:bodyPr xmlns:a="http://schemas.openxmlformats.org/drawingml/2006/main" wrap="square" lIns="38100" tIns="19050" rIns="38100" bIns="19050" anchor="t"/>
+          <a:lstStyle xmlns:a="http://schemas.openxmlformats.org/drawingml/2006/main"/>
+          <a:p xmlns:a="http://schemas.openxmlformats.org/drawingml/2006/main">
+            <a:pPr algn="l">
+              <a:lnSpc>
+                <a:spcPct val="102000"/>
+              </a:lnSpc>
+              <a:buNone/>
+              <a:defRPr sz="810" b="0" i="0">
+                <a:solidFill>
+                  <a:srgbClr val="444444"/>
+                </a:solidFill>
+                <a:latin typeface="Calibri"/>
+                <a:ea typeface="Calibri"/>
+                <a:cs typeface="Calibri"/>
+              </a:defRPr>
+            </a:pPr>
+            <a:r>
+              <a:rPr sz="810" b="0" i="0">
+                <a:solidFill>
+                  <a:srgbClr val="444444"/>
+                </a:solidFill>
+                <a:latin typeface="Calibri"/>
+                <a:ea typeface="Calibri"/>
+                <a:cs typeface="Calibri"/>
+              </a:rPr>
+              <a:t>Difficulty, personality, ability tuning, map semantics, and mode priorities are configured outside the main controller logic.</a:t>
+            </a:r>
+          </a:p>
+        </p:txBody>
+      </p:sp>
+      <p:sp>
+        <p:nvSpPr>
+          <p:cNvPr id="22" name="">
+            <a:extLst xmlns:a="http://schemas.openxmlformats.org/drawingml/2006/main">
+              <a:ext uri="{FF2B5EF4-FFF2-40B4-BE49-F238E27FC236}">
+                <a16:creationId xmlns:a16="http://schemas.microsoft.com/office/drawing/2014/main" id="{624AE304-6E3E-4544-A2DA-44322B46FBD2}"/>
+              </a:ext>
+            </a:extLst>
+          </p:cNvPr>
+          <p:cNvSpPr>
+            <a:spLocks xmlns:a="http://schemas.openxmlformats.org/drawingml/2006/main" noGrp="1"/>
+          </p:cNvSpPr>
+          <p:nvPr/>
+        </p:nvSpPr>
+        <p:spPr>
+          <a:xfrm xmlns:a="http://schemas.openxmlformats.org/drawingml/2006/main">
+            <a:off x="4305300" y="4000500"/>
+            <a:ext cx="2905125" cy="1066800"/>
+          </a:xfrm>
+          <a:prstGeom xmlns:a="http://schemas.openxmlformats.org/drawingml/2006/main" prst="rect">
+            <a:avLst/>
+          </a:prstGeom>
+          <a:solidFill xmlns:a="http://schemas.openxmlformats.org/drawingml/2006/main">
+            <a:srgbClr val="F8FAFC"/>
+          </a:solidFill>
+          <a:ln xmlns:a="http://schemas.openxmlformats.org/drawingml/2006/main" w="9525">
+            <a:solidFill>
+              <a:srgbClr val="D8DDE7"/>
+            </a:solidFill>
+            <a:prstDash val="solid"/>
+          </a:ln>
+        </p:spPr>
+      </p:sp>
+      <p:sp>
+        <p:nvSpPr>
+          <p:cNvPr id="23" name="">
+            <a:extLst xmlns:a="http://schemas.openxmlformats.org/drawingml/2006/main">
+              <a:ext uri="{FF2B5EF4-FFF2-40B4-BE49-F238E27FC236}">
+                <a16:creationId xmlns:a16="http://schemas.microsoft.com/office/drawing/2014/main" id="{04B4D435-ABAE-4820-96B0-A76C50E89009}"/>
+              </a:ext>
+            </a:extLst>
+          </p:cNvPr>
+          <p:cNvSpPr>
+            <a:spLocks xmlns:a="http://schemas.openxmlformats.org/drawingml/2006/main" noGrp="1"/>
+          </p:cNvSpPr>
+          <p:nvPr/>
+        </p:nvSpPr>
+        <p:spPr>
+          <a:xfrm xmlns:a="http://schemas.openxmlformats.org/drawingml/2006/main">
+            <a:off x="4305300" y="4000500"/>
+            <a:ext cx="66675" cy="1066800"/>
+          </a:xfrm>
+          <a:prstGeom xmlns:a="http://schemas.openxmlformats.org/drawingml/2006/main" prst="rect">
+            <a:avLst/>
+          </a:prstGeom>
+          <a:solidFill xmlns:a="http://schemas.openxmlformats.org/drawingml/2006/main">
+            <a:srgbClr val="2B5FAA"/>
+          </a:solidFill>
+          <a:ln xmlns:a="http://schemas.openxmlformats.org/drawingml/2006/main" w="0">
+            <a:noFill/>
+            <a:prstDash val="solid"/>
+          </a:ln>
+        </p:spPr>
+      </p:sp>
+      <p:sp>
+        <p:nvSpPr>
+          <p:cNvPr id="24" name="">
+            <a:extLst xmlns:a="http://schemas.openxmlformats.org/drawingml/2006/main">
+              <a:ext uri="{FF2B5EF4-FFF2-40B4-BE49-F238E27FC236}">
+                <a16:creationId xmlns:a16="http://schemas.microsoft.com/office/drawing/2014/main" id="{175C69F2-1E7C-4303-8750-41927C49BF98}"/>
+              </a:ext>
+            </a:extLst>
+          </p:cNvPr>
+          <p:cNvSpPr>
+            <a:spLocks xmlns:a="http://schemas.openxmlformats.org/drawingml/2006/main" noGrp="1"/>
+          </p:cNvSpPr>
+          <p:nvPr/>
+        </p:nvSpPr>
+        <p:spPr>
+          <a:xfrm xmlns:a="http://schemas.openxmlformats.org/drawingml/2006/main">
+            <a:off x="4476750" y="4114800"/>
+            <a:ext cx="2600325" cy="209550"/>
+          </a:xfrm>
+          <a:prstGeom xmlns:a="http://schemas.openxmlformats.org/drawingml/2006/main" prst="rect">
+            <a:avLst/>
+          </a:prstGeom>
+          <a:noFill xmlns:a="http://schemas.openxmlformats.org/drawingml/2006/main"/>
+          <a:ln xmlns:a="http://schemas.openxmlformats.org/drawingml/2006/main" w="0">
+            <a:noFill/>
+            <a:prstDash val="solid"/>
+          </a:ln>
+        </p:spPr>
+        <p:txBody>
+          <a:bodyPr xmlns:a="http://schemas.openxmlformats.org/drawingml/2006/main" wrap="square" lIns="38100" tIns="19050" rIns="38100" bIns="19050" anchor="t"/>
+          <a:lstStyle xmlns:a="http://schemas.openxmlformats.org/drawingml/2006/main"/>
+          <a:p xmlns:a="http://schemas.openxmlformats.org/drawingml/2006/main">
+            <a:pPr algn="l">
+              <a:lnSpc>
+                <a:spcPct val="105000"/>
+              </a:lnSpc>
+              <a:buNone/>
+              <a:defRPr sz="975" b="1" i="0">
+                <a:solidFill>
+                  <a:srgbClr val="2B5FAA"/>
+                </a:solidFill>
+                <a:latin typeface="Calibri"/>
+                <a:ea typeface="Calibri"/>
+                <a:cs typeface="Calibri"/>
+              </a:defRPr>
+            </a:pPr>
+            <a:r>
+              <a:rPr sz="975" b="1" i="0">
+                <a:solidFill>
+                  <a:srgbClr val="2B5FAA"/>
+                </a:solidFill>
+                <a:latin typeface="Calibri"/>
+                <a:ea typeface="Calibri"/>
+                <a:cs typeface="Calibri"/>
+              </a:rPr>
+              <a:t>Explainable decisions</a:t>
+            </a:r>
+          </a:p>
+        </p:txBody>
+      </p:sp>
+      <p:sp>
+        <p:nvSpPr>
+          <p:cNvPr id="25" name="">
+            <a:extLst xmlns:a="http://schemas.openxmlformats.org/drawingml/2006/main">
+              <a:ext uri="{FF2B5EF4-FFF2-40B4-BE49-F238E27FC236}">
+                <a16:creationId xmlns:a16="http://schemas.microsoft.com/office/drawing/2014/main" id="{A23569FC-B8CB-495B-8E30-E558E211CE3A}"/>
+              </a:ext>
+            </a:extLst>
+          </p:cNvPr>
+          <p:cNvSpPr>
+            <a:spLocks xmlns:a="http://schemas.openxmlformats.org/drawingml/2006/main" noGrp="1"/>
+          </p:cNvSpPr>
+          <p:nvPr/>
+        </p:nvSpPr>
+        <p:spPr>
+          <a:xfrm xmlns:a="http://schemas.openxmlformats.org/drawingml/2006/main">
+            <a:off x="4476750" y="4381500"/>
+            <a:ext cx="2600325" cy="628650"/>
+          </a:xfrm>
+          <a:prstGeom xmlns:a="http://schemas.openxmlformats.org/drawingml/2006/main" prst="rect">
+            <a:avLst/>
+          </a:prstGeom>
+          <a:noFill xmlns:a="http://schemas.openxmlformats.org/drawingml/2006/main"/>
+          <a:ln xmlns:a="http://schemas.openxmlformats.org/drawingml/2006/main" w="0">
+            <a:noFill/>
+            <a:prstDash val="solid"/>
+          </a:ln>
+        </p:spPr>
+        <p:txBody>
+          <a:bodyPr xmlns:a="http://schemas.openxmlformats.org/drawingml/2006/main" wrap="square" lIns="38100" tIns="19050" rIns="38100" bIns="19050" anchor="t"/>
+          <a:lstStyle xmlns:a="http://schemas.openxmlformats.org/drawingml/2006/main"/>
+          <a:p xmlns:a="http://schemas.openxmlformats.org/drawingml/2006/main">
+            <a:pPr algn="l">
+              <a:lnSpc>
+                <a:spcPct val="102000"/>
+              </a:lnSpc>
+              <a:buNone/>
+              <a:defRPr sz="810" b="0" i="0">
+                <a:solidFill>
+                  <a:srgbClr val="444444"/>
+                </a:solidFill>
+                <a:latin typeface="Calibri"/>
+                <a:ea typeface="Calibri"/>
+                <a:cs typeface="Calibri"/>
+              </a:defRPr>
+            </a:pPr>
+            <a:r>
+              <a:rPr sz="810" b="0" i="0">
+                <a:solidFill>
+                  <a:srgbClr val="444444"/>
+                </a:solidFill>
+                <a:latin typeface="Calibri"/>
+                <a:ea typeface="Calibri"/>
+                <a:cs typeface="Calibri"/>
+              </a:rPr>
+              <a:t>Debug labels show current intent, target, score gap, route state, confidence rank, and recovery reason.</a:t>
+            </a:r>
+          </a:p>
+        </p:txBody>
+      </p:sp>
+      <p:sp>
+        <p:nvSpPr>
+          <p:cNvPr id="26" name="">
+            <a:extLst xmlns:a="http://schemas.openxmlformats.org/drawingml/2006/main">
+              <a:ext uri="{FF2B5EF4-FFF2-40B4-BE49-F238E27FC236}">
+                <a16:creationId xmlns:a16="http://schemas.microsoft.com/office/drawing/2014/main" id="{EACECDED-DC09-4F28-97B2-4D9DE02915FB}"/>
+              </a:ext>
+            </a:extLst>
+          </p:cNvPr>
+          <p:cNvSpPr>
+            <a:spLocks xmlns:a="http://schemas.openxmlformats.org/drawingml/2006/main" noGrp="1"/>
+          </p:cNvSpPr>
+          <p:nvPr/>
+        </p:nvSpPr>
+        <p:spPr>
+          <a:xfrm xmlns:a="http://schemas.openxmlformats.org/drawingml/2006/main">
+            <a:off x="7734300" y="4000500"/>
+            <a:ext cx="2905125" cy="1066800"/>
+          </a:xfrm>
+          <a:prstGeom xmlns:a="http://schemas.openxmlformats.org/drawingml/2006/main" prst="rect">
+            <a:avLst/>
+          </a:prstGeom>
+          <a:solidFill xmlns:a="http://schemas.openxmlformats.org/drawingml/2006/main">
+            <a:srgbClr val="F8FAFC"/>
+          </a:solidFill>
+          <a:ln xmlns:a="http://schemas.openxmlformats.org/drawingml/2006/main" w="9525">
+            <a:solidFill>
+              <a:srgbClr val="D8DDE7"/>
+            </a:solidFill>
+            <a:prstDash val="solid"/>
+          </a:ln>
+        </p:spPr>
+      </p:sp>
+      <p:sp>
+        <p:nvSpPr>
+          <p:cNvPr id="27" name="">
+            <a:extLst xmlns:a="http://schemas.openxmlformats.org/drawingml/2006/main">
+              <a:ext uri="{FF2B5EF4-FFF2-40B4-BE49-F238E27FC236}">
+                <a16:creationId xmlns:a16="http://schemas.microsoft.com/office/drawing/2014/main" id="{1A8DA2F1-272E-406A-9AD5-BF77C586FD1C}"/>
+              </a:ext>
+            </a:extLst>
+          </p:cNvPr>
+          <p:cNvSpPr>
+            <a:spLocks xmlns:a="http://schemas.openxmlformats.org/drawingml/2006/main" noGrp="1"/>
+          </p:cNvSpPr>
+          <p:nvPr/>
+        </p:nvSpPr>
+        <p:spPr>
+          <a:xfrm xmlns:a="http://schemas.openxmlformats.org/drawingml/2006/main">
+            <a:off x="7734300" y="4000500"/>
+            <a:ext cx="66675" cy="1066800"/>
+          </a:xfrm>
+          <a:prstGeom xmlns:a="http://schemas.openxmlformats.org/drawingml/2006/main" prst="rect">
+            <a:avLst/>
+          </a:prstGeom>
+          <a:solidFill xmlns:a="http://schemas.openxmlformats.org/drawingml/2006/main">
+            <a:srgbClr val="16824A"/>
+          </a:solidFill>
+          <a:ln xmlns:a="http://schemas.openxmlformats.org/drawingml/2006/main" w="0">
+            <a:noFill/>
+            <a:prstDash val="solid"/>
+          </a:ln>
+        </p:spPr>
+      </p:sp>
+      <p:sp>
+        <p:nvSpPr>
+          <p:cNvPr id="28" name="">
+            <a:extLst xmlns:a="http://schemas.openxmlformats.org/drawingml/2006/main">
+              <a:ext uri="{FF2B5EF4-FFF2-40B4-BE49-F238E27FC236}">
+                <a16:creationId xmlns:a16="http://schemas.microsoft.com/office/drawing/2014/main" id="{8BCCFB2B-E881-44B3-B984-F3332B96B08B}"/>
+              </a:ext>
+            </a:extLst>
+          </p:cNvPr>
+          <p:cNvSpPr>
+            <a:spLocks xmlns:a="http://schemas.openxmlformats.org/drawingml/2006/main" noGrp="1"/>
+          </p:cNvSpPr>
+          <p:nvPr/>
+        </p:nvSpPr>
+        <p:spPr>
+          <a:xfrm xmlns:a="http://schemas.openxmlformats.org/drawingml/2006/main">
+            <a:off x="7905750" y="4114800"/>
+            <a:ext cx="2600325" cy="209550"/>
+          </a:xfrm>
+          <a:prstGeom xmlns:a="http://schemas.openxmlformats.org/drawingml/2006/main" prst="rect">
+            <a:avLst/>
+          </a:prstGeom>
+          <a:noFill xmlns:a="http://schemas.openxmlformats.org/drawingml/2006/main"/>
+          <a:ln xmlns:a="http://schemas.openxmlformats.org/drawingml/2006/main" w="0">
+            <a:noFill/>
+            <a:prstDash val="solid"/>
+          </a:ln>
+        </p:spPr>
+        <p:txBody>
+          <a:bodyPr xmlns:a="http://schemas.openxmlformats.org/drawingml/2006/main" wrap="square" lIns="38100" tIns="19050" rIns="38100" bIns="19050" anchor="t"/>
+          <a:lstStyle xmlns:a="http://schemas.openxmlformats.org/drawingml/2006/main"/>
+          <a:p xmlns:a="http://schemas.openxmlformats.org/drawingml/2006/main">
+            <a:pPr algn="l">
+              <a:lnSpc>
+                <a:spcPct val="105000"/>
+              </a:lnSpc>
+              <a:buNone/>
+              <a:defRPr sz="975" b="1" i="0">
+                <a:solidFill>
+                  <a:srgbClr val="16824A"/>
+                </a:solidFill>
+                <a:latin typeface="Calibri"/>
+                <a:ea typeface="Calibri"/>
+                <a:cs typeface="Calibri"/>
+              </a:defRPr>
+            </a:pPr>
+            <a:r>
+              <a:rPr sz="975" b="1" i="0">
+                <a:solidFill>
+                  <a:srgbClr val="16824A"/>
+                </a:solidFill>
+                <a:latin typeface="Calibri"/>
+                <a:ea typeface="Calibri"/>
+                <a:cs typeface="Calibri"/>
+              </a:rPr>
+              <a:t>Production hardening</a:t>
+            </a:r>
+          </a:p>
+        </p:txBody>
+      </p:sp>
+      <p:sp>
+        <p:nvSpPr>
+          <p:cNvPr id="29" name="">
+            <a:extLst xmlns:a="http://schemas.openxmlformats.org/drawingml/2006/main">
+              <a:ext uri="{FF2B5EF4-FFF2-40B4-BE49-F238E27FC236}">
+                <a16:creationId xmlns:a16="http://schemas.microsoft.com/office/drawing/2014/main" id="{1E4CD89F-B0B9-464B-AE47-9672F24B9B47}"/>
+              </a:ext>
+            </a:extLst>
+          </p:cNvPr>
+          <p:cNvSpPr>
+            <a:spLocks xmlns:a="http://schemas.openxmlformats.org/drawingml/2006/main" noGrp="1"/>
+          </p:cNvSpPr>
+          <p:nvPr/>
+        </p:nvSpPr>
+        <p:spPr>
+          <a:xfrm xmlns:a="http://schemas.openxmlformats.org/drawingml/2006/main">
+            <a:off x="7905750" y="4381500"/>
+            <a:ext cx="2600325" cy="628650"/>
+          </a:xfrm>
+          <a:prstGeom xmlns:a="http://schemas.openxmlformats.org/drawingml/2006/main" prst="rect">
+            <a:avLst/>
+          </a:prstGeom>
+          <a:noFill xmlns:a="http://schemas.openxmlformats.org/drawingml/2006/main"/>
+          <a:ln xmlns:a="http://schemas.openxmlformats.org/drawingml/2006/main" w="0">
+            <a:noFill/>
+            <a:prstDash val="solid"/>
+          </a:ln>
+        </p:spPr>
+        <p:txBody>
+          <a:bodyPr xmlns:a="http://schemas.openxmlformats.org/drawingml/2006/main" wrap="square" lIns="38100" tIns="19050" rIns="38100" bIns="19050" anchor="t"/>
+          <a:lstStyle xmlns:a="http://schemas.openxmlformats.org/drawingml/2006/main"/>
+          <a:p xmlns:a="http://schemas.openxmlformats.org/drawingml/2006/main">
+            <a:pPr algn="l">
+              <a:lnSpc>
+                <a:spcPct val="102000"/>
+              </a:lnSpc>
+              <a:buNone/>
+              <a:defRPr sz="810" b="0" i="0">
+                <a:solidFill>
+                  <a:srgbClr val="444444"/>
+                </a:solidFill>
+                <a:latin typeface="Calibri"/>
+                <a:ea typeface="Calibri"/>
+                <a:cs typeface="Calibri"/>
+              </a:defRPr>
+            </a:pPr>
+            <a:r>
+              <a:rPr sz="810" b="0" i="0">
+                <a:solidFill>
+                  <a:srgbClr val="444444"/>
+                </a:solidFill>
+                <a:latin typeface="Calibri"/>
+                <a:ea typeface="Calibri"/>
+                <a:cs typeface="Calibri"/>
+              </a:rPr>
+              <a:t>Lifecycle cleanup, objective fallback, budget fairness, and incident logging reduce stalls and frame spikes.</a:t>
+            </a:r>
+          </a:p>
+        </p:txBody>
       </p:sp>
     </p:spTree>
     <p:extLst>
@@ -12250,82 +15496,86 @@
       </p:sp>
       <p:sp>
         <p:nvSpPr>
-          <p:cNvPr id="4" name="Rectangle 1">
-            <a:extLst xmlns:a="http://schemas.openxmlformats.org/drawingml/2006/main">
-              <a:ext uri="{FF2B5EF4-FFF2-40B4-BE49-F238E27FC236}">
-                <a16:creationId xmlns:a16="http://schemas.microsoft.com/office/drawing/2014/main" id="{D021F7E1-6253-32B1-7271-AC459A477F4C}"/>
-              </a:ext>
-            </a:extLst>
-          </p:cNvPr>
-          <p:cNvSpPr>
-            <a:spLocks xmlns:a="http://schemas.openxmlformats.org/drawingml/2006/main" noGrp="1"/>
-          </p:cNvSpPr>
-          <p:nvPr>
-            <p:ph idx="1"/>
-          </p:nvPr>
-        </p:nvSpPr>
-        <p:spPr>
-          <a:xfrm xmlns:a="http://schemas.openxmlformats.org/drawingml/2006/main">
-            <a:off x="1025013" y="1715105"/>
-            <a:ext cx="6758773" cy="954107"/>
+          <p:cNvPr id="3" name="">
+            <a:extLst xmlns:a="http://schemas.openxmlformats.org/drawingml/2006/main">
+              <a:ext uri="{FF2B5EF4-FFF2-40B4-BE49-F238E27FC236}">
+                <a16:creationId xmlns:a16="http://schemas.microsoft.com/office/drawing/2014/main" id="{E8C8A888-F2FB-4D00-8849-69A82F380772}"/>
+              </a:ext>
+            </a:extLst>
+          </p:cNvPr>
+          <p:cNvSpPr>
+            <a:spLocks xmlns:a="http://schemas.openxmlformats.org/drawingml/2006/main" noGrp="1"/>
+          </p:cNvSpPr>
+          <p:nvPr/>
+        </p:nvSpPr>
+        <p:spPr>
+          <a:xfrm xmlns:a="http://schemas.openxmlformats.org/drawingml/2006/main">
+            <a:off x="895350" y="1543050"/>
+            <a:ext cx="10096500" cy="342900"/>
           </a:xfrm>
           <a:prstGeom xmlns:a="http://schemas.openxmlformats.org/drawingml/2006/main" prst="rect">
             <a:avLst/>
           </a:prstGeom>
           <a:noFill xmlns:a="http://schemas.openxmlformats.org/drawingml/2006/main"/>
-          <a:ln xmlns:a="http://schemas.openxmlformats.org/drawingml/2006/main">
+          <a:ln xmlns:a="http://schemas.openxmlformats.org/drawingml/2006/main" w="0">
             <a:noFill/>
-          </a:ln>
-        </p:spPr>
-        <p:txBody>
-          <a:bodyPr xmlns:a="http://schemas.openxmlformats.org/drawingml/2006/main" vert="horz" wrap="none" lIns="91440" tIns="45720" rIns="91440" bIns="45720" anchor="ctr">
-            <a:spAutoFit/>
-          </a:bodyPr>
-          <a:lstStyle xmlns:a="http://schemas.openxmlformats.org/drawingml/2006/main"/>
-          <a:p xmlns:a="http://schemas.openxmlformats.org/drawingml/2006/main">
-            <a:pPr marL="0" marR="0" lvl="0" indent="0" algn="l" defTabSz="914400">
+            <a:prstDash val="solid"/>
+          </a:ln>
+        </p:spPr>
+        <p:txBody>
+          <a:bodyPr xmlns:a="http://schemas.openxmlformats.org/drawingml/2006/main" wrap="square" lIns="38100" tIns="19050" rIns="38100" bIns="19050" anchor="t"/>
+          <a:lstStyle xmlns:a="http://schemas.openxmlformats.org/drawingml/2006/main"/>
+          <a:p xmlns:a="http://schemas.openxmlformats.org/drawingml/2006/main">
+            <a:pPr algn="l">
               <a:lnSpc>
-                <a:spcPct val="100000"/>
+                <a:spcPct val="105000"/>
               </a:lnSpc>
-              <a:spcBef>
-                <a:spcPct val="0"/>
-              </a:spcBef>
-              <a:spcAft>
-                <a:spcPct val="0"/>
-              </a:spcAft>
-              <a:buClrTx/>
-              <a:buSzTx/>
-              <a:buFontTx/>
-              <a:buChar char="•"/>
-            </a:pPr>
-            <a:r>
-              <a:t>High-level AI data flow and support layers:</a:t>
-            </a:r>
-          </a:p>
-        </p:txBody>
-      </p:sp>
-      <p:sp>
-        <p:nvSpPr>
-          <p:cNvPr id="5" name="">
-            <a:extLst xmlns:a="http://schemas.openxmlformats.org/drawingml/2006/main">
-              <a:ext uri="{FF2B5EF4-FFF2-40B4-BE49-F238E27FC236}">
-                <a16:creationId xmlns:a16="http://schemas.microsoft.com/office/drawing/2014/main" id="{08C61892-D8C5-4C4F-94CB-8943013D74E9}"/>
-              </a:ext>
-            </a:extLst>
-          </p:cNvPr>
-          <p:cNvSpPr>
-            <a:spLocks xmlns:a="http://schemas.openxmlformats.org/drawingml/2006/main" noGrp="1"/>
-          </p:cNvSpPr>
-          <p:nvPr/>
-        </p:nvSpPr>
-        <p:spPr>
-          <a:xfrm xmlns:a="http://schemas.openxmlformats.org/drawingml/2006/main">
-            <a:off x="904875" y="2333625"/>
-            <a:ext cx="1123950" cy="590550"/>
+              <a:buNone/>
+              <a:defRPr sz="1125" b="0" i="0">
+                <a:solidFill>
+                  <a:srgbClr val="444444"/>
+                </a:solidFill>
+                <a:latin typeface="Calibri"/>
+                <a:ea typeface="Calibri"/>
+                <a:cs typeface="Calibri"/>
+              </a:defRPr>
+            </a:pPr>
+            <a:r>
+              <a:rPr sz="1125" b="0" i="0">
+                <a:solidFill>
+                  <a:srgbClr val="444444"/>
+                </a:solidFill>
+                <a:latin typeface="Calibri"/>
+                <a:ea typeface="Calibri"/>
+                <a:cs typeface="Calibri"/>
+              </a:rPr>
+              <a:t>Runtime AI is organized as a data pipeline: each layer owns one decision responsibility, writes explainable state, and feeds the next layer.</a:t>
+            </a:r>
+          </a:p>
+        </p:txBody>
+      </p:sp>
+      <p:sp>
+        <p:nvSpPr>
+          <p:cNvPr id="4" name="">
+            <a:extLst xmlns:a="http://schemas.openxmlformats.org/drawingml/2006/main">
+              <a:ext uri="{FF2B5EF4-FFF2-40B4-BE49-F238E27FC236}">
+                <a16:creationId xmlns:a16="http://schemas.microsoft.com/office/drawing/2014/main" id="{FC678530-1F80-44CB-9CE4-F81436ABB2E3}"/>
+              </a:ext>
+            </a:extLst>
+          </p:cNvPr>
+          <p:cNvSpPr>
+            <a:spLocks xmlns:a="http://schemas.openxmlformats.org/drawingml/2006/main" noGrp="1"/>
+          </p:cNvSpPr>
+          <p:nvPr/>
+        </p:nvSpPr>
+        <p:spPr>
+          <a:xfrm xmlns:a="http://schemas.openxmlformats.org/drawingml/2006/main">
+            <a:off x="742950" y="2152650"/>
+            <a:ext cx="1314450" cy="552450"/>
           </a:xfrm>
           <a:prstGeom xmlns:a="http://schemas.openxmlformats.org/drawingml/2006/main" prst="roundRect">
             <a:avLst>
-              <a:gd name="adj" fmla="val 9677"/>
+              <a:gd name="adj" fmla="val 10345"/>
             </a:avLst>
           </a:prstGeom>
           <a:solidFill xmlns:a="http://schemas.openxmlformats.org/drawingml/2006/main">
@@ -12341,22 +15591,22 @@
       </p:sp>
       <p:sp>
         <p:nvSpPr>
-          <p:cNvPr id="6" name="">
-            <a:extLst xmlns:a="http://schemas.openxmlformats.org/drawingml/2006/main">
-              <a:ext uri="{FF2B5EF4-FFF2-40B4-BE49-F238E27FC236}">
-                <a16:creationId xmlns:a16="http://schemas.microsoft.com/office/drawing/2014/main" id="{75386D67-2CC5-4A1C-B0DB-DF08DCBC8939}"/>
-              </a:ext>
-            </a:extLst>
-          </p:cNvPr>
-          <p:cNvSpPr>
-            <a:spLocks xmlns:a="http://schemas.openxmlformats.org/drawingml/2006/main" noGrp="1"/>
-          </p:cNvSpPr>
-          <p:nvPr/>
-        </p:nvSpPr>
-        <p:spPr>
-          <a:xfrm xmlns:a="http://schemas.openxmlformats.org/drawingml/2006/main">
-            <a:off x="981075" y="2428875"/>
-            <a:ext cx="971550" cy="419100"/>
+          <p:cNvPr id="5" name="">
+            <a:extLst xmlns:a="http://schemas.openxmlformats.org/drawingml/2006/main">
+              <a:ext uri="{FF2B5EF4-FFF2-40B4-BE49-F238E27FC236}">
+                <a16:creationId xmlns:a16="http://schemas.microsoft.com/office/drawing/2014/main" id="{AF7A16A8-D29A-48BB-B9DF-00A64AFBC0A0}"/>
+              </a:ext>
+            </a:extLst>
+          </p:cNvPr>
+          <p:cNvSpPr>
+            <a:spLocks xmlns:a="http://schemas.openxmlformats.org/drawingml/2006/main" noGrp="1"/>
+          </p:cNvSpPr>
+          <p:nvPr/>
+        </p:nvSpPr>
+        <p:spPr>
+          <a:xfrm xmlns:a="http://schemas.openxmlformats.org/drawingml/2006/main">
+            <a:off x="819150" y="2247900"/>
+            <a:ext cx="1162050" cy="381000"/>
           </a:xfrm>
           <a:prstGeom xmlns:a="http://schemas.openxmlformats.org/drawingml/2006/main" prst="rect">
             <a:avLst/>
@@ -12394,7 +15644,7 @@
                 <a:ea typeface="Calibri"/>
                 <a:cs typeface="Calibri"/>
               </a:rPr>
-              <a:t>Perception</a:t>
+              <a:t>World</a:t>
             </a:r>
           </a:p>
           <a:p xmlns:a="http://schemas.openxmlformats.org/drawingml/2006/main">
@@ -12421,41 +15671,41 @@
                 <a:ea typeface="Calibri"/>
                 <a:cs typeface="Calibri"/>
               </a:rPr>
-              <a:t>Memory</a:t>
-            </a:r>
-          </a:p>
-        </p:txBody>
-      </p:sp>
-      <p:sp>
-        <p:nvSpPr>
-          <p:cNvPr id="7" name="">
-            <a:extLst xmlns:a="http://schemas.openxmlformats.org/drawingml/2006/main">
-              <a:ext uri="{FF2B5EF4-FFF2-40B4-BE49-F238E27FC236}">
-                <a16:creationId xmlns:a16="http://schemas.microsoft.com/office/drawing/2014/main" id="{FB6A96EB-6AFE-4E9C-AFE8-F0FBC49EC4DC}"/>
-              </a:ext>
-            </a:extLst>
-          </p:cNvPr>
-          <p:cNvSpPr>
-            <a:spLocks xmlns:a="http://schemas.openxmlformats.org/drawingml/2006/main" noGrp="1"/>
-          </p:cNvSpPr>
-          <p:nvPr/>
-        </p:nvSpPr>
-        <p:spPr>
-          <a:xfrm xmlns:a="http://schemas.openxmlformats.org/drawingml/2006/main">
-            <a:off x="2428875" y="2333625"/>
-            <a:ext cx="1123950" cy="590550"/>
+              <a:t>Perception</a:t>
+            </a:r>
+          </a:p>
+        </p:txBody>
+      </p:sp>
+      <p:sp>
+        <p:nvSpPr>
+          <p:cNvPr id="6" name="">
+            <a:extLst xmlns:a="http://schemas.openxmlformats.org/drawingml/2006/main">
+              <a:ext uri="{FF2B5EF4-FFF2-40B4-BE49-F238E27FC236}">
+                <a16:creationId xmlns:a16="http://schemas.microsoft.com/office/drawing/2014/main" id="{1647337B-E12E-4D63-9EF5-34E12020900E}"/>
+              </a:ext>
+            </a:extLst>
+          </p:cNvPr>
+          <p:cNvSpPr>
+            <a:spLocks xmlns:a="http://schemas.openxmlformats.org/drawingml/2006/main" noGrp="1"/>
+          </p:cNvSpPr>
+          <p:nvPr/>
+        </p:nvSpPr>
+        <p:spPr>
+          <a:xfrm xmlns:a="http://schemas.openxmlformats.org/drawingml/2006/main">
+            <a:off x="2428875" y="2152650"/>
+            <a:ext cx="1314450" cy="552450"/>
           </a:xfrm>
           <a:prstGeom xmlns:a="http://schemas.openxmlformats.org/drawingml/2006/main" prst="roundRect">
             <a:avLst>
-              <a:gd name="adj" fmla="val 9677"/>
+              <a:gd name="adj" fmla="val 10345"/>
             </a:avLst>
           </a:prstGeom>
           <a:solidFill xmlns:a="http://schemas.openxmlformats.org/drawingml/2006/main">
-            <a:srgbClr val="F4A51C"/>
+            <a:srgbClr val="20384F"/>
           </a:solidFill>
           <a:ln xmlns:a="http://schemas.openxmlformats.org/drawingml/2006/main" w="9525">
             <a:solidFill>
-              <a:srgbClr val="F4A51C"/>
+              <a:srgbClr val="20384F"/>
             </a:solidFill>
             <a:prstDash val="solid"/>
           </a:ln>
@@ -12463,22 +15713,22 @@
       </p:sp>
       <p:sp>
         <p:nvSpPr>
-          <p:cNvPr id="8" name="">
-            <a:extLst xmlns:a="http://schemas.openxmlformats.org/drawingml/2006/main">
-              <a:ext uri="{FF2B5EF4-FFF2-40B4-BE49-F238E27FC236}">
-                <a16:creationId xmlns:a16="http://schemas.microsoft.com/office/drawing/2014/main" id="{0CE5D4D0-5ACF-4817-A4CA-D4B3CB390E9C}"/>
-              </a:ext>
-            </a:extLst>
-          </p:cNvPr>
-          <p:cNvSpPr>
-            <a:spLocks xmlns:a="http://schemas.openxmlformats.org/drawingml/2006/main" noGrp="1"/>
-          </p:cNvSpPr>
-          <p:nvPr/>
-        </p:nvSpPr>
-        <p:spPr>
-          <a:xfrm xmlns:a="http://schemas.openxmlformats.org/drawingml/2006/main">
-            <a:off x="2505075" y="2428875"/>
-            <a:ext cx="971550" cy="419100"/>
+          <p:cNvPr id="7" name="">
+            <a:extLst xmlns:a="http://schemas.openxmlformats.org/drawingml/2006/main">
+              <a:ext uri="{FF2B5EF4-FFF2-40B4-BE49-F238E27FC236}">
+                <a16:creationId xmlns:a16="http://schemas.microsoft.com/office/drawing/2014/main" id="{4874839C-FDEB-4C84-975E-484E7B822012}"/>
+              </a:ext>
+            </a:extLst>
+          </p:cNvPr>
+          <p:cNvSpPr>
+            <a:spLocks xmlns:a="http://schemas.openxmlformats.org/drawingml/2006/main" noGrp="1"/>
+          </p:cNvSpPr>
+          <p:nvPr/>
+        </p:nvSpPr>
+        <p:spPr>
+          <a:xfrm xmlns:a="http://schemas.openxmlformats.org/drawingml/2006/main">
+            <a:off x="2505075" y="2247900"/>
+            <a:ext cx="1162050" cy="381000"/>
           </a:xfrm>
           <a:prstGeom xmlns:a="http://schemas.openxmlformats.org/drawingml/2006/main" prst="rect">
             <a:avLst/>
@@ -12516,7 +15766,7 @@
                 <a:ea typeface="Calibri"/>
                 <a:cs typeface="Calibri"/>
               </a:rPr>
-              <a:t>Target</a:t>
+              <a:t>Shared</a:t>
             </a:r>
           </a:p>
           <a:p xmlns:a="http://schemas.openxmlformats.org/drawingml/2006/main">
@@ -12543,33 +15793,33 @@
                 <a:ea typeface="Calibri"/>
                 <a:cs typeface="Calibri"/>
               </a:rPr>
-              <a:t>Scoring</a:t>
-            </a:r>
-          </a:p>
-        </p:txBody>
-      </p:sp>
-      <p:sp>
-        <p:nvSpPr>
-          <p:cNvPr id="9" name="">
-            <a:extLst xmlns:a="http://schemas.openxmlformats.org/drawingml/2006/main">
-              <a:ext uri="{FF2B5EF4-FFF2-40B4-BE49-F238E27FC236}">
-                <a16:creationId xmlns:a16="http://schemas.microsoft.com/office/drawing/2014/main" id="{558FE62F-AD89-4FB3-AAB1-368025BBF5E7}"/>
-              </a:ext>
-            </a:extLst>
-          </p:cNvPr>
-          <p:cNvSpPr>
-            <a:spLocks xmlns:a="http://schemas.openxmlformats.org/drawingml/2006/main" noGrp="1"/>
-          </p:cNvSpPr>
-          <p:nvPr/>
-        </p:nvSpPr>
-        <p:spPr>
-          <a:xfrm xmlns:a="http://schemas.openxmlformats.org/drawingml/2006/main">
-            <a:off x="3952875" y="2333625"/>
-            <a:ext cx="1123950" cy="590550"/>
+              <a:t>Memory</a:t>
+            </a:r>
+          </a:p>
+        </p:txBody>
+      </p:sp>
+      <p:sp>
+        <p:nvSpPr>
+          <p:cNvPr id="8" name="">
+            <a:extLst xmlns:a="http://schemas.openxmlformats.org/drawingml/2006/main">
+              <a:ext uri="{FF2B5EF4-FFF2-40B4-BE49-F238E27FC236}">
+                <a16:creationId xmlns:a16="http://schemas.microsoft.com/office/drawing/2014/main" id="{A809DC92-9BC1-4940-AD05-49583F2CCD89}"/>
+              </a:ext>
+            </a:extLst>
+          </p:cNvPr>
+          <p:cNvSpPr>
+            <a:spLocks xmlns:a="http://schemas.openxmlformats.org/drawingml/2006/main" noGrp="1"/>
+          </p:cNvSpPr>
+          <p:nvPr/>
+        </p:nvSpPr>
+        <p:spPr>
+          <a:xfrm xmlns:a="http://schemas.openxmlformats.org/drawingml/2006/main">
+            <a:off x="4114800" y="2152650"/>
+            <a:ext cx="1314450" cy="552450"/>
           </a:xfrm>
           <a:prstGeom xmlns:a="http://schemas.openxmlformats.org/drawingml/2006/main" prst="roundRect">
             <a:avLst>
-              <a:gd name="adj" fmla="val 9677"/>
+              <a:gd name="adj" fmla="val 10345"/>
             </a:avLst>
           </a:prstGeom>
           <a:solidFill xmlns:a="http://schemas.openxmlformats.org/drawingml/2006/main">
@@ -12585,22 +15835,22 @@
       </p:sp>
       <p:sp>
         <p:nvSpPr>
-          <p:cNvPr id="10" name="">
-            <a:extLst xmlns:a="http://schemas.openxmlformats.org/drawingml/2006/main">
-              <a:ext uri="{FF2B5EF4-FFF2-40B4-BE49-F238E27FC236}">
-                <a16:creationId xmlns:a16="http://schemas.microsoft.com/office/drawing/2014/main" id="{6E833665-67B6-4D1D-B351-F7EE49518082}"/>
-              </a:ext>
-            </a:extLst>
-          </p:cNvPr>
-          <p:cNvSpPr>
-            <a:spLocks xmlns:a="http://schemas.openxmlformats.org/drawingml/2006/main" noGrp="1"/>
-          </p:cNvSpPr>
-          <p:nvPr/>
-        </p:nvSpPr>
-        <p:spPr>
-          <a:xfrm xmlns:a="http://schemas.openxmlformats.org/drawingml/2006/main">
-            <a:off x="4029075" y="2428875"/>
-            <a:ext cx="971550" cy="419100"/>
+          <p:cNvPr id="9" name="">
+            <a:extLst xmlns:a="http://schemas.openxmlformats.org/drawingml/2006/main">
+              <a:ext uri="{FF2B5EF4-FFF2-40B4-BE49-F238E27FC236}">
+                <a16:creationId xmlns:a16="http://schemas.microsoft.com/office/drawing/2014/main" id="{77E2E361-E1F5-4A73-B207-0CD6FD2F43A2}"/>
+              </a:ext>
+            </a:extLst>
+          </p:cNvPr>
+          <p:cNvSpPr>
+            <a:spLocks xmlns:a="http://schemas.openxmlformats.org/drawingml/2006/main" noGrp="1"/>
+          </p:cNvSpPr>
+          <p:nvPr/>
+        </p:nvSpPr>
+        <p:spPr>
+          <a:xfrm xmlns:a="http://schemas.openxmlformats.org/drawingml/2006/main">
+            <a:off x="4191000" y="2247900"/>
+            <a:ext cx="1162050" cy="381000"/>
           </a:xfrm>
           <a:prstGeom xmlns:a="http://schemas.openxmlformats.org/drawingml/2006/main" prst="rect">
             <a:avLst/>
@@ -12665,33 +15915,33 @@
                 <a:ea typeface="Calibri"/>
                 <a:cs typeface="Calibri"/>
               </a:rPr>
-              <a:t>Decision</a:t>
-            </a:r>
-          </a:p>
-        </p:txBody>
-      </p:sp>
-      <p:sp>
-        <p:nvSpPr>
-          <p:cNvPr id="11" name="">
-            <a:extLst xmlns:a="http://schemas.openxmlformats.org/drawingml/2006/main">
-              <a:ext uri="{FF2B5EF4-FFF2-40B4-BE49-F238E27FC236}">
-                <a16:creationId xmlns:a16="http://schemas.microsoft.com/office/drawing/2014/main" id="{41E90D9D-299F-428E-B518-9E322423817B}"/>
-              </a:ext>
-            </a:extLst>
-          </p:cNvPr>
-          <p:cNvSpPr>
-            <a:spLocks xmlns:a="http://schemas.openxmlformats.org/drawingml/2006/main" noGrp="1"/>
-          </p:cNvSpPr>
-          <p:nvPr/>
-        </p:nvSpPr>
-        <p:spPr>
-          <a:xfrm xmlns:a="http://schemas.openxmlformats.org/drawingml/2006/main">
-            <a:off x="5476875" y="2333625"/>
-            <a:ext cx="1123950" cy="590550"/>
+              <a:t>Scoring</a:t>
+            </a:r>
+          </a:p>
+        </p:txBody>
+      </p:sp>
+      <p:sp>
+        <p:nvSpPr>
+          <p:cNvPr id="10" name="">
+            <a:extLst xmlns:a="http://schemas.openxmlformats.org/drawingml/2006/main">
+              <a:ext uri="{FF2B5EF4-FFF2-40B4-BE49-F238E27FC236}">
+                <a16:creationId xmlns:a16="http://schemas.microsoft.com/office/drawing/2014/main" id="{58578848-936D-432E-B7F3-8D20AE0BE248}"/>
+              </a:ext>
+            </a:extLst>
+          </p:cNvPr>
+          <p:cNvSpPr>
+            <a:spLocks xmlns:a="http://schemas.openxmlformats.org/drawingml/2006/main" noGrp="1"/>
+          </p:cNvSpPr>
+          <p:nvPr/>
+        </p:nvSpPr>
+        <p:spPr>
+          <a:xfrm xmlns:a="http://schemas.openxmlformats.org/drawingml/2006/main">
+            <a:off x="5800725" y="2152650"/>
+            <a:ext cx="1314450" cy="552450"/>
           </a:xfrm>
           <a:prstGeom xmlns:a="http://schemas.openxmlformats.org/drawingml/2006/main" prst="roundRect">
             <a:avLst>
-              <a:gd name="adj" fmla="val 9677"/>
+              <a:gd name="adj" fmla="val 10345"/>
             </a:avLst>
           </a:prstGeom>
           <a:solidFill xmlns:a="http://schemas.openxmlformats.org/drawingml/2006/main">
@@ -12707,22 +15957,22 @@
       </p:sp>
       <p:sp>
         <p:nvSpPr>
-          <p:cNvPr id="12" name="">
-            <a:extLst xmlns:a="http://schemas.openxmlformats.org/drawingml/2006/main">
-              <a:ext uri="{FF2B5EF4-FFF2-40B4-BE49-F238E27FC236}">
-                <a16:creationId xmlns:a16="http://schemas.microsoft.com/office/drawing/2014/main" id="{5D1587D1-CBD6-4BD2-92DD-41DDF5ADE777}"/>
-              </a:ext>
-            </a:extLst>
-          </p:cNvPr>
-          <p:cNvSpPr>
-            <a:spLocks xmlns:a="http://schemas.openxmlformats.org/drawingml/2006/main" noGrp="1"/>
-          </p:cNvSpPr>
-          <p:nvPr/>
-        </p:nvSpPr>
-        <p:spPr>
-          <a:xfrm xmlns:a="http://schemas.openxmlformats.org/drawingml/2006/main">
-            <a:off x="5553075" y="2428875"/>
-            <a:ext cx="971550" cy="419100"/>
+          <p:cNvPr id="11" name="">
+            <a:extLst xmlns:a="http://schemas.openxmlformats.org/drawingml/2006/main">
+              <a:ext uri="{FF2B5EF4-FFF2-40B4-BE49-F238E27FC236}">
+                <a16:creationId xmlns:a16="http://schemas.microsoft.com/office/drawing/2014/main" id="{E9C2DD11-92BB-4B66-87CD-6A8BDCC0722E}"/>
+              </a:ext>
+            </a:extLst>
+          </p:cNvPr>
+          <p:cNvSpPr>
+            <a:spLocks xmlns:a="http://schemas.openxmlformats.org/drawingml/2006/main" noGrp="1"/>
+          </p:cNvSpPr>
+          <p:nvPr/>
+        </p:nvSpPr>
+        <p:spPr>
+          <a:xfrm xmlns:a="http://schemas.openxmlformats.org/drawingml/2006/main">
+            <a:off x="5876925" y="2247900"/>
+            <a:ext cx="1162050" cy="381000"/>
           </a:xfrm>
           <a:prstGeom xmlns:a="http://schemas.openxmlformats.org/drawingml/2006/main" prst="rect">
             <a:avLst/>
@@ -12760,7 +16010,7 @@
                 <a:ea typeface="Calibri"/>
                 <a:cs typeface="Calibri"/>
               </a:rPr>
-              <a:t>Commitment</a:t>
+              <a:t>Action</a:t>
             </a:r>
           </a:p>
           <a:p xmlns:a="http://schemas.openxmlformats.org/drawingml/2006/main">
@@ -12787,33 +16037,33 @@
                 <a:ea typeface="Calibri"/>
                 <a:cs typeface="Calibri"/>
               </a:rPr>
-              <a:t>Hysteresis</a:t>
-            </a:r>
-          </a:p>
-        </p:txBody>
-      </p:sp>
-      <p:sp>
-        <p:nvSpPr>
-          <p:cNvPr id="13" name="">
-            <a:extLst xmlns:a="http://schemas.openxmlformats.org/drawingml/2006/main">
-              <a:ext uri="{FF2B5EF4-FFF2-40B4-BE49-F238E27FC236}">
-                <a16:creationId xmlns:a16="http://schemas.microsoft.com/office/drawing/2014/main" id="{24949463-0951-4F35-A38F-7BBC0A15FE40}"/>
-              </a:ext>
-            </a:extLst>
-          </p:cNvPr>
-          <p:cNvSpPr>
-            <a:spLocks xmlns:a="http://schemas.openxmlformats.org/drawingml/2006/main" noGrp="1"/>
-          </p:cNvSpPr>
-          <p:nvPr/>
-        </p:nvSpPr>
-        <p:spPr>
-          <a:xfrm xmlns:a="http://schemas.openxmlformats.org/drawingml/2006/main">
-            <a:off x="7000875" y="2333625"/>
-            <a:ext cx="1123950" cy="590550"/>
+              <a:t>Commitment</a:t>
+            </a:r>
+          </a:p>
+        </p:txBody>
+      </p:sp>
+      <p:sp>
+        <p:nvSpPr>
+          <p:cNvPr id="12" name="">
+            <a:extLst xmlns:a="http://schemas.openxmlformats.org/drawingml/2006/main">
+              <a:ext uri="{FF2B5EF4-FFF2-40B4-BE49-F238E27FC236}">
+                <a16:creationId xmlns:a16="http://schemas.microsoft.com/office/drawing/2014/main" id="{8A9F7799-9DD1-44AC-80C1-2A2E9C9B6C7D}"/>
+              </a:ext>
+            </a:extLst>
+          </p:cNvPr>
+          <p:cNvSpPr>
+            <a:spLocks xmlns:a="http://schemas.openxmlformats.org/drawingml/2006/main" noGrp="1"/>
+          </p:cNvSpPr>
+          <p:nvPr/>
+        </p:nvSpPr>
+        <p:spPr>
+          <a:xfrm xmlns:a="http://schemas.openxmlformats.org/drawingml/2006/main">
+            <a:off x="7486650" y="2152650"/>
+            <a:ext cx="1314450" cy="552450"/>
           </a:xfrm>
           <a:prstGeom xmlns:a="http://schemas.openxmlformats.org/drawingml/2006/main" prst="roundRect">
             <a:avLst>
-              <a:gd name="adj" fmla="val 9677"/>
+              <a:gd name="adj" fmla="val 10345"/>
             </a:avLst>
           </a:prstGeom>
           <a:solidFill xmlns:a="http://schemas.openxmlformats.org/drawingml/2006/main">
@@ -12829,22 +16079,22 @@
       </p:sp>
       <p:sp>
         <p:nvSpPr>
-          <p:cNvPr id="14" name="">
-            <a:extLst xmlns:a="http://schemas.openxmlformats.org/drawingml/2006/main">
-              <a:ext uri="{FF2B5EF4-FFF2-40B4-BE49-F238E27FC236}">
-                <a16:creationId xmlns:a16="http://schemas.microsoft.com/office/drawing/2014/main" id="{C090F347-3ACC-4CE2-B1CC-B3836D709FFE}"/>
-              </a:ext>
-            </a:extLst>
-          </p:cNvPr>
-          <p:cNvSpPr>
-            <a:spLocks xmlns:a="http://schemas.openxmlformats.org/drawingml/2006/main" noGrp="1"/>
-          </p:cNvSpPr>
-          <p:nvPr/>
-        </p:nvSpPr>
-        <p:spPr>
-          <a:xfrm xmlns:a="http://schemas.openxmlformats.org/drawingml/2006/main">
-            <a:off x="7077075" y="2428875"/>
-            <a:ext cx="971550" cy="419100"/>
+          <p:cNvPr id="13" name="">
+            <a:extLst xmlns:a="http://schemas.openxmlformats.org/drawingml/2006/main">
+              <a:ext uri="{FF2B5EF4-FFF2-40B4-BE49-F238E27FC236}">
+                <a16:creationId xmlns:a16="http://schemas.microsoft.com/office/drawing/2014/main" id="{5674DF33-37C3-4D23-9894-55178B52C17B}"/>
+              </a:ext>
+            </a:extLst>
+          </p:cNvPr>
+          <p:cNvSpPr>
+            <a:spLocks xmlns:a="http://schemas.openxmlformats.org/drawingml/2006/main" noGrp="1"/>
+          </p:cNvSpPr>
+          <p:nvPr/>
+        </p:nvSpPr>
+        <p:spPr>
+          <a:xfrm xmlns:a="http://schemas.openxmlformats.org/drawingml/2006/main">
+            <a:off x="7562850" y="2247900"/>
+            <a:ext cx="1162050" cy="381000"/>
           </a:xfrm>
           <a:prstGeom xmlns:a="http://schemas.openxmlformats.org/drawingml/2006/main" prst="rect">
             <a:avLst/>
@@ -12882,7 +16132,7 @@
                 <a:ea typeface="Calibri"/>
                 <a:cs typeface="Calibri"/>
               </a:rPr>
-              <a:t>Tactical</a:t>
+              <a:t>Planner</a:t>
             </a:r>
           </a:p>
           <a:p xmlns:a="http://schemas.openxmlformats.org/drawingml/2006/main">
@@ -12909,33 +16159,33 @@
                 <a:ea typeface="Calibri"/>
                 <a:cs typeface="Calibri"/>
               </a:rPr>
-              <a:t>Movement</a:t>
-            </a:r>
-          </a:p>
-        </p:txBody>
-      </p:sp>
-      <p:sp>
-        <p:nvSpPr>
-          <p:cNvPr id="15" name="">
-            <a:extLst xmlns:a="http://schemas.openxmlformats.org/drawingml/2006/main">
-              <a:ext uri="{FF2B5EF4-FFF2-40B4-BE49-F238E27FC236}">
-                <a16:creationId xmlns:a16="http://schemas.microsoft.com/office/drawing/2014/main" id="{E59F975B-A7B0-47D8-A459-75D8B97D7C22}"/>
-              </a:ext>
-            </a:extLst>
-          </p:cNvPr>
-          <p:cNvSpPr>
-            <a:spLocks xmlns:a="http://schemas.openxmlformats.org/drawingml/2006/main" noGrp="1"/>
-          </p:cNvSpPr>
-          <p:nvPr/>
-        </p:nvSpPr>
-        <p:spPr>
-          <a:xfrm xmlns:a="http://schemas.openxmlformats.org/drawingml/2006/main">
-            <a:off x="8524875" y="2333625"/>
-            <a:ext cx="1123950" cy="590550"/>
+              <a:t>Navigation</a:t>
+            </a:r>
+          </a:p>
+        </p:txBody>
+      </p:sp>
+      <p:sp>
+        <p:nvSpPr>
+          <p:cNvPr id="14" name="">
+            <a:extLst xmlns:a="http://schemas.openxmlformats.org/drawingml/2006/main">
+              <a:ext uri="{FF2B5EF4-FFF2-40B4-BE49-F238E27FC236}">
+                <a16:creationId xmlns:a16="http://schemas.microsoft.com/office/drawing/2014/main" id="{542ECFD3-86BC-4838-8AED-4D78D218F5B9}"/>
+              </a:ext>
+            </a:extLst>
+          </p:cNvPr>
+          <p:cNvSpPr>
+            <a:spLocks xmlns:a="http://schemas.openxmlformats.org/drawingml/2006/main" noGrp="1"/>
+          </p:cNvSpPr>
+          <p:nvPr/>
+        </p:nvSpPr>
+        <p:spPr>
+          <a:xfrm xmlns:a="http://schemas.openxmlformats.org/drawingml/2006/main">
+            <a:off x="9172575" y="2152650"/>
+            <a:ext cx="1314450" cy="552450"/>
           </a:xfrm>
           <a:prstGeom xmlns:a="http://schemas.openxmlformats.org/drawingml/2006/main" prst="roundRect">
             <a:avLst>
-              <a:gd name="adj" fmla="val 9677"/>
+              <a:gd name="adj" fmla="val 10345"/>
             </a:avLst>
           </a:prstGeom>
           <a:solidFill xmlns:a="http://schemas.openxmlformats.org/drawingml/2006/main">
@@ -12951,22 +16201,22 @@
       </p:sp>
       <p:sp>
         <p:nvSpPr>
-          <p:cNvPr id="16" name="">
-            <a:extLst xmlns:a="http://schemas.openxmlformats.org/drawingml/2006/main">
-              <a:ext uri="{FF2B5EF4-FFF2-40B4-BE49-F238E27FC236}">
-                <a16:creationId xmlns:a16="http://schemas.microsoft.com/office/drawing/2014/main" id="{954BAC6D-F791-46E1-8976-8A43705CFC38}"/>
-              </a:ext>
-            </a:extLst>
-          </p:cNvPr>
-          <p:cNvSpPr>
-            <a:spLocks xmlns:a="http://schemas.openxmlformats.org/drawingml/2006/main" noGrp="1"/>
-          </p:cNvSpPr>
-          <p:nvPr/>
-        </p:nvSpPr>
-        <p:spPr>
-          <a:xfrm xmlns:a="http://schemas.openxmlformats.org/drawingml/2006/main">
-            <a:off x="8601075" y="2428875"/>
-            <a:ext cx="971550" cy="419100"/>
+          <p:cNvPr id="15" name="">
+            <a:extLst xmlns:a="http://schemas.openxmlformats.org/drawingml/2006/main">
+              <a:ext uri="{FF2B5EF4-FFF2-40B4-BE49-F238E27FC236}">
+                <a16:creationId xmlns:a16="http://schemas.microsoft.com/office/drawing/2014/main" id="{D14D99B5-33B5-424D-AAC6-4182AACAE4F9}"/>
+              </a:ext>
+            </a:extLst>
+          </p:cNvPr>
+          <p:cNvSpPr>
+            <a:spLocks xmlns:a="http://schemas.openxmlformats.org/drawingml/2006/main" noGrp="1"/>
+          </p:cNvSpPr>
+          <p:nvPr/>
+        </p:nvSpPr>
+        <p:spPr>
+          <a:xfrm xmlns:a="http://schemas.openxmlformats.org/drawingml/2006/main">
+            <a:off x="9248775" y="2247900"/>
+            <a:ext cx="1162050" cy="381000"/>
           </a:xfrm>
           <a:prstGeom xmlns:a="http://schemas.openxmlformats.org/drawingml/2006/main" prst="rect">
             <a:avLst/>
@@ -13004,7 +16254,7 @@
                 <a:ea typeface="Calibri"/>
                 <a:cs typeface="Calibri"/>
               </a:rPr>
-              <a:t>Action</a:t>
+              <a:t>Command</a:t>
             </a:r>
           </a:p>
           <a:p xmlns:a="http://schemas.openxmlformats.org/drawingml/2006/main">
@@ -13031,29 +16281,29 @@
                 <a:ea typeface="Calibri"/>
                 <a:cs typeface="Calibri"/>
               </a:rPr>
-              <a:t>Executor</a:t>
-            </a:r>
-          </a:p>
-        </p:txBody>
-      </p:sp>
-      <p:sp>
-        <p:nvSpPr>
-          <p:cNvPr id="17" name="">
-            <a:extLst xmlns:a="http://schemas.openxmlformats.org/drawingml/2006/main">
-              <a:ext uri="{FF2B5EF4-FFF2-40B4-BE49-F238E27FC236}">
-                <a16:creationId xmlns:a16="http://schemas.microsoft.com/office/drawing/2014/main" id="{4526B58B-8B2C-4EC7-B536-DB4A378660F6}"/>
-              </a:ext>
-            </a:extLst>
-          </p:cNvPr>
-          <p:cNvSpPr>
-            <a:spLocks xmlns:a="http://schemas.openxmlformats.org/drawingml/2006/main" noGrp="1"/>
-          </p:cNvSpPr>
-          <p:nvPr/>
-        </p:nvSpPr>
-        <p:spPr>
-          <a:xfrm xmlns:a="http://schemas.openxmlformats.org/drawingml/2006/main">
-            <a:off x="2076450" y="2543175"/>
-            <a:ext cx="266700" cy="171450"/>
+              <a:t>Output</a:t>
+            </a:r>
+          </a:p>
+        </p:txBody>
+      </p:sp>
+      <p:sp>
+        <p:nvSpPr>
+          <p:cNvPr id="16" name="">
+            <a:extLst xmlns:a="http://schemas.openxmlformats.org/drawingml/2006/main">
+              <a:ext uri="{FF2B5EF4-FFF2-40B4-BE49-F238E27FC236}">
+                <a16:creationId xmlns:a16="http://schemas.microsoft.com/office/drawing/2014/main" id="{C2AD9D3E-54F7-4DC7-81C0-D037A53ECABE}"/>
+              </a:ext>
+            </a:extLst>
+          </p:cNvPr>
+          <p:cNvSpPr>
+            <a:spLocks xmlns:a="http://schemas.openxmlformats.org/drawingml/2006/main" noGrp="1"/>
+          </p:cNvSpPr>
+          <p:nvPr/>
+        </p:nvSpPr>
+        <p:spPr>
+          <a:xfrm xmlns:a="http://schemas.openxmlformats.org/drawingml/2006/main">
+            <a:off x="2114550" y="2343150"/>
+            <a:ext cx="209550" cy="171450"/>
           </a:xfrm>
           <a:prstGeom xmlns:a="http://schemas.openxmlformats.org/drawingml/2006/main" prst="rightArrow">
             <a:avLst/>
@@ -13069,22 +16319,22 @@
       </p:sp>
       <p:sp>
         <p:nvSpPr>
-          <p:cNvPr id="18" name="">
-            <a:extLst xmlns:a="http://schemas.openxmlformats.org/drawingml/2006/main">
-              <a:ext uri="{FF2B5EF4-FFF2-40B4-BE49-F238E27FC236}">
-                <a16:creationId xmlns:a16="http://schemas.microsoft.com/office/drawing/2014/main" id="{245867AE-1EA3-46B2-9C47-3DEB47F435CF}"/>
-              </a:ext>
-            </a:extLst>
-          </p:cNvPr>
-          <p:cNvSpPr>
-            <a:spLocks xmlns:a="http://schemas.openxmlformats.org/drawingml/2006/main" noGrp="1"/>
-          </p:cNvSpPr>
-          <p:nvPr/>
-        </p:nvSpPr>
-        <p:spPr>
-          <a:xfrm xmlns:a="http://schemas.openxmlformats.org/drawingml/2006/main">
-            <a:off x="3600450" y="2543175"/>
-            <a:ext cx="266700" cy="171450"/>
+          <p:cNvPr id="17" name="">
+            <a:extLst xmlns:a="http://schemas.openxmlformats.org/drawingml/2006/main">
+              <a:ext uri="{FF2B5EF4-FFF2-40B4-BE49-F238E27FC236}">
+                <a16:creationId xmlns:a16="http://schemas.microsoft.com/office/drawing/2014/main" id="{BDA3E527-1F13-48B6-B651-38A94D4F5C0C}"/>
+              </a:ext>
+            </a:extLst>
+          </p:cNvPr>
+          <p:cNvSpPr>
+            <a:spLocks xmlns:a="http://schemas.openxmlformats.org/drawingml/2006/main" noGrp="1"/>
+          </p:cNvSpPr>
+          <p:nvPr/>
+        </p:nvSpPr>
+        <p:spPr>
+          <a:xfrm xmlns:a="http://schemas.openxmlformats.org/drawingml/2006/main">
+            <a:off x="3800475" y="2343150"/>
+            <a:ext cx="209550" cy="171450"/>
           </a:xfrm>
           <a:prstGeom xmlns:a="http://schemas.openxmlformats.org/drawingml/2006/main" prst="rightArrow">
             <a:avLst/>
@@ -13100,22 +16350,22 @@
       </p:sp>
       <p:sp>
         <p:nvSpPr>
-          <p:cNvPr id="19" name="">
-            <a:extLst xmlns:a="http://schemas.openxmlformats.org/drawingml/2006/main">
-              <a:ext uri="{FF2B5EF4-FFF2-40B4-BE49-F238E27FC236}">
-                <a16:creationId xmlns:a16="http://schemas.microsoft.com/office/drawing/2014/main" id="{C090DC2C-39DD-47FF-AD74-95CA075706E7}"/>
-              </a:ext>
-            </a:extLst>
-          </p:cNvPr>
-          <p:cNvSpPr>
-            <a:spLocks xmlns:a="http://schemas.openxmlformats.org/drawingml/2006/main" noGrp="1"/>
-          </p:cNvSpPr>
-          <p:nvPr/>
-        </p:nvSpPr>
-        <p:spPr>
-          <a:xfrm xmlns:a="http://schemas.openxmlformats.org/drawingml/2006/main">
-            <a:off x="5124450" y="2543175"/>
-            <a:ext cx="266700" cy="171450"/>
+          <p:cNvPr id="18" name="">
+            <a:extLst xmlns:a="http://schemas.openxmlformats.org/drawingml/2006/main">
+              <a:ext uri="{FF2B5EF4-FFF2-40B4-BE49-F238E27FC236}">
+                <a16:creationId xmlns:a16="http://schemas.microsoft.com/office/drawing/2014/main" id="{F49D8EC9-7D4E-43F3-A333-E111C158FF29}"/>
+              </a:ext>
+            </a:extLst>
+          </p:cNvPr>
+          <p:cNvSpPr>
+            <a:spLocks xmlns:a="http://schemas.openxmlformats.org/drawingml/2006/main" noGrp="1"/>
+          </p:cNvSpPr>
+          <p:nvPr/>
+        </p:nvSpPr>
+        <p:spPr>
+          <a:xfrm xmlns:a="http://schemas.openxmlformats.org/drawingml/2006/main">
+            <a:off x="5486400" y="2343150"/>
+            <a:ext cx="209550" cy="171450"/>
           </a:xfrm>
           <a:prstGeom xmlns:a="http://schemas.openxmlformats.org/drawingml/2006/main" prst="rightArrow">
             <a:avLst/>
@@ -13131,22 +16381,22 @@
       </p:sp>
       <p:sp>
         <p:nvSpPr>
-          <p:cNvPr id="20" name="">
-            <a:extLst xmlns:a="http://schemas.openxmlformats.org/drawingml/2006/main">
-              <a:ext uri="{FF2B5EF4-FFF2-40B4-BE49-F238E27FC236}">
-                <a16:creationId xmlns:a16="http://schemas.microsoft.com/office/drawing/2014/main" id="{B13E5C7C-56E9-49E0-96C5-B743E93B143F}"/>
-              </a:ext>
-            </a:extLst>
-          </p:cNvPr>
-          <p:cNvSpPr>
-            <a:spLocks xmlns:a="http://schemas.openxmlformats.org/drawingml/2006/main" noGrp="1"/>
-          </p:cNvSpPr>
-          <p:nvPr/>
-        </p:nvSpPr>
-        <p:spPr>
-          <a:xfrm xmlns:a="http://schemas.openxmlformats.org/drawingml/2006/main">
-            <a:off x="6648450" y="2543175"/>
-            <a:ext cx="266700" cy="171450"/>
+          <p:cNvPr id="19" name="">
+            <a:extLst xmlns:a="http://schemas.openxmlformats.org/drawingml/2006/main">
+              <a:ext uri="{FF2B5EF4-FFF2-40B4-BE49-F238E27FC236}">
+                <a16:creationId xmlns:a16="http://schemas.microsoft.com/office/drawing/2014/main" id="{29791BB4-B03A-415A-9B65-469DACB52AD7}"/>
+              </a:ext>
+            </a:extLst>
+          </p:cNvPr>
+          <p:cNvSpPr>
+            <a:spLocks xmlns:a="http://schemas.openxmlformats.org/drawingml/2006/main" noGrp="1"/>
+          </p:cNvSpPr>
+          <p:nvPr/>
+        </p:nvSpPr>
+        <p:spPr>
+          <a:xfrm xmlns:a="http://schemas.openxmlformats.org/drawingml/2006/main">
+            <a:off x="7172325" y="2343150"/>
+            <a:ext cx="209550" cy="171450"/>
           </a:xfrm>
           <a:prstGeom xmlns:a="http://schemas.openxmlformats.org/drawingml/2006/main" prst="rightArrow">
             <a:avLst/>
@@ -13162,22 +16412,22 @@
       </p:sp>
       <p:sp>
         <p:nvSpPr>
-          <p:cNvPr id="21" name="">
-            <a:extLst xmlns:a="http://schemas.openxmlformats.org/drawingml/2006/main">
-              <a:ext uri="{FF2B5EF4-FFF2-40B4-BE49-F238E27FC236}">
-                <a16:creationId xmlns:a16="http://schemas.microsoft.com/office/drawing/2014/main" id="{142ED368-6E7D-4D36-A086-827C813F0E8C}"/>
-              </a:ext>
-            </a:extLst>
-          </p:cNvPr>
-          <p:cNvSpPr>
-            <a:spLocks xmlns:a="http://schemas.openxmlformats.org/drawingml/2006/main" noGrp="1"/>
-          </p:cNvSpPr>
-          <p:nvPr/>
-        </p:nvSpPr>
-        <p:spPr>
-          <a:xfrm xmlns:a="http://schemas.openxmlformats.org/drawingml/2006/main">
-            <a:off x="8172450" y="2543175"/>
-            <a:ext cx="266700" cy="171450"/>
+          <p:cNvPr id="20" name="">
+            <a:extLst xmlns:a="http://schemas.openxmlformats.org/drawingml/2006/main">
+              <a:ext uri="{FF2B5EF4-FFF2-40B4-BE49-F238E27FC236}">
+                <a16:creationId xmlns:a16="http://schemas.microsoft.com/office/drawing/2014/main" id="{386373D8-014B-4408-B5BF-6FEFA350D460}"/>
+              </a:ext>
+            </a:extLst>
+          </p:cNvPr>
+          <p:cNvSpPr>
+            <a:spLocks xmlns:a="http://schemas.openxmlformats.org/drawingml/2006/main" noGrp="1"/>
+          </p:cNvSpPr>
+          <p:nvPr/>
+        </p:nvSpPr>
+        <p:spPr>
+          <a:xfrm xmlns:a="http://schemas.openxmlformats.org/drawingml/2006/main">
+            <a:off x="8858250" y="2343150"/>
+            <a:ext cx="209550" cy="171450"/>
           </a:xfrm>
           <a:prstGeom xmlns:a="http://schemas.openxmlformats.org/drawingml/2006/main" prst="rightArrow">
             <a:avLst/>
@@ -13193,28 +16443,28 @@
       </p:sp>
       <p:sp>
         <p:nvSpPr>
-          <p:cNvPr id="22" name="">
-            <a:extLst xmlns:a="http://schemas.openxmlformats.org/drawingml/2006/main">
-              <a:ext uri="{FF2B5EF4-FFF2-40B4-BE49-F238E27FC236}">
-                <a16:creationId xmlns:a16="http://schemas.microsoft.com/office/drawing/2014/main" id="{62F98CBF-5262-46CC-97C2-E6815CC8D617}"/>
-              </a:ext>
-            </a:extLst>
-          </p:cNvPr>
-          <p:cNvSpPr>
-            <a:spLocks xmlns:a="http://schemas.openxmlformats.org/drawingml/2006/main" noGrp="1"/>
-          </p:cNvSpPr>
-          <p:nvPr/>
-        </p:nvSpPr>
-        <p:spPr>
-          <a:xfrm xmlns:a="http://schemas.openxmlformats.org/drawingml/2006/main">
-            <a:off x="1447800" y="3733800"/>
-            <a:ext cx="2552700" cy="819150"/>
+          <p:cNvPr id="21" name="">
+            <a:extLst xmlns:a="http://schemas.openxmlformats.org/drawingml/2006/main">
+              <a:ext uri="{FF2B5EF4-FFF2-40B4-BE49-F238E27FC236}">
+                <a16:creationId xmlns:a16="http://schemas.microsoft.com/office/drawing/2014/main" id="{FB4F43BB-F8F8-40D1-A233-95DAADAE79BF}"/>
+              </a:ext>
+            </a:extLst>
+          </p:cNvPr>
+          <p:cNvSpPr>
+            <a:spLocks xmlns:a="http://schemas.openxmlformats.org/drawingml/2006/main" noGrp="1"/>
+          </p:cNvSpPr>
+          <p:nvPr/>
+        </p:nvSpPr>
+        <p:spPr>
+          <a:xfrm xmlns:a="http://schemas.openxmlformats.org/drawingml/2006/main">
+            <a:off x="876300" y="3733800"/>
+            <a:ext cx="2381250" cy="990600"/>
           </a:xfrm>
           <a:prstGeom xmlns:a="http://schemas.openxmlformats.org/drawingml/2006/main" prst="rect">
             <a:avLst/>
           </a:prstGeom>
           <a:solidFill xmlns:a="http://schemas.openxmlformats.org/drawingml/2006/main">
-            <a:srgbClr val="F6F8FB"/>
+            <a:srgbClr val="F8FAFC"/>
           </a:solidFill>
           <a:ln xmlns:a="http://schemas.openxmlformats.org/drawingml/2006/main" w="9525">
             <a:solidFill>
@@ -13226,22 +16476,22 @@
       </p:sp>
       <p:sp>
         <p:nvSpPr>
-          <p:cNvPr id="23" name="">
-            <a:extLst xmlns:a="http://schemas.openxmlformats.org/drawingml/2006/main">
-              <a:ext uri="{FF2B5EF4-FFF2-40B4-BE49-F238E27FC236}">
-                <a16:creationId xmlns:a16="http://schemas.microsoft.com/office/drawing/2014/main" id="{A861E577-0ADB-48A1-BF98-5922E1218A9F}"/>
-              </a:ext>
-            </a:extLst>
-          </p:cNvPr>
-          <p:cNvSpPr>
-            <a:spLocks xmlns:a="http://schemas.openxmlformats.org/drawingml/2006/main" noGrp="1"/>
-          </p:cNvSpPr>
-          <p:nvPr/>
-        </p:nvSpPr>
-        <p:spPr>
-          <a:xfrm xmlns:a="http://schemas.openxmlformats.org/drawingml/2006/main">
-            <a:off x="1447800" y="3733800"/>
-            <a:ext cx="66675" cy="819150"/>
+          <p:cNvPr id="22" name="">
+            <a:extLst xmlns:a="http://schemas.openxmlformats.org/drawingml/2006/main">
+              <a:ext uri="{FF2B5EF4-FFF2-40B4-BE49-F238E27FC236}">
+                <a16:creationId xmlns:a16="http://schemas.microsoft.com/office/drawing/2014/main" id="{789CE0A8-7988-475A-865C-43BEAAE7C601}"/>
+              </a:ext>
+            </a:extLst>
+          </p:cNvPr>
+          <p:cNvSpPr>
+            <a:spLocks xmlns:a="http://schemas.openxmlformats.org/drawingml/2006/main" noGrp="1"/>
+          </p:cNvSpPr>
+          <p:nvPr/>
+        </p:nvSpPr>
+        <p:spPr>
+          <a:xfrm xmlns:a="http://schemas.openxmlformats.org/drawingml/2006/main">
+            <a:off x="876300" y="3733800"/>
+            <a:ext cx="66675" cy="990600"/>
           </a:xfrm>
           <a:prstGeom xmlns:a="http://schemas.openxmlformats.org/drawingml/2006/main" prst="rect">
             <a:avLst/>
@@ -13257,22 +16507,22 @@
       </p:sp>
       <p:sp>
         <p:nvSpPr>
-          <p:cNvPr id="24" name="">
-            <a:extLst xmlns:a="http://schemas.openxmlformats.org/drawingml/2006/main">
-              <a:ext uri="{FF2B5EF4-FFF2-40B4-BE49-F238E27FC236}">
-                <a16:creationId xmlns:a16="http://schemas.microsoft.com/office/drawing/2014/main" id="{A9A89598-F820-4DFB-B8D8-3EF53C3654F8}"/>
-              </a:ext>
-            </a:extLst>
-          </p:cNvPr>
-          <p:cNvSpPr>
-            <a:spLocks xmlns:a="http://schemas.openxmlformats.org/drawingml/2006/main" noGrp="1"/>
-          </p:cNvSpPr>
-          <p:nvPr/>
-        </p:nvSpPr>
-        <p:spPr>
-          <a:xfrm xmlns:a="http://schemas.openxmlformats.org/drawingml/2006/main">
-            <a:off x="1695450" y="3943350"/>
-            <a:ext cx="2076450" cy="190500"/>
+          <p:cNvPr id="23" name="">
+            <a:extLst xmlns:a="http://schemas.openxmlformats.org/drawingml/2006/main">
+              <a:ext uri="{FF2B5EF4-FFF2-40B4-BE49-F238E27FC236}">
+                <a16:creationId xmlns:a16="http://schemas.microsoft.com/office/drawing/2014/main" id="{EE45BFAE-B725-4C01-82FF-5A28595856AB}"/>
+              </a:ext>
+            </a:extLst>
+          </p:cNvPr>
+          <p:cNvSpPr>
+            <a:spLocks xmlns:a="http://schemas.openxmlformats.org/drawingml/2006/main" noGrp="1"/>
+          </p:cNvSpPr>
+          <p:nvPr/>
+        </p:nvSpPr>
+        <p:spPr>
+          <a:xfrm xmlns:a="http://schemas.openxmlformats.org/drawingml/2006/main">
+            <a:off x="1047750" y="3848100"/>
+            <a:ext cx="2076450" cy="209550"/>
           </a:xfrm>
           <a:prstGeom xmlns:a="http://schemas.openxmlformats.org/drawingml/2006/main" prst="rect">
             <a:avLst/>
@@ -13292,7 +16542,7 @@
                 <a:spcPct val="105000"/>
               </a:lnSpc>
               <a:buNone/>
-              <a:defRPr sz="1200" b="1" i="0">
+              <a:defRPr sz="975" b="1" i="0">
                 <a:solidFill>
                   <a:srgbClr val="C01855"/>
                 </a:solidFill>
@@ -13302,7 +16552,7 @@
               </a:defRPr>
             </a:pPr>
             <a:r>
-              <a:rPr sz="1200" b="1" i="0">
+              <a:rPr sz="975" b="1" i="0">
                 <a:solidFill>
                   <a:srgbClr val="C01855"/>
                 </a:solidFill>
@@ -13310,29 +16560,29 @@
                 <a:ea typeface="Calibri"/>
                 <a:cs typeface="Calibri"/>
               </a:rPr>
-              <a:t>Team blackboard</a:t>
-            </a:r>
-          </a:p>
-        </p:txBody>
-      </p:sp>
-      <p:sp>
-        <p:nvSpPr>
-          <p:cNvPr id="25" name="">
-            <a:extLst xmlns:a="http://schemas.openxmlformats.org/drawingml/2006/main">
-              <a:ext uri="{FF2B5EF4-FFF2-40B4-BE49-F238E27FC236}">
-                <a16:creationId xmlns:a16="http://schemas.microsoft.com/office/drawing/2014/main" id="{569E034C-496F-4B8B-B4AE-1531C81F37A9}"/>
-              </a:ext>
-            </a:extLst>
-          </p:cNvPr>
-          <p:cNvSpPr>
-            <a:spLocks xmlns:a="http://schemas.openxmlformats.org/drawingml/2006/main" noGrp="1"/>
-          </p:cNvSpPr>
-          <p:nvPr/>
-        </p:nvSpPr>
-        <p:spPr>
-          <a:xfrm xmlns:a="http://schemas.openxmlformats.org/drawingml/2006/main">
-            <a:off x="1695450" y="4229100"/>
-            <a:ext cx="2095500" cy="266700"/>
+              <a:t>Blackboard coordination</a:t>
+            </a:r>
+          </a:p>
+        </p:txBody>
+      </p:sp>
+      <p:sp>
+        <p:nvSpPr>
+          <p:cNvPr id="24" name="">
+            <a:extLst xmlns:a="http://schemas.openxmlformats.org/drawingml/2006/main">
+              <a:ext uri="{FF2B5EF4-FFF2-40B4-BE49-F238E27FC236}">
+                <a16:creationId xmlns:a16="http://schemas.microsoft.com/office/drawing/2014/main" id="{E86FAA07-2232-442E-AC72-5FE86C4AD7D0}"/>
+              </a:ext>
+            </a:extLst>
+          </p:cNvPr>
+          <p:cNvSpPr>
+            <a:spLocks xmlns:a="http://schemas.openxmlformats.org/drawingml/2006/main" noGrp="1"/>
+          </p:cNvSpPr>
+          <p:nvPr/>
+        </p:nvSpPr>
+        <p:spPr>
+          <a:xfrm xmlns:a="http://schemas.openxmlformats.org/drawingml/2006/main">
+            <a:off x="1047750" y="4114800"/>
+            <a:ext cx="2076450" cy="552450"/>
           </a:xfrm>
           <a:prstGeom xmlns:a="http://schemas.openxmlformats.org/drawingml/2006/main" prst="rect">
             <a:avLst/>
@@ -13349,10 +16599,10 @@
           <a:p xmlns:a="http://schemas.openxmlformats.org/drawingml/2006/main">
             <a:pPr algn="l">
               <a:lnSpc>
-                <a:spcPct val="105000"/>
+                <a:spcPct val="102000"/>
               </a:lnSpc>
               <a:buNone/>
-              <a:defRPr sz="863" b="0" i="0">
+              <a:defRPr sz="810" b="0" i="0">
                 <a:solidFill>
                   <a:srgbClr val="444444"/>
                 </a:solidFill>
@@ -13362,7 +16612,7 @@
               </a:defRPr>
             </a:pPr>
             <a:r>
-              <a:rPr sz="863" b="0" i="0">
+              <a:rPr sz="810" b="0" i="0">
                 <a:solidFill>
                   <a:srgbClr val="444444"/>
                 </a:solidFill>
@@ -13370,35 +16620,35 @@
                 <a:ea typeface="Calibri"/>
                 <a:cs typeface="Calibri"/>
               </a:rPr>
-              <a:t>Focus counts, ally pressure, carrier protection, lanes, threats.</a:t>
-            </a:r>
-          </a:p>
-        </p:txBody>
-      </p:sp>
-      <p:sp>
-        <p:nvSpPr>
-          <p:cNvPr id="26" name="">
-            <a:extLst xmlns:a="http://schemas.openxmlformats.org/drawingml/2006/main">
-              <a:ext uri="{FF2B5EF4-FFF2-40B4-BE49-F238E27FC236}">
-                <a16:creationId xmlns:a16="http://schemas.microsoft.com/office/drawing/2014/main" id="{961C0824-8A63-4FF3-9C0D-A588359A3978}"/>
-              </a:ext>
-            </a:extLst>
-          </p:cNvPr>
-          <p:cNvSpPr>
-            <a:spLocks xmlns:a="http://schemas.openxmlformats.org/drawingml/2006/main" noGrp="1"/>
-          </p:cNvSpPr>
-          <p:nvPr/>
-        </p:nvSpPr>
-        <p:spPr>
-          <a:xfrm xmlns:a="http://schemas.openxmlformats.org/drawingml/2006/main">
-            <a:off x="4857750" y="3733800"/>
-            <a:ext cx="2552700" cy="819150"/>
+              <a:t>Shared focus counts, ally pressure, lane claims, threat center, and objective ownership.</a:t>
+            </a:r>
+          </a:p>
+        </p:txBody>
+      </p:sp>
+      <p:sp>
+        <p:nvSpPr>
+          <p:cNvPr id="25" name="">
+            <a:extLst xmlns:a="http://schemas.openxmlformats.org/drawingml/2006/main">
+              <a:ext uri="{FF2B5EF4-FFF2-40B4-BE49-F238E27FC236}">
+                <a16:creationId xmlns:a16="http://schemas.microsoft.com/office/drawing/2014/main" id="{D2BF075B-0DFA-4DC5-B51D-040F34B977CB}"/>
+              </a:ext>
+            </a:extLst>
+          </p:cNvPr>
+          <p:cNvSpPr>
+            <a:spLocks xmlns:a="http://schemas.openxmlformats.org/drawingml/2006/main" noGrp="1"/>
+          </p:cNvSpPr>
+          <p:nvPr/>
+        </p:nvSpPr>
+        <p:spPr>
+          <a:xfrm xmlns:a="http://schemas.openxmlformats.org/drawingml/2006/main">
+            <a:off x="3562350" y="3733800"/>
+            <a:ext cx="2381250" cy="990600"/>
           </a:xfrm>
           <a:prstGeom xmlns:a="http://schemas.openxmlformats.org/drawingml/2006/main" prst="rect">
             <a:avLst/>
           </a:prstGeom>
           <a:solidFill xmlns:a="http://schemas.openxmlformats.org/drawingml/2006/main">
-            <a:srgbClr val="F6F8FB"/>
+            <a:srgbClr val="F8FAFC"/>
           </a:solidFill>
           <a:ln xmlns:a="http://schemas.openxmlformats.org/drawingml/2006/main" w="9525">
             <a:solidFill>
@@ -13410,22 +16660,22 @@
       </p:sp>
       <p:sp>
         <p:nvSpPr>
-          <p:cNvPr id="27" name="">
-            <a:extLst xmlns:a="http://schemas.openxmlformats.org/drawingml/2006/main">
-              <a:ext uri="{FF2B5EF4-FFF2-40B4-BE49-F238E27FC236}">
-                <a16:creationId xmlns:a16="http://schemas.microsoft.com/office/drawing/2014/main" id="{355FD153-A459-4AF1-B929-A5D8D76C5DB3}"/>
-              </a:ext>
-            </a:extLst>
-          </p:cNvPr>
-          <p:cNvSpPr>
-            <a:spLocks xmlns:a="http://schemas.openxmlformats.org/drawingml/2006/main" noGrp="1"/>
-          </p:cNvSpPr>
-          <p:nvPr/>
-        </p:nvSpPr>
-        <p:spPr>
-          <a:xfrm xmlns:a="http://schemas.openxmlformats.org/drawingml/2006/main">
-            <a:off x="4857750" y="3733800"/>
-            <a:ext cx="66675" cy="819150"/>
+          <p:cNvPr id="26" name="">
+            <a:extLst xmlns:a="http://schemas.openxmlformats.org/drawingml/2006/main">
+              <a:ext uri="{FF2B5EF4-FFF2-40B4-BE49-F238E27FC236}">
+                <a16:creationId xmlns:a16="http://schemas.microsoft.com/office/drawing/2014/main" id="{E1515588-A336-4DB7-9FD0-185FB4E2C679}"/>
+              </a:ext>
+            </a:extLst>
+          </p:cNvPr>
+          <p:cNvSpPr>
+            <a:spLocks xmlns:a="http://schemas.openxmlformats.org/drawingml/2006/main" noGrp="1"/>
+          </p:cNvSpPr>
+          <p:nvPr/>
+        </p:nvSpPr>
+        <p:spPr>
+          <a:xfrm xmlns:a="http://schemas.openxmlformats.org/drawingml/2006/main">
+            <a:off x="3562350" y="3733800"/>
+            <a:ext cx="66675" cy="990600"/>
           </a:xfrm>
           <a:prstGeom xmlns:a="http://schemas.openxmlformats.org/drawingml/2006/main" prst="rect">
             <a:avLst/>
@@ -13441,22 +16691,22 @@
       </p:sp>
       <p:sp>
         <p:nvSpPr>
-          <p:cNvPr id="28" name="">
-            <a:extLst xmlns:a="http://schemas.openxmlformats.org/drawingml/2006/main">
-              <a:ext uri="{FF2B5EF4-FFF2-40B4-BE49-F238E27FC236}">
-                <a16:creationId xmlns:a16="http://schemas.microsoft.com/office/drawing/2014/main" id="{3EDEB6E7-2188-495E-A46A-A87225BFDF95}"/>
-              </a:ext>
-            </a:extLst>
-          </p:cNvPr>
-          <p:cNvSpPr>
-            <a:spLocks xmlns:a="http://schemas.openxmlformats.org/drawingml/2006/main" noGrp="1"/>
-          </p:cNvSpPr>
-          <p:nvPr/>
-        </p:nvSpPr>
-        <p:spPr>
-          <a:xfrm xmlns:a="http://schemas.openxmlformats.org/drawingml/2006/main">
-            <a:off x="5105400" y="3943350"/>
-            <a:ext cx="2076450" cy="190500"/>
+          <p:cNvPr id="27" name="">
+            <a:extLst xmlns:a="http://schemas.openxmlformats.org/drawingml/2006/main">
+              <a:ext uri="{FF2B5EF4-FFF2-40B4-BE49-F238E27FC236}">
+                <a16:creationId xmlns:a16="http://schemas.microsoft.com/office/drawing/2014/main" id="{E46FA692-E171-494A-A64C-504C2FD10E37}"/>
+              </a:ext>
+            </a:extLst>
+          </p:cNvPr>
+          <p:cNvSpPr>
+            <a:spLocks xmlns:a="http://schemas.openxmlformats.org/drawingml/2006/main" noGrp="1"/>
+          </p:cNvSpPr>
+          <p:nvPr/>
+        </p:nvSpPr>
+        <p:spPr>
+          <a:xfrm xmlns:a="http://schemas.openxmlformats.org/drawingml/2006/main">
+            <a:off x="3733800" y="3848100"/>
+            <a:ext cx="2076450" cy="209550"/>
           </a:xfrm>
           <a:prstGeom xmlns:a="http://schemas.openxmlformats.org/drawingml/2006/main" prst="rect">
             <a:avLst/>
@@ -13476,7 +16726,7 @@
                 <a:spcPct val="105000"/>
               </a:lnSpc>
               <a:buNone/>
-              <a:defRPr sz="1200" b="1" i="0">
+              <a:defRPr sz="975" b="1" i="0">
                 <a:solidFill>
                   <a:srgbClr val="16824A"/>
                 </a:solidFill>
@@ -13486,7 +16736,7 @@
               </a:defRPr>
             </a:pPr>
             <a:r>
-              <a:rPr sz="1200" b="1" i="0">
+              <a:rPr sz="975" b="1" i="0">
                 <a:solidFill>
                   <a:srgbClr val="16824A"/>
                 </a:solidFill>
@@ -13494,29 +16744,29 @@
                 <a:ea typeface="Calibri"/>
                 <a:cs typeface="Calibri"/>
               </a:rPr>
-              <a:t>Mode macro strategy</a:t>
-            </a:r>
-          </a:p>
-        </p:txBody>
-      </p:sp>
-      <p:sp>
-        <p:nvSpPr>
-          <p:cNvPr id="29" name="">
-            <a:extLst xmlns:a="http://schemas.openxmlformats.org/drawingml/2006/main">
-              <a:ext uri="{FF2B5EF4-FFF2-40B4-BE49-F238E27FC236}">
-                <a16:creationId xmlns:a16="http://schemas.microsoft.com/office/drawing/2014/main" id="{C9510E48-AA53-4CEE-BBCF-03101BFB92EF}"/>
-              </a:ext>
-            </a:extLst>
-          </p:cNvPr>
-          <p:cNvSpPr>
-            <a:spLocks xmlns:a="http://schemas.openxmlformats.org/drawingml/2006/main" noGrp="1"/>
-          </p:cNvSpPr>
-          <p:nvPr/>
-        </p:nvSpPr>
-        <p:spPr>
-          <a:xfrm xmlns:a="http://schemas.openxmlformats.org/drawingml/2006/main">
-            <a:off x="5105400" y="4229100"/>
-            <a:ext cx="2095500" cy="266700"/>
+              <a:t>Game-mode strategy</a:t>
+            </a:r>
+          </a:p>
+        </p:txBody>
+      </p:sp>
+      <p:sp>
+        <p:nvSpPr>
+          <p:cNvPr id="28" name="">
+            <a:extLst xmlns:a="http://schemas.openxmlformats.org/drawingml/2006/main">
+              <a:ext uri="{FF2B5EF4-FFF2-40B4-BE49-F238E27FC236}">
+                <a16:creationId xmlns:a16="http://schemas.microsoft.com/office/drawing/2014/main" id="{173A7372-4722-4F5F-AA14-AFA87568E176}"/>
+              </a:ext>
+            </a:extLst>
+          </p:cNvPr>
+          <p:cNvSpPr>
+            <a:spLocks xmlns:a="http://schemas.openxmlformats.org/drawingml/2006/main" noGrp="1"/>
+          </p:cNvSpPr>
+          <p:nvPr/>
+        </p:nvSpPr>
+        <p:spPr>
+          <a:xfrm xmlns:a="http://schemas.openxmlformats.org/drawingml/2006/main">
+            <a:off x="3733800" y="4114800"/>
+            <a:ext cx="2076450" cy="552450"/>
           </a:xfrm>
           <a:prstGeom xmlns:a="http://schemas.openxmlformats.org/drawingml/2006/main" prst="rect">
             <a:avLst/>
@@ -13533,10 +16783,10 @@
           <a:p xmlns:a="http://schemas.openxmlformats.org/drawingml/2006/main">
             <a:pPr algn="l">
               <a:lnSpc>
-                <a:spcPct val="105000"/>
+                <a:spcPct val="102000"/>
               </a:lnSpc>
               <a:buNone/>
-              <a:defRPr sz="863" b="0" i="0">
+              <a:defRPr sz="810" b="0" i="0">
                 <a:solidFill>
                   <a:srgbClr val="444444"/>
                 </a:solidFill>
@@ -13546,7 +16796,7 @@
               </a:defRPr>
             </a:pPr>
             <a:r>
-              <a:rPr sz="863" b="0" i="0">
+              <a:rPr sz="810" b="0" i="0">
                 <a:solidFill>
                   <a:srgbClr val="444444"/>
                 </a:solidFill>
@@ -13554,35 +16804,35 @@
                 <a:ea typeface="Calibri"/>
                 <a:cs typeface="Calibri"/>
               </a:rPr>
-              <a:t>Gem Grab, Knockout, Brawl Ball, Solo Showdown priorities.</a:t>
-            </a:r>
-          </a:p>
-        </p:txBody>
-      </p:sp>
-      <p:sp>
-        <p:nvSpPr>
-          <p:cNvPr id="30" name="">
-            <a:extLst xmlns:a="http://schemas.openxmlformats.org/drawingml/2006/main">
-              <a:ext uri="{FF2B5EF4-FFF2-40B4-BE49-F238E27FC236}">
-                <a16:creationId xmlns:a16="http://schemas.microsoft.com/office/drawing/2014/main" id="{40836ECC-F806-4A99-B793-3D4722DBDA06}"/>
-              </a:ext>
-            </a:extLst>
-          </p:cNvPr>
-          <p:cNvSpPr>
-            <a:spLocks xmlns:a="http://schemas.openxmlformats.org/drawingml/2006/main" noGrp="1"/>
-          </p:cNvSpPr>
-          <p:nvPr/>
-        </p:nvSpPr>
-        <p:spPr>
-          <a:xfrm xmlns:a="http://schemas.openxmlformats.org/drawingml/2006/main">
-            <a:off x="8267700" y="3733800"/>
-            <a:ext cx="2552700" cy="819150"/>
+              <a:t>Objective floors keep the current win condition above generic combat preference.</a:t>
+            </a:r>
+          </a:p>
+        </p:txBody>
+      </p:sp>
+      <p:sp>
+        <p:nvSpPr>
+          <p:cNvPr id="29" name="">
+            <a:extLst xmlns:a="http://schemas.openxmlformats.org/drawingml/2006/main">
+              <a:ext uri="{FF2B5EF4-FFF2-40B4-BE49-F238E27FC236}">
+                <a16:creationId xmlns:a16="http://schemas.microsoft.com/office/drawing/2014/main" id="{F6F16E32-1D00-4399-84FC-011BCFB25EBC}"/>
+              </a:ext>
+            </a:extLst>
+          </p:cNvPr>
+          <p:cNvSpPr>
+            <a:spLocks xmlns:a="http://schemas.openxmlformats.org/drawingml/2006/main" noGrp="1"/>
+          </p:cNvSpPr>
+          <p:nvPr/>
+        </p:nvSpPr>
+        <p:spPr>
+          <a:xfrm xmlns:a="http://schemas.openxmlformats.org/drawingml/2006/main">
+            <a:off x="6248400" y="3733800"/>
+            <a:ext cx="2381250" cy="990600"/>
           </a:xfrm>
           <a:prstGeom xmlns:a="http://schemas.openxmlformats.org/drawingml/2006/main" prst="rect">
             <a:avLst/>
           </a:prstGeom>
           <a:solidFill xmlns:a="http://schemas.openxmlformats.org/drawingml/2006/main">
-            <a:srgbClr val="F6F8FB"/>
+            <a:srgbClr val="F8FAFC"/>
           </a:solidFill>
           <a:ln xmlns:a="http://schemas.openxmlformats.org/drawingml/2006/main" w="9525">
             <a:solidFill>
@@ -13594,22 +16844,22 @@
       </p:sp>
       <p:sp>
         <p:nvSpPr>
-          <p:cNvPr id="31" name="">
-            <a:extLst xmlns:a="http://schemas.openxmlformats.org/drawingml/2006/main">
-              <a:ext uri="{FF2B5EF4-FFF2-40B4-BE49-F238E27FC236}">
-                <a16:creationId xmlns:a16="http://schemas.microsoft.com/office/drawing/2014/main" id="{83515A7F-ACCF-439E-B127-3D24C5B88F86}"/>
-              </a:ext>
-            </a:extLst>
-          </p:cNvPr>
-          <p:cNvSpPr>
-            <a:spLocks xmlns:a="http://schemas.openxmlformats.org/drawingml/2006/main" noGrp="1"/>
-          </p:cNvSpPr>
-          <p:nvPr/>
-        </p:nvSpPr>
-        <p:spPr>
-          <a:xfrm xmlns:a="http://schemas.openxmlformats.org/drawingml/2006/main">
-            <a:off x="8267700" y="3733800"/>
-            <a:ext cx="66675" cy="819150"/>
+          <p:cNvPr id="30" name="">
+            <a:extLst xmlns:a="http://schemas.openxmlformats.org/drawingml/2006/main">
+              <a:ext uri="{FF2B5EF4-FFF2-40B4-BE49-F238E27FC236}">
+                <a16:creationId xmlns:a16="http://schemas.microsoft.com/office/drawing/2014/main" id="{2A483092-A59B-4F40-AACD-CDBEFEC9BBEA}"/>
+              </a:ext>
+            </a:extLst>
+          </p:cNvPr>
+          <p:cNvSpPr>
+            <a:spLocks xmlns:a="http://schemas.openxmlformats.org/drawingml/2006/main" noGrp="1"/>
+          </p:cNvSpPr>
+          <p:nvPr/>
+        </p:nvSpPr>
+        <p:spPr>
+          <a:xfrm xmlns:a="http://schemas.openxmlformats.org/drawingml/2006/main">
+            <a:off x="6248400" y="3733800"/>
+            <a:ext cx="66675" cy="990600"/>
           </a:xfrm>
           <a:prstGeom xmlns:a="http://schemas.openxmlformats.org/drawingml/2006/main" prst="rect">
             <a:avLst/>
@@ -13625,22 +16875,22 @@
       </p:sp>
       <p:sp>
         <p:nvSpPr>
-          <p:cNvPr id="32" name="">
-            <a:extLst xmlns:a="http://schemas.openxmlformats.org/drawingml/2006/main">
-              <a:ext uri="{FF2B5EF4-FFF2-40B4-BE49-F238E27FC236}">
-                <a16:creationId xmlns:a16="http://schemas.microsoft.com/office/drawing/2014/main" id="{27BF29F4-0615-4994-8B8C-5965A0C2CC2D}"/>
-              </a:ext>
-            </a:extLst>
-          </p:cNvPr>
-          <p:cNvSpPr>
-            <a:spLocks xmlns:a="http://schemas.openxmlformats.org/drawingml/2006/main" noGrp="1"/>
-          </p:cNvSpPr>
-          <p:nvPr/>
-        </p:nvSpPr>
-        <p:spPr>
-          <a:xfrm xmlns:a="http://schemas.openxmlformats.org/drawingml/2006/main">
-            <a:off x="8515350" y="3943350"/>
-            <a:ext cx="2076450" cy="190500"/>
+          <p:cNvPr id="31" name="">
+            <a:extLst xmlns:a="http://schemas.openxmlformats.org/drawingml/2006/main">
+              <a:ext uri="{FF2B5EF4-FFF2-40B4-BE49-F238E27FC236}">
+                <a16:creationId xmlns:a16="http://schemas.microsoft.com/office/drawing/2014/main" id="{133B13E7-339B-4392-8C35-67108693E409}"/>
+              </a:ext>
+            </a:extLst>
+          </p:cNvPr>
+          <p:cNvSpPr>
+            <a:spLocks xmlns:a="http://schemas.openxmlformats.org/drawingml/2006/main" noGrp="1"/>
+          </p:cNvSpPr>
+          <p:nvPr/>
+        </p:nvSpPr>
+        <p:spPr>
+          <a:xfrm xmlns:a="http://schemas.openxmlformats.org/drawingml/2006/main">
+            <a:off x="6419850" y="3848100"/>
+            <a:ext cx="2076450" cy="209550"/>
           </a:xfrm>
           <a:prstGeom xmlns:a="http://schemas.openxmlformats.org/drawingml/2006/main" prst="rect">
             <a:avLst/>
@@ -13660,7 +16910,7 @@
                 <a:spcPct val="105000"/>
               </a:lnSpc>
               <a:buNone/>
-              <a:defRPr sz="1200" b="1" i="0">
+              <a:defRPr sz="975" b="1" i="0">
                 <a:solidFill>
                   <a:srgbClr val="2B5FAA"/>
                 </a:solidFill>
@@ -13670,7 +16920,7 @@
               </a:defRPr>
             </a:pPr>
             <a:r>
-              <a:rPr sz="1200" b="1" i="0">
+              <a:rPr sz="975" b="1" i="0">
                 <a:solidFill>
                   <a:srgbClr val="2B5FAA"/>
                 </a:solidFill>
@@ -13678,7 +16928,67 @@
                 <a:ea typeface="Calibri"/>
                 <a:cs typeface="Calibri"/>
               </a:rPr>
-              <a:t>Validation telemetry</a:t>
+              <a:t>Navigation safety</a:t>
+            </a:r>
+          </a:p>
+        </p:txBody>
+      </p:sp>
+      <p:sp>
+        <p:nvSpPr>
+          <p:cNvPr id="32" name="">
+            <a:extLst xmlns:a="http://schemas.openxmlformats.org/drawingml/2006/main">
+              <a:ext uri="{FF2B5EF4-FFF2-40B4-BE49-F238E27FC236}">
+                <a16:creationId xmlns:a16="http://schemas.microsoft.com/office/drawing/2014/main" id="{71DFB5DE-2499-48AB-8F4A-117996E9323D}"/>
+              </a:ext>
+            </a:extLst>
+          </p:cNvPr>
+          <p:cNvSpPr>
+            <a:spLocks xmlns:a="http://schemas.openxmlformats.org/drawingml/2006/main" noGrp="1"/>
+          </p:cNvSpPr>
+          <p:nvPr/>
+        </p:nvSpPr>
+        <p:spPr>
+          <a:xfrm xmlns:a="http://schemas.openxmlformats.org/drawingml/2006/main">
+            <a:off x="6419850" y="4114800"/>
+            <a:ext cx="2076450" cy="552450"/>
+          </a:xfrm>
+          <a:prstGeom xmlns:a="http://schemas.openxmlformats.org/drawingml/2006/main" prst="rect">
+            <a:avLst/>
+          </a:prstGeom>
+          <a:noFill xmlns:a="http://schemas.openxmlformats.org/drawingml/2006/main"/>
+          <a:ln xmlns:a="http://schemas.openxmlformats.org/drawingml/2006/main" w="0">
+            <a:noFill/>
+            <a:prstDash val="solid"/>
+          </a:ln>
+        </p:spPr>
+        <p:txBody>
+          <a:bodyPr xmlns:a="http://schemas.openxmlformats.org/drawingml/2006/main" wrap="square" lIns="38100" tIns="19050" rIns="38100" bIns="19050" anchor="t"/>
+          <a:lstStyle xmlns:a="http://schemas.openxmlformats.org/drawingml/2006/main"/>
+          <a:p xmlns:a="http://schemas.openxmlformats.org/drawingml/2006/main">
+            <a:pPr algn="l">
+              <a:lnSpc>
+                <a:spcPct val="102000"/>
+              </a:lnSpc>
+              <a:buNone/>
+              <a:defRPr sz="810" b="0" i="0">
+                <a:solidFill>
+                  <a:srgbClr val="444444"/>
+                </a:solidFill>
+                <a:latin typeface="Calibri"/>
+                <a:ea typeface="Calibri"/>
+                <a:cs typeface="Calibri"/>
+              </a:defRPr>
+            </a:pPr>
+            <a:r>
+              <a:rPr sz="810" b="0" i="0">
+                <a:solidFill>
+                  <a:srgbClr val="444444"/>
+                </a:solidFill>
+                <a:latin typeface="Calibri"/>
+                <a:ea typeface="Calibri"/>
+                <a:cs typeface="Calibri"/>
+              </a:rPr>
+              <a:t>A* pathing, walkable-cell validation, route budgets, and stuck recovery prevent stalls.</a:t>
             </a:r>
           </a:p>
         </p:txBody>
@@ -13688,19 +16998,83 @@
           <p:cNvPr id="33" name="">
             <a:extLst xmlns:a="http://schemas.openxmlformats.org/drawingml/2006/main">
               <a:ext uri="{FF2B5EF4-FFF2-40B4-BE49-F238E27FC236}">
-                <a16:creationId xmlns:a16="http://schemas.microsoft.com/office/drawing/2014/main" id="{8C46E2D5-6205-411C-963A-A2A9CFAAD656}"/>
-              </a:ext>
-            </a:extLst>
-          </p:cNvPr>
-          <p:cNvSpPr>
-            <a:spLocks xmlns:a="http://schemas.openxmlformats.org/drawingml/2006/main" noGrp="1"/>
-          </p:cNvSpPr>
-          <p:nvPr/>
-        </p:nvSpPr>
-        <p:spPr>
-          <a:xfrm xmlns:a="http://schemas.openxmlformats.org/drawingml/2006/main">
-            <a:off x="8515350" y="4229100"/>
-            <a:ext cx="2095500" cy="266700"/>
+                <a16:creationId xmlns:a16="http://schemas.microsoft.com/office/drawing/2014/main" id="{CDE92E2B-CE8B-4A53-840B-98102C3391FA}"/>
+              </a:ext>
+            </a:extLst>
+          </p:cNvPr>
+          <p:cNvSpPr>
+            <a:spLocks xmlns:a="http://schemas.openxmlformats.org/drawingml/2006/main" noGrp="1"/>
+          </p:cNvSpPr>
+          <p:nvPr/>
+        </p:nvSpPr>
+        <p:spPr>
+          <a:xfrm xmlns:a="http://schemas.openxmlformats.org/drawingml/2006/main">
+            <a:off x="8934450" y="3733800"/>
+            <a:ext cx="2381250" cy="990600"/>
+          </a:xfrm>
+          <a:prstGeom xmlns:a="http://schemas.openxmlformats.org/drawingml/2006/main" prst="rect">
+            <a:avLst/>
+          </a:prstGeom>
+          <a:solidFill xmlns:a="http://schemas.openxmlformats.org/drawingml/2006/main">
+            <a:srgbClr val="F8FAFC"/>
+          </a:solidFill>
+          <a:ln xmlns:a="http://schemas.openxmlformats.org/drawingml/2006/main" w="9525">
+            <a:solidFill>
+              <a:srgbClr val="D8DDE7"/>
+            </a:solidFill>
+            <a:prstDash val="solid"/>
+          </a:ln>
+        </p:spPr>
+      </p:sp>
+      <p:sp>
+        <p:nvSpPr>
+          <p:cNvPr id="34" name="">
+            <a:extLst xmlns:a="http://schemas.openxmlformats.org/drawingml/2006/main">
+              <a:ext uri="{FF2B5EF4-FFF2-40B4-BE49-F238E27FC236}">
+                <a16:creationId xmlns:a16="http://schemas.microsoft.com/office/drawing/2014/main" id="{D1CCEAA2-7D8F-415E-B5AD-07EA6108904A}"/>
+              </a:ext>
+            </a:extLst>
+          </p:cNvPr>
+          <p:cNvSpPr>
+            <a:spLocks xmlns:a="http://schemas.openxmlformats.org/drawingml/2006/main" noGrp="1"/>
+          </p:cNvSpPr>
+          <p:nvPr/>
+        </p:nvSpPr>
+        <p:spPr>
+          <a:xfrm xmlns:a="http://schemas.openxmlformats.org/drawingml/2006/main">
+            <a:off x="8934450" y="3733800"/>
+            <a:ext cx="66675" cy="990600"/>
+          </a:xfrm>
+          <a:prstGeom xmlns:a="http://schemas.openxmlformats.org/drawingml/2006/main" prst="rect">
+            <a:avLst/>
+          </a:prstGeom>
+          <a:solidFill xmlns:a="http://schemas.openxmlformats.org/drawingml/2006/main">
+            <a:srgbClr val="6A36BF"/>
+          </a:solidFill>
+          <a:ln xmlns:a="http://schemas.openxmlformats.org/drawingml/2006/main" w="0">
+            <a:noFill/>
+            <a:prstDash val="solid"/>
+          </a:ln>
+        </p:spPr>
+      </p:sp>
+      <p:sp>
+        <p:nvSpPr>
+          <p:cNvPr id="35" name="">
+            <a:extLst xmlns:a="http://schemas.openxmlformats.org/drawingml/2006/main">
+              <a:ext uri="{FF2B5EF4-FFF2-40B4-BE49-F238E27FC236}">
+                <a16:creationId xmlns:a16="http://schemas.microsoft.com/office/drawing/2014/main" id="{66746EB2-909A-4BC9-803D-2834F26C19A7}"/>
+              </a:ext>
+            </a:extLst>
+          </p:cNvPr>
+          <p:cNvSpPr>
+            <a:spLocks xmlns:a="http://schemas.openxmlformats.org/drawingml/2006/main" noGrp="1"/>
+          </p:cNvSpPr>
+          <p:nvPr/>
+        </p:nvSpPr>
+        <p:spPr>
+          <a:xfrm xmlns:a="http://schemas.openxmlformats.org/drawingml/2006/main">
+            <a:off x="9105900" y="3848100"/>
+            <a:ext cx="2076450" cy="209550"/>
           </a:xfrm>
           <a:prstGeom xmlns:a="http://schemas.openxmlformats.org/drawingml/2006/main" prst="rect">
             <a:avLst/>
@@ -13720,7 +17094,67 @@
                 <a:spcPct val="105000"/>
               </a:lnSpc>
               <a:buNone/>
-              <a:defRPr sz="863" b="0" i="0">
+              <a:defRPr sz="975" b="1" i="0">
+                <a:solidFill>
+                  <a:srgbClr val="6A36BF"/>
+                </a:solidFill>
+                <a:latin typeface="Calibri"/>
+                <a:ea typeface="Calibri"/>
+                <a:cs typeface="Calibri"/>
+              </a:defRPr>
+            </a:pPr>
+            <a:r>
+              <a:rPr sz="975" b="1" i="0">
+                <a:solidFill>
+                  <a:srgbClr val="6A36BF"/>
+                </a:solidFill>
+                <a:latin typeface="Calibri"/>
+                <a:ea typeface="Calibri"/>
+                <a:cs typeface="Calibri"/>
+              </a:rPr>
+              <a:t>Telemetry &amp; tuning</a:t>
+            </a:r>
+          </a:p>
+        </p:txBody>
+      </p:sp>
+      <p:sp>
+        <p:nvSpPr>
+          <p:cNvPr id="36" name="">
+            <a:extLst xmlns:a="http://schemas.openxmlformats.org/drawingml/2006/main">
+              <a:ext uri="{FF2B5EF4-FFF2-40B4-BE49-F238E27FC236}">
+                <a16:creationId xmlns:a16="http://schemas.microsoft.com/office/drawing/2014/main" id="{DFFDC8FC-2A2F-4879-8E24-065CE37E0E64}"/>
+              </a:ext>
+            </a:extLst>
+          </p:cNvPr>
+          <p:cNvSpPr>
+            <a:spLocks xmlns:a="http://schemas.openxmlformats.org/drawingml/2006/main" noGrp="1"/>
+          </p:cNvSpPr>
+          <p:nvPr/>
+        </p:nvSpPr>
+        <p:spPr>
+          <a:xfrm xmlns:a="http://schemas.openxmlformats.org/drawingml/2006/main">
+            <a:off x="9105900" y="4114800"/>
+            <a:ext cx="2076450" cy="552450"/>
+          </a:xfrm>
+          <a:prstGeom xmlns:a="http://schemas.openxmlformats.org/drawingml/2006/main" prst="rect">
+            <a:avLst/>
+          </a:prstGeom>
+          <a:noFill xmlns:a="http://schemas.openxmlformats.org/drawingml/2006/main"/>
+          <a:ln xmlns:a="http://schemas.openxmlformats.org/drawingml/2006/main" w="0">
+            <a:noFill/>
+            <a:prstDash val="solid"/>
+          </a:ln>
+        </p:spPr>
+        <p:txBody>
+          <a:bodyPr xmlns:a="http://schemas.openxmlformats.org/drawingml/2006/main" wrap="square" lIns="38100" tIns="19050" rIns="38100" bIns="19050" anchor="t"/>
+          <a:lstStyle xmlns:a="http://schemas.openxmlformats.org/drawingml/2006/main"/>
+          <a:p xmlns:a="http://schemas.openxmlformats.org/drawingml/2006/main">
+            <a:pPr algn="l">
+              <a:lnSpc>
+                <a:spcPct val="102000"/>
+              </a:lnSpc>
+              <a:buNone/>
+              <a:defRPr sz="810" b="0" i="0">
                 <a:solidFill>
                   <a:srgbClr val="444444"/>
                 </a:solidFill>
@@ -13730,7 +17164,7 @@
               </a:defRPr>
             </a:pPr>
             <a:r>
-              <a:rPr sz="863" b="0" i="0">
+              <a:rPr sz="810" b="0" i="0">
                 <a:solidFill>
                   <a:srgbClr val="444444"/>
                 </a:solidFill>
@@ -13738,7 +17172,131 @@
                 <a:ea typeface="Calibri"/>
                 <a:cs typeface="Calibri"/>
               </a:rPr>
-              <a:t>Scores, intent, path state, stuck data, and incident logging.</a:t>
+              <a:t>Debug gizmos, incident logs, performance tiers, and ScriptableObject presets support tuning.</a:t>
+            </a:r>
+          </a:p>
+        </p:txBody>
+      </p:sp>
+      <p:sp>
+        <p:nvSpPr>
+          <p:cNvPr id="37" name="">
+            <a:extLst xmlns:a="http://schemas.openxmlformats.org/drawingml/2006/main">
+              <a:ext uri="{FF2B5EF4-FFF2-40B4-BE49-F238E27FC236}">
+                <a16:creationId xmlns:a16="http://schemas.microsoft.com/office/drawing/2014/main" id="{B4A3E62B-20FF-40BA-A47D-1D3DB127D465}"/>
+              </a:ext>
+            </a:extLst>
+          </p:cNvPr>
+          <p:cNvSpPr>
+            <a:spLocks xmlns:a="http://schemas.openxmlformats.org/drawingml/2006/main" noGrp="1"/>
+          </p:cNvSpPr>
+          <p:nvPr/>
+        </p:nvSpPr>
+        <p:spPr>
+          <a:xfrm xmlns:a="http://schemas.openxmlformats.org/drawingml/2006/main">
+            <a:off x="1657350" y="5219700"/>
+            <a:ext cx="8858250" cy="476250"/>
+          </a:xfrm>
+          <a:prstGeom xmlns:a="http://schemas.openxmlformats.org/drawingml/2006/main" prst="rect">
+            <a:avLst/>
+          </a:prstGeom>
+          <a:solidFill xmlns:a="http://schemas.openxmlformats.org/drawingml/2006/main">
+            <a:srgbClr val="EEF6FF"/>
+          </a:solidFill>
+          <a:ln xmlns:a="http://schemas.openxmlformats.org/drawingml/2006/main" w="9525">
+            <a:solidFill>
+              <a:srgbClr val="D8DDE7"/>
+            </a:solidFill>
+            <a:prstDash val="solid"/>
+          </a:ln>
+        </p:spPr>
+      </p:sp>
+      <p:sp>
+        <p:nvSpPr>
+          <p:cNvPr id="38" name="">
+            <a:extLst xmlns:a="http://schemas.openxmlformats.org/drawingml/2006/main">
+              <a:ext uri="{FF2B5EF4-FFF2-40B4-BE49-F238E27FC236}">
+                <a16:creationId xmlns:a16="http://schemas.microsoft.com/office/drawing/2014/main" id="{B48C040E-7FCA-485E-AD81-84D867F4B397}"/>
+              </a:ext>
+            </a:extLst>
+          </p:cNvPr>
+          <p:cNvSpPr>
+            <a:spLocks xmlns:a="http://schemas.openxmlformats.org/drawingml/2006/main" noGrp="1"/>
+          </p:cNvSpPr>
+          <p:nvPr/>
+        </p:nvSpPr>
+        <p:spPr>
+          <a:xfrm xmlns:a="http://schemas.openxmlformats.org/drawingml/2006/main">
+            <a:off x="1657350" y="5219700"/>
+            <a:ext cx="66675" cy="476250"/>
+          </a:xfrm>
+          <a:prstGeom xmlns:a="http://schemas.openxmlformats.org/drawingml/2006/main" prst="rect">
+            <a:avLst/>
+          </a:prstGeom>
+          <a:solidFill xmlns:a="http://schemas.openxmlformats.org/drawingml/2006/main">
+            <a:srgbClr val="0F8FB3"/>
+          </a:solidFill>
+          <a:ln xmlns:a="http://schemas.openxmlformats.org/drawingml/2006/main" w="0">
+            <a:noFill/>
+            <a:prstDash val="solid"/>
+          </a:ln>
+        </p:spPr>
+      </p:sp>
+      <p:sp>
+        <p:nvSpPr>
+          <p:cNvPr id="39" name="">
+            <a:extLst xmlns:a="http://schemas.openxmlformats.org/drawingml/2006/main">
+              <a:ext uri="{FF2B5EF4-FFF2-40B4-BE49-F238E27FC236}">
+                <a16:creationId xmlns:a16="http://schemas.microsoft.com/office/drawing/2014/main" id="{114F854E-1535-4AAC-BC01-23F2D4DAF868}"/>
+              </a:ext>
+            </a:extLst>
+          </p:cNvPr>
+          <p:cNvSpPr>
+            <a:spLocks xmlns:a="http://schemas.openxmlformats.org/drawingml/2006/main" noGrp="1"/>
+          </p:cNvSpPr>
+          <p:nvPr/>
+        </p:nvSpPr>
+        <p:spPr>
+          <a:xfrm xmlns:a="http://schemas.openxmlformats.org/drawingml/2006/main">
+            <a:off x="1885950" y="5362575"/>
+            <a:ext cx="8382000" cy="190500"/>
+          </a:xfrm>
+          <a:prstGeom xmlns:a="http://schemas.openxmlformats.org/drawingml/2006/main" prst="rect">
+            <a:avLst/>
+          </a:prstGeom>
+          <a:noFill xmlns:a="http://schemas.openxmlformats.org/drawingml/2006/main"/>
+          <a:ln xmlns:a="http://schemas.openxmlformats.org/drawingml/2006/main" w="0">
+            <a:noFill/>
+            <a:prstDash val="solid"/>
+          </a:ln>
+        </p:spPr>
+        <p:txBody>
+          <a:bodyPr xmlns:a="http://schemas.openxmlformats.org/drawingml/2006/main" wrap="square" lIns="38100" tIns="19050" rIns="38100" bIns="19050" anchor="t"/>
+          <a:lstStyle xmlns:a="http://schemas.openxmlformats.org/drawingml/2006/main"/>
+          <a:p xmlns:a="http://schemas.openxmlformats.org/drawingml/2006/main">
+            <a:pPr algn="ctr">
+              <a:lnSpc>
+                <a:spcPct val="105000"/>
+              </a:lnSpc>
+              <a:buNone/>
+              <a:defRPr sz="1013" b="1" i="0">
+                <a:solidFill>
+                  <a:srgbClr val="20384F"/>
+                </a:solidFill>
+                <a:latin typeface="Calibri"/>
+                <a:ea typeface="Calibri"/>
+                <a:cs typeface="Calibri"/>
+              </a:defRPr>
+            </a:pPr>
+            <a:r>
+              <a:rPr sz="1013" b="1" i="0">
+                <a:solidFill>
+                  <a:srgbClr val="20384F"/>
+                </a:solidFill>
+                <a:latin typeface="Calibri"/>
+                <a:ea typeface="Calibri"/>
+                <a:cs typeface="Calibri"/>
+              </a:rPr>
+              <a:t>Industry-style design goal: explainable decisions, modular expansion, data-driven tuning, and predictable runtime cost.</a:t>
             </a:r>
           </a:p>
         </p:txBody>
